--- a/protected-downloads/praesentation/M13.pptx
+++ b/protected-downloads/praesentation/M13.pptx
@@ -8,17 +8,17 @@
     <p:sldId id="256" r:id="rId7"/>
     <p:sldId id="257" r:id="rId8"/>
     <p:sldId id="258" r:id="rId9"/>
-    <p:sldId id="259" r:id="rId10"/>
-    <p:sldId id="260" r:id="rId11"/>
-    <p:sldId id="261" r:id="rId12"/>
-    <p:sldId id="262" r:id="rId13"/>
-    <p:sldId id="263" r:id="rId14"/>
-    <p:sldId id="264" r:id="rId15"/>
-    <p:sldId id="265" r:id="rId16"/>
-    <p:sldId id="266" r:id="rId17"/>
-    <p:sldId id="267" r:id="rId18"/>
-    <p:sldId id="268" r:id="rId19"/>
-    <p:sldId id="269" r:id="rId20"/>
+    <p:sldId id="259" r:id="rId11"/>
+    <p:sldId id="260" r:id="rId12"/>
+    <p:sldId id="261" r:id="rId13"/>
+    <p:sldId id="262" r:id="rId14"/>
+    <p:sldId id="263" r:id="rId15"/>
+    <p:sldId id="264" r:id="rId16"/>
+    <p:sldId id="265" r:id="rId17"/>
+    <p:sldId id="266" r:id="rId18"/>
+    <p:sldId id="267" r:id="rId19"/>
+    <p:sldId id="268" r:id="rId20"/>
+    <p:sldId id="269" r:id="rId21"/>
   </p:sldIdLst>
   <p:sldSz cx="12188952" cy="6858000" type="screen4x3"/>
   <p:notesSz cx="6858000" cy="9144000"/>
@@ -118,6 +118,1126 @@
     </a:lvl9pPr>
   </p:defaultTextStyle>
 </p:presentation>
+</file>
+
+<file path=ppt/notesMasters/notesMaster1.xml><?xml version="1.0" encoding="utf-8"?>
+<p:notesMaster xmlns:a="http://schemas.openxmlformats.org/drawingml/2006/main" xmlns:p="http://schemas.openxmlformats.org/presentationml/2006/main" xmlns:r="http://schemas.openxmlformats.org/officeDocument/2006/relationships">
+  <p:cSld>
+    <p:bg>
+      <p:bgRef idx="1001">
+        <a:schemeClr val="bg1"/>
+      </p:bgRef>
+    </p:bg>
+    <p:spTree>
+      <p:nvGrpSpPr>
+        <p:cNvPr id="1" name=""/>
+        <p:cNvGrpSpPr/>
+        <p:nvPr/>
+      </p:nvGrpSpPr>
+      <p:grpSpPr>
+        <a:xfrm>
+          <a:off x="0" y="0"/>
+          <a:ext cx="0" cy="0"/>
+          <a:chOff x="0" y="0"/>
+          <a:chExt cx="0" cy="0"/>
+        </a:xfrm>
+      </p:grpSpPr>
+      <p:sp>
+        <p:nvSpPr>
+          <p:cNvPr id="2" name="Header Placeholder 1"/>
+          <p:cNvSpPr>
+            <a:spLocks noGrp="1"/>
+          </p:cNvSpPr>
+          <p:nvPr>
+            <p:ph type="hdr" sz="quarter"/>
+          </p:nvPr>
+        </p:nvSpPr>
+        <p:spPr>
+          <a:xfrm>
+            <a:off x="0" y="0"/>
+            <a:ext cx="2971800" cy="457200"/>
+          </a:xfrm>
+          <a:prstGeom prst="rect">
+            <a:avLst/>
+          </a:prstGeom>
+        </p:spPr>
+        <p:txBody>
+          <a:bodyPr vert="horz" lIns="91440" tIns="45720" rIns="91440" bIns="45720" rtlCol="0"/>
+          <a:lstStyle>
+            <a:lvl1pPr algn="l">
+              <a:defRPr sz="1200"/>
+            </a:lvl1pPr>
+          </a:lstStyle>
+          <a:p>
+            <a:endParaRPr lang="en-US"/>
+          </a:p>
+        </p:txBody>
+      </p:sp>
+      <p:sp>
+        <p:nvSpPr>
+          <p:cNvPr id="3" name="Date Placeholder 2"/>
+          <p:cNvSpPr>
+            <a:spLocks noGrp="1"/>
+          </p:cNvSpPr>
+          <p:nvPr>
+            <p:ph type="dt" idx="1"/>
+          </p:nvPr>
+        </p:nvSpPr>
+        <p:spPr>
+          <a:xfrm>
+            <a:off x="3884613" y="0"/>
+            <a:ext cx="2971800" cy="457200"/>
+          </a:xfrm>
+          <a:prstGeom prst="rect">
+            <a:avLst/>
+          </a:prstGeom>
+        </p:spPr>
+        <p:txBody>
+          <a:bodyPr vert="horz" lIns="91440" tIns="45720" rIns="91440" bIns="45720" rtlCol="0"/>
+          <a:lstStyle>
+            <a:lvl1pPr algn="r">
+              <a:defRPr sz="1200"/>
+            </a:lvl1pPr>
+          </a:lstStyle>
+          <a:p>
+            <a:fld id="{0F89C1C7-3DCD-1040-A9CF-14679D8B5DDD}" type="datetimeFigureOut">
+              <a:rPr lang="en-US" smtClean="0"/>
+              <a:t>10/17/16</a:t>
+            </a:fld>
+            <a:endParaRPr lang="en-US"/>
+          </a:p>
+        </p:txBody>
+      </p:sp>
+      <p:sp>
+        <p:nvSpPr>
+          <p:cNvPr id="4" name="Slide Image Placeholder 3"/>
+          <p:cNvSpPr>
+            <a:spLocks noGrp="1" noRot="1" noChangeAspect="1"/>
+          </p:cNvSpPr>
+          <p:nvPr>
+            <p:ph type="sldImg" idx="2"/>
+          </p:nvPr>
+        </p:nvSpPr>
+        <p:spPr>
+          <a:xfrm>
+            <a:off x="1143000" y="685800"/>
+            <a:ext cx="4572000" cy="3429000"/>
+          </a:xfrm>
+          <a:prstGeom prst="rect">
+            <a:avLst/>
+          </a:prstGeom>
+          <a:noFill/>
+          <a:ln w="12700">
+            <a:solidFill>
+              <a:prstClr val="black"/>
+            </a:solidFill>
+          </a:ln>
+        </p:spPr>
+        <p:txBody>
+          <a:bodyPr vert="horz" lIns="91440" tIns="45720" rIns="91440" bIns="45720" rtlCol="0" anchor="ctr"/>
+          <a:lstStyle/>
+          <a:p>
+            <a:endParaRPr lang="en-US"/>
+          </a:p>
+        </p:txBody>
+      </p:sp>
+      <p:sp>
+        <p:nvSpPr>
+          <p:cNvPr id="5" name="Notes Placeholder 4"/>
+          <p:cNvSpPr>
+            <a:spLocks noGrp="1"/>
+          </p:cNvSpPr>
+          <p:nvPr>
+            <p:ph type="body" sz="quarter" idx="3"/>
+          </p:nvPr>
+        </p:nvSpPr>
+        <p:spPr>
+          <a:xfrm>
+            <a:off x="685800" y="4343400"/>
+            <a:ext cx="5486400" cy="4114800"/>
+          </a:xfrm>
+          <a:prstGeom prst="rect">
+            <a:avLst/>
+          </a:prstGeom>
+        </p:spPr>
+        <p:txBody>
+          <a:bodyPr vert="horz" lIns="91440" tIns="45720" rIns="91440" bIns="45720" rtlCol="0"/>
+          <a:lstStyle/>
+          <a:p>
+            <a:pPr lvl="0"/>
+            <a:r>
+              <a:rPr lang="en-US" smtClean="0"/>
+              <a:t>Click to edit Master text styles</a:t>
+            </a:r>
+          </a:p>
+          <a:p>
+            <a:pPr lvl="1"/>
+            <a:r>
+              <a:rPr lang="en-US" smtClean="0"/>
+              <a:t>Second level</a:t>
+            </a:r>
+          </a:p>
+          <a:p>
+            <a:pPr lvl="2"/>
+            <a:r>
+              <a:rPr lang="en-US" smtClean="0"/>
+              <a:t>Third level</a:t>
+            </a:r>
+          </a:p>
+          <a:p>
+            <a:pPr lvl="3"/>
+            <a:r>
+              <a:rPr lang="en-US" smtClean="0"/>
+              <a:t>Fourth level</a:t>
+            </a:r>
+          </a:p>
+          <a:p>
+            <a:pPr lvl="4"/>
+            <a:r>
+              <a:rPr lang="en-US" smtClean="0"/>
+              <a:t>Fifth level</a:t>
+            </a:r>
+            <a:endParaRPr lang="en-US"/>
+          </a:p>
+        </p:txBody>
+      </p:sp>
+      <p:sp>
+        <p:nvSpPr>
+          <p:cNvPr id="6" name="Footer Placeholder 5"/>
+          <p:cNvSpPr>
+            <a:spLocks noGrp="1"/>
+          </p:cNvSpPr>
+          <p:nvPr>
+            <p:ph type="ftr" sz="quarter" idx="4"/>
+          </p:nvPr>
+        </p:nvSpPr>
+        <p:spPr>
+          <a:xfrm>
+            <a:off x="0" y="8685213"/>
+            <a:ext cx="2971800" cy="457200"/>
+          </a:xfrm>
+          <a:prstGeom prst="rect">
+            <a:avLst/>
+          </a:prstGeom>
+        </p:spPr>
+        <p:txBody>
+          <a:bodyPr vert="horz" lIns="91440" tIns="45720" rIns="91440" bIns="45720" rtlCol="0" anchor="b"/>
+          <a:lstStyle>
+            <a:lvl1pPr algn="l">
+              <a:defRPr sz="1200"/>
+            </a:lvl1pPr>
+          </a:lstStyle>
+          <a:p>
+            <a:endParaRPr lang="en-US"/>
+          </a:p>
+        </p:txBody>
+      </p:sp>
+      <p:sp>
+        <p:nvSpPr>
+          <p:cNvPr id="7" name="Slide Number Placeholder 6"/>
+          <p:cNvSpPr>
+            <a:spLocks noGrp="1"/>
+          </p:cNvSpPr>
+          <p:nvPr>
+            <p:ph type="sldNum" sz="quarter" idx="5"/>
+          </p:nvPr>
+        </p:nvSpPr>
+        <p:spPr>
+          <a:xfrm>
+            <a:off x="3884613" y="8685213"/>
+            <a:ext cx="2971800" cy="457200"/>
+          </a:xfrm>
+          <a:prstGeom prst="rect">
+            <a:avLst/>
+          </a:prstGeom>
+        </p:spPr>
+        <p:txBody>
+          <a:bodyPr vert="horz" lIns="91440" tIns="45720" rIns="91440" bIns="45720" rtlCol="0" anchor="b"/>
+          <a:lstStyle>
+            <a:lvl1pPr algn="r">
+              <a:defRPr sz="1200"/>
+            </a:lvl1pPr>
+          </a:lstStyle>
+          <a:p>
+            <a:fld id="{BB5E49A5-4136-284D-997B-48E1D791AD67}" type="slidenum">
+              <a:rPr lang="en-US" smtClean="0"/>
+              <a:t>‹#›</a:t>
+            </a:fld>
+            <a:endParaRPr lang="en-US"/>
+          </a:p>
+        </p:txBody>
+      </p:sp>
+    </p:spTree>
+    <p:extLst>
+      <p:ext uri="{BB962C8B-B14F-4D97-AF65-F5344CB8AC3E}">
+        <p14:creationId xmlns:p14="http://schemas.microsoft.com/office/powerpoint/2010/main" val="2623252185"/>
+      </p:ext>
+    </p:extLst>
+  </p:cSld>
+  <p:clrMap bg1="lt1" tx1="dk1" bg2="lt2" tx2="dk2" accent1="accent1" accent2="accent2" accent3="accent3" accent4="accent4" accent5="accent5" accent6="accent6" hlink="hlink" folHlink="folHlink"/>
+  <p:notesStyle>
+    <a:lvl1pPr marL="0" algn="l" defTabSz="457200" rtl="0" eaLnBrk="1" latinLnBrk="0" hangingPunct="1">
+      <a:defRPr sz="1200" kern="1200">
+        <a:solidFill>
+          <a:schemeClr val="tx1"/>
+        </a:solidFill>
+        <a:latin typeface="+mn-lt"/>
+        <a:ea typeface="+mn-ea"/>
+        <a:cs typeface="+mn-cs"/>
+      </a:defRPr>
+    </a:lvl1pPr>
+    <a:lvl2pPr marL="457200" algn="l" defTabSz="457200" rtl="0" eaLnBrk="1" latinLnBrk="0" hangingPunct="1">
+      <a:defRPr sz="1200" kern="1200">
+        <a:solidFill>
+          <a:schemeClr val="tx1"/>
+        </a:solidFill>
+        <a:latin typeface="+mn-lt"/>
+        <a:ea typeface="+mn-ea"/>
+        <a:cs typeface="+mn-cs"/>
+      </a:defRPr>
+    </a:lvl2pPr>
+    <a:lvl3pPr marL="914400" algn="l" defTabSz="457200" rtl="0" eaLnBrk="1" latinLnBrk="0" hangingPunct="1">
+      <a:defRPr sz="1200" kern="1200">
+        <a:solidFill>
+          <a:schemeClr val="tx1"/>
+        </a:solidFill>
+        <a:latin typeface="+mn-lt"/>
+        <a:ea typeface="+mn-ea"/>
+        <a:cs typeface="+mn-cs"/>
+      </a:defRPr>
+    </a:lvl3pPr>
+    <a:lvl4pPr marL="1371600" algn="l" defTabSz="457200" rtl="0" eaLnBrk="1" latinLnBrk="0" hangingPunct="1">
+      <a:defRPr sz="1200" kern="1200">
+        <a:solidFill>
+          <a:schemeClr val="tx1"/>
+        </a:solidFill>
+        <a:latin typeface="+mn-lt"/>
+        <a:ea typeface="+mn-ea"/>
+        <a:cs typeface="+mn-cs"/>
+      </a:defRPr>
+    </a:lvl4pPr>
+    <a:lvl5pPr marL="1828800" algn="l" defTabSz="457200" rtl="0" eaLnBrk="1" latinLnBrk="0" hangingPunct="1">
+      <a:defRPr sz="1200" kern="1200">
+        <a:solidFill>
+          <a:schemeClr val="tx1"/>
+        </a:solidFill>
+        <a:latin typeface="+mn-lt"/>
+        <a:ea typeface="+mn-ea"/>
+        <a:cs typeface="+mn-cs"/>
+      </a:defRPr>
+    </a:lvl5pPr>
+    <a:lvl6pPr marL="2286000" algn="l" defTabSz="457200" rtl="0" eaLnBrk="1" latinLnBrk="0" hangingPunct="1">
+      <a:defRPr sz="1200" kern="1200">
+        <a:solidFill>
+          <a:schemeClr val="tx1"/>
+        </a:solidFill>
+        <a:latin typeface="+mn-lt"/>
+        <a:ea typeface="+mn-ea"/>
+        <a:cs typeface="+mn-cs"/>
+      </a:defRPr>
+    </a:lvl6pPr>
+    <a:lvl7pPr marL="2743200" algn="l" defTabSz="457200" rtl="0" eaLnBrk="1" latinLnBrk="0" hangingPunct="1">
+      <a:defRPr sz="1200" kern="1200">
+        <a:solidFill>
+          <a:schemeClr val="tx1"/>
+        </a:solidFill>
+        <a:latin typeface="+mn-lt"/>
+        <a:ea typeface="+mn-ea"/>
+        <a:cs typeface="+mn-cs"/>
+      </a:defRPr>
+    </a:lvl7pPr>
+    <a:lvl8pPr marL="3200400" algn="l" defTabSz="457200" rtl="0" eaLnBrk="1" latinLnBrk="0" hangingPunct="1">
+      <a:defRPr sz="1200" kern="1200">
+        <a:solidFill>
+          <a:schemeClr val="tx1"/>
+        </a:solidFill>
+        <a:latin typeface="+mn-lt"/>
+        <a:ea typeface="+mn-ea"/>
+        <a:cs typeface="+mn-cs"/>
+      </a:defRPr>
+    </a:lvl8pPr>
+    <a:lvl9pPr marL="3657600" algn="l" defTabSz="457200" rtl="0" eaLnBrk="1" latinLnBrk="0" hangingPunct="1">
+      <a:defRPr sz="1200" kern="1200">
+        <a:solidFill>
+          <a:schemeClr val="tx1"/>
+        </a:solidFill>
+        <a:latin typeface="+mn-lt"/>
+        <a:ea typeface="+mn-ea"/>
+        <a:cs typeface="+mn-cs"/>
+      </a:defRPr>
+    </a:lvl9pPr>
+  </p:notesStyle>
+</p:notesMaster>
+</file>
+
+<file path=ppt/notesSlides/notesSlide1.xml><?xml version="1.0" encoding="utf-8"?>
+<p:notes xmlns:a="http://schemas.openxmlformats.org/drawingml/2006/main" xmlns:p="http://schemas.openxmlformats.org/presentationml/2006/main" xmlns:r="http://schemas.openxmlformats.org/officeDocument/2006/relationships">
+  <p:cSld>
+    <p:spTree>
+      <p:nvGrpSpPr>
+        <p:cNvPr id="1" name=""/>
+        <p:cNvGrpSpPr/>
+        <p:nvPr/>
+      </p:nvGrpSpPr>
+      <p:grpSpPr>
+        <a:xfrm>
+          <a:off x="0" y="0"/>
+          <a:ext cx="0" cy="0"/>
+          <a:chOff x="0" y="0"/>
+          <a:chExt cx="0" cy="0"/>
+        </a:xfrm>
+      </p:grpSpPr>
+      <p:sp>
+        <p:nvSpPr>
+          <p:cNvPr id="2" name="Slide Image Placeholder 1"/>
+          <p:cNvSpPr>
+            <a:spLocks noGrp="1"/>
+          </p:cNvSpPr>
+          <p:nvPr>
+            <p:ph type="sldImg" idx="2"/>
+          </p:nvPr>
+        </p:nvSpPr>
+        <p:spPr/>
+      </p:sp>
+      <p:sp>
+        <p:nvSpPr>
+          <p:cNvPr id="3" name="Notes Placeholder 2"/>
+          <p:cNvSpPr>
+            <a:spLocks noGrp="1"/>
+          </p:cNvSpPr>
+          <p:nvPr>
+            <p:ph type="body" idx="3" sz="quarter"/>
+          </p:nvPr>
+        </p:nvSpPr>
+        <p:spPr/>
+        <p:txBody>
+          <a:bodyPr/>
+          <a:lstStyle/>
+          <a:p>
+            <a:r>
+              <a:t>Siehe Trainerhandbuch (Sektion 3) für Moderationshinweise, Timing und erwartete Teilnehmerreaktionen.</a:t>
+            </a:r>
+          </a:p>
+        </p:txBody>
+      </p:sp>
+      <p:sp>
+        <p:nvSpPr>
+          <p:cNvPr id="4" name="Slide Number Placeholder 3"/>
+          <p:cNvSpPr>
+            <a:spLocks noGrp="1"/>
+          </p:cNvSpPr>
+          <p:nvPr>
+            <p:ph type="sldNum" idx="5" sz="quarter"/>
+          </p:nvPr>
+        </p:nvSpPr>
+        <p:spPr/>
+      </p:sp>
+    </p:spTree>
+  </p:cSld>
+  <p:clrMapOvr>
+    <a:masterClrMapping/>
+  </p:clrMapOvr>
+</p:notes>
+</file>
+
+<file path=ppt/notesSlides/notesSlide10.xml><?xml version="1.0" encoding="utf-8"?>
+<p:notes xmlns:a="http://schemas.openxmlformats.org/drawingml/2006/main" xmlns:p="http://schemas.openxmlformats.org/presentationml/2006/main" xmlns:r="http://schemas.openxmlformats.org/officeDocument/2006/relationships">
+  <p:cSld>
+    <p:spTree>
+      <p:nvGrpSpPr>
+        <p:cNvPr id="1" name=""/>
+        <p:cNvGrpSpPr/>
+        <p:nvPr/>
+      </p:nvGrpSpPr>
+      <p:grpSpPr>
+        <a:xfrm>
+          <a:off x="0" y="0"/>
+          <a:ext cx="0" cy="0"/>
+          <a:chOff x="0" y="0"/>
+          <a:chExt cx="0" cy="0"/>
+        </a:xfrm>
+      </p:grpSpPr>
+      <p:sp>
+        <p:nvSpPr>
+          <p:cNvPr id="2" name="Slide Image Placeholder 1"/>
+          <p:cNvSpPr>
+            <a:spLocks noGrp="1"/>
+          </p:cNvSpPr>
+          <p:nvPr>
+            <p:ph type="sldImg" idx="2"/>
+          </p:nvPr>
+        </p:nvSpPr>
+        <p:spPr/>
+      </p:sp>
+      <p:sp>
+        <p:nvSpPr>
+          <p:cNvPr id="3" name="Notes Placeholder 2"/>
+          <p:cNvSpPr>
+            <a:spLocks noGrp="1"/>
+          </p:cNvSpPr>
+          <p:nvPr>
+            <p:ph type="body" idx="3" sz="quarter"/>
+          </p:nvPr>
+        </p:nvSpPr>
+        <p:spPr/>
+        <p:txBody>
+          <a:bodyPr/>
+          <a:lstStyle/>
+          <a:p>
+            <a:r>
+              <a:t>Siehe Trainerhandbuch (Sektion 3) für Moderationshinweise, Timing und erwartete Teilnehmerreaktionen.</a:t>
+            </a:r>
+          </a:p>
+        </p:txBody>
+      </p:sp>
+      <p:sp>
+        <p:nvSpPr>
+          <p:cNvPr id="4" name="Slide Number Placeholder 3"/>
+          <p:cNvSpPr>
+            <a:spLocks noGrp="1"/>
+          </p:cNvSpPr>
+          <p:nvPr>
+            <p:ph type="sldNum" idx="5" sz="quarter"/>
+          </p:nvPr>
+        </p:nvSpPr>
+        <p:spPr/>
+      </p:sp>
+    </p:spTree>
+  </p:cSld>
+  <p:clrMapOvr>
+    <a:masterClrMapping/>
+  </p:clrMapOvr>
+</p:notes>
+</file>
+
+<file path=ppt/notesSlides/notesSlide11.xml><?xml version="1.0" encoding="utf-8"?>
+<p:notes xmlns:a="http://schemas.openxmlformats.org/drawingml/2006/main" xmlns:p="http://schemas.openxmlformats.org/presentationml/2006/main" xmlns:r="http://schemas.openxmlformats.org/officeDocument/2006/relationships">
+  <p:cSld>
+    <p:spTree>
+      <p:nvGrpSpPr>
+        <p:cNvPr id="1" name=""/>
+        <p:cNvGrpSpPr/>
+        <p:nvPr/>
+      </p:nvGrpSpPr>
+      <p:grpSpPr>
+        <a:xfrm>
+          <a:off x="0" y="0"/>
+          <a:ext cx="0" cy="0"/>
+          <a:chOff x="0" y="0"/>
+          <a:chExt cx="0" cy="0"/>
+        </a:xfrm>
+      </p:grpSpPr>
+      <p:sp>
+        <p:nvSpPr>
+          <p:cNvPr id="2" name="Slide Image Placeholder 1"/>
+          <p:cNvSpPr>
+            <a:spLocks noGrp="1"/>
+          </p:cNvSpPr>
+          <p:nvPr>
+            <p:ph type="sldImg" idx="2"/>
+          </p:nvPr>
+        </p:nvSpPr>
+        <p:spPr/>
+      </p:sp>
+      <p:sp>
+        <p:nvSpPr>
+          <p:cNvPr id="3" name="Notes Placeholder 2"/>
+          <p:cNvSpPr>
+            <a:spLocks noGrp="1"/>
+          </p:cNvSpPr>
+          <p:nvPr>
+            <p:ph type="body" idx="3" sz="quarter"/>
+          </p:nvPr>
+        </p:nvSpPr>
+        <p:spPr/>
+        <p:txBody>
+          <a:bodyPr/>
+          <a:lstStyle/>
+          <a:p>
+            <a:r>
+              <a:t>Siehe Trainerhandbuch (Sektion 3) für Moderationshinweise, Timing und erwartete Teilnehmerreaktionen.</a:t>
+            </a:r>
+          </a:p>
+        </p:txBody>
+      </p:sp>
+      <p:sp>
+        <p:nvSpPr>
+          <p:cNvPr id="4" name="Slide Number Placeholder 3"/>
+          <p:cNvSpPr>
+            <a:spLocks noGrp="1"/>
+          </p:cNvSpPr>
+          <p:nvPr>
+            <p:ph type="sldNum" idx="5" sz="quarter"/>
+          </p:nvPr>
+        </p:nvSpPr>
+        <p:spPr/>
+      </p:sp>
+    </p:spTree>
+  </p:cSld>
+  <p:clrMapOvr>
+    <a:masterClrMapping/>
+  </p:clrMapOvr>
+</p:notes>
+</file>
+
+<file path=ppt/notesSlides/notesSlide2.xml><?xml version="1.0" encoding="utf-8"?>
+<p:notes xmlns:a="http://schemas.openxmlformats.org/drawingml/2006/main" xmlns:p="http://schemas.openxmlformats.org/presentationml/2006/main" xmlns:r="http://schemas.openxmlformats.org/officeDocument/2006/relationships">
+  <p:cSld>
+    <p:spTree>
+      <p:nvGrpSpPr>
+        <p:cNvPr id="1" name=""/>
+        <p:cNvGrpSpPr/>
+        <p:nvPr/>
+      </p:nvGrpSpPr>
+      <p:grpSpPr>
+        <a:xfrm>
+          <a:off x="0" y="0"/>
+          <a:ext cx="0" cy="0"/>
+          <a:chOff x="0" y="0"/>
+          <a:chExt cx="0" cy="0"/>
+        </a:xfrm>
+      </p:grpSpPr>
+      <p:sp>
+        <p:nvSpPr>
+          <p:cNvPr id="2" name="Slide Image Placeholder 1"/>
+          <p:cNvSpPr>
+            <a:spLocks noGrp="1"/>
+          </p:cNvSpPr>
+          <p:nvPr>
+            <p:ph type="sldImg" idx="2"/>
+          </p:nvPr>
+        </p:nvSpPr>
+        <p:spPr/>
+      </p:sp>
+      <p:sp>
+        <p:nvSpPr>
+          <p:cNvPr id="3" name="Notes Placeholder 2"/>
+          <p:cNvSpPr>
+            <a:spLocks noGrp="1"/>
+          </p:cNvSpPr>
+          <p:nvPr>
+            <p:ph type="body" idx="3" sz="quarter"/>
+          </p:nvPr>
+        </p:nvSpPr>
+        <p:spPr/>
+        <p:txBody>
+          <a:bodyPr/>
+          <a:lstStyle/>
+          <a:p>
+            <a:r>
+              <a:t>Siehe Trainerhandbuch (Sektion 3) für Moderationshinweise, Timing und erwartete Teilnehmerreaktionen.</a:t>
+            </a:r>
+          </a:p>
+        </p:txBody>
+      </p:sp>
+      <p:sp>
+        <p:nvSpPr>
+          <p:cNvPr id="4" name="Slide Number Placeholder 3"/>
+          <p:cNvSpPr>
+            <a:spLocks noGrp="1"/>
+          </p:cNvSpPr>
+          <p:nvPr>
+            <p:ph type="sldNum" idx="5" sz="quarter"/>
+          </p:nvPr>
+        </p:nvSpPr>
+        <p:spPr/>
+      </p:sp>
+    </p:spTree>
+  </p:cSld>
+  <p:clrMapOvr>
+    <a:masterClrMapping/>
+  </p:clrMapOvr>
+</p:notes>
+</file>
+
+<file path=ppt/notesSlides/notesSlide3.xml><?xml version="1.0" encoding="utf-8"?>
+<p:notes xmlns:a="http://schemas.openxmlformats.org/drawingml/2006/main" xmlns:p="http://schemas.openxmlformats.org/presentationml/2006/main" xmlns:r="http://schemas.openxmlformats.org/officeDocument/2006/relationships">
+  <p:cSld>
+    <p:spTree>
+      <p:nvGrpSpPr>
+        <p:cNvPr id="1" name=""/>
+        <p:cNvGrpSpPr/>
+        <p:nvPr/>
+      </p:nvGrpSpPr>
+      <p:grpSpPr>
+        <a:xfrm>
+          <a:off x="0" y="0"/>
+          <a:ext cx="0" cy="0"/>
+          <a:chOff x="0" y="0"/>
+          <a:chExt cx="0" cy="0"/>
+        </a:xfrm>
+      </p:grpSpPr>
+      <p:sp>
+        <p:nvSpPr>
+          <p:cNvPr id="2" name="Slide Image Placeholder 1"/>
+          <p:cNvSpPr>
+            <a:spLocks noGrp="1"/>
+          </p:cNvSpPr>
+          <p:nvPr>
+            <p:ph type="sldImg" idx="2"/>
+          </p:nvPr>
+        </p:nvSpPr>
+        <p:spPr/>
+      </p:sp>
+      <p:sp>
+        <p:nvSpPr>
+          <p:cNvPr id="3" name="Notes Placeholder 2"/>
+          <p:cNvSpPr>
+            <a:spLocks noGrp="1"/>
+          </p:cNvSpPr>
+          <p:nvPr>
+            <p:ph type="body" idx="3" sz="quarter"/>
+          </p:nvPr>
+        </p:nvSpPr>
+        <p:spPr/>
+        <p:txBody>
+          <a:bodyPr/>
+          <a:lstStyle/>
+          <a:p>
+            <a:r>
+              <a:t>Siehe Trainerhandbuch (Sektion 3) für Moderationshinweise, Timing und erwartete Teilnehmerreaktionen.</a:t>
+            </a:r>
+          </a:p>
+        </p:txBody>
+      </p:sp>
+      <p:sp>
+        <p:nvSpPr>
+          <p:cNvPr id="4" name="Slide Number Placeholder 3"/>
+          <p:cNvSpPr>
+            <a:spLocks noGrp="1"/>
+          </p:cNvSpPr>
+          <p:nvPr>
+            <p:ph type="sldNum" idx="5" sz="quarter"/>
+          </p:nvPr>
+        </p:nvSpPr>
+        <p:spPr/>
+      </p:sp>
+    </p:spTree>
+  </p:cSld>
+  <p:clrMapOvr>
+    <a:masterClrMapping/>
+  </p:clrMapOvr>
+</p:notes>
+</file>
+
+<file path=ppt/notesSlides/notesSlide4.xml><?xml version="1.0" encoding="utf-8"?>
+<p:notes xmlns:a="http://schemas.openxmlformats.org/drawingml/2006/main" xmlns:p="http://schemas.openxmlformats.org/presentationml/2006/main" xmlns:r="http://schemas.openxmlformats.org/officeDocument/2006/relationships">
+  <p:cSld>
+    <p:spTree>
+      <p:nvGrpSpPr>
+        <p:cNvPr id="1" name=""/>
+        <p:cNvGrpSpPr/>
+        <p:nvPr/>
+      </p:nvGrpSpPr>
+      <p:grpSpPr>
+        <a:xfrm>
+          <a:off x="0" y="0"/>
+          <a:ext cx="0" cy="0"/>
+          <a:chOff x="0" y="0"/>
+          <a:chExt cx="0" cy="0"/>
+        </a:xfrm>
+      </p:grpSpPr>
+      <p:sp>
+        <p:nvSpPr>
+          <p:cNvPr id="2" name="Slide Image Placeholder 1"/>
+          <p:cNvSpPr>
+            <a:spLocks noGrp="1"/>
+          </p:cNvSpPr>
+          <p:nvPr>
+            <p:ph type="sldImg" idx="2"/>
+          </p:nvPr>
+        </p:nvSpPr>
+        <p:spPr/>
+      </p:sp>
+      <p:sp>
+        <p:nvSpPr>
+          <p:cNvPr id="3" name="Notes Placeholder 2"/>
+          <p:cNvSpPr>
+            <a:spLocks noGrp="1"/>
+          </p:cNvSpPr>
+          <p:nvPr>
+            <p:ph type="body" idx="3" sz="quarter"/>
+          </p:nvPr>
+        </p:nvSpPr>
+        <p:spPr/>
+        <p:txBody>
+          <a:bodyPr/>
+          <a:lstStyle/>
+          <a:p>
+            <a:r>
+              <a:t>Siehe Trainerhandbuch (Sektion 3) für Moderationshinweise, Timing und erwartete Teilnehmerreaktionen.</a:t>
+            </a:r>
+          </a:p>
+        </p:txBody>
+      </p:sp>
+      <p:sp>
+        <p:nvSpPr>
+          <p:cNvPr id="4" name="Slide Number Placeholder 3"/>
+          <p:cNvSpPr>
+            <a:spLocks noGrp="1"/>
+          </p:cNvSpPr>
+          <p:nvPr>
+            <p:ph type="sldNum" idx="5" sz="quarter"/>
+          </p:nvPr>
+        </p:nvSpPr>
+        <p:spPr/>
+      </p:sp>
+    </p:spTree>
+  </p:cSld>
+  <p:clrMapOvr>
+    <a:masterClrMapping/>
+  </p:clrMapOvr>
+</p:notes>
+</file>
+
+<file path=ppt/notesSlides/notesSlide5.xml><?xml version="1.0" encoding="utf-8"?>
+<p:notes xmlns:a="http://schemas.openxmlformats.org/drawingml/2006/main" xmlns:p="http://schemas.openxmlformats.org/presentationml/2006/main" xmlns:r="http://schemas.openxmlformats.org/officeDocument/2006/relationships">
+  <p:cSld>
+    <p:spTree>
+      <p:nvGrpSpPr>
+        <p:cNvPr id="1" name=""/>
+        <p:cNvGrpSpPr/>
+        <p:nvPr/>
+      </p:nvGrpSpPr>
+      <p:grpSpPr>
+        <a:xfrm>
+          <a:off x="0" y="0"/>
+          <a:ext cx="0" cy="0"/>
+          <a:chOff x="0" y="0"/>
+          <a:chExt cx="0" cy="0"/>
+        </a:xfrm>
+      </p:grpSpPr>
+      <p:sp>
+        <p:nvSpPr>
+          <p:cNvPr id="2" name="Slide Image Placeholder 1"/>
+          <p:cNvSpPr>
+            <a:spLocks noGrp="1"/>
+          </p:cNvSpPr>
+          <p:nvPr>
+            <p:ph type="sldImg" idx="2"/>
+          </p:nvPr>
+        </p:nvSpPr>
+        <p:spPr/>
+      </p:sp>
+      <p:sp>
+        <p:nvSpPr>
+          <p:cNvPr id="3" name="Notes Placeholder 2"/>
+          <p:cNvSpPr>
+            <a:spLocks noGrp="1"/>
+          </p:cNvSpPr>
+          <p:nvPr>
+            <p:ph type="body" idx="3" sz="quarter"/>
+          </p:nvPr>
+        </p:nvSpPr>
+        <p:spPr/>
+        <p:txBody>
+          <a:bodyPr/>
+          <a:lstStyle/>
+          <a:p>
+            <a:r>
+              <a:t>Siehe Trainerhandbuch (Sektion 3) für Moderationshinweise, Timing und erwartete Teilnehmerreaktionen.</a:t>
+            </a:r>
+          </a:p>
+        </p:txBody>
+      </p:sp>
+      <p:sp>
+        <p:nvSpPr>
+          <p:cNvPr id="4" name="Slide Number Placeholder 3"/>
+          <p:cNvSpPr>
+            <a:spLocks noGrp="1"/>
+          </p:cNvSpPr>
+          <p:nvPr>
+            <p:ph type="sldNum" idx="5" sz="quarter"/>
+          </p:nvPr>
+        </p:nvSpPr>
+        <p:spPr/>
+      </p:sp>
+    </p:spTree>
+  </p:cSld>
+  <p:clrMapOvr>
+    <a:masterClrMapping/>
+  </p:clrMapOvr>
+</p:notes>
+</file>
+
+<file path=ppt/notesSlides/notesSlide6.xml><?xml version="1.0" encoding="utf-8"?>
+<p:notes xmlns:a="http://schemas.openxmlformats.org/drawingml/2006/main" xmlns:p="http://schemas.openxmlformats.org/presentationml/2006/main" xmlns:r="http://schemas.openxmlformats.org/officeDocument/2006/relationships">
+  <p:cSld>
+    <p:spTree>
+      <p:nvGrpSpPr>
+        <p:cNvPr id="1" name=""/>
+        <p:cNvGrpSpPr/>
+        <p:nvPr/>
+      </p:nvGrpSpPr>
+      <p:grpSpPr>
+        <a:xfrm>
+          <a:off x="0" y="0"/>
+          <a:ext cx="0" cy="0"/>
+          <a:chOff x="0" y="0"/>
+          <a:chExt cx="0" cy="0"/>
+        </a:xfrm>
+      </p:grpSpPr>
+      <p:sp>
+        <p:nvSpPr>
+          <p:cNvPr id="2" name="Slide Image Placeholder 1"/>
+          <p:cNvSpPr>
+            <a:spLocks noGrp="1"/>
+          </p:cNvSpPr>
+          <p:nvPr>
+            <p:ph type="sldImg" idx="2"/>
+          </p:nvPr>
+        </p:nvSpPr>
+        <p:spPr/>
+      </p:sp>
+      <p:sp>
+        <p:nvSpPr>
+          <p:cNvPr id="3" name="Notes Placeholder 2"/>
+          <p:cNvSpPr>
+            <a:spLocks noGrp="1"/>
+          </p:cNvSpPr>
+          <p:nvPr>
+            <p:ph type="body" idx="3" sz="quarter"/>
+          </p:nvPr>
+        </p:nvSpPr>
+        <p:spPr/>
+        <p:txBody>
+          <a:bodyPr/>
+          <a:lstStyle/>
+          <a:p>
+            <a:r>
+              <a:t>Siehe Trainerhandbuch (Sektion 3) für Moderationshinweise, Timing und erwartete Teilnehmerreaktionen.</a:t>
+            </a:r>
+          </a:p>
+        </p:txBody>
+      </p:sp>
+      <p:sp>
+        <p:nvSpPr>
+          <p:cNvPr id="4" name="Slide Number Placeholder 3"/>
+          <p:cNvSpPr>
+            <a:spLocks noGrp="1"/>
+          </p:cNvSpPr>
+          <p:nvPr>
+            <p:ph type="sldNum" idx="5" sz="quarter"/>
+          </p:nvPr>
+        </p:nvSpPr>
+        <p:spPr/>
+      </p:sp>
+    </p:spTree>
+  </p:cSld>
+  <p:clrMapOvr>
+    <a:masterClrMapping/>
+  </p:clrMapOvr>
+</p:notes>
+</file>
+
+<file path=ppt/notesSlides/notesSlide7.xml><?xml version="1.0" encoding="utf-8"?>
+<p:notes xmlns:a="http://schemas.openxmlformats.org/drawingml/2006/main" xmlns:p="http://schemas.openxmlformats.org/presentationml/2006/main" xmlns:r="http://schemas.openxmlformats.org/officeDocument/2006/relationships">
+  <p:cSld>
+    <p:spTree>
+      <p:nvGrpSpPr>
+        <p:cNvPr id="1" name=""/>
+        <p:cNvGrpSpPr/>
+        <p:nvPr/>
+      </p:nvGrpSpPr>
+      <p:grpSpPr>
+        <a:xfrm>
+          <a:off x="0" y="0"/>
+          <a:ext cx="0" cy="0"/>
+          <a:chOff x="0" y="0"/>
+          <a:chExt cx="0" cy="0"/>
+        </a:xfrm>
+      </p:grpSpPr>
+      <p:sp>
+        <p:nvSpPr>
+          <p:cNvPr id="2" name="Slide Image Placeholder 1"/>
+          <p:cNvSpPr>
+            <a:spLocks noGrp="1"/>
+          </p:cNvSpPr>
+          <p:nvPr>
+            <p:ph type="sldImg" idx="2"/>
+          </p:nvPr>
+        </p:nvSpPr>
+        <p:spPr/>
+      </p:sp>
+      <p:sp>
+        <p:nvSpPr>
+          <p:cNvPr id="3" name="Notes Placeholder 2"/>
+          <p:cNvSpPr>
+            <a:spLocks noGrp="1"/>
+          </p:cNvSpPr>
+          <p:nvPr>
+            <p:ph type="body" idx="3" sz="quarter"/>
+          </p:nvPr>
+        </p:nvSpPr>
+        <p:spPr/>
+        <p:txBody>
+          <a:bodyPr/>
+          <a:lstStyle/>
+          <a:p>
+            <a:r>
+              <a:t>Siehe Trainerhandbuch (Sektion 3) für Moderationshinweise, Timing und erwartete Teilnehmerreaktionen.</a:t>
+            </a:r>
+          </a:p>
+        </p:txBody>
+      </p:sp>
+      <p:sp>
+        <p:nvSpPr>
+          <p:cNvPr id="4" name="Slide Number Placeholder 3"/>
+          <p:cNvSpPr>
+            <a:spLocks noGrp="1"/>
+          </p:cNvSpPr>
+          <p:nvPr>
+            <p:ph type="sldNum" idx="5" sz="quarter"/>
+          </p:nvPr>
+        </p:nvSpPr>
+        <p:spPr/>
+      </p:sp>
+    </p:spTree>
+  </p:cSld>
+  <p:clrMapOvr>
+    <a:masterClrMapping/>
+  </p:clrMapOvr>
+</p:notes>
+</file>
+
+<file path=ppt/notesSlides/notesSlide8.xml><?xml version="1.0" encoding="utf-8"?>
+<p:notes xmlns:a="http://schemas.openxmlformats.org/drawingml/2006/main" xmlns:p="http://schemas.openxmlformats.org/presentationml/2006/main" xmlns:r="http://schemas.openxmlformats.org/officeDocument/2006/relationships">
+  <p:cSld>
+    <p:spTree>
+      <p:nvGrpSpPr>
+        <p:cNvPr id="1" name=""/>
+        <p:cNvGrpSpPr/>
+        <p:nvPr/>
+      </p:nvGrpSpPr>
+      <p:grpSpPr>
+        <a:xfrm>
+          <a:off x="0" y="0"/>
+          <a:ext cx="0" cy="0"/>
+          <a:chOff x="0" y="0"/>
+          <a:chExt cx="0" cy="0"/>
+        </a:xfrm>
+      </p:grpSpPr>
+      <p:sp>
+        <p:nvSpPr>
+          <p:cNvPr id="2" name="Slide Image Placeholder 1"/>
+          <p:cNvSpPr>
+            <a:spLocks noGrp="1"/>
+          </p:cNvSpPr>
+          <p:nvPr>
+            <p:ph type="sldImg" idx="2"/>
+          </p:nvPr>
+        </p:nvSpPr>
+        <p:spPr/>
+      </p:sp>
+      <p:sp>
+        <p:nvSpPr>
+          <p:cNvPr id="3" name="Notes Placeholder 2"/>
+          <p:cNvSpPr>
+            <a:spLocks noGrp="1"/>
+          </p:cNvSpPr>
+          <p:nvPr>
+            <p:ph type="body" idx="3" sz="quarter"/>
+          </p:nvPr>
+        </p:nvSpPr>
+        <p:spPr/>
+        <p:txBody>
+          <a:bodyPr/>
+          <a:lstStyle/>
+          <a:p>
+            <a:r>
+              <a:t>Siehe Trainerhandbuch (Sektion 3) für Moderationshinweise, Timing und erwartete Teilnehmerreaktionen.</a:t>
+            </a:r>
+          </a:p>
+        </p:txBody>
+      </p:sp>
+      <p:sp>
+        <p:nvSpPr>
+          <p:cNvPr id="4" name="Slide Number Placeholder 3"/>
+          <p:cNvSpPr>
+            <a:spLocks noGrp="1"/>
+          </p:cNvSpPr>
+          <p:nvPr>
+            <p:ph type="sldNum" idx="5" sz="quarter"/>
+          </p:nvPr>
+        </p:nvSpPr>
+        <p:spPr/>
+      </p:sp>
+    </p:spTree>
+  </p:cSld>
+  <p:clrMapOvr>
+    <a:masterClrMapping/>
+  </p:clrMapOvr>
+</p:notes>
+</file>
+
+<file path=ppt/notesSlides/notesSlide9.xml><?xml version="1.0" encoding="utf-8"?>
+<p:notes xmlns:a="http://schemas.openxmlformats.org/drawingml/2006/main" xmlns:p="http://schemas.openxmlformats.org/presentationml/2006/main" xmlns:r="http://schemas.openxmlformats.org/officeDocument/2006/relationships">
+  <p:cSld>
+    <p:spTree>
+      <p:nvGrpSpPr>
+        <p:cNvPr id="1" name=""/>
+        <p:cNvGrpSpPr/>
+        <p:nvPr/>
+      </p:nvGrpSpPr>
+      <p:grpSpPr>
+        <a:xfrm>
+          <a:off x="0" y="0"/>
+          <a:ext cx="0" cy="0"/>
+          <a:chOff x="0" y="0"/>
+          <a:chExt cx="0" cy="0"/>
+        </a:xfrm>
+      </p:grpSpPr>
+      <p:sp>
+        <p:nvSpPr>
+          <p:cNvPr id="2" name="Slide Image Placeholder 1"/>
+          <p:cNvSpPr>
+            <a:spLocks noGrp="1"/>
+          </p:cNvSpPr>
+          <p:nvPr>
+            <p:ph type="sldImg" idx="2"/>
+          </p:nvPr>
+        </p:nvSpPr>
+        <p:spPr/>
+      </p:sp>
+      <p:sp>
+        <p:nvSpPr>
+          <p:cNvPr id="3" name="Notes Placeholder 2"/>
+          <p:cNvSpPr>
+            <a:spLocks noGrp="1"/>
+          </p:cNvSpPr>
+          <p:nvPr>
+            <p:ph type="body" idx="3" sz="quarter"/>
+          </p:nvPr>
+        </p:nvSpPr>
+        <p:spPr/>
+        <p:txBody>
+          <a:bodyPr/>
+          <a:lstStyle/>
+          <a:p>
+            <a:r>
+              <a:t>Siehe Trainerhandbuch (Sektion 3) für Moderationshinweise, Timing und erwartete Teilnehmerreaktionen.</a:t>
+            </a:r>
+          </a:p>
+        </p:txBody>
+      </p:sp>
+      <p:sp>
+        <p:nvSpPr>
+          <p:cNvPr id="4" name="Slide Number Placeholder 3"/>
+          <p:cNvSpPr>
+            <a:spLocks noGrp="1"/>
+          </p:cNvSpPr>
+          <p:nvPr>
+            <p:ph type="sldNum" idx="5" sz="quarter"/>
+          </p:nvPr>
+        </p:nvSpPr>
+        <p:spPr/>
+      </p:sp>
+    </p:spTree>
+  </p:cSld>
+  <p:clrMapOvr>
+    <a:masterClrMapping/>
+  </p:clrMapOvr>
+</p:notes>
 </file>
 
 <file path=ppt/slideLayouts/slideLayout1.xml><?xml version="1.0" encoding="utf-8"?>
@@ -5392,64 +6512,7 @@
                 </a:solidFill>
                 <a:latin typeface="Arial"/>
               </a:rPr>
-              <a:t>Kundenname (anonymisiert): ___________________________ Datum: _______________</a:t>
-            </a:r>
-          </a:p>
-          <a:p>
-            <a:pPr>
-              <a:spcBef>
-                <a:spcPts val="400"/>
-              </a:spcBef>
-              <a:spcAft>
-                <a:spcPts val="200"/>
-              </a:spcAft>
-            </a:pPr>
-            <a:r>
-              <a:rPr sz="1200">
-                <a:solidFill>
-                  <a:srgbClr val="3D5466"/>
-                </a:solidFill>
-                <a:latin typeface="Arial"/>
-              </a:rPr>
               <a:t>Meine Top-2 Cross-Selling-Hypothesen für diesen Kunden:</a:t>
-            </a:r>
-          </a:p>
-          <a:p>
-            <a:pPr>
-              <a:spcBef>
-                <a:spcPts val="400"/>
-              </a:spcBef>
-              <a:spcAft>
-                <a:spcPts val="200"/>
-              </a:spcAft>
-            </a:pPr>
-            <a:r>
-              <a:rPr sz="1300">
-                <a:solidFill>
-                  <a:srgbClr val="3D5466"/>
-                </a:solidFill>
-                <a:latin typeface="Arial"/>
-              </a:rPr>
-              <a:t>▸  ___________________________________________________________________________</a:t>
-            </a:r>
-          </a:p>
-          <a:p>
-            <a:pPr>
-              <a:spcBef>
-                <a:spcPts val="400"/>
-              </a:spcBef>
-              <a:spcAft>
-                <a:spcPts val="200"/>
-              </a:spcAft>
-            </a:pPr>
-            <a:r>
-              <a:rPr sz="1300">
-                <a:solidFill>
-                  <a:srgbClr val="3D5466"/>
-                </a:solidFill>
-                <a:latin typeface="Arial"/>
-              </a:rPr>
-              <a:t>▸  ___________________________________________________________________________</a:t>
             </a:r>
           </a:p>
         </p:txBody>
@@ -5813,25 +6876,6 @@
             <a:spAutoFit/>
           </a:bodyPr>
           <a:lstStyle/>
-          <a:p>
-            <a:pPr>
-              <a:spcBef>
-                <a:spcPts val="400"/>
-              </a:spcBef>
-              <a:spcAft>
-                <a:spcPts val="200"/>
-              </a:spcAft>
-            </a:pPr>
-            <a:r>
-              <a:rPr sz="1200">
-                <a:solidFill>
-                  <a:srgbClr val="3D5466"/>
-                </a:solidFill>
-                <a:latin typeface="Arial"/>
-              </a:rPr>
-              <a:t>Ausgewählte Hypothese: ___________________________</a:t>
-            </a:r>
-          </a:p>
           <a:p>
             <a:pPr>
               <a:spcBef>
@@ -9463,4 +10507,324 @@
   </a:objectDefaults>
   <a:extraClrSchemeLst/>
 </a:theme>
+</file>
+
+<file path=ppt/theme/theme2.xml><?xml version="1.0" encoding="utf-8"?>
+<a:theme xmlns:a="http://schemas.openxmlformats.org/drawingml/2006/main" name="Office Theme">
+  <a:themeElements>
+    <a:clrScheme name="Office">
+      <a:dk1>
+        <a:sysClr val="windowText" lastClr="000000"/>
+      </a:dk1>
+      <a:lt1>
+        <a:sysClr val="window" lastClr="FFFFFF"/>
+      </a:lt1>
+      <a:dk2>
+        <a:srgbClr val="1F497D"/>
+      </a:dk2>
+      <a:lt2>
+        <a:srgbClr val="EEECE1"/>
+      </a:lt2>
+      <a:accent1>
+        <a:srgbClr val="4F81BD"/>
+      </a:accent1>
+      <a:accent2>
+        <a:srgbClr val="C0504D"/>
+      </a:accent2>
+      <a:accent3>
+        <a:srgbClr val="9BBB59"/>
+      </a:accent3>
+      <a:accent4>
+        <a:srgbClr val="8064A2"/>
+      </a:accent4>
+      <a:accent5>
+        <a:srgbClr val="4BACC6"/>
+      </a:accent5>
+      <a:accent6>
+        <a:srgbClr val="F79646"/>
+      </a:accent6>
+      <a:hlink>
+        <a:srgbClr val="0000FF"/>
+      </a:hlink>
+      <a:folHlink>
+        <a:srgbClr val="800080"/>
+      </a:folHlink>
+    </a:clrScheme>
+    <a:fontScheme name="Office">
+      <a:majorFont>
+        <a:latin typeface="Calibri"/>
+        <a:ea typeface=""/>
+        <a:cs typeface=""/>
+        <a:font script="Jpan" typeface="ＭＳ Ｐゴシック"/>
+        <a:font script="Hang" typeface="맑은 고딕"/>
+        <a:font script="Hans" typeface="宋体"/>
+        <a:font script="Hant" typeface="新細明體"/>
+        <a:font script="Arab" typeface="Times New Roman"/>
+        <a:font script="Hebr" typeface="Times New Roman"/>
+        <a:font script="Thai" typeface="Angsana New"/>
+        <a:font script="Ethi" typeface="Nyala"/>
+        <a:font script="Beng" typeface="Vrinda"/>
+        <a:font script="Gujr" typeface="Shruti"/>
+        <a:font script="Khmr" typeface="MoolBoran"/>
+        <a:font script="Knda" typeface="Tunga"/>
+        <a:font script="Guru" typeface="Raavi"/>
+        <a:font script="Cans" typeface="Euphemia"/>
+        <a:font script="Cher" typeface="Plantagenet Cherokee"/>
+        <a:font script="Yiii" typeface="Microsoft Yi Baiti"/>
+        <a:font script="Tibt" typeface="Microsoft Himalaya"/>
+        <a:font script="Thaa" typeface="MV Boli"/>
+        <a:font script="Deva" typeface="Mangal"/>
+        <a:font script="Telu" typeface="Gautami"/>
+        <a:font script="Taml" typeface="Latha"/>
+        <a:font script="Syrc" typeface="Estrangelo Edessa"/>
+        <a:font script="Orya" typeface="Kalinga"/>
+        <a:font script="Mlym" typeface="Kartika"/>
+        <a:font script="Laoo" typeface="DokChampa"/>
+        <a:font script="Sinh" typeface="Iskoola Pota"/>
+        <a:font script="Mong" typeface="Mongolian Baiti"/>
+        <a:font script="Viet" typeface="Times New Roman"/>
+        <a:font script="Uigh" typeface="Microsoft Uighur"/>
+        <a:font script="Geor" typeface="Sylfaen"/>
+      </a:majorFont>
+      <a:minorFont>
+        <a:latin typeface="Calibri"/>
+        <a:ea typeface=""/>
+        <a:cs typeface=""/>
+        <a:font script="Jpan" typeface="ＭＳ Ｐゴシック"/>
+        <a:font script="Hang" typeface="맑은 고딕"/>
+        <a:font script="Hans" typeface="宋体"/>
+        <a:font script="Hant" typeface="新細明體"/>
+        <a:font script="Arab" typeface="Arial"/>
+        <a:font script="Hebr" typeface="Arial"/>
+        <a:font script="Thai" typeface="Cordia New"/>
+        <a:font script="Ethi" typeface="Nyala"/>
+        <a:font script="Beng" typeface="Vrinda"/>
+        <a:font script="Gujr" typeface="Shruti"/>
+        <a:font script="Khmr" typeface="DaunPenh"/>
+        <a:font script="Knda" typeface="Tunga"/>
+        <a:font script="Guru" typeface="Raavi"/>
+        <a:font script="Cans" typeface="Euphemia"/>
+        <a:font script="Cher" typeface="Plantagenet Cherokee"/>
+        <a:font script="Yiii" typeface="Microsoft Yi Baiti"/>
+        <a:font script="Tibt" typeface="Microsoft Himalaya"/>
+        <a:font script="Thaa" typeface="MV Boli"/>
+        <a:font script="Deva" typeface="Mangal"/>
+        <a:font script="Telu" typeface="Gautami"/>
+        <a:font script="Taml" typeface="Latha"/>
+        <a:font script="Syrc" typeface="Estrangelo Edessa"/>
+        <a:font script="Orya" typeface="Kalinga"/>
+        <a:font script="Mlym" typeface="Kartika"/>
+        <a:font script="Laoo" typeface="DokChampa"/>
+        <a:font script="Sinh" typeface="Iskoola Pota"/>
+        <a:font script="Mong" typeface="Mongolian Baiti"/>
+        <a:font script="Viet" typeface="Arial"/>
+        <a:font script="Uigh" typeface="Microsoft Uighur"/>
+        <a:font script="Geor" typeface="Sylfaen"/>
+      </a:minorFont>
+    </a:fontScheme>
+    <a:fmtScheme name="Office">
+      <a:fillStyleLst>
+        <a:solidFill>
+          <a:schemeClr val="phClr"/>
+        </a:solidFill>
+        <a:gradFill rotWithShape="1">
+          <a:gsLst>
+            <a:gs pos="0">
+              <a:schemeClr val="phClr">
+                <a:tint val="50000"/>
+                <a:satMod val="300000"/>
+              </a:schemeClr>
+            </a:gs>
+            <a:gs pos="35000">
+              <a:schemeClr val="phClr">
+                <a:tint val="37000"/>
+                <a:satMod val="300000"/>
+              </a:schemeClr>
+            </a:gs>
+            <a:gs pos="100000">
+              <a:schemeClr val="phClr">
+                <a:tint val="15000"/>
+                <a:satMod val="350000"/>
+              </a:schemeClr>
+            </a:gs>
+          </a:gsLst>
+          <a:lin ang="16200000" scaled="1"/>
+        </a:gradFill>
+        <a:gradFill rotWithShape="1">
+          <a:gsLst>
+            <a:gs pos="0">
+              <a:schemeClr val="phClr">
+                <a:tint val="100000"/>
+                <a:shade val="100000"/>
+                <a:satMod val="130000"/>
+              </a:schemeClr>
+            </a:gs>
+            <a:gs pos="100000">
+              <a:schemeClr val="phClr">
+                <a:tint val="50000"/>
+                <a:shade val="100000"/>
+                <a:satMod val="350000"/>
+              </a:schemeClr>
+            </a:gs>
+          </a:gsLst>
+          <a:lin ang="16200000" scaled="0"/>
+        </a:gradFill>
+      </a:fillStyleLst>
+      <a:lnStyleLst>
+        <a:ln w="9525" cap="flat" cmpd="sng" algn="ctr">
+          <a:solidFill>
+            <a:schemeClr val="phClr">
+              <a:shade val="95000"/>
+              <a:satMod val="105000"/>
+            </a:schemeClr>
+          </a:solidFill>
+          <a:prstDash val="solid"/>
+        </a:ln>
+        <a:ln w="25400" cap="flat" cmpd="sng" algn="ctr">
+          <a:solidFill>
+            <a:schemeClr val="phClr"/>
+          </a:solidFill>
+          <a:prstDash val="solid"/>
+        </a:ln>
+        <a:ln w="38100" cap="flat" cmpd="sng" algn="ctr">
+          <a:solidFill>
+            <a:schemeClr val="phClr"/>
+          </a:solidFill>
+          <a:prstDash val="solid"/>
+        </a:ln>
+      </a:lnStyleLst>
+      <a:effectStyleLst>
+        <a:effectStyle>
+          <a:effectLst>
+            <a:outerShdw blurRad="40000" dist="20000" dir="5400000" rotWithShape="0">
+              <a:srgbClr val="000000">
+                <a:alpha val="38000"/>
+              </a:srgbClr>
+            </a:outerShdw>
+          </a:effectLst>
+        </a:effectStyle>
+        <a:effectStyle>
+          <a:effectLst>
+            <a:outerShdw blurRad="40000" dist="23000" dir="5400000" rotWithShape="0">
+              <a:srgbClr val="000000">
+                <a:alpha val="35000"/>
+              </a:srgbClr>
+            </a:outerShdw>
+          </a:effectLst>
+        </a:effectStyle>
+        <a:effectStyle>
+          <a:effectLst>
+            <a:outerShdw blurRad="40000" dist="23000" dir="5400000" rotWithShape="0">
+              <a:srgbClr val="000000">
+                <a:alpha val="35000"/>
+              </a:srgbClr>
+            </a:outerShdw>
+          </a:effectLst>
+          <a:scene3d>
+            <a:camera prst="orthographicFront">
+              <a:rot lat="0" lon="0" rev="0"/>
+            </a:camera>
+            <a:lightRig rig="threePt" dir="t">
+              <a:rot lat="0" lon="0" rev="1200000"/>
+            </a:lightRig>
+          </a:scene3d>
+          <a:sp3d>
+            <a:bevelT w="63500" h="25400"/>
+          </a:sp3d>
+        </a:effectStyle>
+      </a:effectStyleLst>
+      <a:bgFillStyleLst>
+        <a:solidFill>
+          <a:schemeClr val="phClr"/>
+        </a:solidFill>
+        <a:gradFill rotWithShape="1">
+          <a:gsLst>
+            <a:gs pos="0">
+              <a:schemeClr val="phClr">
+                <a:tint val="40000"/>
+                <a:satMod val="350000"/>
+              </a:schemeClr>
+            </a:gs>
+            <a:gs pos="40000">
+              <a:schemeClr val="phClr">
+                <a:tint val="45000"/>
+                <a:shade val="99000"/>
+                <a:satMod val="350000"/>
+              </a:schemeClr>
+            </a:gs>
+            <a:gs pos="100000">
+              <a:schemeClr val="phClr">
+                <a:shade val="20000"/>
+                <a:satMod val="255000"/>
+              </a:schemeClr>
+            </a:gs>
+          </a:gsLst>
+          <a:path path="circle">
+            <a:fillToRect l="50000" t="-80000" r="50000" b="180000"/>
+          </a:path>
+        </a:gradFill>
+        <a:gradFill rotWithShape="1">
+          <a:gsLst>
+            <a:gs pos="0">
+              <a:schemeClr val="phClr">
+                <a:tint val="80000"/>
+                <a:satMod val="300000"/>
+              </a:schemeClr>
+            </a:gs>
+            <a:gs pos="100000">
+              <a:schemeClr val="phClr">
+                <a:shade val="30000"/>
+                <a:satMod val="200000"/>
+              </a:schemeClr>
+            </a:gs>
+          </a:gsLst>
+          <a:path path="circle">
+            <a:fillToRect l="50000" t="50000" r="50000" b="50000"/>
+          </a:path>
+        </a:gradFill>
+      </a:bgFillStyleLst>
+    </a:fmtScheme>
+  </a:themeElements>
+  <a:objectDefaults>
+    <a:spDef>
+      <a:spPr/>
+      <a:bodyPr/>
+      <a:lstStyle/>
+      <a:style>
+        <a:lnRef idx="1">
+          <a:schemeClr val="accent1"/>
+        </a:lnRef>
+        <a:fillRef idx="3">
+          <a:schemeClr val="accent1"/>
+        </a:fillRef>
+        <a:effectRef idx="2">
+          <a:schemeClr val="accent1"/>
+        </a:effectRef>
+        <a:fontRef idx="minor">
+          <a:schemeClr val="lt1"/>
+        </a:fontRef>
+      </a:style>
+    </a:spDef>
+    <a:lnDef>
+      <a:spPr/>
+      <a:bodyPr/>
+      <a:lstStyle/>
+      <a:style>
+        <a:lnRef idx="2">
+          <a:schemeClr val="accent1"/>
+        </a:lnRef>
+        <a:fillRef idx="0">
+          <a:schemeClr val="accent1"/>
+        </a:fillRef>
+        <a:effectRef idx="1">
+          <a:schemeClr val="accent1"/>
+        </a:effectRef>
+        <a:fontRef idx="minor">
+          <a:schemeClr val="tx1"/>
+        </a:fontRef>
+      </a:style>
+    </a:lnDef>
+  </a:objectDefaults>
+  <a:extraClrSchemeLst/>
+</a:theme>
 </file>
--- a/protected-downloads/praesentation/M13.pptx
+++ b/protected-downloads/praesentation/M13.pptx
@@ -6857,49 +6857,7 @@
       </p:sp>
       <p:sp>
         <p:nvSpPr>
-          <p:cNvPr id="8" name="TextBox 7"/>
-          <p:cNvSpPr txBox="1"/>
-          <p:nvPr/>
-        </p:nvSpPr>
-        <p:spPr>
-          <a:xfrm>
-            <a:off x="685800" y="1417320"/>
-            <a:ext cx="10817352" cy="5029200"/>
-          </a:xfrm>
-          <a:prstGeom prst="rect">
-            <a:avLst/>
-          </a:prstGeom>
-          <a:noFill/>
-        </p:spPr>
-        <p:txBody>
-          <a:bodyPr wrap="square">
-            <a:spAutoFit/>
-          </a:bodyPr>
-          <a:lstStyle/>
-          <a:p>
-            <a:pPr>
-              <a:spcBef>
-                <a:spcPts val="400"/>
-              </a:spcBef>
-              <a:spcAft>
-                <a:spcPts val="200"/>
-              </a:spcAft>
-            </a:pPr>
-            <a:r>
-              <a:rPr sz="1200">
-                <a:solidFill>
-                  <a:srgbClr val="3D5466"/>
-                </a:solidFill>
-                <a:latin typeface="Arial"/>
-              </a:rPr>
-              <a:t># 5. PRAXISTRANSFER</a:t>
-            </a:r>
-          </a:p>
-        </p:txBody>
-      </p:sp>
-      <p:sp>
-        <p:nvSpPr>
-          <p:cNvPr id="9" name="Rectangle 8"/>
+          <p:cNvPr id="8" name="Rectangle 7"/>
           <p:cNvSpPr/>
           <p:nvPr/>
         </p:nvSpPr>
@@ -6942,7 +6900,7 @@
       </p:sp>
       <p:sp>
         <p:nvSpPr>
-          <p:cNvPr id="10" name="TextBox 9"/>
+          <p:cNvPr id="9" name="TextBox 8"/>
           <p:cNvSpPr txBox="1"/>
           <p:nvPr/>
         </p:nvSpPr>

--- a/protected-downloads/praesentation/M13.pptx
+++ b/protected-downloads/praesentation/M13.pptx
@@ -8,7 +8,7 @@
     <p:sldId id="256" r:id="rId7"/>
     <p:sldId id="257" r:id="rId8"/>
     <p:sldId id="258" r:id="rId9"/>
-    <p:sldId id="259" r:id="rId11"/>
+    <p:sldId id="259" r:id="rId10"/>
     <p:sldId id="260" r:id="rId12"/>
     <p:sldId id="261" r:id="rId13"/>
     <p:sldId id="262" r:id="rId14"/>
@@ -19,6 +19,7 @@
     <p:sldId id="267" r:id="rId19"/>
     <p:sldId id="268" r:id="rId20"/>
     <p:sldId id="269" r:id="rId21"/>
+    <p:sldId id="270" r:id="rId22"/>
   </p:sldIdLst>
   <p:sldSz cx="12188952" cy="6858000" type="screen4x3"/>
   <p:notesSz cx="6858000" cy="9144000"/>
@@ -5033,7 +5034,7 @@
                 </a:solidFill>
                 <a:latin typeface="Source Serif 4"/>
               </a:rPr>
-              <a:t>Schritt 3: Gespräch</a:t>
+              <a:t>Schritt 2: Hypothese formulieren</a:t>
             </a:r>
           </a:p>
         </p:txBody>
@@ -5075,121 +5076,26 @@
                 </a:solidFill>
                 <a:latin typeface="Arial"/>
               </a:rPr>
-              <a:t>Das Cross-Selling-Gespräch ist kein Verkaufsgespräch. Es ist eine bedarfsgeleitete Gesprächserweiterung. Der Einstieg erfolgt über eine offene Frage zur Situation – nicht mit einem Produktvorschlag.</a:t>
+              <a:t>Eine Cross-Selling-Hypothese verknüpft einen beobachteten Kundenbedarf mit einem konkreten Lösungsansatz. Gutes Format:</a:t>
             </a:r>
           </a:p>
           <a:p>
             <a:pPr>
               <a:spcBef>
-                <a:spcPts val="400"/>
+                <a:spcPts val="600"/>
               </a:spcBef>
               <a:spcAft>
                 <a:spcPts val="200"/>
               </a:spcAft>
             </a:pPr>
             <a:r>
-              <a:rPr sz="1200">
+              <a:rPr sz="1200" i="1">
                 <a:solidFill>
                   <a:srgbClr val="3D5466"/>
                 </a:solidFill>
                 <a:latin typeface="Arial"/>
               </a:rPr>
-              <a:t>Gesprächseinstieg nach SPIN :</a:t>
-            </a:r>
-          </a:p>
-          <a:p>
-            <a:pPr>
-              <a:spcBef>
-                <a:spcPts val="400"/>
-              </a:spcBef>
-              <a:spcAft>
-                <a:spcPts val="200"/>
-              </a:spcAft>
-            </a:pPr>
-            <a:r>
-              <a:rPr sz="1300">
-                <a:solidFill>
-                  <a:srgbClr val="3D5466"/>
-                </a:solidFill>
-                <a:latin typeface="Arial"/>
-              </a:rPr>
-              <a:t>▸  Situationsfrage: „Wie haben Sie aktuell Ihre Betriebsunterbrechungsrisiken abgesichert?"</a:t>
-            </a:r>
-          </a:p>
-          <a:p>
-            <a:pPr>
-              <a:spcBef>
-                <a:spcPts val="400"/>
-              </a:spcBef>
-              <a:spcAft>
-                <a:spcPts val="200"/>
-              </a:spcAft>
-            </a:pPr>
-            <a:r>
-              <a:rPr sz="1300">
-                <a:solidFill>
-                  <a:srgbClr val="3D5466"/>
-                </a:solidFill>
-                <a:latin typeface="Arial"/>
-              </a:rPr>
-              <a:t>▸  Problemfrage: „Gibt es Bereiche, bei denen Sie sich fragen, ob das ausreicht?"</a:t>
-            </a:r>
-          </a:p>
-          <a:p>
-            <a:pPr>
-              <a:spcBef>
-                <a:spcPts val="400"/>
-              </a:spcBef>
-              <a:spcAft>
-                <a:spcPts val="200"/>
-              </a:spcAft>
-            </a:pPr>
-            <a:r>
-              <a:rPr sz="1300">
-                <a:solidFill>
-                  <a:srgbClr val="3D5466"/>
-                </a:solidFill>
-                <a:latin typeface="Arial"/>
-              </a:rPr>
-              <a:t>▸  Implikationsfrage: „Was würde ein Ausfall von zwei Wochen für Ihren Betrieb bedeuten?"</a:t>
-            </a:r>
-          </a:p>
-          <a:p>
-            <a:pPr>
-              <a:spcBef>
-                <a:spcPts val="400"/>
-              </a:spcBef>
-              <a:spcAft>
-                <a:spcPts val="200"/>
-              </a:spcAft>
-            </a:pPr>
-            <a:r>
-              <a:rPr sz="1300">
-                <a:solidFill>
-                  <a:srgbClr val="3D5466"/>
-                </a:solidFill>
-                <a:latin typeface="Arial"/>
-              </a:rPr>
-              <a:t>▸  Nutzenfrage: „Was wäre für Sie die ideale Lösung, wenn das Risiko vollständig gedeckt wäre?"</a:t>
-            </a:r>
-          </a:p>
-          <a:p>
-            <a:pPr>
-              <a:spcBef>
-                <a:spcPts val="400"/>
-              </a:spcBef>
-              <a:spcAft>
-                <a:spcPts val="200"/>
-              </a:spcAft>
-            </a:pPr>
-            <a:r>
-              <a:rPr sz="1200">
-                <a:solidFill>
-                  <a:srgbClr val="3D5466"/>
-                </a:solidFill>
-                <a:latin typeface="Arial"/>
-              </a:rPr>
-              <a:t>Erst nach diesem Verlauf folgt der Produktvorschlag – oder die Einbeziehung des Verbundpartners.</a:t>
+              <a:t>→  „[Kunde] hat [Situation/Signal]. Ich vermute deshalb, dass er [Bedarf] hat – passend dazu wäre [Lösung/Verbundpartner]."</a:t>
             </a:r>
           </a:p>
         </p:txBody>
@@ -5527,7 +5433,7 @@
                 </a:solidFill>
                 <a:latin typeface="Source Serif 4"/>
               </a:rPr>
-              <a:t>Schritt 4: Dokumentation</a:t>
+              <a:t>Schritt 3: Gespräch</a:t>
             </a:r>
           </a:p>
         </p:txBody>
@@ -5563,13 +5469,13 @@
               </a:spcAft>
             </a:pPr>
             <a:r>
-              <a:rPr sz="1300">
+              <a:rPr sz="1200">
                 <a:solidFill>
                   <a:srgbClr val="3D5466"/>
                 </a:solidFill>
                 <a:latin typeface="Arial"/>
               </a:rPr>
-              <a:t>▸  Besprochene Bedarfsfelder</a:t>
+              <a:t>Das Cross-Selling-Gespräch ist kein Verkaufsgespräch. Es ist eine bedarfsgeleitete Gesprächserweiterung. Der Einstieg erfolgt über eine offene Frage zur Situation – nicht mit einem Produktvorschlag.</a:t>
             </a:r>
           </a:p>
           <a:p>
@@ -5582,13 +5488,13 @@
               </a:spcAft>
             </a:pPr>
             <a:r>
-              <a:rPr sz="1300">
+              <a:rPr sz="1200">
                 <a:solidFill>
                   <a:srgbClr val="3D5466"/>
                 </a:solidFill>
                 <a:latin typeface="Arial"/>
               </a:rPr>
-              <a:t>▸  Ergebnis (Abschluss / offen / kein Bedarf)</a:t>
+              <a:t>Gesprächseinstieg nach SPIN :</a:t>
             </a:r>
           </a:p>
           <a:p>
@@ -5607,7 +5513,7 @@
                 </a:solidFill>
                 <a:latin typeface="Arial"/>
               </a:rPr>
-              <a:t>▸  Nächste Schritte und Folgetermine</a:t>
+              <a:t>▸  Situationsfrage: „Wie haben Sie aktuell Ihre Betriebsunterbrechungsrisiken abgesichert?"</a:t>
             </a:r>
           </a:p>
           <a:p>
@@ -5626,7 +5532,7 @@
                 </a:solidFill>
                 <a:latin typeface="Arial"/>
               </a:rPr>
-              <a:t>▸  Verbundpartner-Übergabe (falls relevant)</a:t>
+              <a:t>▸  Problemfrage: „Gibt es Bereiche, bei denen Sie sich fragen, ob das ausreicht?"</a:t>
             </a:r>
           </a:p>
           <a:p>
@@ -5639,13 +5545,13 @@
               </a:spcAft>
             </a:pPr>
             <a:r>
-              <a:rPr sz="1200">
+              <a:rPr sz="1300">
                 <a:solidFill>
                   <a:srgbClr val="3D5466"/>
                 </a:solidFill>
                 <a:latin typeface="Arial"/>
               </a:rPr>
-              <a:t>## 4.4 Verbundpartner-Matrix</a:t>
+              <a:t>▸  Implikationsfrage: „Was würde ein Ausfall von zwei Wochen für Ihren Betrieb bedeuten?"</a:t>
             </a:r>
           </a:p>
           <a:p>
@@ -5658,13 +5564,13 @@
               </a:spcAft>
             </a:pPr>
             <a:r>
-              <a:rPr sz="1200">
+              <a:rPr sz="1300">
                 <a:solidFill>
                   <a:srgbClr val="3D5466"/>
                 </a:solidFill>
                 <a:latin typeface="Arial"/>
               </a:rPr>
-              <a:t>Die Stärke der VR-Bank liegt im Verbund. Welcher Verbundpartner ist für welches Bedarfsfeld relevant?</a:t>
+              <a:t>▸  Nutzenfrage: „Was wäre für Sie die ideale Lösung, wenn das Risiko vollständig gedeckt wäre?"</a:t>
             </a:r>
           </a:p>
           <a:p>
@@ -5683,102 +5589,7 @@
                 </a:solidFill>
                 <a:latin typeface="Arial"/>
               </a:rPr>
-              <a:t>## 4.5 Praxiscase: Vom Kreditgespräch zum Vollbankverbund</a:t>
-            </a:r>
-          </a:p>
-          <a:p>
-            <a:pPr>
-              <a:spcBef>
-                <a:spcPts val="400"/>
-              </a:spcBef>
-              <a:spcAft>
-                <a:spcPts val="200"/>
-              </a:spcAft>
-            </a:pPr>
-            <a:r>
-              <a:rPr sz="1200">
-                <a:solidFill>
-                  <a:srgbClr val="3D5466"/>
-                </a:solidFill>
-                <a:latin typeface="Arial"/>
-              </a:rPr>
-              <a:t>Ausgangssituation</a:t>
-            </a:r>
-          </a:p>
-          <a:p>
-            <a:pPr>
-              <a:spcBef>
-                <a:spcPts val="400"/>
-              </a:spcBef>
-              <a:spcAft>
-                <a:spcPts val="200"/>
-              </a:spcAft>
-            </a:pPr>
-            <a:r>
-              <a:rPr sz="1200">
-                <a:solidFill>
-                  <a:srgbClr val="3D5466"/>
-                </a:solidFill>
-                <a:latin typeface="Arial"/>
-              </a:rPr>
-              <a:t>Vor dem Jahresgespräch analysiert Markus den Kunden in agree:</a:t>
-            </a:r>
-          </a:p>
-          <a:p>
-            <a:pPr>
-              <a:spcBef>
-                <a:spcPts val="400"/>
-              </a:spcBef>
-              <a:spcAft>
-                <a:spcPts val="200"/>
-              </a:spcAft>
-            </a:pPr>
-            <a:r>
-              <a:rPr sz="1200">
-                <a:solidFill>
-                  <a:srgbClr val="3D5466"/>
-                </a:solidFill>
-                <a:latin typeface="Arial"/>
-              </a:rPr>
-              <a:t>Das Gespräch</a:t>
-            </a:r>
-          </a:p>
-          <a:p>
-            <a:pPr>
-              <a:spcBef>
-                <a:spcPts val="400"/>
-              </a:spcBef>
-              <a:spcAft>
-                <a:spcPts val="200"/>
-              </a:spcAft>
-            </a:pPr>
-            <a:r>
-              <a:rPr sz="1200">
-                <a:solidFill>
-                  <a:srgbClr val="3D5466"/>
-                </a:solidFill>
-                <a:latin typeface="Arial"/>
-              </a:rPr>
-              <a:t>„Sie hatten letztes Jahr den Ausfall der CNC-Anlage erwähnt. Wie haben Sie die zwei Wochen finanziell abgefedert?"</a:t>
-            </a:r>
-          </a:p>
-          <a:p>
-            <a:pPr>
-              <a:spcBef>
-                <a:spcPts val="400"/>
-              </a:spcBef>
-              <a:spcAft>
-                <a:spcPts val="200"/>
-              </a:spcAft>
-            </a:pPr>
-            <a:r>
-              <a:rPr sz="1200">
-                <a:solidFill>
-                  <a:srgbClr val="3D5466"/>
-                </a:solidFill>
-                <a:latin typeface="Arial"/>
-              </a:rPr>
-              <a:t>Der Kunde: „Ehrlich gesagt war das eng. Wir haben aus den Rücklagen überbrückt – aber das war ungeplant."</a:t>
+              <a:t>Erst nach diesem Verlauf folgt der Produktvorschlag – oder die Einbeziehung des Verbundpartners.</a:t>
             </a:r>
           </a:p>
         </p:txBody>
@@ -5894,7 +5705,7 @@
             <a:avLst/>
           </a:prstGeom>
           <a:solidFill>
-            <a:srgbClr val="FFFFFF"/>
+            <a:srgbClr val="EDEDF3"/>
           </a:solidFill>
           <a:ln>
             <a:noFill/>
@@ -5995,43 +5806,51 @@
                 </a:solidFill>
                 <a:latin typeface="JetBrains Mono"/>
               </a:rPr>
-              <a:t>M13  ·  SCHAUBILD</a:t>
-            </a:r>
-          </a:p>
-        </p:txBody>
-      </p:sp>
-      <p:sp>
-        <p:nvSpPr>
-          <p:cNvPr id="5" name="TextBox 4"/>
-          <p:cNvSpPr txBox="1"/>
-          <p:nvPr/>
-        </p:nvSpPr>
-        <p:spPr>
-          <a:xfrm>
-            <a:off x="685800" y="502920"/>
-            <a:ext cx="10817352" cy="594360"/>
-          </a:xfrm>
-          <a:prstGeom prst="rect">
-            <a:avLst/>
-          </a:prstGeom>
-          <a:noFill/>
-        </p:spPr>
-        <p:txBody>
-          <a:bodyPr wrap="square">
-            <a:spAutoFit/>
-          </a:bodyPr>
-          <a:lstStyle/>
-          <a:p>
-            <a:pPr algn="l"/>
-            <a:r>
-              <a:rPr sz="2000" b="1" i="0">
-                <a:solidFill>
-                  <a:srgbClr val="1F2C56"/>
-                </a:solidFill>
-                <a:latin typeface="Source Serif 4"/>
-              </a:rPr>
-              <a:t>Verbundpartner-Matrix</a:t>
-            </a:r>
+              <a:t>M13  ·  INHALT</a:t>
+            </a:r>
+          </a:p>
+        </p:txBody>
+      </p:sp>
+      <p:sp>
+        <p:nvSpPr>
+          <p:cNvPr id="5" name="Rectangle 4"/>
+          <p:cNvSpPr/>
+          <p:nvPr/>
+        </p:nvSpPr>
+        <p:spPr>
+          <a:xfrm>
+            <a:off x="0" y="1234440"/>
+            <a:ext cx="12188952" cy="12700"/>
+          </a:xfrm>
+          <a:prstGeom prst="rect">
+            <a:avLst/>
+          </a:prstGeom>
+          <a:solidFill>
+            <a:srgbClr val="D8DFE4"/>
+          </a:solidFill>
+          <a:ln>
+            <a:noFill/>
+          </a:ln>
+        </p:spPr>
+        <p:style>
+          <a:lnRef idx="1">
+            <a:schemeClr val="accent1"/>
+          </a:lnRef>
+          <a:fillRef idx="3">
+            <a:schemeClr val="accent1"/>
+          </a:fillRef>
+          <a:effectRef idx="2">
+            <a:schemeClr val="accent1"/>
+          </a:effectRef>
+          <a:fontRef idx="minor">
+            <a:schemeClr val="lt1"/>
+          </a:fontRef>
+        </p:style>
+        <p:txBody>
+          <a:bodyPr rtlCol="0" anchor="ctr"/>
+          <a:lstStyle/>
+          <a:p>
+            <a:pPr algn="ctr"/>
           </a:p>
         </p:txBody>
       </p:sp>
@@ -6043,8 +5862,8 @@
         </p:nvSpPr>
         <p:spPr>
           <a:xfrm>
-            <a:off x="685800" y="1143000"/>
-            <a:ext cx="10817352" cy="25400"/>
+            <a:off x="685800" y="502920"/>
+            <a:ext cx="36576" cy="658368"/>
           </a:xfrm>
           <a:prstGeom prst="rect">
             <a:avLst/>
@@ -6078,33 +5897,295 @@
           </a:p>
         </p:txBody>
       </p:sp>
-      <p:pic>
-        <p:nvPicPr>
-          <p:cNvPr id="7" name="Picture 6" descr="image.png"/>
-          <p:cNvPicPr>
-            <a:picLocks noChangeAspect="1"/>
-          </p:cNvPicPr>
-          <p:nvPr/>
-        </p:nvPicPr>
-        <p:blipFill>
-          <a:blip r:embed="rId2"/>
-          <a:stretch>
-            <a:fillRect/>
-          </a:stretch>
-        </p:blipFill>
-        <p:spPr>
-          <a:xfrm>
-            <a:off x="2433486" y="1325880"/>
-            <a:ext cx="7321979" cy="4937760"/>
-          </a:xfrm>
-          <a:prstGeom prst="rect">
-            <a:avLst/>
-          </a:prstGeom>
-        </p:spPr>
-      </p:pic>
-      <p:sp>
-        <p:nvSpPr>
-          <p:cNvPr id="8" name="Rectangle 7"/>
+      <p:sp>
+        <p:nvSpPr>
+          <p:cNvPr id="7" name="TextBox 6"/>
+          <p:cNvSpPr txBox="1"/>
+          <p:nvPr/>
+        </p:nvSpPr>
+        <p:spPr>
+          <a:xfrm>
+            <a:off x="813816" y="502920"/>
+            <a:ext cx="10634472" cy="685800"/>
+          </a:xfrm>
+          <a:prstGeom prst="rect">
+            <a:avLst/>
+          </a:prstGeom>
+          <a:noFill/>
+        </p:spPr>
+        <p:txBody>
+          <a:bodyPr wrap="square">
+            <a:spAutoFit/>
+          </a:bodyPr>
+          <a:lstStyle/>
+          <a:p>
+            <a:pPr algn="l"/>
+            <a:r>
+              <a:rPr sz="2400" b="1" i="0">
+                <a:solidFill>
+                  <a:srgbClr val="1F2C56"/>
+                </a:solidFill>
+                <a:latin typeface="Source Serif 4"/>
+              </a:rPr>
+              <a:t>Schritt 4: Dokumentation</a:t>
+            </a:r>
+          </a:p>
+        </p:txBody>
+      </p:sp>
+      <p:sp>
+        <p:nvSpPr>
+          <p:cNvPr id="8" name="TextBox 7"/>
+          <p:cNvSpPr txBox="1"/>
+          <p:nvPr/>
+        </p:nvSpPr>
+        <p:spPr>
+          <a:xfrm>
+            <a:off x="685800" y="1417320"/>
+            <a:ext cx="10817352" cy="5029200"/>
+          </a:xfrm>
+          <a:prstGeom prst="rect">
+            <a:avLst/>
+          </a:prstGeom>
+          <a:noFill/>
+        </p:spPr>
+        <p:txBody>
+          <a:bodyPr wrap="square">
+            <a:spAutoFit/>
+          </a:bodyPr>
+          <a:lstStyle/>
+          <a:p>
+            <a:pPr>
+              <a:spcBef>
+                <a:spcPts val="400"/>
+              </a:spcBef>
+              <a:spcAft>
+                <a:spcPts val="200"/>
+              </a:spcAft>
+            </a:pPr>
+            <a:r>
+              <a:rPr sz="1300">
+                <a:solidFill>
+                  <a:srgbClr val="3D5466"/>
+                </a:solidFill>
+                <a:latin typeface="Arial"/>
+              </a:rPr>
+              <a:t>▸  Besprochene Bedarfsfelder</a:t>
+            </a:r>
+          </a:p>
+          <a:p>
+            <a:pPr>
+              <a:spcBef>
+                <a:spcPts val="400"/>
+              </a:spcBef>
+              <a:spcAft>
+                <a:spcPts val="200"/>
+              </a:spcAft>
+            </a:pPr>
+            <a:r>
+              <a:rPr sz="1300">
+                <a:solidFill>
+                  <a:srgbClr val="3D5466"/>
+                </a:solidFill>
+                <a:latin typeface="Arial"/>
+              </a:rPr>
+              <a:t>▸  Ergebnis (Abschluss / offen / kein Bedarf)</a:t>
+            </a:r>
+          </a:p>
+          <a:p>
+            <a:pPr>
+              <a:spcBef>
+                <a:spcPts val="400"/>
+              </a:spcBef>
+              <a:spcAft>
+                <a:spcPts val="200"/>
+              </a:spcAft>
+            </a:pPr>
+            <a:r>
+              <a:rPr sz="1300">
+                <a:solidFill>
+                  <a:srgbClr val="3D5466"/>
+                </a:solidFill>
+                <a:latin typeface="Arial"/>
+              </a:rPr>
+              <a:t>▸  Nächste Schritte und Folgetermine</a:t>
+            </a:r>
+          </a:p>
+          <a:p>
+            <a:pPr>
+              <a:spcBef>
+                <a:spcPts val="400"/>
+              </a:spcBef>
+              <a:spcAft>
+                <a:spcPts val="200"/>
+              </a:spcAft>
+            </a:pPr>
+            <a:r>
+              <a:rPr sz="1300">
+                <a:solidFill>
+                  <a:srgbClr val="3D5466"/>
+                </a:solidFill>
+                <a:latin typeface="Arial"/>
+              </a:rPr>
+              <a:t>▸  Verbundpartner-Übergabe (falls relevant)</a:t>
+            </a:r>
+          </a:p>
+          <a:p>
+            <a:pPr>
+              <a:spcBef>
+                <a:spcPts val="400"/>
+              </a:spcBef>
+              <a:spcAft>
+                <a:spcPts val="200"/>
+              </a:spcAft>
+            </a:pPr>
+            <a:r>
+              <a:rPr sz="1200">
+                <a:solidFill>
+                  <a:srgbClr val="3D5466"/>
+                </a:solidFill>
+                <a:latin typeface="Arial"/>
+              </a:rPr>
+              <a:t>## 4.4 Verbundpartner-Matrix</a:t>
+            </a:r>
+          </a:p>
+          <a:p>
+            <a:pPr>
+              <a:spcBef>
+                <a:spcPts val="400"/>
+              </a:spcBef>
+              <a:spcAft>
+                <a:spcPts val="200"/>
+              </a:spcAft>
+            </a:pPr>
+            <a:r>
+              <a:rPr sz="1200">
+                <a:solidFill>
+                  <a:srgbClr val="3D5466"/>
+                </a:solidFill>
+                <a:latin typeface="Arial"/>
+              </a:rPr>
+              <a:t>Die Stärke der VR-Bank liegt im Verbund. Welcher Verbundpartner ist für welches Bedarfsfeld relevant?</a:t>
+            </a:r>
+          </a:p>
+          <a:p>
+            <a:pPr>
+              <a:spcBef>
+                <a:spcPts val="400"/>
+              </a:spcBef>
+              <a:spcAft>
+                <a:spcPts val="200"/>
+              </a:spcAft>
+            </a:pPr>
+            <a:r>
+              <a:rPr sz="1200">
+                <a:solidFill>
+                  <a:srgbClr val="3D5466"/>
+                </a:solidFill>
+                <a:latin typeface="Arial"/>
+              </a:rPr>
+              <a:t>## 4.5 Praxiscase: Vom Kreditgespräch zum Vollbankverbund</a:t>
+            </a:r>
+          </a:p>
+          <a:p>
+            <a:pPr>
+              <a:spcBef>
+                <a:spcPts val="400"/>
+              </a:spcBef>
+              <a:spcAft>
+                <a:spcPts val="200"/>
+              </a:spcAft>
+            </a:pPr>
+            <a:r>
+              <a:rPr sz="1200">
+                <a:solidFill>
+                  <a:srgbClr val="3D5466"/>
+                </a:solidFill>
+                <a:latin typeface="Arial"/>
+              </a:rPr>
+              <a:t>Ausgangssituation</a:t>
+            </a:r>
+          </a:p>
+          <a:p>
+            <a:pPr>
+              <a:spcBef>
+                <a:spcPts val="400"/>
+              </a:spcBef>
+              <a:spcAft>
+                <a:spcPts val="200"/>
+              </a:spcAft>
+            </a:pPr>
+            <a:r>
+              <a:rPr sz="1200">
+                <a:solidFill>
+                  <a:srgbClr val="3D5466"/>
+                </a:solidFill>
+                <a:latin typeface="Arial"/>
+              </a:rPr>
+              <a:t>Vor dem Jahresgespräch analysiert Markus den Kunden in agree:</a:t>
+            </a:r>
+          </a:p>
+          <a:p>
+            <a:pPr>
+              <a:spcBef>
+                <a:spcPts val="400"/>
+              </a:spcBef>
+              <a:spcAft>
+                <a:spcPts val="200"/>
+              </a:spcAft>
+            </a:pPr>
+            <a:r>
+              <a:rPr sz="1200">
+                <a:solidFill>
+                  <a:srgbClr val="3D5466"/>
+                </a:solidFill>
+                <a:latin typeface="Arial"/>
+              </a:rPr>
+              <a:t>Das Gespräch</a:t>
+            </a:r>
+          </a:p>
+          <a:p>
+            <a:pPr>
+              <a:spcBef>
+                <a:spcPts val="400"/>
+              </a:spcBef>
+              <a:spcAft>
+                <a:spcPts val="200"/>
+              </a:spcAft>
+            </a:pPr>
+            <a:r>
+              <a:rPr sz="1200">
+                <a:solidFill>
+                  <a:srgbClr val="3D5466"/>
+                </a:solidFill>
+                <a:latin typeface="Arial"/>
+              </a:rPr>
+              <a:t>„Sie hatten letztes Jahr den Ausfall der CNC-Anlage erwähnt. Wie haben Sie die zwei Wochen finanziell abgefedert?"</a:t>
+            </a:r>
+          </a:p>
+          <a:p>
+            <a:pPr>
+              <a:spcBef>
+                <a:spcPts val="400"/>
+              </a:spcBef>
+              <a:spcAft>
+                <a:spcPts val="200"/>
+              </a:spcAft>
+            </a:pPr>
+            <a:r>
+              <a:rPr sz="1200">
+                <a:solidFill>
+                  <a:srgbClr val="3D5466"/>
+                </a:solidFill>
+                <a:latin typeface="Arial"/>
+              </a:rPr>
+              <a:t>Der Kunde: „Ehrlich gesagt war das eng. Wir haben aus den Rücklagen überbrückt – aber das war ungeplant."</a:t>
+            </a:r>
+          </a:p>
+        </p:txBody>
+      </p:sp>
+      <p:sp>
+        <p:nvSpPr>
+          <p:cNvPr id="9" name="Rectangle 8"/>
           <p:cNvSpPr/>
           <p:nvPr/>
         </p:nvSpPr>
@@ -6147,7 +6228,7 @@
       </p:sp>
       <p:sp>
         <p:nvSpPr>
-          <p:cNvPr id="9" name="TextBox 8"/>
+          <p:cNvPr id="10" name="TextBox 9"/>
           <p:cNvSpPr txBox="1"/>
           <p:nvPr/>
         </p:nvSpPr>
@@ -6176,41 +6257,6 @@
                 <a:latin typeface="JetBrains Mono"/>
               </a:rPr>
               <a:t>Benedikt Zoller Coaching  ·  FKB Campus  ·  M13</a:t>
-            </a:r>
-          </a:p>
-        </p:txBody>
-      </p:sp>
-      <p:sp>
-        <p:nvSpPr>
-          <p:cNvPr id="10" name="TextBox 9"/>
-          <p:cNvSpPr txBox="1"/>
-          <p:nvPr/>
-        </p:nvSpPr>
-        <p:spPr>
-          <a:xfrm>
-            <a:off x="7176211" y="6583680"/>
-            <a:ext cx="4326940" cy="256032"/>
-          </a:xfrm>
-          <a:prstGeom prst="rect">
-            <a:avLst/>
-          </a:prstGeom>
-          <a:noFill/>
-        </p:spPr>
-        <p:txBody>
-          <a:bodyPr wrap="none">
-            <a:spAutoFit/>
-          </a:bodyPr>
-          <a:lstStyle/>
-          <a:p>
-            <a:pPr algn="r"/>
-            <a:r>
-              <a:rPr sz="700">
-                <a:solidFill>
-                  <a:srgbClr val="A0B4D2"/>
-                </a:solidFill>
-                <a:latin typeface="JetBrains Mono"/>
-              </a:rPr>
-              <a:t>Schaubild</a:t>
             </a:r>
           </a:p>
         </p:txBody>
@@ -6248,7 +6294,7 @@
             <a:avLst/>
           </a:prstGeom>
           <a:solidFill>
-            <a:srgbClr val="EDEDF3"/>
+            <a:srgbClr val="FFFFFF"/>
           </a:solidFill>
           <a:ln>
             <a:noFill/>
@@ -6349,51 +6395,43 @@
                 </a:solidFill>
                 <a:latin typeface="JetBrains Mono"/>
               </a:rPr>
-              <a:t>M13  ·  INHALT</a:t>
-            </a:r>
-          </a:p>
-        </p:txBody>
-      </p:sp>
-      <p:sp>
-        <p:nvSpPr>
-          <p:cNvPr id="5" name="Rectangle 4"/>
-          <p:cNvSpPr/>
-          <p:nvPr/>
-        </p:nvSpPr>
-        <p:spPr>
-          <a:xfrm>
-            <a:off x="0" y="1234440"/>
-            <a:ext cx="12188952" cy="12700"/>
-          </a:xfrm>
-          <a:prstGeom prst="rect">
-            <a:avLst/>
-          </a:prstGeom>
-          <a:solidFill>
-            <a:srgbClr val="D8DFE4"/>
-          </a:solidFill>
-          <a:ln>
-            <a:noFill/>
-          </a:ln>
-        </p:spPr>
-        <p:style>
-          <a:lnRef idx="1">
-            <a:schemeClr val="accent1"/>
-          </a:lnRef>
-          <a:fillRef idx="3">
-            <a:schemeClr val="accent1"/>
-          </a:fillRef>
-          <a:effectRef idx="2">
-            <a:schemeClr val="accent1"/>
-          </a:effectRef>
-          <a:fontRef idx="minor">
-            <a:schemeClr val="lt1"/>
-          </a:fontRef>
-        </p:style>
-        <p:txBody>
-          <a:bodyPr rtlCol="0" anchor="ctr"/>
-          <a:lstStyle/>
-          <a:p>
-            <a:pPr algn="ctr"/>
+              <a:t>M13  ·  SCHAUBILD</a:t>
+            </a:r>
+          </a:p>
+        </p:txBody>
+      </p:sp>
+      <p:sp>
+        <p:nvSpPr>
+          <p:cNvPr id="5" name="TextBox 4"/>
+          <p:cNvSpPr txBox="1"/>
+          <p:nvPr/>
+        </p:nvSpPr>
+        <p:spPr>
+          <a:xfrm>
+            <a:off x="685800" y="502920"/>
+            <a:ext cx="10817352" cy="594360"/>
+          </a:xfrm>
+          <a:prstGeom prst="rect">
+            <a:avLst/>
+          </a:prstGeom>
+          <a:noFill/>
+        </p:spPr>
+        <p:txBody>
+          <a:bodyPr wrap="square">
+            <a:spAutoFit/>
+          </a:bodyPr>
+          <a:lstStyle/>
+          <a:p>
+            <a:pPr algn="l"/>
+            <a:r>
+              <a:rPr sz="2000" b="1" i="0">
+                <a:solidFill>
+                  <a:srgbClr val="1F2C56"/>
+                </a:solidFill>
+                <a:latin typeface="Source Serif 4"/>
+              </a:rPr>
+              <a:t>Verbundpartner-Matrix</a:t>
+            </a:r>
           </a:p>
         </p:txBody>
       </p:sp>
@@ -6405,8 +6443,8 @@
         </p:nvSpPr>
         <p:spPr>
           <a:xfrm>
-            <a:off x="685800" y="502920"/>
-            <a:ext cx="36576" cy="658368"/>
+            <a:off x="685800" y="1143000"/>
+            <a:ext cx="10817352" cy="25400"/>
           </a:xfrm>
           <a:prstGeom prst="rect">
             <a:avLst/>
@@ -6440,86 +6478,33 @@
           </a:p>
         </p:txBody>
       </p:sp>
-      <p:sp>
-        <p:nvSpPr>
-          <p:cNvPr id="7" name="TextBox 6"/>
-          <p:cNvSpPr txBox="1"/>
-          <p:nvPr/>
-        </p:nvSpPr>
-        <p:spPr>
-          <a:xfrm>
-            <a:off x="813816" y="502920"/>
-            <a:ext cx="10634472" cy="685800"/>
-          </a:xfrm>
-          <a:prstGeom prst="rect">
-            <a:avLst/>
-          </a:prstGeom>
-          <a:noFill/>
-        </p:spPr>
-        <p:txBody>
-          <a:bodyPr wrap="square">
-            <a:spAutoFit/>
-          </a:bodyPr>
-          <a:lstStyle/>
-          <a:p>
-            <a:pPr algn="l"/>
-            <a:r>
-              <a:rPr sz="2400" b="1" i="0">
-                <a:solidFill>
-                  <a:srgbClr val="1F2C56"/>
-                </a:solidFill>
-                <a:latin typeface="Source Serif 4"/>
-              </a:rPr>
-              <a:t>Arbeitsblatt A: Wallet-Share-Analyse</a:t>
-            </a:r>
-          </a:p>
-        </p:txBody>
-      </p:sp>
-      <p:sp>
-        <p:nvSpPr>
-          <p:cNvPr id="8" name="TextBox 7"/>
-          <p:cNvSpPr txBox="1"/>
-          <p:nvPr/>
-        </p:nvSpPr>
-        <p:spPr>
-          <a:xfrm>
-            <a:off x="685800" y="1417320"/>
-            <a:ext cx="10817352" cy="5029200"/>
-          </a:xfrm>
-          <a:prstGeom prst="rect">
-            <a:avLst/>
-          </a:prstGeom>
-          <a:noFill/>
-        </p:spPr>
-        <p:txBody>
-          <a:bodyPr wrap="square">
-            <a:spAutoFit/>
-          </a:bodyPr>
-          <a:lstStyle/>
-          <a:p>
-            <a:pPr>
-              <a:spcBef>
-                <a:spcPts val="400"/>
-              </a:spcBef>
-              <a:spcAft>
-                <a:spcPts val="200"/>
-              </a:spcAft>
-            </a:pPr>
-            <a:r>
-              <a:rPr sz="1200">
-                <a:solidFill>
-                  <a:srgbClr val="3D5466"/>
-                </a:solidFill>
-                <a:latin typeface="Arial"/>
-              </a:rPr>
-              <a:t>Meine Top-2 Cross-Selling-Hypothesen für diesen Kunden:</a:t>
-            </a:r>
-          </a:p>
-        </p:txBody>
-      </p:sp>
-      <p:sp>
-        <p:nvSpPr>
-          <p:cNvPr id="9" name="Rectangle 8"/>
+      <p:pic>
+        <p:nvPicPr>
+          <p:cNvPr id="7" name="Picture 6" descr="image.png"/>
+          <p:cNvPicPr>
+            <a:picLocks noChangeAspect="1"/>
+          </p:cNvPicPr>
+          <p:nvPr/>
+        </p:nvPicPr>
+        <p:blipFill>
+          <a:blip r:embed="rId2"/>
+          <a:stretch>
+            <a:fillRect/>
+          </a:stretch>
+        </p:blipFill>
+        <p:spPr>
+          <a:xfrm>
+            <a:off x="2433486" y="1325880"/>
+            <a:ext cx="7321979" cy="4937760"/>
+          </a:xfrm>
+          <a:prstGeom prst="rect">
+            <a:avLst/>
+          </a:prstGeom>
+        </p:spPr>
+      </p:pic>
+      <p:sp>
+        <p:nvSpPr>
+          <p:cNvPr id="8" name="Rectangle 7"/>
           <p:cNvSpPr/>
           <p:nvPr/>
         </p:nvSpPr>
@@ -6562,7 +6547,7 @@
       </p:sp>
       <p:sp>
         <p:nvSpPr>
-          <p:cNvPr id="10" name="TextBox 9"/>
+          <p:cNvPr id="9" name="TextBox 8"/>
           <p:cNvSpPr txBox="1"/>
           <p:nvPr/>
         </p:nvSpPr>
@@ -6591,6 +6576,41 @@
                 <a:latin typeface="JetBrains Mono"/>
               </a:rPr>
               <a:t>Benedikt Zoller Coaching  ·  FKB Campus  ·  M13</a:t>
+            </a:r>
+          </a:p>
+        </p:txBody>
+      </p:sp>
+      <p:sp>
+        <p:nvSpPr>
+          <p:cNvPr id="10" name="TextBox 9"/>
+          <p:cNvSpPr txBox="1"/>
+          <p:nvPr/>
+        </p:nvSpPr>
+        <p:spPr>
+          <a:xfrm>
+            <a:off x="7176211" y="6583680"/>
+            <a:ext cx="4326940" cy="256032"/>
+          </a:xfrm>
+          <a:prstGeom prst="rect">
+            <a:avLst/>
+          </a:prstGeom>
+          <a:noFill/>
+        </p:spPr>
+        <p:txBody>
+          <a:bodyPr wrap="none">
+            <a:spAutoFit/>
+          </a:bodyPr>
+          <a:lstStyle/>
+          <a:p>
+            <a:pPr algn="r"/>
+            <a:r>
+              <a:rPr sz="700">
+                <a:solidFill>
+                  <a:srgbClr val="A0B4D2"/>
+                </a:solidFill>
+                <a:latin typeface="JetBrains Mono"/>
+              </a:rPr>
+              <a:t>Schaubild</a:t>
             </a:r>
           </a:p>
         </p:txBody>
@@ -6850,6 +6870,386 @@
                 </a:solidFill>
                 <a:latin typeface="Source Serif 4"/>
               </a:rPr>
+              <a:t>Arbeitsblatt A: Wallet-Share-Analyse</a:t>
+            </a:r>
+          </a:p>
+        </p:txBody>
+      </p:sp>
+      <p:sp>
+        <p:nvSpPr>
+          <p:cNvPr id="8" name="TextBox 7"/>
+          <p:cNvSpPr txBox="1"/>
+          <p:nvPr/>
+        </p:nvSpPr>
+        <p:spPr>
+          <a:xfrm>
+            <a:off x="685800" y="1417320"/>
+            <a:ext cx="10817352" cy="5029200"/>
+          </a:xfrm>
+          <a:prstGeom prst="rect">
+            <a:avLst/>
+          </a:prstGeom>
+          <a:noFill/>
+        </p:spPr>
+        <p:txBody>
+          <a:bodyPr wrap="square">
+            <a:spAutoFit/>
+          </a:bodyPr>
+          <a:lstStyle/>
+          <a:p>
+            <a:pPr>
+              <a:spcBef>
+                <a:spcPts val="400"/>
+              </a:spcBef>
+              <a:spcAft>
+                <a:spcPts val="200"/>
+              </a:spcAft>
+            </a:pPr>
+            <a:r>
+              <a:rPr sz="1200">
+                <a:solidFill>
+                  <a:srgbClr val="3D5466"/>
+                </a:solidFill>
+                <a:latin typeface="Arial"/>
+              </a:rPr>
+              <a:t>Meine Top-2 Cross-Selling-Hypothesen für diesen Kunden:</a:t>
+            </a:r>
+          </a:p>
+        </p:txBody>
+      </p:sp>
+      <p:sp>
+        <p:nvSpPr>
+          <p:cNvPr id="9" name="Rectangle 8"/>
+          <p:cNvSpPr/>
+          <p:nvPr/>
+        </p:nvSpPr>
+        <p:spPr>
+          <a:xfrm>
+            <a:off x="0" y="6510528"/>
+            <a:ext cx="12188952" cy="347472"/>
+          </a:xfrm>
+          <a:prstGeom prst="rect">
+            <a:avLst/>
+          </a:prstGeom>
+          <a:solidFill>
+            <a:srgbClr val="0A1937"/>
+          </a:solidFill>
+          <a:ln>
+            <a:noFill/>
+          </a:ln>
+        </p:spPr>
+        <p:style>
+          <a:lnRef idx="1">
+            <a:schemeClr val="accent1"/>
+          </a:lnRef>
+          <a:fillRef idx="3">
+            <a:schemeClr val="accent1"/>
+          </a:fillRef>
+          <a:effectRef idx="2">
+            <a:schemeClr val="accent1"/>
+          </a:effectRef>
+          <a:fontRef idx="minor">
+            <a:schemeClr val="lt1"/>
+          </a:fontRef>
+        </p:style>
+        <p:txBody>
+          <a:bodyPr rtlCol="0" anchor="ctr"/>
+          <a:lstStyle/>
+          <a:p>
+            <a:pPr algn="ctr"/>
+          </a:p>
+        </p:txBody>
+      </p:sp>
+      <p:sp>
+        <p:nvSpPr>
+          <p:cNvPr id="10" name="TextBox 9"/>
+          <p:cNvSpPr txBox="1"/>
+          <p:nvPr/>
+        </p:nvSpPr>
+        <p:spPr>
+          <a:xfrm>
+            <a:off x="685800" y="6583680"/>
+            <a:ext cx="6490411" cy="256032"/>
+          </a:xfrm>
+          <a:prstGeom prst="rect">
+            <a:avLst/>
+          </a:prstGeom>
+          <a:noFill/>
+        </p:spPr>
+        <p:txBody>
+          <a:bodyPr wrap="none">
+            <a:spAutoFit/>
+          </a:bodyPr>
+          <a:lstStyle/>
+          <a:p>
+            <a:pPr algn="l"/>
+            <a:r>
+              <a:rPr sz="700">
+                <a:solidFill>
+                  <a:srgbClr val="A0B4D2"/>
+                </a:solidFill>
+                <a:latin typeface="JetBrains Mono"/>
+              </a:rPr>
+              <a:t>Benedikt Zoller Coaching  ·  FKB Campus  ·  M13</a:t>
+            </a:r>
+          </a:p>
+        </p:txBody>
+      </p:sp>
+    </p:spTree>
+  </p:cSld>
+  <p:clrMapOvr>
+    <a:masterClrMapping/>
+  </p:clrMapOvr>
+</p:sld>
+</file>
+
+<file path=ppt/slides/slide15.xml><?xml version="1.0" encoding="utf-8"?>
+<p:sld xmlns:a="http://schemas.openxmlformats.org/drawingml/2006/main" xmlns:p="http://schemas.openxmlformats.org/presentationml/2006/main" xmlns:r="http://schemas.openxmlformats.org/officeDocument/2006/relationships">
+  <p:cSld>
+    <p:spTree>
+      <p:nvGrpSpPr>
+        <p:cNvPr id="1" name=""/>
+        <p:cNvGrpSpPr/>
+        <p:nvPr/>
+      </p:nvGrpSpPr>
+      <p:grpSpPr/>
+      <p:sp>
+        <p:nvSpPr>
+          <p:cNvPr id="2" name="Rectangle 1"/>
+          <p:cNvSpPr/>
+          <p:nvPr/>
+        </p:nvSpPr>
+        <p:spPr>
+          <a:xfrm>
+            <a:off x="0" y="0"/>
+            <a:ext cx="12188952" cy="6858000"/>
+          </a:xfrm>
+          <a:prstGeom prst="rect">
+            <a:avLst/>
+          </a:prstGeom>
+          <a:solidFill>
+            <a:srgbClr val="EDEDF3"/>
+          </a:solidFill>
+          <a:ln>
+            <a:noFill/>
+          </a:ln>
+        </p:spPr>
+        <p:style>
+          <a:lnRef idx="1">
+            <a:schemeClr val="accent1"/>
+          </a:lnRef>
+          <a:fillRef idx="3">
+            <a:schemeClr val="accent1"/>
+          </a:fillRef>
+          <a:effectRef idx="2">
+            <a:schemeClr val="accent1"/>
+          </a:effectRef>
+          <a:fontRef idx="minor">
+            <a:schemeClr val="lt1"/>
+          </a:fontRef>
+        </p:style>
+        <p:txBody>
+          <a:bodyPr rtlCol="0" anchor="ctr"/>
+          <a:lstStyle/>
+          <a:p>
+            <a:pPr algn="ctr"/>
+          </a:p>
+        </p:txBody>
+      </p:sp>
+      <p:sp>
+        <p:nvSpPr>
+          <p:cNvPr id="3" name="Rectangle 2"/>
+          <p:cNvSpPr/>
+          <p:nvPr/>
+        </p:nvSpPr>
+        <p:spPr>
+          <a:xfrm>
+            <a:off x="0" y="0"/>
+            <a:ext cx="12188952" cy="50292"/>
+          </a:xfrm>
+          <a:prstGeom prst="rect">
+            <a:avLst/>
+          </a:prstGeom>
+          <a:solidFill>
+            <a:srgbClr val="1F2C56"/>
+          </a:solidFill>
+          <a:ln>
+            <a:noFill/>
+          </a:ln>
+        </p:spPr>
+        <p:style>
+          <a:lnRef idx="1">
+            <a:schemeClr val="accent1"/>
+          </a:lnRef>
+          <a:fillRef idx="3">
+            <a:schemeClr val="accent1"/>
+          </a:fillRef>
+          <a:effectRef idx="2">
+            <a:schemeClr val="accent1"/>
+          </a:effectRef>
+          <a:fontRef idx="minor">
+            <a:schemeClr val="lt1"/>
+          </a:fontRef>
+        </p:style>
+        <p:txBody>
+          <a:bodyPr rtlCol="0" anchor="ctr"/>
+          <a:lstStyle/>
+          <a:p>
+            <a:pPr algn="ctr"/>
+          </a:p>
+        </p:txBody>
+      </p:sp>
+      <p:sp>
+        <p:nvSpPr>
+          <p:cNvPr id="4" name="TextBox 3"/>
+          <p:cNvSpPr txBox="1"/>
+          <p:nvPr/>
+        </p:nvSpPr>
+        <p:spPr>
+          <a:xfrm>
+            <a:off x="685800" y="109728"/>
+            <a:ext cx="10817352" cy="228600"/>
+          </a:xfrm>
+          <a:prstGeom prst="rect">
+            <a:avLst/>
+          </a:prstGeom>
+          <a:noFill/>
+        </p:spPr>
+        <p:txBody>
+          <a:bodyPr wrap="none">
+            <a:spAutoFit/>
+          </a:bodyPr>
+          <a:lstStyle/>
+          <a:p>
+            <a:pPr algn="l"/>
+            <a:r>
+              <a:rPr sz="750">
+                <a:solidFill>
+                  <a:srgbClr val="78808C"/>
+                </a:solidFill>
+                <a:latin typeface="JetBrains Mono"/>
+              </a:rPr>
+              <a:t>M13  ·  INHALT</a:t>
+            </a:r>
+          </a:p>
+        </p:txBody>
+      </p:sp>
+      <p:sp>
+        <p:nvSpPr>
+          <p:cNvPr id="5" name="Rectangle 4"/>
+          <p:cNvSpPr/>
+          <p:nvPr/>
+        </p:nvSpPr>
+        <p:spPr>
+          <a:xfrm>
+            <a:off x="0" y="1234440"/>
+            <a:ext cx="12188952" cy="12700"/>
+          </a:xfrm>
+          <a:prstGeom prst="rect">
+            <a:avLst/>
+          </a:prstGeom>
+          <a:solidFill>
+            <a:srgbClr val="D8DFE4"/>
+          </a:solidFill>
+          <a:ln>
+            <a:noFill/>
+          </a:ln>
+        </p:spPr>
+        <p:style>
+          <a:lnRef idx="1">
+            <a:schemeClr val="accent1"/>
+          </a:lnRef>
+          <a:fillRef idx="3">
+            <a:schemeClr val="accent1"/>
+          </a:fillRef>
+          <a:effectRef idx="2">
+            <a:schemeClr val="accent1"/>
+          </a:effectRef>
+          <a:fontRef idx="minor">
+            <a:schemeClr val="lt1"/>
+          </a:fontRef>
+        </p:style>
+        <p:txBody>
+          <a:bodyPr rtlCol="0" anchor="ctr"/>
+          <a:lstStyle/>
+          <a:p>
+            <a:pPr algn="ctr"/>
+          </a:p>
+        </p:txBody>
+      </p:sp>
+      <p:sp>
+        <p:nvSpPr>
+          <p:cNvPr id="6" name="Rectangle 5"/>
+          <p:cNvSpPr/>
+          <p:nvPr/>
+        </p:nvSpPr>
+        <p:spPr>
+          <a:xfrm>
+            <a:off x="685800" y="502920"/>
+            <a:ext cx="36576" cy="658368"/>
+          </a:xfrm>
+          <a:prstGeom prst="rect">
+            <a:avLst/>
+          </a:prstGeom>
+          <a:solidFill>
+            <a:srgbClr val="D9C089"/>
+          </a:solidFill>
+          <a:ln>
+            <a:noFill/>
+          </a:ln>
+        </p:spPr>
+        <p:style>
+          <a:lnRef idx="1">
+            <a:schemeClr val="accent1"/>
+          </a:lnRef>
+          <a:fillRef idx="3">
+            <a:schemeClr val="accent1"/>
+          </a:fillRef>
+          <a:effectRef idx="2">
+            <a:schemeClr val="accent1"/>
+          </a:effectRef>
+          <a:fontRef idx="minor">
+            <a:schemeClr val="lt1"/>
+          </a:fontRef>
+        </p:style>
+        <p:txBody>
+          <a:bodyPr rtlCol="0" anchor="ctr"/>
+          <a:lstStyle/>
+          <a:p>
+            <a:pPr algn="ctr"/>
+          </a:p>
+        </p:txBody>
+      </p:sp>
+      <p:sp>
+        <p:nvSpPr>
+          <p:cNvPr id="7" name="TextBox 6"/>
+          <p:cNvSpPr txBox="1"/>
+          <p:nvPr/>
+        </p:nvSpPr>
+        <p:spPr>
+          <a:xfrm>
+            <a:off x="813816" y="502920"/>
+            <a:ext cx="10634472" cy="685800"/>
+          </a:xfrm>
+          <a:prstGeom prst="rect">
+            <a:avLst/>
+          </a:prstGeom>
+          <a:noFill/>
+        </p:spPr>
+        <p:txBody>
+          <a:bodyPr wrap="square">
+            <a:spAutoFit/>
+          </a:bodyPr>
+          <a:lstStyle/>
+          <a:p>
+            <a:pPr algn="l"/>
+            <a:r>
+              <a:rPr sz="2400" b="1" i="0">
+                <a:solidFill>
+                  <a:srgbClr val="1F2C56"/>
+                </a:solidFill>
+                <a:latin typeface="Source Serif 4"/>
+              </a:rPr>
               <a:t>Arbeitsblatt B: Cross-Selling-Gesprächsvorbereitung</a:t>
             </a:r>
           </a:p>
@@ -7067,7 +7467,7 @@
                 </a:solidFill>
                 <a:latin typeface="JetBrains Mono"/>
               </a:rPr>
-              <a:t>LERNZIELE  ·  M13</a:t>
+              <a:t>ÜBERBLICK  ·  M13</a:t>
             </a:r>
           </a:p>
         </p:txBody>
@@ -7145,7 +7545,7 @@
                 </a:solidFill>
                 <a:latin typeface="Source Serif 4"/>
               </a:rPr>
-              <a:t>Was Sie heute mitnehmen</a:t>
+              <a:t>Worum geht es heute</a:t>
             </a:r>
           </a:p>
         </p:txBody>
@@ -7158,8 +7558,8 @@
         </p:nvSpPr>
         <p:spPr>
           <a:xfrm>
-            <a:off x="685800" y="1371600"/>
-            <a:ext cx="10817352" cy="5120640"/>
+            <a:off x="685800" y="1737360"/>
+            <a:ext cx="9720072" cy="4206240"/>
           </a:xfrm>
           <a:prstGeom prst="rect">
             <a:avLst/>
@@ -7173,97 +7573,50 @@
           <a:lstStyle/>
           <a:p>
             <a:pPr>
-              <a:spcBef>
-                <a:spcPts val="800"/>
-              </a:spcBef>
               <a:spcAft>
-                <a:spcPts val="200"/>
+                <a:spcPts val="1200"/>
               </a:spcAft>
             </a:pPr>
             <a:r>
-              <a:rPr sz="1400">
+              <a:rPr sz="1700">
                 <a:solidFill>
                   <a:srgbClr val="3D5466"/>
                 </a:solidFill>
                 <a:latin typeface="Arial"/>
               </a:rPr>
-              <a:t>▸  Den Unterschied zwischen reaktivem und systematisch-bedarfsorientiertem Cross-Selling erklären und begründen, warum der zweite Ansatz nachhaltiger ist</a:t>
+              <a:t>Nach dem Kreditabschluss endet oft das Gespräch – und das Verbundpotenzial bleibt liegen.</a:t>
             </a:r>
           </a:p>
           <a:p>
             <a:pPr>
-              <a:spcBef>
-                <a:spcPts val="800"/>
-              </a:spcBef>
               <a:spcAft>
-                <a:spcPts val="200"/>
+                <a:spcPts val="1200"/>
               </a:spcAft>
             </a:pPr>
             <a:r>
-              <a:rPr sz="1400">
+              <a:rPr sz="1700">
                 <a:solidFill>
                   <a:srgbClr val="3D5466"/>
                 </a:solidFill>
                 <a:latin typeface="Arial"/>
               </a:rPr>
-              <a:t>▸  Cross-Selling-Potenziale in einem gegebenen Kundenprofil anhand der Wallet-Share-Methodik identifizieren und die zwei vielversprechendsten Ansatzpunkte benennen</a:t>
+              <a:t>Sie lernen die Verbundpartner-Landkarte kennen und entwickeln systematische Anschlussimpulse vom Kreditgespräch zum Vollbankverbund.</a:t>
             </a:r>
           </a:p>
           <a:p>
             <a:pPr>
-              <a:spcBef>
-                <a:spcPts val="800"/>
-              </a:spcBef>
               <a:spcAft>
-                <a:spcPts val="200"/>
+                <a:spcPts val="1200"/>
               </a:spcAft>
             </a:pPr>
             <a:r>
-              <a:rPr sz="1400">
+              <a:rPr sz="1700">
                 <a:solidFill>
                   <a:srgbClr val="3D5466"/>
                 </a:solidFill>
                 <a:latin typeface="Arial"/>
               </a:rPr>
-              <a:t>▸  Den 4-Schritte-Cross-Selling-Prozess (Analyse – Hypothese – Gespräch – Dokumentation) in einem simulierten Kundengespräch anwenden</a:t>
-            </a:r>
-          </a:p>
-          <a:p>
-            <a:pPr>
-              <a:spcBef>
-                <a:spcPts val="800"/>
-              </a:spcBef>
-              <a:spcAft>
-                <a:spcPts val="200"/>
-              </a:spcAft>
-            </a:pPr>
-            <a:r>
-              <a:rPr sz="1400">
-                <a:solidFill>
-                  <a:srgbClr val="3D5466"/>
-                </a:solidFill>
-                <a:latin typeface="Arial"/>
-              </a:rPr>
-              <a:t>▸  Die relevanten Verbundpartner den typischen Bedarfsfeldern der Firmenkunden zuordnen</a:t>
-            </a:r>
-          </a:p>
-          <a:p>
-            <a:pPr>
-              <a:spcBef>
-                <a:spcPts val="800"/>
-              </a:spcBef>
-              <a:spcAft>
-                <a:spcPts val="200"/>
-              </a:spcAft>
-            </a:pPr>
-            <a:r>
-              <a:rPr sz="1400">
-                <a:solidFill>
-                  <a:srgbClr val="3D5466"/>
-                </a:solidFill>
-                <a:latin typeface="Arial"/>
-              </a:rPr>
-              <a:t>▸  Produktgetriebenes Push-Cross-Selling von bedarfsorientiertem Cross-Selling unterscheiden und die situationsgerechte Vorgehensweise wählen</a:t>
+              <a:t>Danach erkennen Sie Cross-Selling-Anlässe im Tagesgeschäft und sprechen sie gezielt an.</a:t>
             </a:r>
           </a:p>
         </p:txBody>
@@ -7480,7 +7833,7 @@
                 </a:solidFill>
                 <a:latin typeface="JetBrains Mono"/>
               </a:rPr>
-              <a:t>M13  ·  INHALT</a:t>
+              <a:t>LERNZIELE  ·  M13</a:t>
             </a:r>
           </a:p>
         </p:txBody>
@@ -7530,57 +7883,14 @@
       </p:sp>
       <p:sp>
         <p:nvSpPr>
-          <p:cNvPr id="6" name="Rectangle 5"/>
-          <p:cNvSpPr/>
+          <p:cNvPr id="6" name="TextBox 5"/>
+          <p:cNvSpPr txBox="1"/>
           <p:nvPr/>
         </p:nvSpPr>
         <p:spPr>
           <a:xfrm>
             <a:off x="685800" y="502920"/>
-            <a:ext cx="36576" cy="658368"/>
-          </a:xfrm>
-          <a:prstGeom prst="rect">
-            <a:avLst/>
-          </a:prstGeom>
-          <a:solidFill>
-            <a:srgbClr val="D9C089"/>
-          </a:solidFill>
-          <a:ln>
-            <a:noFill/>
-          </a:ln>
-        </p:spPr>
-        <p:style>
-          <a:lnRef idx="1">
-            <a:schemeClr val="accent1"/>
-          </a:lnRef>
-          <a:fillRef idx="3">
-            <a:schemeClr val="accent1"/>
-          </a:fillRef>
-          <a:effectRef idx="2">
-            <a:schemeClr val="accent1"/>
-          </a:effectRef>
-          <a:fontRef idx="minor">
-            <a:schemeClr val="lt1"/>
-          </a:fontRef>
-        </p:style>
-        <p:txBody>
-          <a:bodyPr rtlCol="0" anchor="ctr"/>
-          <a:lstStyle/>
-          <a:p>
-            <a:pPr algn="ctr"/>
-          </a:p>
-        </p:txBody>
-      </p:sp>
-      <p:sp>
-        <p:nvSpPr>
-          <p:cNvPr id="7" name="TextBox 6"/>
-          <p:cNvSpPr txBox="1"/>
-          <p:nvPr/>
-        </p:nvSpPr>
-        <p:spPr>
-          <a:xfrm>
-            <a:off x="813816" y="502920"/>
-            <a:ext cx="10634472" cy="685800"/>
+            <a:ext cx="10817352" cy="658368"/>
           </a:xfrm>
           <a:prstGeom prst="rect">
             <a:avLst/>
@@ -7595,27 +7905,27 @@
           <a:p>
             <a:pPr algn="l"/>
             <a:r>
-              <a:rPr sz="2400" b="1" i="0">
+              <a:rPr sz="2600" b="1" i="0">
                 <a:solidFill>
                   <a:srgbClr val="1F2C56"/>
                 </a:solidFill>
                 <a:latin typeface="Source Serif 4"/>
               </a:rPr>
-              <a:t>Definition</a:t>
-            </a:r>
-          </a:p>
-        </p:txBody>
-      </p:sp>
-      <p:sp>
-        <p:nvSpPr>
-          <p:cNvPr id="8" name="TextBox 7"/>
+              <a:t>Was Sie heute mitnehmen</a:t>
+            </a:r>
+          </a:p>
+        </p:txBody>
+      </p:sp>
+      <p:sp>
+        <p:nvSpPr>
+          <p:cNvPr id="7" name="TextBox 6"/>
           <p:cNvSpPr txBox="1"/>
           <p:nvPr/>
         </p:nvSpPr>
         <p:spPr>
           <a:xfrm>
-            <a:off x="685800" y="1417320"/>
-            <a:ext cx="10817352" cy="5029200"/>
+            <a:off x="685800" y="1371600"/>
+            <a:ext cx="10817352" cy="5120640"/>
           </a:xfrm>
           <a:prstGeom prst="rect">
             <a:avLst/>
@@ -7630,27 +7940,103 @@
           <a:p>
             <a:pPr>
               <a:spcBef>
-                <a:spcPts val="600"/>
+                <a:spcPts val="800"/>
               </a:spcBef>
               <a:spcAft>
                 <a:spcPts val="200"/>
               </a:spcAft>
             </a:pPr>
             <a:r>
-              <a:rPr sz="1200" i="1">
+              <a:rPr sz="1400">
                 <a:solidFill>
                   <a:srgbClr val="3D5466"/>
                 </a:solidFill>
                 <a:latin typeface="Arial"/>
               </a:rPr>
-              <a:t>→  Cross-Selling ist kein Verkaufsakt. Es ist das konsequente Ausfüllen eines Bedarfs, den der Kunde ohnehin hat – bei der eigenen Bank oder einem Wettbewerber.</a:t>
-            </a:r>
-          </a:p>
-        </p:txBody>
-      </p:sp>
-      <p:sp>
-        <p:nvSpPr>
-          <p:cNvPr id="9" name="Rectangle 8"/>
+              <a:t>▸  Den Unterschied zwischen reaktivem und systematisch-bedarfsorientiertem Cross-Selling erklären und begründen, warum der zweite Ansatz nachhaltiger ist</a:t>
+            </a:r>
+          </a:p>
+          <a:p>
+            <a:pPr>
+              <a:spcBef>
+                <a:spcPts val="800"/>
+              </a:spcBef>
+              <a:spcAft>
+                <a:spcPts val="200"/>
+              </a:spcAft>
+            </a:pPr>
+            <a:r>
+              <a:rPr sz="1400">
+                <a:solidFill>
+                  <a:srgbClr val="3D5466"/>
+                </a:solidFill>
+                <a:latin typeface="Arial"/>
+              </a:rPr>
+              <a:t>▸  Cross-Selling-Potenziale in einem gegebenen Kundenprofil anhand der Wallet-Share-Methodik identifizieren und die zwei vielversprechendsten Ansatzpunkte benennen</a:t>
+            </a:r>
+          </a:p>
+          <a:p>
+            <a:pPr>
+              <a:spcBef>
+                <a:spcPts val="800"/>
+              </a:spcBef>
+              <a:spcAft>
+                <a:spcPts val="200"/>
+              </a:spcAft>
+            </a:pPr>
+            <a:r>
+              <a:rPr sz="1400">
+                <a:solidFill>
+                  <a:srgbClr val="3D5466"/>
+                </a:solidFill>
+                <a:latin typeface="Arial"/>
+              </a:rPr>
+              <a:t>▸  Den 4-Schritte-Cross-Selling-Prozess (Analyse – Hypothese – Gespräch – Dokumentation) in einem simulierten Kundengespräch anwenden</a:t>
+            </a:r>
+          </a:p>
+          <a:p>
+            <a:pPr>
+              <a:spcBef>
+                <a:spcPts val="800"/>
+              </a:spcBef>
+              <a:spcAft>
+                <a:spcPts val="200"/>
+              </a:spcAft>
+            </a:pPr>
+            <a:r>
+              <a:rPr sz="1400">
+                <a:solidFill>
+                  <a:srgbClr val="3D5466"/>
+                </a:solidFill>
+                <a:latin typeface="Arial"/>
+              </a:rPr>
+              <a:t>▸  Die relevanten Verbundpartner den typischen Bedarfsfeldern der Firmenkunden zuordnen</a:t>
+            </a:r>
+          </a:p>
+          <a:p>
+            <a:pPr>
+              <a:spcBef>
+                <a:spcPts val="800"/>
+              </a:spcBef>
+              <a:spcAft>
+                <a:spcPts val="200"/>
+              </a:spcAft>
+            </a:pPr>
+            <a:r>
+              <a:rPr sz="1400">
+                <a:solidFill>
+                  <a:srgbClr val="3D5466"/>
+                </a:solidFill>
+                <a:latin typeface="Arial"/>
+              </a:rPr>
+              <a:t>▸  Produktgetriebenes Push-Cross-Selling von bedarfsorientiertem Cross-Selling unterscheiden und die situationsgerechte Vorgehensweise wählen</a:t>
+            </a:r>
+          </a:p>
+        </p:txBody>
+      </p:sp>
+      <p:sp>
+        <p:nvSpPr>
+          <p:cNvPr id="8" name="Rectangle 7"/>
           <p:cNvSpPr/>
           <p:nvPr/>
         </p:nvSpPr>
@@ -7693,7 +8079,7 @@
       </p:sp>
       <p:sp>
         <p:nvSpPr>
-          <p:cNvPr id="10" name="TextBox 9"/>
+          <p:cNvPr id="9" name="TextBox 8"/>
           <p:cNvSpPr txBox="1"/>
           <p:nvPr/>
         </p:nvSpPr>
@@ -7981,7 +8367,7 @@
                 </a:solidFill>
                 <a:latin typeface="Source Serif 4"/>
               </a:rPr>
-              <a:t>Zwei Typen: Push vs. Pull</a:t>
+              <a:t>Definition</a:t>
             </a:r>
           </a:p>
         </p:txBody>
@@ -8010,20 +8396,20 @@
           <a:p>
             <a:pPr>
               <a:spcBef>
-                <a:spcPts val="400"/>
+                <a:spcPts val="600"/>
               </a:spcBef>
               <a:spcAft>
                 <a:spcPts val="200"/>
               </a:spcAft>
             </a:pPr>
             <a:r>
-              <a:rPr sz="1200">
+              <a:rPr sz="1200" i="1">
                 <a:solidFill>
                   <a:srgbClr val="3D5466"/>
                 </a:solidFill>
                 <a:latin typeface="Arial"/>
               </a:rPr>
-              <a:t>## 4.2 Wallet-Share-Analyse: Wo liegt das Potenzial?</a:t>
+              <a:t>→  Cross-Selling ist kein Verkaufsakt. Es ist das konsequente Ausfüllen eines Bedarfs, den der Kunde ohnehin hat – bei der eigenen Bank oder einem Wettbewerber.</a:t>
             </a:r>
           </a:p>
         </p:txBody>
@@ -8361,7 +8747,7 @@
                 </a:solidFill>
                 <a:latin typeface="Source Serif 4"/>
               </a:rPr>
-              <a:t>Das Konzept</a:t>
+              <a:t>Zwei Typen: Push vs. Pull</a:t>
             </a:r>
           </a:p>
         </p:txBody>
@@ -8403,7 +8789,7 @@
                 </a:solidFill>
                 <a:latin typeface="Arial"/>
               </a:rPr>
-              <a:t>Das unausgeschöpfte Potenzial von 60 % ist nicht verloren – es ist bei einem Wettbewerber.</a:t>
+              <a:t>## 4.2 Wallet-Share-Analyse: Wo liegt das Potenzial?</a:t>
             </a:r>
           </a:p>
         </p:txBody>
@@ -8741,7 +9127,7 @@
                 </a:solidFill>
                 <a:latin typeface="Source Serif 4"/>
               </a:rPr>
-              <a:t>Potenzialanalyse in agree</a:t>
+              <a:t>Das Konzept</a:t>
             </a:r>
           </a:p>
         </p:txBody>
@@ -8783,26 +9169,7 @@
                 </a:solidFill>
                 <a:latin typeface="Arial"/>
               </a:rPr>
-              <a:t>agree bietet über das CRM-Modul und den UnternehmerDialog strukturierte Hilfsmittel zur Potenzialanalyse. Berater sollten vor jedem Jahresgespräch folgende Felder prüfen:</a:t>
-            </a:r>
-          </a:p>
-          <a:p>
-            <a:pPr>
-              <a:spcBef>
-                <a:spcPts val="400"/>
-              </a:spcBef>
-              <a:spcAft>
-                <a:spcPts val="200"/>
-              </a:spcAft>
-            </a:pPr>
-            <a:r>
-              <a:rPr sz="1200">
-                <a:solidFill>
-                  <a:srgbClr val="3D5466"/>
-                </a:solidFill>
-                <a:latin typeface="Arial"/>
-              </a:rPr>
-              <a:t>Empfehlung: Erstellen Sie für Ihre Top-20-Kunden eine einfache Wallet-Share-Schätzung anhand dieser fünf Dimensionen, bevor Sie das Jahresgespräch vorbereiten.</a:t>
+              <a:t>Das unausgeschöpfte Potenzial von 60 % ist nicht verloren – es ist bei einem Wettbewerber.</a:t>
             </a:r>
           </a:p>
         </p:txBody>
@@ -9140,7 +9507,7 @@
                 </a:solidFill>
                 <a:latin typeface="Source Serif 4"/>
               </a:rPr>
-              <a:t>Ereignisbasierte Cross-Selling-Anlässe</a:t>
+              <a:t>Potenzialanalyse in agree</a:t>
             </a:r>
           </a:p>
         </p:txBody>
@@ -9182,7 +9549,7 @@
                 </a:solidFill>
                 <a:latin typeface="Arial"/>
               </a:rPr>
-              <a:t>Das Jahresgespräch ist nur einer von vielen Anlässen. In der Praxis öffnen oft Ereignisse das Gespräch besser als der Jahreskalender – weil der Bedarf dann für den Kunden selbst spürbar ist:</a:t>
+              <a:t>agree bietet über das CRM-Modul und den UnternehmerDialog strukturierte Hilfsmittel zur Potenzialanalyse. Berater sollten vor jedem Jahresgespräch folgende Felder prüfen:</a:t>
             </a:r>
           </a:p>
           <a:p>
@@ -9201,26 +9568,7 @@
                 </a:solidFill>
                 <a:latin typeface="Arial"/>
               </a:rPr>
-              <a:t>## 4.3 Der 4-Schritte-Cross-Selling-Prozess</a:t>
-            </a:r>
-          </a:p>
-          <a:p>
-            <a:pPr>
-              <a:spcBef>
-                <a:spcPts val="400"/>
-              </a:spcBef>
-              <a:spcAft>
-                <a:spcPts val="200"/>
-              </a:spcAft>
-            </a:pPr>
-            <a:r>
-              <a:rPr sz="1200">
-                <a:solidFill>
-                  <a:srgbClr val="3D5466"/>
-                </a:solidFill>
-                <a:latin typeface="Arial"/>
-              </a:rPr>
-              <a:t>Systematisches Cross-Selling folgt einem klaren Prozess – nicht dem Zufall eines Gesprächsmoments.</a:t>
+              <a:t>Empfehlung: Erstellen Sie für Ihre Top-20-Kunden eine einfache Wallet-Share-Schätzung anhand dieser fünf Dimensionen, bevor Sie das Jahresgespräch vorbereiten.</a:t>
             </a:r>
           </a:p>
         </p:txBody>
@@ -9558,7 +9906,7 @@
                 </a:solidFill>
                 <a:latin typeface="Source Serif 4"/>
               </a:rPr>
-              <a:t>Schritt 1: Analyse</a:t>
+              <a:t>Ereignisbasierte Cross-Selling-Anlässe</a:t>
             </a:r>
           </a:p>
         </p:txBody>
@@ -9600,7 +9948,7 @@
                 </a:solidFill>
                 <a:latin typeface="Arial"/>
               </a:rPr>
-              <a:t>Wer? Welcher Kunde hat das größte unausgeschöpfte Potenzial?</a:t>
+              <a:t>Das Jahresgespräch ist nur einer von vielen Anlässen. In der Praxis öffnen oft Ereignisse das Gespräch besser als der Jahreskalender – weil der Bedarf dann für den Kunden selbst spürbar ist:</a:t>
             </a:r>
           </a:p>
           <a:p>
@@ -9619,7 +9967,7 @@
                 </a:solidFill>
                 <a:latin typeface="Arial"/>
               </a:rPr>
-              <a:t>Was? In welchem Bedarfsfeld liegt das Potenzial (Finanzierung, Absicherung, Anlage, ZV)?</a:t>
+              <a:t>## 4.3 Der 4-Schritte-Cross-Selling-Prozess</a:t>
             </a:r>
           </a:p>
           <a:p>
@@ -9638,26 +9986,7 @@
                 </a:solidFill>
                 <a:latin typeface="Arial"/>
               </a:rPr>
-              <a:t>Datenquellen: agree CRM, Jahreskontospiegel, Kreditakten, Verbundpartner-Cockpit</a:t>
-            </a:r>
-          </a:p>
-          <a:p>
-            <a:pPr>
-              <a:spcBef>
-                <a:spcPts val="400"/>
-              </a:spcBef>
-              <a:spcAft>
-                <a:spcPts val="200"/>
-              </a:spcAft>
-            </a:pPr>
-            <a:r>
-              <a:rPr sz="1200">
-                <a:solidFill>
-                  <a:srgbClr val="3D5466"/>
-                </a:solidFill>
-                <a:latin typeface="Arial"/>
-              </a:rPr>
-              <a:t>Ergebnis: Eine priorisierte Liste von 3–5 Cross-Selling-Hypothesen für diesen Kunden.</a:t>
+              <a:t>Systematisches Cross-Selling folgt einem klaren Prozess – nicht dem Zufall eines Gesprächsmoments.</a:t>
             </a:r>
           </a:p>
         </p:txBody>
@@ -9995,7 +10324,7 @@
                 </a:solidFill>
                 <a:latin typeface="Source Serif 4"/>
               </a:rPr>
-              <a:t>Schritt 2: Hypothese formulieren</a:t>
+              <a:t>Schritt 1: Analyse</a:t>
             </a:r>
           </a:p>
         </p:txBody>
@@ -10037,26 +10366,64 @@
                 </a:solidFill>
                 <a:latin typeface="Arial"/>
               </a:rPr>
-              <a:t>Eine Cross-Selling-Hypothese verknüpft einen beobachteten Kundenbedarf mit einem konkreten Lösungsansatz. Gutes Format:</a:t>
+              <a:t>Wer? Welcher Kunde hat das größte unausgeschöpfte Potenzial?</a:t>
             </a:r>
           </a:p>
           <a:p>
             <a:pPr>
               <a:spcBef>
-                <a:spcPts val="600"/>
+                <a:spcPts val="400"/>
               </a:spcBef>
               <a:spcAft>
                 <a:spcPts val="200"/>
               </a:spcAft>
             </a:pPr>
             <a:r>
-              <a:rPr sz="1200" i="1">
+              <a:rPr sz="1200">
                 <a:solidFill>
                   <a:srgbClr val="3D5466"/>
                 </a:solidFill>
                 <a:latin typeface="Arial"/>
               </a:rPr>
-              <a:t>→  „[Kunde] hat [Situation/Signal]. Ich vermute deshalb, dass er [Bedarf] hat – passend dazu wäre [Lösung/Verbundpartner]."</a:t>
+              <a:t>Was? In welchem Bedarfsfeld liegt das Potenzial (Finanzierung, Absicherung, Anlage, ZV)?</a:t>
+            </a:r>
+          </a:p>
+          <a:p>
+            <a:pPr>
+              <a:spcBef>
+                <a:spcPts val="400"/>
+              </a:spcBef>
+              <a:spcAft>
+                <a:spcPts val="200"/>
+              </a:spcAft>
+            </a:pPr>
+            <a:r>
+              <a:rPr sz="1200">
+                <a:solidFill>
+                  <a:srgbClr val="3D5466"/>
+                </a:solidFill>
+                <a:latin typeface="Arial"/>
+              </a:rPr>
+              <a:t>Datenquellen: agree CRM, Jahreskontospiegel, Kreditakten, Verbundpartner-Cockpit</a:t>
+            </a:r>
+          </a:p>
+          <a:p>
+            <a:pPr>
+              <a:spcBef>
+                <a:spcPts val="400"/>
+              </a:spcBef>
+              <a:spcAft>
+                <a:spcPts val="200"/>
+              </a:spcAft>
+            </a:pPr>
+            <a:r>
+              <a:rPr sz="1200">
+                <a:solidFill>
+                  <a:srgbClr val="3D5466"/>
+                </a:solidFill>
+                <a:latin typeface="Arial"/>
+              </a:rPr>
+              <a:t>Ergebnis: Eine priorisierte Liste von 3–5 Cross-Selling-Hypothesen für diesen Kunden.</a:t>
             </a:r>
           </a:p>
         </p:txBody>

--- a/protected-downloads/praesentation/M13.pptx
+++ b/protected-downloads/praesentation/M13.pptx
@@ -20,6 +20,8 @@
     <p:sldId id="268" r:id="rId20"/>
     <p:sldId id="269" r:id="rId21"/>
     <p:sldId id="270" r:id="rId22"/>
+    <p:sldId id="271" r:id="rId23"/>
+    <p:sldId id="272" r:id="rId24"/>
   </p:sldIdLst>
   <p:sldSz cx="12188952" cy="6858000" type="screen4x3"/>
   <p:notesSz cx="6858000" cy="9144000"/>
@@ -516,7 +518,7 @@
           <a:lstStyle/>
           <a:p>
             <a:r>
-              <a:t>Siehe Trainerhandbuch (Sektion 3) für Moderationshinweise, Timing und erwartete Teilnehmerreaktionen.</a:t>
+              <a:t>Agenda aus dem Ablaufplan (Sektion 3.1). Timing und Pausen siehe Trainerhandbuch.</a:t>
             </a:r>
           </a:p>
         </p:txBody>
@@ -5034,7 +5036,7 @@
                 </a:solidFill>
                 <a:latin typeface="Source Serif 4"/>
               </a:rPr>
-              <a:t>Schritt 2: Hypothese formulieren</a:t>
+              <a:t>Schritt 1: Analyse</a:t>
             </a:r>
           </a:p>
         </p:txBody>
@@ -5070,32 +5072,70 @@
               </a:spcAft>
             </a:pPr>
             <a:r>
-              <a:rPr sz="1200">
+              <a:rPr sz="1300">
                 <a:solidFill>
                   <a:srgbClr val="3D5466"/>
                 </a:solidFill>
                 <a:latin typeface="Arial"/>
               </a:rPr>
-              <a:t>Eine Cross-Selling-Hypothese verknüpft einen beobachteten Kundenbedarf mit einem konkreten Lösungsansatz. Gutes Format:</a:t>
+              <a:t>▸  Wer? Welcher Kunde hat das größte unausgeschöpfte Potenzial?</a:t>
             </a:r>
           </a:p>
           <a:p>
             <a:pPr>
               <a:spcBef>
-                <a:spcPts val="600"/>
+                <a:spcPts val="400"/>
               </a:spcBef>
               <a:spcAft>
                 <a:spcPts val="200"/>
               </a:spcAft>
             </a:pPr>
             <a:r>
-              <a:rPr sz="1200" i="1">
+              <a:rPr sz="1300">
                 <a:solidFill>
                   <a:srgbClr val="3D5466"/>
                 </a:solidFill>
                 <a:latin typeface="Arial"/>
               </a:rPr>
-              <a:t>→  „[Kunde] hat [Situation/Signal]. Ich vermute deshalb, dass er [Bedarf] hat – passend dazu wäre [Lösung/Verbundpartner]."</a:t>
+              <a:t>▸  Was? In welchem Bedarfsfeld liegt das Potenzial (Finanzierung, Absicherung, Anlage, ZV)?</a:t>
+            </a:r>
+          </a:p>
+          <a:p>
+            <a:pPr>
+              <a:spcBef>
+                <a:spcPts val="400"/>
+              </a:spcBef>
+              <a:spcAft>
+                <a:spcPts val="200"/>
+              </a:spcAft>
+            </a:pPr>
+            <a:r>
+              <a:rPr sz="1300">
+                <a:solidFill>
+                  <a:srgbClr val="3D5466"/>
+                </a:solidFill>
+                <a:latin typeface="Arial"/>
+              </a:rPr>
+              <a:t>▸  Datenquellen: agree CRM, Jahreskontospiegel, Kreditakten, Verbundpartner-Cockpit</a:t>
+            </a:r>
+          </a:p>
+          <a:p>
+            <a:pPr>
+              <a:spcBef>
+                <a:spcPts val="400"/>
+              </a:spcBef>
+              <a:spcAft>
+                <a:spcPts val="200"/>
+              </a:spcAft>
+            </a:pPr>
+            <a:r>
+              <a:rPr sz="1300">
+                <a:solidFill>
+                  <a:srgbClr val="3D5466"/>
+                </a:solidFill>
+                <a:latin typeface="Arial"/>
+              </a:rPr>
+              <a:t>▸  Ergebnis: Eine priorisierte Liste von 3–5 Cross-Selling-Hypothesen für diesen Kunden.</a:t>
             </a:r>
           </a:p>
         </p:txBody>
@@ -5433,7 +5473,7 @@
                 </a:solidFill>
                 <a:latin typeface="Source Serif 4"/>
               </a:rPr>
-              <a:t>Schritt 3: Gespräch</a:t>
+              <a:t>Schritt 2: Hypothese formulieren</a:t>
             </a:r>
           </a:p>
         </p:txBody>
@@ -5469,127 +5509,32 @@
               </a:spcAft>
             </a:pPr>
             <a:r>
-              <a:rPr sz="1200">
+              <a:rPr sz="1300">
                 <a:solidFill>
                   <a:srgbClr val="3D5466"/>
                 </a:solidFill>
                 <a:latin typeface="Arial"/>
               </a:rPr>
-              <a:t>Das Cross-Selling-Gespräch ist kein Verkaufsgespräch. Es ist eine bedarfsgeleitete Gesprächserweiterung. Der Einstieg erfolgt über eine offene Frage zur Situation – nicht mit einem Produktvorschlag.</a:t>
+              <a:t>▸  Eine Cross-Selling-Hypothese verknüpft einen beobachteten Kundenbedarf mit einem konkreten Lösungsansatz. Gutes Format:</a:t>
             </a:r>
           </a:p>
           <a:p>
             <a:pPr>
               <a:spcBef>
-                <a:spcPts val="400"/>
+                <a:spcPts val="600"/>
               </a:spcBef>
               <a:spcAft>
                 <a:spcPts val="200"/>
               </a:spcAft>
             </a:pPr>
             <a:r>
-              <a:rPr sz="1200">
+              <a:rPr sz="1200" i="1">
                 <a:solidFill>
                   <a:srgbClr val="3D5466"/>
                 </a:solidFill>
                 <a:latin typeface="Arial"/>
               </a:rPr>
-              <a:t>Gesprächseinstieg nach SPIN :</a:t>
-            </a:r>
-          </a:p>
-          <a:p>
-            <a:pPr>
-              <a:spcBef>
-                <a:spcPts val="400"/>
-              </a:spcBef>
-              <a:spcAft>
-                <a:spcPts val="200"/>
-              </a:spcAft>
-            </a:pPr>
-            <a:r>
-              <a:rPr sz="1300">
-                <a:solidFill>
-                  <a:srgbClr val="3D5466"/>
-                </a:solidFill>
-                <a:latin typeface="Arial"/>
-              </a:rPr>
-              <a:t>▸  Situationsfrage: „Wie haben Sie aktuell Ihre Betriebsunterbrechungsrisiken abgesichert?"</a:t>
-            </a:r>
-          </a:p>
-          <a:p>
-            <a:pPr>
-              <a:spcBef>
-                <a:spcPts val="400"/>
-              </a:spcBef>
-              <a:spcAft>
-                <a:spcPts val="200"/>
-              </a:spcAft>
-            </a:pPr>
-            <a:r>
-              <a:rPr sz="1300">
-                <a:solidFill>
-                  <a:srgbClr val="3D5466"/>
-                </a:solidFill>
-                <a:latin typeface="Arial"/>
-              </a:rPr>
-              <a:t>▸  Problemfrage: „Gibt es Bereiche, bei denen Sie sich fragen, ob das ausreicht?"</a:t>
-            </a:r>
-          </a:p>
-          <a:p>
-            <a:pPr>
-              <a:spcBef>
-                <a:spcPts val="400"/>
-              </a:spcBef>
-              <a:spcAft>
-                <a:spcPts val="200"/>
-              </a:spcAft>
-            </a:pPr>
-            <a:r>
-              <a:rPr sz="1300">
-                <a:solidFill>
-                  <a:srgbClr val="3D5466"/>
-                </a:solidFill>
-                <a:latin typeface="Arial"/>
-              </a:rPr>
-              <a:t>▸  Implikationsfrage: „Was würde ein Ausfall von zwei Wochen für Ihren Betrieb bedeuten?"</a:t>
-            </a:r>
-          </a:p>
-          <a:p>
-            <a:pPr>
-              <a:spcBef>
-                <a:spcPts val="400"/>
-              </a:spcBef>
-              <a:spcAft>
-                <a:spcPts val="200"/>
-              </a:spcAft>
-            </a:pPr>
-            <a:r>
-              <a:rPr sz="1300">
-                <a:solidFill>
-                  <a:srgbClr val="3D5466"/>
-                </a:solidFill>
-                <a:latin typeface="Arial"/>
-              </a:rPr>
-              <a:t>▸  Nutzenfrage: „Was wäre für Sie die ideale Lösung, wenn das Risiko vollständig gedeckt wäre?"</a:t>
-            </a:r>
-          </a:p>
-          <a:p>
-            <a:pPr>
-              <a:spcBef>
-                <a:spcPts val="400"/>
-              </a:spcBef>
-              <a:spcAft>
-                <a:spcPts val="200"/>
-              </a:spcAft>
-            </a:pPr>
-            <a:r>
-              <a:rPr sz="1200">
-                <a:solidFill>
-                  <a:srgbClr val="3D5466"/>
-                </a:solidFill>
-                <a:latin typeface="Arial"/>
-              </a:rPr>
-              <a:t>Erst nach diesem Verlauf folgt der Produktvorschlag – oder die Einbeziehung des Verbundpartners.</a:t>
+              <a:t>→  „[Kunde] hat [Situation/Signal]. Ich vermute deshalb, dass er [Bedarf] hat – passend dazu wäre [Lösung/Verbundpartner]."</a:t>
             </a:r>
           </a:p>
         </p:txBody>
@@ -5927,7 +5872,7 @@
                 </a:solidFill>
                 <a:latin typeface="Source Serif 4"/>
               </a:rPr>
-              <a:t>Schritt 4: Dokumentation</a:t>
+              <a:t>Schritt 3: Gespräch</a:t>
             </a:r>
           </a:p>
         </p:txBody>
@@ -5969,7 +5914,7 @@
                 </a:solidFill>
                 <a:latin typeface="Arial"/>
               </a:rPr>
-              <a:t>▸  Besprochene Bedarfsfelder</a:t>
+              <a:t>▸  Das Cross-Selling-Gespräch ist kein Verkaufsgespräch. Es ist eine bedarfsgeleitete Gesprächserweiterung. Der Einstieg erfolgt über eine offene Frage zur Situation – nicht mit einem Produktvorschlag.</a:t>
             </a:r>
           </a:p>
           <a:p>
@@ -5988,7 +5933,7 @@
                 </a:solidFill>
                 <a:latin typeface="Arial"/>
               </a:rPr>
-              <a:t>▸  Ergebnis (Abschluss / offen / kein Bedarf)</a:t>
+              <a:t>▸  Gesprächseinstieg nach SPIN :</a:t>
             </a:r>
           </a:p>
           <a:p>
@@ -6007,7 +5952,7 @@
                 </a:solidFill>
                 <a:latin typeface="Arial"/>
               </a:rPr>
-              <a:t>▸  Nächste Schritte und Folgetermine</a:t>
+              <a:t>▸  Situationsfrage: „Wie haben Sie aktuell Ihre Betriebsunterbrechungsrisiken abgesichert?"</a:t>
             </a:r>
           </a:p>
           <a:p>
@@ -6026,7 +5971,7 @@
                 </a:solidFill>
                 <a:latin typeface="Arial"/>
               </a:rPr>
-              <a:t>▸  Verbundpartner-Übergabe (falls relevant)</a:t>
+              <a:t>▸  Problemfrage: „Gibt es Bereiche, bei denen Sie sich fragen, ob das ausreicht?"</a:t>
             </a:r>
           </a:p>
           <a:p>
@@ -6039,13 +5984,13 @@
               </a:spcAft>
             </a:pPr>
             <a:r>
-              <a:rPr sz="1200">
+              <a:rPr sz="1300">
                 <a:solidFill>
                   <a:srgbClr val="3D5466"/>
                 </a:solidFill>
                 <a:latin typeface="Arial"/>
               </a:rPr>
-              <a:t>## 4.4 Verbundpartner-Matrix</a:t>
+              <a:t>▸  Implikationsfrage: „Was würde ein Ausfall von zwei Wochen für Ihren Betrieb bedeuten?"</a:t>
             </a:r>
           </a:p>
           <a:p>
@@ -6058,13 +6003,13 @@
               </a:spcAft>
             </a:pPr>
             <a:r>
-              <a:rPr sz="1200">
+              <a:rPr sz="1300">
                 <a:solidFill>
                   <a:srgbClr val="3D5466"/>
                 </a:solidFill>
                 <a:latin typeface="Arial"/>
               </a:rPr>
-              <a:t>Die Stärke der VR-Bank liegt im Verbund. Welcher Verbundpartner ist für welches Bedarfsfeld relevant?</a:t>
+              <a:t>▸  Nutzenfrage: „Was wäre für Sie die ideale Lösung, wenn das Risiko vollständig gedeckt wäre?"</a:t>
             </a:r>
           </a:p>
           <a:p>
@@ -6077,108 +6022,13 @@
               </a:spcAft>
             </a:pPr>
             <a:r>
-              <a:rPr sz="1200">
+              <a:rPr sz="1300">
                 <a:solidFill>
                   <a:srgbClr val="3D5466"/>
                 </a:solidFill>
                 <a:latin typeface="Arial"/>
               </a:rPr>
-              <a:t>## 4.5 Praxiscase: Vom Kreditgespräch zum Vollbankverbund</a:t>
-            </a:r>
-          </a:p>
-          <a:p>
-            <a:pPr>
-              <a:spcBef>
-                <a:spcPts val="400"/>
-              </a:spcBef>
-              <a:spcAft>
-                <a:spcPts val="200"/>
-              </a:spcAft>
-            </a:pPr>
-            <a:r>
-              <a:rPr sz="1200">
-                <a:solidFill>
-                  <a:srgbClr val="3D5466"/>
-                </a:solidFill>
-                <a:latin typeface="Arial"/>
-              </a:rPr>
-              <a:t>Ausgangssituation</a:t>
-            </a:r>
-          </a:p>
-          <a:p>
-            <a:pPr>
-              <a:spcBef>
-                <a:spcPts val="400"/>
-              </a:spcBef>
-              <a:spcAft>
-                <a:spcPts val="200"/>
-              </a:spcAft>
-            </a:pPr>
-            <a:r>
-              <a:rPr sz="1200">
-                <a:solidFill>
-                  <a:srgbClr val="3D5466"/>
-                </a:solidFill>
-                <a:latin typeface="Arial"/>
-              </a:rPr>
-              <a:t>Vor dem Jahresgespräch analysiert Markus den Kunden in agree:</a:t>
-            </a:r>
-          </a:p>
-          <a:p>
-            <a:pPr>
-              <a:spcBef>
-                <a:spcPts val="400"/>
-              </a:spcBef>
-              <a:spcAft>
-                <a:spcPts val="200"/>
-              </a:spcAft>
-            </a:pPr>
-            <a:r>
-              <a:rPr sz="1200">
-                <a:solidFill>
-                  <a:srgbClr val="3D5466"/>
-                </a:solidFill>
-                <a:latin typeface="Arial"/>
-              </a:rPr>
-              <a:t>Das Gespräch</a:t>
-            </a:r>
-          </a:p>
-          <a:p>
-            <a:pPr>
-              <a:spcBef>
-                <a:spcPts val="400"/>
-              </a:spcBef>
-              <a:spcAft>
-                <a:spcPts val="200"/>
-              </a:spcAft>
-            </a:pPr>
-            <a:r>
-              <a:rPr sz="1200">
-                <a:solidFill>
-                  <a:srgbClr val="3D5466"/>
-                </a:solidFill>
-                <a:latin typeface="Arial"/>
-              </a:rPr>
-              <a:t>„Sie hatten letztes Jahr den Ausfall der CNC-Anlage erwähnt. Wie haben Sie die zwei Wochen finanziell abgefedert?"</a:t>
-            </a:r>
-          </a:p>
-          <a:p>
-            <a:pPr>
-              <a:spcBef>
-                <a:spcPts val="400"/>
-              </a:spcBef>
-              <a:spcAft>
-                <a:spcPts val="200"/>
-              </a:spcAft>
-            </a:pPr>
-            <a:r>
-              <a:rPr sz="1200">
-                <a:solidFill>
-                  <a:srgbClr val="3D5466"/>
-                </a:solidFill>
-                <a:latin typeface="Arial"/>
-              </a:rPr>
-              <a:t>Der Kunde: „Ehrlich gesagt war das eng. Wir haben aus den Rücklagen überbrückt – aber das war ungeplant."</a:t>
+              <a:t>▸  Erst nach diesem Verlauf folgt der Produktvorschlag – oder die Einbeziehung des Verbundpartners.</a:t>
             </a:r>
           </a:p>
         </p:txBody>
@@ -6294,7 +6144,7 @@
             <a:avLst/>
           </a:prstGeom>
           <a:solidFill>
-            <a:srgbClr val="FFFFFF"/>
+            <a:srgbClr val="EDEDF3"/>
           </a:solidFill>
           <a:ln>
             <a:noFill/>
@@ -6395,43 +6245,51 @@
                 </a:solidFill>
                 <a:latin typeface="JetBrains Mono"/>
               </a:rPr>
-              <a:t>M13  ·  SCHAUBILD</a:t>
-            </a:r>
-          </a:p>
-        </p:txBody>
-      </p:sp>
-      <p:sp>
-        <p:nvSpPr>
-          <p:cNvPr id="5" name="TextBox 4"/>
-          <p:cNvSpPr txBox="1"/>
-          <p:nvPr/>
-        </p:nvSpPr>
-        <p:spPr>
-          <a:xfrm>
-            <a:off x="685800" y="502920"/>
-            <a:ext cx="10817352" cy="594360"/>
-          </a:xfrm>
-          <a:prstGeom prst="rect">
-            <a:avLst/>
-          </a:prstGeom>
-          <a:noFill/>
-        </p:spPr>
-        <p:txBody>
-          <a:bodyPr wrap="square">
-            <a:spAutoFit/>
-          </a:bodyPr>
-          <a:lstStyle/>
-          <a:p>
-            <a:pPr algn="l"/>
-            <a:r>
-              <a:rPr sz="2000" b="1" i="0">
-                <a:solidFill>
-                  <a:srgbClr val="1F2C56"/>
-                </a:solidFill>
-                <a:latin typeface="Source Serif 4"/>
-              </a:rPr>
-              <a:t>Verbundpartner-Matrix</a:t>
-            </a:r>
+              <a:t>M13  ·  INHALT</a:t>
+            </a:r>
+          </a:p>
+        </p:txBody>
+      </p:sp>
+      <p:sp>
+        <p:nvSpPr>
+          <p:cNvPr id="5" name="Rectangle 4"/>
+          <p:cNvSpPr/>
+          <p:nvPr/>
+        </p:nvSpPr>
+        <p:spPr>
+          <a:xfrm>
+            <a:off x="0" y="1234440"/>
+            <a:ext cx="12188952" cy="12700"/>
+          </a:xfrm>
+          <a:prstGeom prst="rect">
+            <a:avLst/>
+          </a:prstGeom>
+          <a:solidFill>
+            <a:srgbClr val="D8DFE4"/>
+          </a:solidFill>
+          <a:ln>
+            <a:noFill/>
+          </a:ln>
+        </p:spPr>
+        <p:style>
+          <a:lnRef idx="1">
+            <a:schemeClr val="accent1"/>
+          </a:lnRef>
+          <a:fillRef idx="3">
+            <a:schemeClr val="accent1"/>
+          </a:fillRef>
+          <a:effectRef idx="2">
+            <a:schemeClr val="accent1"/>
+          </a:effectRef>
+          <a:fontRef idx="minor">
+            <a:schemeClr val="lt1"/>
+          </a:fontRef>
+        </p:style>
+        <p:txBody>
+          <a:bodyPr rtlCol="0" anchor="ctr"/>
+          <a:lstStyle/>
+          <a:p>
+            <a:pPr algn="ctr"/>
           </a:p>
         </p:txBody>
       </p:sp>
@@ -6443,8 +6301,8 @@
         </p:nvSpPr>
         <p:spPr>
           <a:xfrm>
-            <a:off x="685800" y="1143000"/>
-            <a:ext cx="10817352" cy="25400"/>
+            <a:off x="685800" y="502920"/>
+            <a:ext cx="36576" cy="658368"/>
           </a:xfrm>
           <a:prstGeom prst="rect">
             <a:avLst/>
@@ -6478,33 +6336,295 @@
           </a:p>
         </p:txBody>
       </p:sp>
-      <p:pic>
-        <p:nvPicPr>
-          <p:cNvPr id="7" name="Picture 6" descr="image.png"/>
-          <p:cNvPicPr>
-            <a:picLocks noChangeAspect="1"/>
-          </p:cNvPicPr>
-          <p:nvPr/>
-        </p:nvPicPr>
-        <p:blipFill>
-          <a:blip r:embed="rId2"/>
-          <a:stretch>
-            <a:fillRect/>
-          </a:stretch>
-        </p:blipFill>
-        <p:spPr>
-          <a:xfrm>
-            <a:off x="2433486" y="1325880"/>
-            <a:ext cx="7321979" cy="4937760"/>
-          </a:xfrm>
-          <a:prstGeom prst="rect">
-            <a:avLst/>
-          </a:prstGeom>
-        </p:spPr>
-      </p:pic>
-      <p:sp>
-        <p:nvSpPr>
-          <p:cNvPr id="8" name="Rectangle 7"/>
+      <p:sp>
+        <p:nvSpPr>
+          <p:cNvPr id="7" name="TextBox 6"/>
+          <p:cNvSpPr txBox="1"/>
+          <p:nvPr/>
+        </p:nvSpPr>
+        <p:spPr>
+          <a:xfrm>
+            <a:off x="813816" y="502920"/>
+            <a:ext cx="10634472" cy="685800"/>
+          </a:xfrm>
+          <a:prstGeom prst="rect">
+            <a:avLst/>
+          </a:prstGeom>
+          <a:noFill/>
+        </p:spPr>
+        <p:txBody>
+          <a:bodyPr wrap="square">
+            <a:spAutoFit/>
+          </a:bodyPr>
+          <a:lstStyle/>
+          <a:p>
+            <a:pPr algn="l"/>
+            <a:r>
+              <a:rPr sz="2400" b="1" i="0">
+                <a:solidFill>
+                  <a:srgbClr val="1F2C56"/>
+                </a:solidFill>
+                <a:latin typeface="Source Serif 4"/>
+              </a:rPr>
+              <a:t>Schritt 4: Dokumentation</a:t>
+            </a:r>
+          </a:p>
+        </p:txBody>
+      </p:sp>
+      <p:sp>
+        <p:nvSpPr>
+          <p:cNvPr id="8" name="TextBox 7"/>
+          <p:cNvSpPr txBox="1"/>
+          <p:nvPr/>
+        </p:nvSpPr>
+        <p:spPr>
+          <a:xfrm>
+            <a:off x="685800" y="1417320"/>
+            <a:ext cx="10817352" cy="5029200"/>
+          </a:xfrm>
+          <a:prstGeom prst="rect">
+            <a:avLst/>
+          </a:prstGeom>
+          <a:noFill/>
+        </p:spPr>
+        <p:txBody>
+          <a:bodyPr wrap="square">
+            <a:spAutoFit/>
+          </a:bodyPr>
+          <a:lstStyle/>
+          <a:p>
+            <a:pPr>
+              <a:spcBef>
+                <a:spcPts val="400"/>
+              </a:spcBef>
+              <a:spcAft>
+                <a:spcPts val="200"/>
+              </a:spcAft>
+            </a:pPr>
+            <a:r>
+              <a:rPr sz="1300">
+                <a:solidFill>
+                  <a:srgbClr val="3D5466"/>
+                </a:solidFill>
+                <a:latin typeface="Arial"/>
+              </a:rPr>
+              <a:t>▸  Besprochene Bedarfsfelder</a:t>
+            </a:r>
+          </a:p>
+          <a:p>
+            <a:pPr>
+              <a:spcBef>
+                <a:spcPts val="400"/>
+              </a:spcBef>
+              <a:spcAft>
+                <a:spcPts val="200"/>
+              </a:spcAft>
+            </a:pPr>
+            <a:r>
+              <a:rPr sz="1300">
+                <a:solidFill>
+                  <a:srgbClr val="3D5466"/>
+                </a:solidFill>
+                <a:latin typeface="Arial"/>
+              </a:rPr>
+              <a:t>▸  Ergebnis (Abschluss / offen / kein Bedarf)</a:t>
+            </a:r>
+          </a:p>
+          <a:p>
+            <a:pPr>
+              <a:spcBef>
+                <a:spcPts val="400"/>
+              </a:spcBef>
+              <a:spcAft>
+                <a:spcPts val="200"/>
+              </a:spcAft>
+            </a:pPr>
+            <a:r>
+              <a:rPr sz="1300">
+                <a:solidFill>
+                  <a:srgbClr val="3D5466"/>
+                </a:solidFill>
+                <a:latin typeface="Arial"/>
+              </a:rPr>
+              <a:t>▸  Nächste Schritte und Folgetermine</a:t>
+            </a:r>
+          </a:p>
+          <a:p>
+            <a:pPr>
+              <a:spcBef>
+                <a:spcPts val="400"/>
+              </a:spcBef>
+              <a:spcAft>
+                <a:spcPts val="200"/>
+              </a:spcAft>
+            </a:pPr>
+            <a:r>
+              <a:rPr sz="1300">
+                <a:solidFill>
+                  <a:srgbClr val="3D5466"/>
+                </a:solidFill>
+                <a:latin typeface="Arial"/>
+              </a:rPr>
+              <a:t>▸  Verbundpartner-Übergabe (falls relevant)</a:t>
+            </a:r>
+          </a:p>
+          <a:p>
+            <a:pPr>
+              <a:spcBef>
+                <a:spcPts val="400"/>
+              </a:spcBef>
+              <a:spcAft>
+                <a:spcPts val="200"/>
+              </a:spcAft>
+            </a:pPr>
+            <a:r>
+              <a:rPr sz="1300">
+                <a:solidFill>
+                  <a:srgbClr val="3D5466"/>
+                </a:solidFill>
+                <a:latin typeface="Arial"/>
+              </a:rPr>
+              <a:t>▸  ## 4.4 Verbundpartner-Matrix</a:t>
+            </a:r>
+          </a:p>
+          <a:p>
+            <a:pPr>
+              <a:spcBef>
+                <a:spcPts val="400"/>
+              </a:spcBef>
+              <a:spcAft>
+                <a:spcPts val="200"/>
+              </a:spcAft>
+            </a:pPr>
+            <a:r>
+              <a:rPr sz="1300">
+                <a:solidFill>
+                  <a:srgbClr val="3D5466"/>
+                </a:solidFill>
+                <a:latin typeface="Arial"/>
+              </a:rPr>
+              <a:t>▸  Die Stärke der VR-Bank liegt im Verbund. Welcher Verbundpartner ist für welches Bedarfsfeld relevant?</a:t>
+            </a:r>
+          </a:p>
+          <a:p>
+            <a:pPr>
+              <a:spcBef>
+                <a:spcPts val="400"/>
+              </a:spcBef>
+              <a:spcAft>
+                <a:spcPts val="200"/>
+              </a:spcAft>
+            </a:pPr>
+            <a:r>
+              <a:rPr sz="1300">
+                <a:solidFill>
+                  <a:srgbClr val="3D5466"/>
+                </a:solidFill>
+                <a:latin typeface="Arial"/>
+              </a:rPr>
+              <a:t>▸  ## 4.5 Praxiscase: Vom Kreditgespräch zum Vollbankverbund</a:t>
+            </a:r>
+          </a:p>
+          <a:p>
+            <a:pPr>
+              <a:spcBef>
+                <a:spcPts val="400"/>
+              </a:spcBef>
+              <a:spcAft>
+                <a:spcPts val="200"/>
+              </a:spcAft>
+            </a:pPr>
+            <a:r>
+              <a:rPr sz="1300">
+                <a:solidFill>
+                  <a:srgbClr val="3D5466"/>
+                </a:solidFill>
+                <a:latin typeface="Arial"/>
+              </a:rPr>
+              <a:t>▸  Ausgangssituation</a:t>
+            </a:r>
+          </a:p>
+          <a:p>
+            <a:pPr>
+              <a:spcBef>
+                <a:spcPts val="400"/>
+              </a:spcBef>
+              <a:spcAft>
+                <a:spcPts val="200"/>
+              </a:spcAft>
+            </a:pPr>
+            <a:r>
+              <a:rPr sz="1300">
+                <a:solidFill>
+                  <a:srgbClr val="3D5466"/>
+                </a:solidFill>
+                <a:latin typeface="Arial"/>
+              </a:rPr>
+              <a:t>▸  Vor dem Jahresgespräch analysiert Markus den Kunden in agree:</a:t>
+            </a:r>
+          </a:p>
+          <a:p>
+            <a:pPr>
+              <a:spcBef>
+                <a:spcPts val="400"/>
+              </a:spcBef>
+              <a:spcAft>
+                <a:spcPts val="200"/>
+              </a:spcAft>
+            </a:pPr>
+            <a:r>
+              <a:rPr sz="1300">
+                <a:solidFill>
+                  <a:srgbClr val="3D5466"/>
+                </a:solidFill>
+                <a:latin typeface="Arial"/>
+              </a:rPr>
+              <a:t>▸  Das Gespräch</a:t>
+            </a:r>
+          </a:p>
+          <a:p>
+            <a:pPr>
+              <a:spcBef>
+                <a:spcPts val="400"/>
+              </a:spcBef>
+              <a:spcAft>
+                <a:spcPts val="200"/>
+              </a:spcAft>
+            </a:pPr>
+            <a:r>
+              <a:rPr sz="1300">
+                <a:solidFill>
+                  <a:srgbClr val="3D5466"/>
+                </a:solidFill>
+                <a:latin typeface="Arial"/>
+              </a:rPr>
+              <a:t>▸  „Sie hatten letztes Jahr den Ausfall der CNC-Anlage erwähnt. Wie haben Sie die zwei Wochen finanziell abgefedert?"</a:t>
+            </a:r>
+          </a:p>
+          <a:p>
+            <a:pPr>
+              <a:spcBef>
+                <a:spcPts val="400"/>
+              </a:spcBef>
+              <a:spcAft>
+                <a:spcPts val="200"/>
+              </a:spcAft>
+            </a:pPr>
+            <a:r>
+              <a:rPr sz="1300">
+                <a:solidFill>
+                  <a:srgbClr val="3D5466"/>
+                </a:solidFill>
+                <a:latin typeface="Arial"/>
+              </a:rPr>
+              <a:t>▸  Der Kunde: „Ehrlich gesagt war das eng. Wir haben aus den Rücklagen überbrückt – aber das war ungeplant."</a:t>
+            </a:r>
+          </a:p>
+        </p:txBody>
+      </p:sp>
+      <p:sp>
+        <p:nvSpPr>
+          <p:cNvPr id="9" name="Rectangle 8"/>
           <p:cNvSpPr/>
           <p:nvPr/>
         </p:nvSpPr>
@@ -6547,7 +6667,7 @@
       </p:sp>
       <p:sp>
         <p:nvSpPr>
-          <p:cNvPr id="9" name="TextBox 8"/>
+          <p:cNvPr id="10" name="TextBox 9"/>
           <p:cNvSpPr txBox="1"/>
           <p:nvPr/>
         </p:nvSpPr>
@@ -6576,41 +6696,6 @@
                 <a:latin typeface="JetBrains Mono"/>
               </a:rPr>
               <a:t>Benedikt Zoller Coaching  ·  FKB Campus  ·  M13</a:t>
-            </a:r>
-          </a:p>
-        </p:txBody>
-      </p:sp>
-      <p:sp>
-        <p:nvSpPr>
-          <p:cNvPr id="10" name="TextBox 9"/>
-          <p:cNvSpPr txBox="1"/>
-          <p:nvPr/>
-        </p:nvSpPr>
-        <p:spPr>
-          <a:xfrm>
-            <a:off x="7176211" y="6583680"/>
-            <a:ext cx="4326940" cy="256032"/>
-          </a:xfrm>
-          <a:prstGeom prst="rect">
-            <a:avLst/>
-          </a:prstGeom>
-          <a:noFill/>
-        </p:spPr>
-        <p:txBody>
-          <a:bodyPr wrap="none">
-            <a:spAutoFit/>
-          </a:bodyPr>
-          <a:lstStyle/>
-          <a:p>
-            <a:pPr algn="r"/>
-            <a:r>
-              <a:rPr sz="700">
-                <a:solidFill>
-                  <a:srgbClr val="A0B4D2"/>
-                </a:solidFill>
-                <a:latin typeface="JetBrains Mono"/>
-              </a:rPr>
-              <a:t>Schaubild</a:t>
             </a:r>
           </a:p>
         </p:txBody>
@@ -6648,7 +6733,7 @@
             <a:avLst/>
           </a:prstGeom>
           <a:solidFill>
-            <a:srgbClr val="EDEDF3"/>
+            <a:srgbClr val="FFFFFF"/>
           </a:solidFill>
           <a:ln>
             <a:noFill/>
@@ -6749,51 +6834,43 @@
                 </a:solidFill>
                 <a:latin typeface="JetBrains Mono"/>
               </a:rPr>
-              <a:t>M13  ·  INHALT</a:t>
-            </a:r>
-          </a:p>
-        </p:txBody>
-      </p:sp>
-      <p:sp>
-        <p:nvSpPr>
-          <p:cNvPr id="5" name="Rectangle 4"/>
-          <p:cNvSpPr/>
-          <p:nvPr/>
-        </p:nvSpPr>
-        <p:spPr>
-          <a:xfrm>
-            <a:off x="0" y="1234440"/>
-            <a:ext cx="12188952" cy="12700"/>
-          </a:xfrm>
-          <a:prstGeom prst="rect">
-            <a:avLst/>
-          </a:prstGeom>
-          <a:solidFill>
-            <a:srgbClr val="D8DFE4"/>
-          </a:solidFill>
-          <a:ln>
-            <a:noFill/>
-          </a:ln>
-        </p:spPr>
-        <p:style>
-          <a:lnRef idx="1">
-            <a:schemeClr val="accent1"/>
-          </a:lnRef>
-          <a:fillRef idx="3">
-            <a:schemeClr val="accent1"/>
-          </a:fillRef>
-          <a:effectRef idx="2">
-            <a:schemeClr val="accent1"/>
-          </a:effectRef>
-          <a:fontRef idx="minor">
-            <a:schemeClr val="lt1"/>
-          </a:fontRef>
-        </p:style>
-        <p:txBody>
-          <a:bodyPr rtlCol="0" anchor="ctr"/>
-          <a:lstStyle/>
-          <a:p>
-            <a:pPr algn="ctr"/>
+              <a:t>M13  ·  SCHAUBILD</a:t>
+            </a:r>
+          </a:p>
+        </p:txBody>
+      </p:sp>
+      <p:sp>
+        <p:nvSpPr>
+          <p:cNvPr id="5" name="TextBox 4"/>
+          <p:cNvSpPr txBox="1"/>
+          <p:nvPr/>
+        </p:nvSpPr>
+        <p:spPr>
+          <a:xfrm>
+            <a:off x="685800" y="502920"/>
+            <a:ext cx="10817352" cy="594360"/>
+          </a:xfrm>
+          <a:prstGeom prst="rect">
+            <a:avLst/>
+          </a:prstGeom>
+          <a:noFill/>
+        </p:spPr>
+        <p:txBody>
+          <a:bodyPr wrap="square">
+            <a:spAutoFit/>
+          </a:bodyPr>
+          <a:lstStyle/>
+          <a:p>
+            <a:pPr algn="l"/>
+            <a:r>
+              <a:rPr sz="2000" b="1" i="0">
+                <a:solidFill>
+                  <a:srgbClr val="1F2C56"/>
+                </a:solidFill>
+                <a:latin typeface="Source Serif 4"/>
+              </a:rPr>
+              <a:t>Verbundpartner-Matrix</a:t>
+            </a:r>
           </a:p>
         </p:txBody>
       </p:sp>
@@ -6805,8 +6882,8 @@
         </p:nvSpPr>
         <p:spPr>
           <a:xfrm>
-            <a:off x="685800" y="502920"/>
-            <a:ext cx="36576" cy="658368"/>
+            <a:off x="685800" y="1143000"/>
+            <a:ext cx="10817352" cy="25400"/>
           </a:xfrm>
           <a:prstGeom prst="rect">
             <a:avLst/>
@@ -6840,86 +6917,33 @@
           </a:p>
         </p:txBody>
       </p:sp>
-      <p:sp>
-        <p:nvSpPr>
-          <p:cNvPr id="7" name="TextBox 6"/>
-          <p:cNvSpPr txBox="1"/>
-          <p:nvPr/>
-        </p:nvSpPr>
-        <p:spPr>
-          <a:xfrm>
-            <a:off x="813816" y="502920"/>
-            <a:ext cx="10634472" cy="685800"/>
-          </a:xfrm>
-          <a:prstGeom prst="rect">
-            <a:avLst/>
-          </a:prstGeom>
-          <a:noFill/>
-        </p:spPr>
-        <p:txBody>
-          <a:bodyPr wrap="square">
-            <a:spAutoFit/>
-          </a:bodyPr>
-          <a:lstStyle/>
-          <a:p>
-            <a:pPr algn="l"/>
-            <a:r>
-              <a:rPr sz="2400" b="1" i="0">
-                <a:solidFill>
-                  <a:srgbClr val="1F2C56"/>
-                </a:solidFill>
-                <a:latin typeface="Source Serif 4"/>
-              </a:rPr>
-              <a:t>Arbeitsblatt A: Wallet-Share-Analyse</a:t>
-            </a:r>
-          </a:p>
-        </p:txBody>
-      </p:sp>
-      <p:sp>
-        <p:nvSpPr>
-          <p:cNvPr id="8" name="TextBox 7"/>
-          <p:cNvSpPr txBox="1"/>
-          <p:nvPr/>
-        </p:nvSpPr>
-        <p:spPr>
-          <a:xfrm>
-            <a:off x="685800" y="1417320"/>
-            <a:ext cx="10817352" cy="5029200"/>
-          </a:xfrm>
-          <a:prstGeom prst="rect">
-            <a:avLst/>
-          </a:prstGeom>
-          <a:noFill/>
-        </p:spPr>
-        <p:txBody>
-          <a:bodyPr wrap="square">
-            <a:spAutoFit/>
-          </a:bodyPr>
-          <a:lstStyle/>
-          <a:p>
-            <a:pPr>
-              <a:spcBef>
-                <a:spcPts val="400"/>
-              </a:spcBef>
-              <a:spcAft>
-                <a:spcPts val="200"/>
-              </a:spcAft>
-            </a:pPr>
-            <a:r>
-              <a:rPr sz="1200">
-                <a:solidFill>
-                  <a:srgbClr val="3D5466"/>
-                </a:solidFill>
-                <a:latin typeface="Arial"/>
-              </a:rPr>
-              <a:t>Meine Top-2 Cross-Selling-Hypothesen für diesen Kunden:</a:t>
-            </a:r>
-          </a:p>
-        </p:txBody>
-      </p:sp>
-      <p:sp>
-        <p:nvSpPr>
-          <p:cNvPr id="9" name="Rectangle 8"/>
+      <p:pic>
+        <p:nvPicPr>
+          <p:cNvPr id="7" name="Picture 6" descr="image.png"/>
+          <p:cNvPicPr>
+            <a:picLocks noChangeAspect="1"/>
+          </p:cNvPicPr>
+          <p:nvPr/>
+        </p:nvPicPr>
+        <p:blipFill>
+          <a:blip r:embed="rId2"/>
+          <a:stretch>
+            <a:fillRect/>
+          </a:stretch>
+        </p:blipFill>
+        <p:spPr>
+          <a:xfrm>
+            <a:off x="2433486" y="1325880"/>
+            <a:ext cx="7321979" cy="4937760"/>
+          </a:xfrm>
+          <a:prstGeom prst="rect">
+            <a:avLst/>
+          </a:prstGeom>
+        </p:spPr>
+      </p:pic>
+      <p:sp>
+        <p:nvSpPr>
+          <p:cNvPr id="8" name="Rectangle 7"/>
           <p:cNvSpPr/>
           <p:nvPr/>
         </p:nvSpPr>
@@ -6962,7 +6986,7 @@
       </p:sp>
       <p:sp>
         <p:nvSpPr>
-          <p:cNvPr id="10" name="TextBox 9"/>
+          <p:cNvPr id="9" name="TextBox 8"/>
           <p:cNvSpPr txBox="1"/>
           <p:nvPr/>
         </p:nvSpPr>
@@ -6991,6 +7015,41 @@
                 <a:latin typeface="JetBrains Mono"/>
               </a:rPr>
               <a:t>Benedikt Zoller Coaching  ·  FKB Campus  ·  M13</a:t>
+            </a:r>
+          </a:p>
+        </p:txBody>
+      </p:sp>
+      <p:sp>
+        <p:nvSpPr>
+          <p:cNvPr id="10" name="TextBox 9"/>
+          <p:cNvSpPr txBox="1"/>
+          <p:nvPr/>
+        </p:nvSpPr>
+        <p:spPr>
+          <a:xfrm>
+            <a:off x="7176211" y="6583680"/>
+            <a:ext cx="4326940" cy="256032"/>
+          </a:xfrm>
+          <a:prstGeom prst="rect">
+            <a:avLst/>
+          </a:prstGeom>
+          <a:noFill/>
+        </p:spPr>
+        <p:txBody>
+          <a:bodyPr wrap="none">
+            <a:spAutoFit/>
+          </a:bodyPr>
+          <a:lstStyle/>
+          <a:p>
+            <a:pPr algn="r"/>
+            <a:r>
+              <a:rPr sz="700">
+                <a:solidFill>
+                  <a:srgbClr val="A0B4D2"/>
+                </a:solidFill>
+                <a:latin typeface="JetBrains Mono"/>
+              </a:rPr>
+              <a:t>Schaubild</a:t>
             </a:r>
           </a:p>
         </p:txBody>
@@ -7250,14 +7309,56 @@
                 </a:solidFill>
                 <a:latin typeface="Source Serif 4"/>
               </a:rPr>
-              <a:t>Arbeitsblatt B: Cross-Selling-Gesprächsvorbereitung</a:t>
-            </a:r>
-          </a:p>
-        </p:txBody>
-      </p:sp>
-      <p:sp>
-        <p:nvSpPr>
-          <p:cNvPr id="8" name="Rectangle 7"/>
+              <a:t>Arbeitsblatt A: Wallet-Share-Analyse</a:t>
+            </a:r>
+          </a:p>
+        </p:txBody>
+      </p:sp>
+      <p:sp>
+        <p:nvSpPr>
+          <p:cNvPr id="8" name="TextBox 7"/>
+          <p:cNvSpPr txBox="1"/>
+          <p:nvPr/>
+        </p:nvSpPr>
+        <p:spPr>
+          <a:xfrm>
+            <a:off x="685800" y="1417320"/>
+            <a:ext cx="10817352" cy="5029200"/>
+          </a:xfrm>
+          <a:prstGeom prst="rect">
+            <a:avLst/>
+          </a:prstGeom>
+          <a:noFill/>
+        </p:spPr>
+        <p:txBody>
+          <a:bodyPr wrap="square">
+            <a:spAutoFit/>
+          </a:bodyPr>
+          <a:lstStyle/>
+          <a:p>
+            <a:pPr>
+              <a:spcBef>
+                <a:spcPts val="400"/>
+              </a:spcBef>
+              <a:spcAft>
+                <a:spcPts val="200"/>
+              </a:spcAft>
+            </a:pPr>
+            <a:r>
+              <a:rPr sz="1300">
+                <a:solidFill>
+                  <a:srgbClr val="3D5466"/>
+                </a:solidFill>
+                <a:latin typeface="Arial"/>
+              </a:rPr>
+              <a:t>▸  Meine Top-2 Cross-Selling-Hypothesen für diesen Kunden:</a:t>
+            </a:r>
+          </a:p>
+        </p:txBody>
+      </p:sp>
+      <p:sp>
+        <p:nvSpPr>
+          <p:cNvPr id="9" name="Rectangle 8"/>
           <p:cNvSpPr/>
           <p:nvPr/>
         </p:nvSpPr>
@@ -7300,7 +7401,7 @@
       </p:sp>
       <p:sp>
         <p:nvSpPr>
-          <p:cNvPr id="9" name="TextBox 8"/>
+          <p:cNvPr id="10" name="TextBox 9"/>
           <p:cNvSpPr txBox="1"/>
           <p:nvPr/>
         </p:nvSpPr>
@@ -7329,6 +7430,1359 @@
                 <a:latin typeface="JetBrains Mono"/>
               </a:rPr>
               <a:t>Benedikt Zoller Coaching  ·  FKB Campus  ·  M13</a:t>
+            </a:r>
+          </a:p>
+        </p:txBody>
+      </p:sp>
+    </p:spTree>
+  </p:cSld>
+  <p:clrMapOvr>
+    <a:masterClrMapping/>
+  </p:clrMapOvr>
+</p:sld>
+</file>
+
+<file path=ppt/slides/slide16.xml><?xml version="1.0" encoding="utf-8"?>
+<p:sld xmlns:a="http://schemas.openxmlformats.org/drawingml/2006/main" xmlns:p="http://schemas.openxmlformats.org/presentationml/2006/main" xmlns:r="http://schemas.openxmlformats.org/officeDocument/2006/relationships">
+  <p:cSld>
+    <p:spTree>
+      <p:nvGrpSpPr>
+        <p:cNvPr id="1" name=""/>
+        <p:cNvGrpSpPr/>
+        <p:nvPr/>
+      </p:nvGrpSpPr>
+      <p:grpSpPr/>
+      <p:sp>
+        <p:nvSpPr>
+          <p:cNvPr id="2" name="Rectangle 1"/>
+          <p:cNvSpPr/>
+          <p:nvPr/>
+        </p:nvSpPr>
+        <p:spPr>
+          <a:xfrm>
+            <a:off x="0" y="0"/>
+            <a:ext cx="12188952" cy="6858000"/>
+          </a:xfrm>
+          <a:prstGeom prst="rect">
+            <a:avLst/>
+          </a:prstGeom>
+          <a:solidFill>
+            <a:srgbClr val="FFFFFF"/>
+          </a:solidFill>
+          <a:ln>
+            <a:noFill/>
+          </a:ln>
+        </p:spPr>
+        <p:style>
+          <a:lnRef idx="1">
+            <a:schemeClr val="accent1"/>
+          </a:lnRef>
+          <a:fillRef idx="3">
+            <a:schemeClr val="accent1"/>
+          </a:fillRef>
+          <a:effectRef idx="2">
+            <a:schemeClr val="accent1"/>
+          </a:effectRef>
+          <a:fontRef idx="minor">
+            <a:schemeClr val="lt1"/>
+          </a:fontRef>
+        </p:style>
+        <p:txBody>
+          <a:bodyPr rtlCol="0" anchor="ctr"/>
+          <a:lstStyle/>
+          <a:p>
+            <a:pPr algn="ctr"/>
+          </a:p>
+        </p:txBody>
+      </p:sp>
+      <p:sp>
+        <p:nvSpPr>
+          <p:cNvPr id="3" name="Rectangle 2"/>
+          <p:cNvSpPr/>
+          <p:nvPr/>
+        </p:nvSpPr>
+        <p:spPr>
+          <a:xfrm>
+            <a:off x="0" y="0"/>
+            <a:ext cx="12188952" cy="50292"/>
+          </a:xfrm>
+          <a:prstGeom prst="rect">
+            <a:avLst/>
+          </a:prstGeom>
+          <a:solidFill>
+            <a:srgbClr val="1F2C56"/>
+          </a:solidFill>
+          <a:ln>
+            <a:noFill/>
+          </a:ln>
+        </p:spPr>
+        <p:style>
+          <a:lnRef idx="1">
+            <a:schemeClr val="accent1"/>
+          </a:lnRef>
+          <a:fillRef idx="3">
+            <a:schemeClr val="accent1"/>
+          </a:fillRef>
+          <a:effectRef idx="2">
+            <a:schemeClr val="accent1"/>
+          </a:effectRef>
+          <a:fontRef idx="minor">
+            <a:schemeClr val="lt1"/>
+          </a:fontRef>
+        </p:style>
+        <p:txBody>
+          <a:bodyPr rtlCol="0" anchor="ctr"/>
+          <a:lstStyle/>
+          <a:p>
+            <a:pPr algn="ctr"/>
+          </a:p>
+        </p:txBody>
+      </p:sp>
+      <p:sp>
+        <p:nvSpPr>
+          <p:cNvPr id="4" name="TextBox 3"/>
+          <p:cNvSpPr txBox="1"/>
+          <p:nvPr/>
+        </p:nvSpPr>
+        <p:spPr>
+          <a:xfrm>
+            <a:off x="685800" y="109728"/>
+            <a:ext cx="10817352" cy="228600"/>
+          </a:xfrm>
+          <a:prstGeom prst="rect">
+            <a:avLst/>
+          </a:prstGeom>
+          <a:noFill/>
+        </p:spPr>
+        <p:txBody>
+          <a:bodyPr wrap="none">
+            <a:spAutoFit/>
+          </a:bodyPr>
+          <a:lstStyle/>
+          <a:p>
+            <a:pPr algn="l"/>
+            <a:r>
+              <a:rPr sz="750">
+                <a:solidFill>
+                  <a:srgbClr val="78808C"/>
+                </a:solidFill>
+                <a:latin typeface="JetBrains Mono"/>
+              </a:rPr>
+              <a:t>M13  ·  ÜBERSICHT</a:t>
+            </a:r>
+          </a:p>
+        </p:txBody>
+      </p:sp>
+      <p:sp>
+        <p:nvSpPr>
+          <p:cNvPr id="5" name="TextBox 4"/>
+          <p:cNvSpPr txBox="1"/>
+          <p:nvPr/>
+        </p:nvSpPr>
+        <p:spPr>
+          <a:xfrm>
+            <a:off x="685800" y="502920"/>
+            <a:ext cx="10817352" cy="594360"/>
+          </a:xfrm>
+          <a:prstGeom prst="rect">
+            <a:avLst/>
+          </a:prstGeom>
+          <a:noFill/>
+        </p:spPr>
+        <p:txBody>
+          <a:bodyPr wrap="square">
+            <a:spAutoFit/>
+          </a:bodyPr>
+          <a:lstStyle/>
+          <a:p>
+            <a:pPr algn="l"/>
+            <a:r>
+              <a:rPr sz="2000" b="1" i="0">
+                <a:solidFill>
+                  <a:srgbClr val="1F2C56"/>
+                </a:solidFill>
+                <a:latin typeface="Source Serif 4"/>
+              </a:rPr>
+              <a:t>Arbeitsblatt A: Wallet-Share-Analyse</a:t>
+            </a:r>
+          </a:p>
+        </p:txBody>
+      </p:sp>
+      <p:sp>
+        <p:nvSpPr>
+          <p:cNvPr id="6" name="Rectangle 5"/>
+          <p:cNvSpPr/>
+          <p:nvPr/>
+        </p:nvSpPr>
+        <p:spPr>
+          <a:xfrm>
+            <a:off x="685800" y="1143000"/>
+            <a:ext cx="10817352" cy="25400"/>
+          </a:xfrm>
+          <a:prstGeom prst="rect">
+            <a:avLst/>
+          </a:prstGeom>
+          <a:solidFill>
+            <a:srgbClr val="D9C089"/>
+          </a:solidFill>
+          <a:ln>
+            <a:noFill/>
+          </a:ln>
+        </p:spPr>
+        <p:style>
+          <a:lnRef idx="1">
+            <a:schemeClr val="accent1"/>
+          </a:lnRef>
+          <a:fillRef idx="3">
+            <a:schemeClr val="accent1"/>
+          </a:fillRef>
+          <a:effectRef idx="2">
+            <a:schemeClr val="accent1"/>
+          </a:effectRef>
+          <a:fontRef idx="minor">
+            <a:schemeClr val="lt1"/>
+          </a:fontRef>
+        </p:style>
+        <p:txBody>
+          <a:bodyPr rtlCol="0" anchor="ctr"/>
+          <a:lstStyle/>
+          <a:p>
+            <a:pPr algn="ctr"/>
+          </a:p>
+        </p:txBody>
+      </p:sp>
+      <p:graphicFrame>
+        <p:nvGraphicFramePr>
+          <p:cNvPr id="7" name="Table 6"/>
+          <p:cNvGraphicFramePr>
+            <a:graphicFrameLocks noGrp="1"/>
+          </p:cNvGraphicFramePr>
+          <p:nvPr/>
+        </p:nvGraphicFramePr>
+        <p:xfrm>
+          <a:off x="685800" y="1417320"/>
+          <a:ext cx="10817352" cy="2688336"/>
+        </p:xfrm>
+        <a:graphic>
+          <a:graphicData uri="http://schemas.openxmlformats.org/drawingml/2006/table">
+            <a:tbl>
+              <a:tblPr firstRow="1" bandRow="1">
+                <a:tableStyleId>{5C22544A-7EE6-4342-B048-85BDC9FD1C3A}</a:tableStyleId>
+              </a:tblPr>
+              <a:tblGrid>
+                <a:gridCol w="2163470"/>
+                <a:gridCol w="2163470"/>
+                <a:gridCol w="2163470"/>
+                <a:gridCol w="2163470"/>
+                <a:gridCol w="2163472"/>
+              </a:tblGrid>
+              <a:tr h="384048">
+                <a:tc>
+                  <a:txBody>
+                    <a:bodyPr/>
+                    <a:lstStyle/>
+                    <a:p>
+                      <a:r>
+                        <a:rPr sz="1100" b="1">
+                          <a:solidFill>
+                            <a:srgbClr val="FFFFFF"/>
+                          </a:solidFill>
+                          <a:latin typeface="Arial"/>
+                        </a:rPr>
+                        <a:t>Dimension</a:t>
+                      </a:r>
+                    </a:p>
+                  </a:txBody>
+                  <a:tcPr>
+                    <a:solidFill>
+                      <a:srgbClr val="1F2C56"/>
+                    </a:solidFill>
+                  </a:tcPr>
+                </a:tc>
+                <a:tc>
+                  <a:txBody>
+                    <a:bodyPr/>
+                    <a:lstStyle/>
+                    <a:p>
+                      <a:r>
+                        <a:rPr sz="1100" b="1">
+                          <a:solidFill>
+                            <a:srgbClr val="FFFFFF"/>
+                          </a:solidFill>
+                          <a:latin typeface="Arial"/>
+                        </a:rPr>
+                        <a:t>Aktueller Stand (uns bekannt)</a:t>
+                      </a:r>
+                    </a:p>
+                  </a:txBody>
+                  <a:tcPr>
+                    <a:solidFill>
+                      <a:srgbClr val="1F2C56"/>
+                    </a:solidFill>
+                  </a:tcPr>
+                </a:tc>
+                <a:tc>
+                  <a:txBody>
+                    <a:bodyPr/>
+                    <a:lstStyle/>
+                    <a:p>
+                      <a:r>
+                        <a:rPr sz="1100" b="1">
+                          <a:solidFill>
+                            <a:srgbClr val="FFFFFF"/>
+                          </a:solidFill>
+                          <a:latin typeface="Arial"/>
+                        </a:rPr>
+                        <a:t>Schätzung Gesamtbedarf</a:t>
+                      </a:r>
+                    </a:p>
+                  </a:txBody>
+                  <a:tcPr>
+                    <a:solidFill>
+                      <a:srgbClr val="1F2C56"/>
+                    </a:solidFill>
+                  </a:tcPr>
+                </a:tc>
+                <a:tc>
+                  <a:txBody>
+                    <a:bodyPr/>
+                    <a:lstStyle/>
+                    <a:p>
+                      <a:r>
+                        <a:rPr sz="1100" b="1">
+                          <a:solidFill>
+                            <a:srgbClr val="FFFFFF"/>
+                          </a:solidFill>
+                          <a:latin typeface="Arial"/>
+                        </a:rPr>
+                        <a:t>Wallet-Share (%)</a:t>
+                      </a:r>
+                    </a:p>
+                  </a:txBody>
+                  <a:tcPr>
+                    <a:solidFill>
+                      <a:srgbClr val="1F2C56"/>
+                    </a:solidFill>
+                  </a:tcPr>
+                </a:tc>
+                <a:tc>
+                  <a:txBody>
+                    <a:bodyPr/>
+                    <a:lstStyle/>
+                    <a:p>
+                      <a:r>
+                        <a:rPr sz="1100" b="1">
+                          <a:solidFill>
+                            <a:srgbClr val="FFFFFF"/>
+                          </a:solidFill>
+                          <a:latin typeface="Arial"/>
+                        </a:rPr>
+                        <a:t>Cross-Selling-Potenzial</a:t>
+                      </a:r>
+                    </a:p>
+                  </a:txBody>
+                  <a:tcPr>
+                    <a:solidFill>
+                      <a:srgbClr val="1F2C56"/>
+                    </a:solidFill>
+                  </a:tcPr>
+                </a:tc>
+              </a:tr>
+              <a:tr h="384048">
+                <a:tc>
+                  <a:txBody>
+                    <a:bodyPr/>
+                    <a:lstStyle/>
+                    <a:p>
+                      <a:r>
+                        <a:rPr sz="1050">
+                          <a:solidFill>
+                            <a:srgbClr val="3D5466"/>
+                          </a:solidFill>
+                          <a:latin typeface="Arial"/>
+                        </a:rPr>
+                        <a:t>Finanzierung</a:t>
+                      </a:r>
+                    </a:p>
+                  </a:txBody>
+                  <a:tcPr/>
+                </a:tc>
+                <a:tc>
+                  <a:txBody>
+                    <a:bodyPr/>
+                    <a:lstStyle/>
+                    <a:p/>
+                  </a:txBody>
+                  <a:tcPr/>
+                </a:tc>
+                <a:tc>
+                  <a:txBody>
+                    <a:bodyPr/>
+                    <a:lstStyle/>
+                    <a:p/>
+                  </a:txBody>
+                  <a:tcPr/>
+                </a:tc>
+                <a:tc>
+                  <a:txBody>
+                    <a:bodyPr/>
+                    <a:lstStyle/>
+                    <a:p/>
+                  </a:txBody>
+                  <a:tcPr/>
+                </a:tc>
+                <a:tc>
+                  <a:txBody>
+                    <a:bodyPr/>
+                    <a:lstStyle/>
+                    <a:p/>
+                  </a:txBody>
+                  <a:tcPr/>
+                </a:tc>
+              </a:tr>
+              <a:tr h="384048">
+                <a:tc>
+                  <a:txBody>
+                    <a:bodyPr/>
+                    <a:lstStyle/>
+                    <a:p>
+                      <a:r>
+                        <a:rPr sz="1050">
+                          <a:solidFill>
+                            <a:srgbClr val="3D5466"/>
+                          </a:solidFill>
+                          <a:latin typeface="Arial"/>
+                        </a:rPr>
+                        <a:t>Absicherung</a:t>
+                      </a:r>
+                    </a:p>
+                  </a:txBody>
+                  <a:tcPr/>
+                </a:tc>
+                <a:tc>
+                  <a:txBody>
+                    <a:bodyPr/>
+                    <a:lstStyle/>
+                    <a:p/>
+                  </a:txBody>
+                  <a:tcPr/>
+                </a:tc>
+                <a:tc>
+                  <a:txBody>
+                    <a:bodyPr/>
+                    <a:lstStyle/>
+                    <a:p/>
+                  </a:txBody>
+                  <a:tcPr/>
+                </a:tc>
+                <a:tc>
+                  <a:txBody>
+                    <a:bodyPr/>
+                    <a:lstStyle/>
+                    <a:p/>
+                  </a:txBody>
+                  <a:tcPr/>
+                </a:tc>
+                <a:tc>
+                  <a:txBody>
+                    <a:bodyPr/>
+                    <a:lstStyle/>
+                    <a:p/>
+                  </a:txBody>
+                  <a:tcPr/>
+                </a:tc>
+              </a:tr>
+              <a:tr h="384048">
+                <a:tc>
+                  <a:txBody>
+                    <a:bodyPr/>
+                    <a:lstStyle/>
+                    <a:p>
+                      <a:r>
+                        <a:rPr sz="1050">
+                          <a:solidFill>
+                            <a:srgbClr val="3D5466"/>
+                          </a:solidFill>
+                          <a:latin typeface="Arial"/>
+                        </a:rPr>
+                        <a:t>Kapitalanlage</a:t>
+                      </a:r>
+                    </a:p>
+                  </a:txBody>
+                  <a:tcPr/>
+                </a:tc>
+                <a:tc>
+                  <a:txBody>
+                    <a:bodyPr/>
+                    <a:lstStyle/>
+                    <a:p/>
+                  </a:txBody>
+                  <a:tcPr/>
+                </a:tc>
+                <a:tc>
+                  <a:txBody>
+                    <a:bodyPr/>
+                    <a:lstStyle/>
+                    <a:p/>
+                  </a:txBody>
+                  <a:tcPr/>
+                </a:tc>
+                <a:tc>
+                  <a:txBody>
+                    <a:bodyPr/>
+                    <a:lstStyle/>
+                    <a:p/>
+                  </a:txBody>
+                  <a:tcPr/>
+                </a:tc>
+                <a:tc>
+                  <a:txBody>
+                    <a:bodyPr/>
+                    <a:lstStyle/>
+                    <a:p/>
+                  </a:txBody>
+                  <a:tcPr/>
+                </a:tc>
+              </a:tr>
+              <a:tr h="384048">
+                <a:tc>
+                  <a:txBody>
+                    <a:bodyPr/>
+                    <a:lstStyle/>
+                    <a:p>
+                      <a:r>
+                        <a:rPr sz="1050">
+                          <a:solidFill>
+                            <a:srgbClr val="3D5466"/>
+                          </a:solidFill>
+                          <a:latin typeface="Arial"/>
+                        </a:rPr>
+                        <a:t>Zahlungsverkehr</a:t>
+                      </a:r>
+                    </a:p>
+                  </a:txBody>
+                  <a:tcPr/>
+                </a:tc>
+                <a:tc>
+                  <a:txBody>
+                    <a:bodyPr/>
+                    <a:lstStyle/>
+                    <a:p/>
+                  </a:txBody>
+                  <a:tcPr/>
+                </a:tc>
+                <a:tc>
+                  <a:txBody>
+                    <a:bodyPr/>
+                    <a:lstStyle/>
+                    <a:p/>
+                  </a:txBody>
+                  <a:tcPr/>
+                </a:tc>
+                <a:tc>
+                  <a:txBody>
+                    <a:bodyPr/>
+                    <a:lstStyle/>
+                    <a:p/>
+                  </a:txBody>
+                  <a:tcPr/>
+                </a:tc>
+                <a:tc>
+                  <a:txBody>
+                    <a:bodyPr/>
+                    <a:lstStyle/>
+                    <a:p/>
+                  </a:txBody>
+                  <a:tcPr/>
+                </a:tc>
+              </a:tr>
+              <a:tr h="384048">
+                <a:tc>
+                  <a:txBody>
+                    <a:bodyPr/>
+                    <a:lstStyle/>
+                    <a:p>
+                      <a:r>
+                        <a:rPr sz="1050">
+                          <a:solidFill>
+                            <a:srgbClr val="3D5466"/>
+                          </a:solidFill>
+                          <a:latin typeface="Arial"/>
+                        </a:rPr>
+                        <a:t>Privat/Gesellschafter</a:t>
+                      </a:r>
+                    </a:p>
+                  </a:txBody>
+                  <a:tcPr/>
+                </a:tc>
+                <a:tc>
+                  <a:txBody>
+                    <a:bodyPr/>
+                    <a:lstStyle/>
+                    <a:p/>
+                  </a:txBody>
+                  <a:tcPr/>
+                </a:tc>
+                <a:tc>
+                  <a:txBody>
+                    <a:bodyPr/>
+                    <a:lstStyle/>
+                    <a:p/>
+                  </a:txBody>
+                  <a:tcPr/>
+                </a:tc>
+                <a:tc>
+                  <a:txBody>
+                    <a:bodyPr/>
+                    <a:lstStyle/>
+                    <a:p/>
+                  </a:txBody>
+                  <a:tcPr/>
+                </a:tc>
+                <a:tc>
+                  <a:txBody>
+                    <a:bodyPr/>
+                    <a:lstStyle/>
+                    <a:p/>
+                  </a:txBody>
+                  <a:tcPr/>
+                </a:tc>
+              </a:tr>
+              <a:tr h="384048">
+                <a:tc>
+                  <a:txBody>
+                    <a:bodyPr/>
+                    <a:lstStyle/>
+                    <a:p>
+                      <a:r>
+                        <a:rPr sz="1050">
+                          <a:solidFill>
+                            <a:srgbClr val="3D5466"/>
+                          </a:solidFill>
+                          <a:latin typeface="Arial"/>
+                        </a:rPr>
+                        <a:t>Gesamt</a:t>
+                      </a:r>
+                    </a:p>
+                  </a:txBody>
+                  <a:tcPr/>
+                </a:tc>
+                <a:tc>
+                  <a:txBody>
+                    <a:bodyPr/>
+                    <a:lstStyle/>
+                    <a:p/>
+                  </a:txBody>
+                  <a:tcPr/>
+                </a:tc>
+                <a:tc>
+                  <a:txBody>
+                    <a:bodyPr/>
+                    <a:lstStyle/>
+                    <a:p/>
+                  </a:txBody>
+                  <a:tcPr/>
+                </a:tc>
+                <a:tc>
+                  <a:txBody>
+                    <a:bodyPr/>
+                    <a:lstStyle/>
+                    <a:p/>
+                  </a:txBody>
+                  <a:tcPr/>
+                </a:tc>
+                <a:tc>
+                  <a:txBody>
+                    <a:bodyPr/>
+                    <a:lstStyle/>
+                    <a:p/>
+                  </a:txBody>
+                  <a:tcPr/>
+                </a:tc>
+              </a:tr>
+            </a:tbl>
+          </a:graphicData>
+        </a:graphic>
+      </p:graphicFrame>
+      <p:sp>
+        <p:nvSpPr>
+          <p:cNvPr id="8" name="Rectangle 7"/>
+          <p:cNvSpPr/>
+          <p:nvPr/>
+        </p:nvSpPr>
+        <p:spPr>
+          <a:xfrm>
+            <a:off x="0" y="6510528"/>
+            <a:ext cx="12188952" cy="347472"/>
+          </a:xfrm>
+          <a:prstGeom prst="rect">
+            <a:avLst/>
+          </a:prstGeom>
+          <a:solidFill>
+            <a:srgbClr val="0A1937"/>
+          </a:solidFill>
+          <a:ln>
+            <a:noFill/>
+          </a:ln>
+        </p:spPr>
+        <p:style>
+          <a:lnRef idx="1">
+            <a:schemeClr val="accent1"/>
+          </a:lnRef>
+          <a:fillRef idx="3">
+            <a:schemeClr val="accent1"/>
+          </a:fillRef>
+          <a:effectRef idx="2">
+            <a:schemeClr val="accent1"/>
+          </a:effectRef>
+          <a:fontRef idx="minor">
+            <a:schemeClr val="lt1"/>
+          </a:fontRef>
+        </p:style>
+        <p:txBody>
+          <a:bodyPr rtlCol="0" anchor="ctr"/>
+          <a:lstStyle/>
+          <a:p>
+            <a:pPr algn="ctr"/>
+          </a:p>
+        </p:txBody>
+      </p:sp>
+      <p:sp>
+        <p:nvSpPr>
+          <p:cNvPr id="9" name="TextBox 8"/>
+          <p:cNvSpPr txBox="1"/>
+          <p:nvPr/>
+        </p:nvSpPr>
+        <p:spPr>
+          <a:xfrm>
+            <a:off x="685800" y="6583680"/>
+            <a:ext cx="6490411" cy="256032"/>
+          </a:xfrm>
+          <a:prstGeom prst="rect">
+            <a:avLst/>
+          </a:prstGeom>
+          <a:noFill/>
+        </p:spPr>
+        <p:txBody>
+          <a:bodyPr wrap="none">
+            <a:spAutoFit/>
+          </a:bodyPr>
+          <a:lstStyle/>
+          <a:p>
+            <a:pPr algn="l"/>
+            <a:r>
+              <a:rPr sz="700">
+                <a:solidFill>
+                  <a:srgbClr val="A0B4D2"/>
+                </a:solidFill>
+                <a:latin typeface="JetBrains Mono"/>
+              </a:rPr>
+              <a:t>Benedikt Zoller Coaching  ·  FKB Campus  ·  M13</a:t>
+            </a:r>
+          </a:p>
+        </p:txBody>
+      </p:sp>
+      <p:sp>
+        <p:nvSpPr>
+          <p:cNvPr id="10" name="TextBox 9"/>
+          <p:cNvSpPr txBox="1"/>
+          <p:nvPr/>
+        </p:nvSpPr>
+        <p:spPr>
+          <a:xfrm>
+            <a:off x="7176211" y="6583680"/>
+            <a:ext cx="4326940" cy="256032"/>
+          </a:xfrm>
+          <a:prstGeom prst="rect">
+            <a:avLst/>
+          </a:prstGeom>
+          <a:noFill/>
+        </p:spPr>
+        <p:txBody>
+          <a:bodyPr wrap="none">
+            <a:spAutoFit/>
+          </a:bodyPr>
+          <a:lstStyle/>
+          <a:p>
+            <a:pPr algn="r"/>
+            <a:r>
+              <a:rPr sz="700">
+                <a:solidFill>
+                  <a:srgbClr val="A0B4D2"/>
+                </a:solidFill>
+                <a:latin typeface="JetBrains Mono"/>
+              </a:rPr>
+              <a:t>Übersicht</a:t>
+            </a:r>
+          </a:p>
+        </p:txBody>
+      </p:sp>
+    </p:spTree>
+  </p:cSld>
+  <p:clrMapOvr>
+    <a:masterClrMapping/>
+  </p:clrMapOvr>
+</p:sld>
+</file>
+
+<file path=ppt/slides/slide17.xml><?xml version="1.0" encoding="utf-8"?>
+<p:sld xmlns:a="http://schemas.openxmlformats.org/drawingml/2006/main" xmlns:p="http://schemas.openxmlformats.org/presentationml/2006/main" xmlns:r="http://schemas.openxmlformats.org/officeDocument/2006/relationships">
+  <p:cSld>
+    <p:spTree>
+      <p:nvGrpSpPr>
+        <p:cNvPr id="1" name=""/>
+        <p:cNvGrpSpPr/>
+        <p:nvPr/>
+      </p:nvGrpSpPr>
+      <p:grpSpPr/>
+      <p:sp>
+        <p:nvSpPr>
+          <p:cNvPr id="2" name="Rectangle 1"/>
+          <p:cNvSpPr/>
+          <p:nvPr/>
+        </p:nvSpPr>
+        <p:spPr>
+          <a:xfrm>
+            <a:off x="0" y="0"/>
+            <a:ext cx="12188952" cy="6858000"/>
+          </a:xfrm>
+          <a:prstGeom prst="rect">
+            <a:avLst/>
+          </a:prstGeom>
+          <a:solidFill>
+            <a:srgbClr val="FFFFFF"/>
+          </a:solidFill>
+          <a:ln>
+            <a:noFill/>
+          </a:ln>
+        </p:spPr>
+        <p:style>
+          <a:lnRef idx="1">
+            <a:schemeClr val="accent1"/>
+          </a:lnRef>
+          <a:fillRef idx="3">
+            <a:schemeClr val="accent1"/>
+          </a:fillRef>
+          <a:effectRef idx="2">
+            <a:schemeClr val="accent1"/>
+          </a:effectRef>
+          <a:fontRef idx="minor">
+            <a:schemeClr val="lt1"/>
+          </a:fontRef>
+        </p:style>
+        <p:txBody>
+          <a:bodyPr rtlCol="0" anchor="ctr"/>
+          <a:lstStyle/>
+          <a:p>
+            <a:pPr algn="ctr"/>
+          </a:p>
+        </p:txBody>
+      </p:sp>
+      <p:sp>
+        <p:nvSpPr>
+          <p:cNvPr id="3" name="Rectangle 2"/>
+          <p:cNvSpPr/>
+          <p:nvPr/>
+        </p:nvSpPr>
+        <p:spPr>
+          <a:xfrm>
+            <a:off x="0" y="0"/>
+            <a:ext cx="12188952" cy="50292"/>
+          </a:xfrm>
+          <a:prstGeom prst="rect">
+            <a:avLst/>
+          </a:prstGeom>
+          <a:solidFill>
+            <a:srgbClr val="1F2C56"/>
+          </a:solidFill>
+          <a:ln>
+            <a:noFill/>
+          </a:ln>
+        </p:spPr>
+        <p:style>
+          <a:lnRef idx="1">
+            <a:schemeClr val="accent1"/>
+          </a:lnRef>
+          <a:fillRef idx="3">
+            <a:schemeClr val="accent1"/>
+          </a:fillRef>
+          <a:effectRef idx="2">
+            <a:schemeClr val="accent1"/>
+          </a:effectRef>
+          <a:fontRef idx="minor">
+            <a:schemeClr val="lt1"/>
+          </a:fontRef>
+        </p:style>
+        <p:txBody>
+          <a:bodyPr rtlCol="0" anchor="ctr"/>
+          <a:lstStyle/>
+          <a:p>
+            <a:pPr algn="ctr"/>
+          </a:p>
+        </p:txBody>
+      </p:sp>
+      <p:sp>
+        <p:nvSpPr>
+          <p:cNvPr id="4" name="TextBox 3"/>
+          <p:cNvSpPr txBox="1"/>
+          <p:nvPr/>
+        </p:nvSpPr>
+        <p:spPr>
+          <a:xfrm>
+            <a:off x="685800" y="109728"/>
+            <a:ext cx="10817352" cy="228600"/>
+          </a:xfrm>
+          <a:prstGeom prst="rect">
+            <a:avLst/>
+          </a:prstGeom>
+          <a:noFill/>
+        </p:spPr>
+        <p:txBody>
+          <a:bodyPr wrap="none">
+            <a:spAutoFit/>
+          </a:bodyPr>
+          <a:lstStyle/>
+          <a:p>
+            <a:pPr algn="l"/>
+            <a:r>
+              <a:rPr sz="750">
+                <a:solidFill>
+                  <a:srgbClr val="78808C"/>
+                </a:solidFill>
+                <a:latin typeface="JetBrains Mono"/>
+              </a:rPr>
+              <a:t>M13  ·  ÜBERSICHT</a:t>
+            </a:r>
+          </a:p>
+        </p:txBody>
+      </p:sp>
+      <p:sp>
+        <p:nvSpPr>
+          <p:cNvPr id="5" name="TextBox 4"/>
+          <p:cNvSpPr txBox="1"/>
+          <p:nvPr/>
+        </p:nvSpPr>
+        <p:spPr>
+          <a:xfrm>
+            <a:off x="685800" y="502920"/>
+            <a:ext cx="10817352" cy="594360"/>
+          </a:xfrm>
+          <a:prstGeom prst="rect">
+            <a:avLst/>
+          </a:prstGeom>
+          <a:noFill/>
+        </p:spPr>
+        <p:txBody>
+          <a:bodyPr wrap="square">
+            <a:spAutoFit/>
+          </a:bodyPr>
+          <a:lstStyle/>
+          <a:p>
+            <a:pPr algn="l"/>
+            <a:r>
+              <a:rPr sz="2000" b="1" i="0">
+                <a:solidFill>
+                  <a:srgbClr val="1F2C56"/>
+                </a:solidFill>
+                <a:latin typeface="Source Serif 4"/>
+              </a:rPr>
+              <a:t>Arbeitsblatt B: Cross-Selling-Gesprächsvorbereitung</a:t>
+            </a:r>
+          </a:p>
+        </p:txBody>
+      </p:sp>
+      <p:sp>
+        <p:nvSpPr>
+          <p:cNvPr id="6" name="Rectangle 5"/>
+          <p:cNvSpPr/>
+          <p:nvPr/>
+        </p:nvSpPr>
+        <p:spPr>
+          <a:xfrm>
+            <a:off x="685800" y="1143000"/>
+            <a:ext cx="10817352" cy="25400"/>
+          </a:xfrm>
+          <a:prstGeom prst="rect">
+            <a:avLst/>
+          </a:prstGeom>
+          <a:solidFill>
+            <a:srgbClr val="D9C089"/>
+          </a:solidFill>
+          <a:ln>
+            <a:noFill/>
+          </a:ln>
+        </p:spPr>
+        <p:style>
+          <a:lnRef idx="1">
+            <a:schemeClr val="accent1"/>
+          </a:lnRef>
+          <a:fillRef idx="3">
+            <a:schemeClr val="accent1"/>
+          </a:fillRef>
+          <a:effectRef idx="2">
+            <a:schemeClr val="accent1"/>
+          </a:effectRef>
+          <a:fontRef idx="minor">
+            <a:schemeClr val="lt1"/>
+          </a:fontRef>
+        </p:style>
+        <p:txBody>
+          <a:bodyPr rtlCol="0" anchor="ctr"/>
+          <a:lstStyle/>
+          <a:p>
+            <a:pPr algn="ctr"/>
+          </a:p>
+        </p:txBody>
+      </p:sp>
+      <p:graphicFrame>
+        <p:nvGraphicFramePr>
+          <p:cNvPr id="7" name="Table 6"/>
+          <p:cNvGraphicFramePr>
+            <a:graphicFrameLocks noGrp="1"/>
+          </p:cNvGraphicFramePr>
+          <p:nvPr/>
+        </p:nvGraphicFramePr>
+        <p:xfrm>
+          <a:off x="685800" y="1417320"/>
+          <a:ext cx="10817352" cy="2688336"/>
+        </p:xfrm>
+        <a:graphic>
+          <a:graphicData uri="http://schemas.openxmlformats.org/drawingml/2006/table">
+            <a:tbl>
+              <a:tblPr firstRow="1" bandRow="1">
+                <a:tableStyleId>{5C22544A-7EE6-4342-B048-85BDC9FD1C3A}</a:tableStyleId>
+              </a:tblPr>
+              <a:tblGrid>
+                <a:gridCol w="5408676"/>
+                <a:gridCol w="5408676"/>
+              </a:tblGrid>
+              <a:tr h="384048">
+                <a:tc>
+                  <a:txBody>
+                    <a:bodyPr/>
+                    <a:lstStyle/>
+                    <a:p>
+                      <a:r>
+                        <a:rPr sz="1100" b="1">
+                          <a:solidFill>
+                            <a:srgbClr val="FFFFFF"/>
+                          </a:solidFill>
+                          <a:latin typeface="Arial"/>
+                        </a:rPr>
+                        <a:t>Schritt</a:t>
+                      </a:r>
+                    </a:p>
+                  </a:txBody>
+                  <a:tcPr>
+                    <a:solidFill>
+                      <a:srgbClr val="1F2C56"/>
+                    </a:solidFill>
+                  </a:tcPr>
+                </a:tc>
+                <a:tc>
+                  <a:txBody>
+                    <a:bodyPr/>
+                    <a:lstStyle/>
+                    <a:p>
+                      <a:r>
+                        <a:rPr sz="1100" b="1">
+                          <a:solidFill>
+                            <a:srgbClr val="FFFFFF"/>
+                          </a:solidFill>
+                          <a:latin typeface="Arial"/>
+                        </a:rPr>
+                        <a:t>Meine Vorbereitung</a:t>
+                      </a:r>
+                    </a:p>
+                  </a:txBody>
+                  <a:tcPr>
+                    <a:solidFill>
+                      <a:srgbClr val="1F2C56"/>
+                    </a:solidFill>
+                  </a:tcPr>
+                </a:tc>
+              </a:tr>
+              <a:tr h="384048">
+                <a:tc>
+                  <a:txBody>
+                    <a:bodyPr/>
+                    <a:lstStyle/>
+                    <a:p>
+                      <a:r>
+                        <a:rPr sz="1050">
+                          <a:solidFill>
+                            <a:srgbClr val="3D5466"/>
+                          </a:solidFill>
+                          <a:latin typeface="Arial"/>
+                        </a:rPr>
+                        <a:t>Situationsfrage</a:t>
+                      </a:r>
+                    </a:p>
+                  </a:txBody>
+                  <a:tcPr/>
+                </a:tc>
+                <a:tc>
+                  <a:txBody>
+                    <a:bodyPr/>
+                    <a:lstStyle/>
+                    <a:p/>
+                  </a:txBody>
+                  <a:tcPr/>
+                </a:tc>
+              </a:tr>
+              <a:tr h="384048">
+                <a:tc>
+                  <a:txBody>
+                    <a:bodyPr/>
+                    <a:lstStyle/>
+                    <a:p>
+                      <a:r>
+                        <a:rPr sz="1050">
+                          <a:solidFill>
+                            <a:srgbClr val="3D5466"/>
+                          </a:solidFill>
+                          <a:latin typeface="Arial"/>
+                        </a:rPr>
+                        <a:t>Problemfrage</a:t>
+                      </a:r>
+                    </a:p>
+                  </a:txBody>
+                  <a:tcPr/>
+                </a:tc>
+                <a:tc>
+                  <a:txBody>
+                    <a:bodyPr/>
+                    <a:lstStyle/>
+                    <a:p/>
+                  </a:txBody>
+                  <a:tcPr/>
+                </a:tc>
+              </a:tr>
+              <a:tr h="384048">
+                <a:tc>
+                  <a:txBody>
+                    <a:bodyPr/>
+                    <a:lstStyle/>
+                    <a:p>
+                      <a:r>
+                        <a:rPr sz="1050">
+                          <a:solidFill>
+                            <a:srgbClr val="3D5466"/>
+                          </a:solidFill>
+                          <a:latin typeface="Arial"/>
+                        </a:rPr>
+                        <a:t>Implikationsfrage</a:t>
+                      </a:r>
+                    </a:p>
+                  </a:txBody>
+                  <a:tcPr/>
+                </a:tc>
+                <a:tc>
+                  <a:txBody>
+                    <a:bodyPr/>
+                    <a:lstStyle/>
+                    <a:p/>
+                  </a:txBody>
+                  <a:tcPr/>
+                </a:tc>
+              </a:tr>
+              <a:tr h="384048">
+                <a:tc>
+                  <a:txBody>
+                    <a:bodyPr/>
+                    <a:lstStyle/>
+                    <a:p>
+                      <a:r>
+                        <a:rPr sz="1050">
+                          <a:solidFill>
+                            <a:srgbClr val="3D5466"/>
+                          </a:solidFill>
+                          <a:latin typeface="Arial"/>
+                        </a:rPr>
+                        <a:t>Nutzenfrage</a:t>
+                      </a:r>
+                    </a:p>
+                  </a:txBody>
+                  <a:tcPr/>
+                </a:tc>
+                <a:tc>
+                  <a:txBody>
+                    <a:bodyPr/>
+                    <a:lstStyle/>
+                    <a:p/>
+                  </a:txBody>
+                  <a:tcPr/>
+                </a:tc>
+              </a:tr>
+              <a:tr h="384048">
+                <a:tc>
+                  <a:txBody>
+                    <a:bodyPr/>
+                    <a:lstStyle/>
+                    <a:p>
+                      <a:r>
+                        <a:rPr sz="1050">
+                          <a:solidFill>
+                            <a:srgbClr val="3D5466"/>
+                          </a:solidFill>
+                          <a:latin typeface="Arial"/>
+                        </a:rPr>
+                        <a:t>Verbundpartner / Lösung</a:t>
+                      </a:r>
+                    </a:p>
+                  </a:txBody>
+                  <a:tcPr/>
+                </a:tc>
+                <a:tc>
+                  <a:txBody>
+                    <a:bodyPr/>
+                    <a:lstStyle/>
+                    <a:p/>
+                  </a:txBody>
+                  <a:tcPr/>
+                </a:tc>
+              </a:tr>
+              <a:tr h="384048">
+                <a:tc>
+                  <a:txBody>
+                    <a:bodyPr/>
+                    <a:lstStyle/>
+                    <a:p>
+                      <a:r>
+                        <a:rPr sz="1050">
+                          <a:solidFill>
+                            <a:srgbClr val="3D5466"/>
+                          </a:solidFill>
+                          <a:latin typeface="Arial"/>
+                        </a:rPr>
+                        <a:t>Dokumentation in agree</a:t>
+                      </a:r>
+                    </a:p>
+                  </a:txBody>
+                  <a:tcPr/>
+                </a:tc>
+                <a:tc>
+                  <a:txBody>
+                    <a:bodyPr/>
+                    <a:lstStyle/>
+                    <a:p/>
+                  </a:txBody>
+                  <a:tcPr/>
+                </a:tc>
+              </a:tr>
+            </a:tbl>
+          </a:graphicData>
+        </a:graphic>
+      </p:graphicFrame>
+      <p:sp>
+        <p:nvSpPr>
+          <p:cNvPr id="8" name="Rectangle 7"/>
+          <p:cNvSpPr/>
+          <p:nvPr/>
+        </p:nvSpPr>
+        <p:spPr>
+          <a:xfrm>
+            <a:off x="0" y="6510528"/>
+            <a:ext cx="12188952" cy="347472"/>
+          </a:xfrm>
+          <a:prstGeom prst="rect">
+            <a:avLst/>
+          </a:prstGeom>
+          <a:solidFill>
+            <a:srgbClr val="0A1937"/>
+          </a:solidFill>
+          <a:ln>
+            <a:noFill/>
+          </a:ln>
+        </p:spPr>
+        <p:style>
+          <a:lnRef idx="1">
+            <a:schemeClr val="accent1"/>
+          </a:lnRef>
+          <a:fillRef idx="3">
+            <a:schemeClr val="accent1"/>
+          </a:fillRef>
+          <a:effectRef idx="2">
+            <a:schemeClr val="accent1"/>
+          </a:effectRef>
+          <a:fontRef idx="minor">
+            <a:schemeClr val="lt1"/>
+          </a:fontRef>
+        </p:style>
+        <p:txBody>
+          <a:bodyPr rtlCol="0" anchor="ctr"/>
+          <a:lstStyle/>
+          <a:p>
+            <a:pPr algn="ctr"/>
+          </a:p>
+        </p:txBody>
+      </p:sp>
+      <p:sp>
+        <p:nvSpPr>
+          <p:cNvPr id="9" name="TextBox 8"/>
+          <p:cNvSpPr txBox="1"/>
+          <p:nvPr/>
+        </p:nvSpPr>
+        <p:spPr>
+          <a:xfrm>
+            <a:off x="685800" y="6583680"/>
+            <a:ext cx="6490411" cy="256032"/>
+          </a:xfrm>
+          <a:prstGeom prst="rect">
+            <a:avLst/>
+          </a:prstGeom>
+          <a:noFill/>
+        </p:spPr>
+        <p:txBody>
+          <a:bodyPr wrap="none">
+            <a:spAutoFit/>
+          </a:bodyPr>
+          <a:lstStyle/>
+          <a:p>
+            <a:pPr algn="l"/>
+            <a:r>
+              <a:rPr sz="700">
+                <a:solidFill>
+                  <a:srgbClr val="A0B4D2"/>
+                </a:solidFill>
+                <a:latin typeface="JetBrains Mono"/>
+              </a:rPr>
+              <a:t>Benedikt Zoller Coaching  ·  FKB Campus  ·  M13</a:t>
+            </a:r>
+          </a:p>
+        </p:txBody>
+      </p:sp>
+      <p:sp>
+        <p:nvSpPr>
+          <p:cNvPr id="10" name="TextBox 9"/>
+          <p:cNvSpPr txBox="1"/>
+          <p:nvPr/>
+        </p:nvSpPr>
+        <p:spPr>
+          <a:xfrm>
+            <a:off x="7176211" y="6583680"/>
+            <a:ext cx="4326940" cy="256032"/>
+          </a:xfrm>
+          <a:prstGeom prst="rect">
+            <a:avLst/>
+          </a:prstGeom>
+          <a:noFill/>
+        </p:spPr>
+        <p:txBody>
+          <a:bodyPr wrap="none">
+            <a:spAutoFit/>
+          </a:bodyPr>
+          <a:lstStyle/>
+          <a:p>
+            <a:pPr algn="r"/>
+            <a:r>
+              <a:rPr sz="700">
+                <a:solidFill>
+                  <a:srgbClr val="A0B4D2"/>
+                </a:solidFill>
+                <a:latin typeface="JetBrains Mono"/>
+              </a:rPr>
+              <a:t>Übersicht</a:t>
             </a:r>
           </a:p>
         </p:txBody>
@@ -8246,7 +9700,7 @@
                 </a:solidFill>
                 <a:latin typeface="JetBrains Mono"/>
               </a:rPr>
-              <a:t>M13  ·  INHALT</a:t>
+              <a:t>AGENDA  ·  M13</a:t>
             </a:r>
           </a:p>
         </p:txBody>
@@ -8296,57 +9750,14 @@
       </p:sp>
       <p:sp>
         <p:nvSpPr>
-          <p:cNvPr id="6" name="Rectangle 5"/>
-          <p:cNvSpPr/>
+          <p:cNvPr id="6" name="TextBox 5"/>
+          <p:cNvSpPr txBox="1"/>
           <p:nvPr/>
         </p:nvSpPr>
         <p:spPr>
           <a:xfrm>
             <a:off x="685800" y="502920"/>
-            <a:ext cx="36576" cy="658368"/>
-          </a:xfrm>
-          <a:prstGeom prst="rect">
-            <a:avLst/>
-          </a:prstGeom>
-          <a:solidFill>
-            <a:srgbClr val="D9C089"/>
-          </a:solidFill>
-          <a:ln>
-            <a:noFill/>
-          </a:ln>
-        </p:spPr>
-        <p:style>
-          <a:lnRef idx="1">
-            <a:schemeClr val="accent1"/>
-          </a:lnRef>
-          <a:fillRef idx="3">
-            <a:schemeClr val="accent1"/>
-          </a:fillRef>
-          <a:effectRef idx="2">
-            <a:schemeClr val="accent1"/>
-          </a:effectRef>
-          <a:fontRef idx="minor">
-            <a:schemeClr val="lt1"/>
-          </a:fontRef>
-        </p:style>
-        <p:txBody>
-          <a:bodyPr rtlCol="0" anchor="ctr"/>
-          <a:lstStyle/>
-          <a:p>
-            <a:pPr algn="ctr"/>
-          </a:p>
-        </p:txBody>
-      </p:sp>
-      <p:sp>
-        <p:nvSpPr>
-          <p:cNvPr id="7" name="TextBox 6"/>
-          <p:cNvSpPr txBox="1"/>
-          <p:nvPr/>
-        </p:nvSpPr>
-        <p:spPr>
-          <a:xfrm>
-            <a:off x="813816" y="502920"/>
-            <a:ext cx="10634472" cy="685800"/>
+            <a:ext cx="10817352" cy="658368"/>
           </a:xfrm>
           <a:prstGeom prst="rect">
             <a:avLst/>
@@ -8361,27 +9772,27 @@
           <a:p>
             <a:pPr algn="l"/>
             <a:r>
-              <a:rPr sz="2400" b="1" i="0">
+              <a:rPr sz="2600" b="1" i="0">
                 <a:solidFill>
                   <a:srgbClr val="1F2C56"/>
                 </a:solidFill>
                 <a:latin typeface="Source Serif 4"/>
               </a:rPr>
-              <a:t>Definition</a:t>
-            </a:r>
-          </a:p>
-        </p:txBody>
-      </p:sp>
-      <p:sp>
-        <p:nvSpPr>
-          <p:cNvPr id="8" name="TextBox 7"/>
+              <a:t>So läuft das Modul</a:t>
+            </a:r>
+          </a:p>
+        </p:txBody>
+      </p:sp>
+      <p:sp>
+        <p:nvSpPr>
+          <p:cNvPr id="7" name="TextBox 6"/>
           <p:cNvSpPr txBox="1"/>
           <p:nvPr/>
         </p:nvSpPr>
         <p:spPr>
           <a:xfrm>
-            <a:off x="685800" y="1417320"/>
-            <a:ext cx="10817352" cy="5029200"/>
+            <a:off x="685800" y="1463040"/>
+            <a:ext cx="10817352" cy="4937760"/>
           </a:xfrm>
           <a:prstGeom prst="rect">
             <a:avLst/>
@@ -8396,27 +9807,267 @@
           <a:p>
             <a:pPr>
               <a:spcBef>
-                <a:spcPts val="600"/>
+                <a:spcPts val="700"/>
               </a:spcBef>
               <a:spcAft>
-                <a:spcPts val="200"/>
+                <a:spcPts val="100"/>
               </a:spcAft>
             </a:pPr>
             <a:r>
-              <a:rPr sz="1200" i="1">
+              <a:rPr sz="1200">
+                <a:solidFill>
+                  <a:srgbClr val="78808C"/>
+                </a:solidFill>
+                <a:latin typeface="Consolas"/>
+              </a:rPr>
+              <a:t>0–5 min     </a:t>
+            </a:r>
+            <a:r>
+              <a:rPr sz="1500" b="1">
                 <a:solidFill>
                   <a:srgbClr val="3D5466"/>
                 </a:solidFill>
                 <a:latin typeface="Arial"/>
               </a:rPr>
-              <a:t>→  Cross-Selling ist kein Verkaufsakt. Es ist das konsequente Ausfüllen eines Bedarfs, den der Kunde ohnehin hat – bei der eigenen Bank oder einem Wettbewerber.</a:t>
-            </a:r>
-          </a:p>
-        </p:txBody>
-      </p:sp>
-      <p:sp>
-        <p:nvSpPr>
-          <p:cNvPr id="9" name="Rectangle 8"/>
+              <a:t>  Einstieg &amp; Zielklärung</a:t>
+            </a:r>
+            <a:r>
+              <a:rPr sz="1200">
+                <a:solidFill>
+                  <a:srgbClr val="78808C"/>
+                </a:solidFill>
+                <a:latin typeface="Arial"/>
+              </a:rPr>
+              <a:t>  ·  Plenum</a:t>
+            </a:r>
+          </a:p>
+          <a:p>
+            <a:pPr>
+              <a:spcBef>
+                <a:spcPts val="700"/>
+              </a:spcBef>
+              <a:spcAft>
+                <a:spcPts val="100"/>
+              </a:spcAft>
+            </a:pPr>
+            <a:r>
+              <a:rPr sz="1200">
+                <a:solidFill>
+                  <a:srgbClr val="78808C"/>
+                </a:solidFill>
+                <a:latin typeface="Consolas"/>
+              </a:rPr>
+              <a:t>5–20 min    </a:t>
+            </a:r>
+            <a:r>
+              <a:rPr sz="1500" b="1">
+                <a:solidFill>
+                  <a:srgbClr val="3D5466"/>
+                </a:solidFill>
+                <a:latin typeface="Arial"/>
+              </a:rPr>
+              <a:t>  Theorie-Input: Cross-Selling-Begriff und Wallet Share</a:t>
+            </a:r>
+            <a:r>
+              <a:rPr sz="1200">
+                <a:solidFill>
+                  <a:srgbClr val="78808C"/>
+                </a:solidFill>
+                <a:latin typeface="Arial"/>
+              </a:rPr>
+              <a:t>  ·  Kurzinput + Flipchart</a:t>
+            </a:r>
+          </a:p>
+          <a:p>
+            <a:pPr>
+              <a:spcBef>
+                <a:spcPts val="700"/>
+              </a:spcBef>
+              <a:spcAft>
+                <a:spcPts val="100"/>
+              </a:spcAft>
+            </a:pPr>
+            <a:r>
+              <a:rPr sz="1200">
+                <a:solidFill>
+                  <a:srgbClr val="78808C"/>
+                </a:solidFill>
+                <a:latin typeface="Consolas"/>
+              </a:rPr>
+              <a:t>20–35 min   </a:t>
+            </a:r>
+            <a:r>
+              <a:rPr sz="1500" b="1">
+                <a:solidFill>
+                  <a:srgbClr val="3D5466"/>
+                </a:solidFill>
+                <a:latin typeface="Arial"/>
+              </a:rPr>
+              <a:t>  Übung: Kundenprofil-Analyse</a:t>
+            </a:r>
+            <a:r>
+              <a:rPr sz="1200">
+                <a:solidFill>
+                  <a:srgbClr val="78808C"/>
+                </a:solidFill>
+                <a:latin typeface="Arial"/>
+              </a:rPr>
+              <a:t>  ·  Partnerarbeit</a:t>
+            </a:r>
+          </a:p>
+          <a:p>
+            <a:pPr>
+              <a:spcBef>
+                <a:spcPts val="700"/>
+              </a:spcBef>
+              <a:spcAft>
+                <a:spcPts val="100"/>
+              </a:spcAft>
+            </a:pPr>
+            <a:r>
+              <a:rPr sz="1200">
+                <a:solidFill>
+                  <a:srgbClr val="78808C"/>
+                </a:solidFill>
+                <a:latin typeface="Consolas"/>
+              </a:rPr>
+              <a:t>35–50 min   </a:t>
+            </a:r>
+            <a:r>
+              <a:rPr sz="1500" b="1">
+                <a:solidFill>
+                  <a:srgbClr val="3D5466"/>
+                </a:solidFill>
+                <a:latin typeface="Arial"/>
+              </a:rPr>
+              <a:t>  Verbundpartner-Matrix ausfüllen</a:t>
+            </a:r>
+            <a:r>
+              <a:rPr sz="1200">
+                <a:solidFill>
+                  <a:srgbClr val="78808C"/>
+                </a:solidFill>
+                <a:latin typeface="Arial"/>
+              </a:rPr>
+              <a:t>  ·  Einzelarbeit</a:t>
+            </a:r>
+          </a:p>
+          <a:p>
+            <a:pPr>
+              <a:spcBef>
+                <a:spcPts val="700"/>
+              </a:spcBef>
+              <a:spcAft>
+                <a:spcPts val="100"/>
+              </a:spcAft>
+            </a:pPr>
+            <a:r>
+              <a:rPr sz="1200">
+                <a:solidFill>
+                  <a:srgbClr val="78808C"/>
+                </a:solidFill>
+                <a:latin typeface="Consolas"/>
+              </a:rPr>
+              <a:t>50–75 min   </a:t>
+            </a:r>
+            <a:r>
+              <a:rPr sz="1500" b="1">
+                <a:solidFill>
+                  <a:srgbClr val="3D5466"/>
+                </a:solidFill>
+                <a:latin typeface="Arial"/>
+              </a:rPr>
+              <a:t>  Rollenspiel: Cross-Selling-Gespräch</a:t>
+            </a:r>
+            <a:r>
+              <a:rPr sz="1200">
+                <a:solidFill>
+                  <a:srgbClr val="78808C"/>
+                </a:solidFill>
+                <a:latin typeface="Arial"/>
+              </a:rPr>
+              <a:t>  ·  Dreiergruppen (rotierend)</a:t>
+            </a:r>
+          </a:p>
+          <a:p>
+            <a:pPr>
+              <a:spcBef>
+                <a:spcPts val="700"/>
+              </a:spcBef>
+              <a:spcAft>
+                <a:spcPts val="100"/>
+              </a:spcAft>
+            </a:pPr>
+            <a:r>
+              <a:rPr sz="1200">
+                <a:solidFill>
+                  <a:srgbClr val="78808C"/>
+                </a:solidFill>
+                <a:latin typeface="Consolas"/>
+              </a:rPr>
+              <a:t>75–85 min   </a:t>
+            </a:r>
+            <a:r>
+              <a:rPr sz="1500" b="1">
+                <a:solidFill>
+                  <a:srgbClr val="3D5466"/>
+                </a:solidFill>
+                <a:latin typeface="Arial"/>
+              </a:rPr>
+              <a:t>  Plenumreflexion</a:t>
+            </a:r>
+            <a:r>
+              <a:rPr sz="1200">
+                <a:solidFill>
+                  <a:srgbClr val="78808C"/>
+                </a:solidFill>
+                <a:latin typeface="Arial"/>
+              </a:rPr>
+              <a:t>  ·  Plenum</a:t>
+            </a:r>
+          </a:p>
+          <a:p>
+            <a:pPr>
+              <a:spcBef>
+                <a:spcPts val="700"/>
+              </a:spcBef>
+              <a:spcAft>
+                <a:spcPts val="100"/>
+              </a:spcAft>
+            </a:pPr>
+            <a:r>
+              <a:rPr sz="1200">
+                <a:solidFill>
+                  <a:srgbClr val="78808C"/>
+                </a:solidFill>
+                <a:latin typeface="Consolas"/>
+              </a:rPr>
+              <a:t>85–90 min   </a:t>
+            </a:r>
+            <a:r>
+              <a:rPr sz="1500" b="1">
+                <a:solidFill>
+                  <a:srgbClr val="3D5466"/>
+                </a:solidFill>
+                <a:latin typeface="Arial"/>
+              </a:rPr>
+              <a:t>  Transfer &amp; Abschluss</a:t>
+            </a:r>
+            <a:r>
+              <a:rPr sz="1200">
+                <a:solidFill>
+                  <a:srgbClr val="78808C"/>
+                </a:solidFill>
+                <a:latin typeface="Arial"/>
+              </a:rPr>
+              <a:t>  ·  Einzelarbeit</a:t>
+            </a:r>
+          </a:p>
+        </p:txBody>
+      </p:sp>
+      <p:sp>
+        <p:nvSpPr>
+          <p:cNvPr id="8" name="Rectangle 7"/>
           <p:cNvSpPr/>
           <p:nvPr/>
         </p:nvSpPr>
@@ -8459,7 +10110,7 @@
       </p:sp>
       <p:sp>
         <p:nvSpPr>
-          <p:cNvPr id="10" name="TextBox 9"/>
+          <p:cNvPr id="9" name="TextBox 8"/>
           <p:cNvSpPr txBox="1"/>
           <p:nvPr/>
         </p:nvSpPr>
@@ -8747,7 +10398,7 @@
                 </a:solidFill>
                 <a:latin typeface="Source Serif 4"/>
               </a:rPr>
-              <a:t>Zwei Typen: Push vs. Pull</a:t>
+              <a:t>Definition</a:t>
             </a:r>
           </a:p>
         </p:txBody>
@@ -8776,20 +10427,20 @@
           <a:p>
             <a:pPr>
               <a:spcBef>
-                <a:spcPts val="400"/>
+                <a:spcPts val="600"/>
               </a:spcBef>
               <a:spcAft>
                 <a:spcPts val="200"/>
               </a:spcAft>
             </a:pPr>
             <a:r>
-              <a:rPr sz="1200">
+              <a:rPr sz="1200" i="1">
                 <a:solidFill>
                   <a:srgbClr val="3D5466"/>
                 </a:solidFill>
                 <a:latin typeface="Arial"/>
               </a:rPr>
-              <a:t>## 4.2 Wallet-Share-Analyse: Wo liegt das Potenzial?</a:t>
+              <a:t>→  Cross-Selling ist kein Verkaufsakt. Es ist das konsequente Ausfüllen eines Bedarfs, den der Kunde ohnehin hat – bei der eigenen Bank oder einem Wettbewerber.</a:t>
             </a:r>
           </a:p>
         </p:txBody>
@@ -9127,7 +10778,7 @@
                 </a:solidFill>
                 <a:latin typeface="Source Serif 4"/>
               </a:rPr>
-              <a:t>Das Konzept</a:t>
+              <a:t>Zwei Typen: Push vs. Pull</a:t>
             </a:r>
           </a:p>
         </p:txBody>
@@ -9163,13 +10814,13 @@
               </a:spcAft>
             </a:pPr>
             <a:r>
-              <a:rPr sz="1200">
+              <a:rPr sz="1300">
                 <a:solidFill>
                   <a:srgbClr val="3D5466"/>
                 </a:solidFill>
                 <a:latin typeface="Arial"/>
               </a:rPr>
-              <a:t>Das unausgeschöpfte Potenzial von 60 % ist nicht verloren – es ist bei einem Wettbewerber.</a:t>
+              <a:t>▸  ## 4.2 Wallet-Share-Analyse: Wo liegt das Potenzial?</a:t>
             </a:r>
           </a:p>
         </p:txBody>
@@ -9507,7 +11158,7 @@
                 </a:solidFill>
                 <a:latin typeface="Source Serif 4"/>
               </a:rPr>
-              <a:t>Potenzialanalyse in agree</a:t>
+              <a:t>Das Konzept</a:t>
             </a:r>
           </a:p>
         </p:txBody>
@@ -9543,32 +11194,13 @@
               </a:spcAft>
             </a:pPr>
             <a:r>
-              <a:rPr sz="1200">
+              <a:rPr sz="1300">
                 <a:solidFill>
                   <a:srgbClr val="3D5466"/>
                 </a:solidFill>
                 <a:latin typeface="Arial"/>
               </a:rPr>
-              <a:t>agree bietet über das CRM-Modul und den UnternehmerDialog strukturierte Hilfsmittel zur Potenzialanalyse. Berater sollten vor jedem Jahresgespräch folgende Felder prüfen:</a:t>
-            </a:r>
-          </a:p>
-          <a:p>
-            <a:pPr>
-              <a:spcBef>
-                <a:spcPts val="400"/>
-              </a:spcBef>
-              <a:spcAft>
-                <a:spcPts val="200"/>
-              </a:spcAft>
-            </a:pPr>
-            <a:r>
-              <a:rPr sz="1200">
-                <a:solidFill>
-                  <a:srgbClr val="3D5466"/>
-                </a:solidFill>
-                <a:latin typeface="Arial"/>
-              </a:rPr>
-              <a:t>Empfehlung: Erstellen Sie für Ihre Top-20-Kunden eine einfache Wallet-Share-Schätzung anhand dieser fünf Dimensionen, bevor Sie das Jahresgespräch vorbereiten.</a:t>
+              <a:t>▸  Das unausgeschöpfte Potenzial von 60 % ist nicht verloren – es ist bei einem Wettbewerber.</a:t>
             </a:r>
           </a:p>
         </p:txBody>
@@ -9906,7 +11538,7 @@
                 </a:solidFill>
                 <a:latin typeface="Source Serif 4"/>
               </a:rPr>
-              <a:t>Ereignisbasierte Cross-Selling-Anlässe</a:t>
+              <a:t>Potenzialanalyse in agree</a:t>
             </a:r>
           </a:p>
         </p:txBody>
@@ -9942,13 +11574,13 @@
               </a:spcAft>
             </a:pPr>
             <a:r>
-              <a:rPr sz="1200">
+              <a:rPr sz="1300">
                 <a:solidFill>
                   <a:srgbClr val="3D5466"/>
                 </a:solidFill>
                 <a:latin typeface="Arial"/>
               </a:rPr>
-              <a:t>Das Jahresgespräch ist nur einer von vielen Anlässen. In der Praxis öffnen oft Ereignisse das Gespräch besser als der Jahreskalender – weil der Bedarf dann für den Kunden selbst spürbar ist:</a:t>
+              <a:t>▸  agree bietet über das CRM-Modul und den UnternehmerDialog strukturierte Hilfsmittel zur Potenzialanalyse. Berater sollten vor jedem Jahresgespräch folgende Felder prüfen:</a:t>
             </a:r>
           </a:p>
           <a:p>
@@ -9961,32 +11593,13 @@
               </a:spcAft>
             </a:pPr>
             <a:r>
-              <a:rPr sz="1200">
+              <a:rPr sz="1300">
                 <a:solidFill>
                   <a:srgbClr val="3D5466"/>
                 </a:solidFill>
                 <a:latin typeface="Arial"/>
               </a:rPr>
-              <a:t>## 4.3 Der 4-Schritte-Cross-Selling-Prozess</a:t>
-            </a:r>
-          </a:p>
-          <a:p>
-            <a:pPr>
-              <a:spcBef>
-                <a:spcPts val="400"/>
-              </a:spcBef>
-              <a:spcAft>
-                <a:spcPts val="200"/>
-              </a:spcAft>
-            </a:pPr>
-            <a:r>
-              <a:rPr sz="1200">
-                <a:solidFill>
-                  <a:srgbClr val="3D5466"/>
-                </a:solidFill>
-                <a:latin typeface="Arial"/>
-              </a:rPr>
-              <a:t>Systematisches Cross-Selling folgt einem klaren Prozess – nicht dem Zufall eines Gesprächsmoments.</a:t>
+              <a:t>▸  Empfehlung: Erstellen Sie für Ihre Top-20-Kunden eine einfache Wallet-Share-Schätzung anhand dieser fünf Dimensionen, bevor Sie das Jahresgespräch vorbereiten.</a:t>
             </a:r>
           </a:p>
         </p:txBody>
@@ -10324,7 +11937,7 @@
                 </a:solidFill>
                 <a:latin typeface="Source Serif 4"/>
               </a:rPr>
-              <a:t>Schritt 1: Analyse</a:t>
+              <a:t>Ereignisbasierte Cross-Selling-Anlässe</a:t>
             </a:r>
           </a:p>
         </p:txBody>
@@ -10360,13 +11973,13 @@
               </a:spcAft>
             </a:pPr>
             <a:r>
-              <a:rPr sz="1200">
+              <a:rPr sz="1300">
                 <a:solidFill>
                   <a:srgbClr val="3D5466"/>
                 </a:solidFill>
                 <a:latin typeface="Arial"/>
               </a:rPr>
-              <a:t>Wer? Welcher Kunde hat das größte unausgeschöpfte Potenzial?</a:t>
+              <a:t>▸  Das Jahresgespräch ist nur einer von vielen Anlässen. In der Praxis öffnen oft Ereignisse das Gespräch besser als der Jahreskalender – weil der Bedarf dann für den Kunden selbst spürbar ist:</a:t>
             </a:r>
           </a:p>
           <a:p>
@@ -10379,13 +11992,13 @@
               </a:spcAft>
             </a:pPr>
             <a:r>
-              <a:rPr sz="1200">
+              <a:rPr sz="1300">
                 <a:solidFill>
                   <a:srgbClr val="3D5466"/>
                 </a:solidFill>
                 <a:latin typeface="Arial"/>
               </a:rPr>
-              <a:t>Was? In welchem Bedarfsfeld liegt das Potenzial (Finanzierung, Absicherung, Anlage, ZV)?</a:t>
+              <a:t>▸  ## 4.3 Der 4-Schritte-Cross-Selling-Prozess</a:t>
             </a:r>
           </a:p>
           <a:p>
@@ -10398,32 +12011,13 @@
               </a:spcAft>
             </a:pPr>
             <a:r>
-              <a:rPr sz="1200">
+              <a:rPr sz="1300">
                 <a:solidFill>
                   <a:srgbClr val="3D5466"/>
                 </a:solidFill>
                 <a:latin typeface="Arial"/>
               </a:rPr>
-              <a:t>Datenquellen: agree CRM, Jahreskontospiegel, Kreditakten, Verbundpartner-Cockpit</a:t>
-            </a:r>
-          </a:p>
-          <a:p>
-            <a:pPr>
-              <a:spcBef>
-                <a:spcPts val="400"/>
-              </a:spcBef>
-              <a:spcAft>
-                <a:spcPts val="200"/>
-              </a:spcAft>
-            </a:pPr>
-            <a:r>
-              <a:rPr sz="1200">
-                <a:solidFill>
-                  <a:srgbClr val="3D5466"/>
-                </a:solidFill>
-                <a:latin typeface="Arial"/>
-              </a:rPr>
-              <a:t>Ergebnis: Eine priorisierte Liste von 3–5 Cross-Selling-Hypothesen für diesen Kunden.</a:t>
+              <a:t>▸  Systematisches Cross-Selling folgt einem klaren Prozess – nicht dem Zufall eines Gesprächsmoments.</a:t>
             </a:r>
           </a:p>
         </p:txBody>

--- a/protected-downloads/praesentation/M13.pptx
+++ b/protected-downloads/praesentation/M13.pptx
@@ -4741,7 +4741,7 @@
                 </a:solidFill>
                 <a:latin typeface="JetBrains Mono"/>
               </a:rPr>
-              <a:t>Benedikt Zoller Coaching  ·  FKB Campus  ·  2026</a:t>
+              <a:t>FKB Campus  ·  2026</a:t>
             </a:r>
           </a:p>
         </p:txBody>
@@ -5213,7 +5213,7 @@
                 </a:solidFill>
                 <a:latin typeface="JetBrains Mono"/>
               </a:rPr>
-              <a:t>Benedikt Zoller Coaching  ·  FKB Campus  ·  M13</a:t>
+              <a:t>FKB Campus  ·  M13</a:t>
             </a:r>
           </a:p>
         </p:txBody>
@@ -5612,7 +5612,7 @@
                 </a:solidFill>
                 <a:latin typeface="JetBrains Mono"/>
               </a:rPr>
-              <a:t>Benedikt Zoller Coaching  ·  FKB Campus  ·  M13</a:t>
+              <a:t>FKB Campus  ·  M13</a:t>
             </a:r>
           </a:p>
         </p:txBody>
@@ -6106,7 +6106,7 @@
                 </a:solidFill>
                 <a:latin typeface="JetBrains Mono"/>
               </a:rPr>
-              <a:t>Benedikt Zoller Coaching  ·  FKB Campus  ·  M13</a:t>
+              <a:t>FKB Campus  ·  M13</a:t>
             </a:r>
           </a:p>
         </p:txBody>
@@ -6695,7 +6695,7 @@
                 </a:solidFill>
                 <a:latin typeface="JetBrains Mono"/>
               </a:rPr>
-              <a:t>Benedikt Zoller Coaching  ·  FKB Campus  ·  M13</a:t>
+              <a:t>FKB Campus  ·  M13</a:t>
             </a:r>
           </a:p>
         </p:txBody>
@@ -7014,7 +7014,7 @@
                 </a:solidFill>
                 <a:latin typeface="JetBrains Mono"/>
               </a:rPr>
-              <a:t>Benedikt Zoller Coaching  ·  FKB Campus  ·  M13</a:t>
+              <a:t>FKB Campus  ·  M13</a:t>
             </a:r>
           </a:p>
         </p:txBody>
@@ -7429,7 +7429,7 @@
                 </a:solidFill>
                 <a:latin typeface="JetBrains Mono"/>
               </a:rPr>
-              <a:t>Benedikt Zoller Coaching  ·  FKB Campus  ·  M13</a:t>
+              <a:t>FKB Campus  ·  M13</a:t>
             </a:r>
           </a:p>
         </p:txBody>
@@ -8177,7 +8177,7 @@
                 </a:solidFill>
                 <a:latin typeface="JetBrains Mono"/>
               </a:rPr>
-              <a:t>Benedikt Zoller Coaching  ·  FKB Campus  ·  M13</a:t>
+              <a:t>FKB Campus  ·  M13</a:t>
             </a:r>
           </a:p>
         </p:txBody>
@@ -8747,7 +8747,7 @@
                 </a:solidFill>
                 <a:latin typeface="JetBrains Mono"/>
               </a:rPr>
-              <a:t>Benedikt Zoller Coaching  ·  FKB Campus  ·  M13</a:t>
+              <a:t>FKB Campus  ·  M13</a:t>
             </a:r>
           </a:p>
         </p:txBody>
@@ -9148,7 +9148,7 @@
                 </a:solidFill>
                 <a:latin typeface="JetBrains Mono"/>
               </a:rPr>
-              <a:t>Benedikt Zoller Coaching  ·  FKB Campus  ·  M13</a:t>
+              <a:t>FKB Campus  ·  M13</a:t>
             </a:r>
           </a:p>
         </p:txBody>
@@ -9561,7 +9561,7 @@
                 </a:solidFill>
                 <a:latin typeface="JetBrains Mono"/>
               </a:rPr>
-              <a:t>Benedikt Zoller Coaching  ·  FKB Campus  ·  M13</a:t>
+              <a:t>FKB Campus  ·  M13</a:t>
             </a:r>
           </a:p>
         </p:txBody>
@@ -10138,7 +10138,7 @@
                 </a:solidFill>
                 <a:latin typeface="JetBrains Mono"/>
               </a:rPr>
-              <a:t>Benedikt Zoller Coaching  ·  FKB Campus  ·  M13</a:t>
+              <a:t>FKB Campus  ·  M13</a:t>
             </a:r>
           </a:p>
         </p:txBody>
@@ -10518,7 +10518,7 @@
                 </a:solidFill>
                 <a:latin typeface="JetBrains Mono"/>
               </a:rPr>
-              <a:t>Benedikt Zoller Coaching  ·  FKB Campus  ·  M13</a:t>
+              <a:t>FKB Campus  ·  M13</a:t>
             </a:r>
           </a:p>
         </p:txBody>
@@ -10898,7 +10898,7 @@
                 </a:solidFill>
                 <a:latin typeface="JetBrains Mono"/>
               </a:rPr>
-              <a:t>Benedikt Zoller Coaching  ·  FKB Campus  ·  M13</a:t>
+              <a:t>FKB Campus  ·  M13</a:t>
             </a:r>
           </a:p>
         </p:txBody>
@@ -11278,7 +11278,7 @@
                 </a:solidFill>
                 <a:latin typeface="JetBrains Mono"/>
               </a:rPr>
-              <a:t>Benedikt Zoller Coaching  ·  FKB Campus  ·  M13</a:t>
+              <a:t>FKB Campus  ·  M13</a:t>
             </a:r>
           </a:p>
         </p:txBody>
@@ -11677,7 +11677,7 @@
                 </a:solidFill>
                 <a:latin typeface="JetBrains Mono"/>
               </a:rPr>
-              <a:t>Benedikt Zoller Coaching  ·  FKB Campus  ·  M13</a:t>
+              <a:t>FKB Campus  ·  M13</a:t>
             </a:r>
           </a:p>
         </p:txBody>
@@ -12095,7 +12095,7 @@
                 </a:solidFill>
                 <a:latin typeface="JetBrains Mono"/>
               </a:rPr>
-              <a:t>Benedikt Zoller Coaching  ·  FKB Campus  ·  M13</a:t>
+              <a:t>FKB Campus  ·  M13</a:t>
             </a:r>
           </a:p>
         </p:txBody>

--- a/protected-downloads/praesentation/M13.pptx
+++ b/protected-downloads/praesentation/M13.pptx
@@ -9464,7 +9464,7 @@
                 </a:solidFill>
                 <a:latin typeface="Arial"/>
               </a:rPr>
-              <a:t>▸  Die relevanten Verbundpartner den typischen Bedarfsfeldern der Firmenkunden zuordnen</a:t>
+              <a:t>▸  Die Verbundpartner-Matrix anwenden und einem Kundenprofil den passenden Verbundpartner zuordnen sowie den nächsten Gesprächsschritt ableiten</a:t>
             </a:r>
           </a:p>
           <a:p>
@@ -9483,7 +9483,7 @@
                 </a:solidFill>
                 <a:latin typeface="Arial"/>
               </a:rPr>
-              <a:t>▸  Produktgetriebenes Push-Cross-Selling von bedarfsorientiertem Cross-Selling unterscheiden und die situationsgerechte Vorgehensweise wählen</a:t>
+              <a:t>▸  Den Unterschied zwischen Push- und Pull-Cross-Selling beschreiben und erläutern, warum der bedarfsorientierte Ansatz für Kundenbindung und Ertrag wirksamer ist</a:t>
             </a:r>
           </a:p>
         </p:txBody>
@@ -9875,7 +9875,7 @@
                 </a:solidFill>
                 <a:latin typeface="Arial"/>
               </a:rPr>
-              <a:t>  ·  Kurzinput + Flipchart</a:t>
+              <a:t>  ·  Kurzinput + Flipchart + agree-Live-Demo (3 Min)</a:t>
             </a:r>
           </a:p>
           <a:p>
@@ -9968,7 +9968,7 @@
                 </a:solidFill>
                 <a:latin typeface="Consolas"/>
               </a:rPr>
-              <a:t>50–75 min   </a:t>
+              <a:t>50–80 min   </a:t>
             </a:r>
             <a:r>
               <a:rPr sz="1500" b="1">
@@ -10005,7 +10005,7 @@
                 </a:solidFill>
                 <a:latin typeface="Consolas"/>
               </a:rPr>
-              <a:t>75–85 min   </a:t>
+              <a:t>80–90 min   </a:t>
             </a:r>
             <a:r>
               <a:rPr sz="1500" b="1">
@@ -10042,7 +10042,7 @@
                 </a:solidFill>
                 <a:latin typeface="Consolas"/>
               </a:rPr>
-              <a:t>85–90 min   </a:t>
+              <a:t>90–95 min   </a:t>
             </a:r>
             <a:r>
               <a:rPr sz="1500" b="1">

--- a/protected-downloads/praesentation/M13.pptx
+++ b/protected-downloads/praesentation/M13.pptx
@@ -4663,7 +4663,7 @@
                 </a:solidFill>
                 <a:latin typeface="Arial"/>
               </a:rPr>
-              <a:t>v0.3</a:t>
+              <a:t>v1.0</a:t>
             </a:r>
           </a:p>
         </p:txBody>

--- a/protected-downloads/praesentation/M13.pptx
+++ b/protected-downloads/praesentation/M13.pptx
@@ -658,7 +658,7 @@
           <a:lstStyle/>
           <a:p>
             <a:r>
-              <a:t>Siehe Trainerhandbuch (Sektion 3) für Moderationshinweise, Timing und erwartete Teilnehmerreaktionen.</a:t>
+              <a:t>Moderation (HB Sec 3): Partnerarbeit mit Musterprofil aus Sec 4.3. Aufgabe: Welche Wallet-Share-Lücken erkennen Sie? Welche zwei Ansatzpunkte würden Sie zuerst adressieren? Auswertung im Plenum: Welche Lücken hat jedes Paar identifiziert? Unterschiede in der Priorisierung diskutieren. Trainer-Hinweis: Es gibt keine eindeutig richtige Priorisierung – das ist Absicht. Die Diskussion zeigt, dass systematisches Cross-Selling Urteile erfordert, nicht nur Checklisten. Das ist die Vorbereitung auf Stufe 3 (M14). Trainer-Hinweis Priorisierung: Wenn TN nach unterschiedlichen Kriterien priorisieren (der eine nach Kundenbedarf, der andere nach Abschlusswahrscheinlichkeit): beide Perspektiven würdigen und dann gemeinsam eine Entscheidungsregel ableiten – Anlass-Aktualität + Ertragspotenzial + Beziehungsrisiko. Das Priorisierungsraster aus Arbeitsblatt A (Priorität A vs. B) als gemeinsame Methode festhalten, damit die Übung nicht in beliebigen Einzelmeinungen endet.</a:t>
             </a:r>
           </a:p>
         </p:txBody>
@@ -1078,7 +1078,7 @@
           <a:lstStyle/>
           <a:p>
             <a:r>
-              <a:t>Siehe Trainerhandbuch (Sektion 3) für Moderationshinweise, Timing und erwartete Teilnehmerreaktionen.</a:t>
+              <a:t>Moderation (HB Sec 3): Partnerarbeit mit Musterprofil aus Sec 4.3. Aufgabe: Welche Wallet-Share-Lücken erkennen Sie? Welche zwei Ansatzpunkte würden Sie zuerst adressieren? Auswertung im Plenum: Welche Lücken hat jedes Paar identifiziert? Unterschiede in der Priorisierung diskutieren. Trainer-Hinweis: Es gibt keine eindeutig richtige Priorisierung – das ist Absicht. Die Diskussion zeigt, dass systematisches Cross-Selling Urteile erfordert, nicht nur Checklisten. Das ist die Vorbereitung auf Stufe 3 (M14). Trainer-Hinweis Priorisierung: Wenn TN nach unterschiedlichen Kriterien priorisieren (der eine nach Kundenbedarf, der andere nach Abschlusswahrscheinlichkeit): beide Perspektiven würdigen und dann gemeinsam eine Entscheidungsregel ableiten – Anlass-Aktualität + Ertragspotenzial + Beziehungsrisiko. Das Priorisierungsraster aus Arbeitsblatt A (Priorität A vs. B) als gemeinsame Methode festhalten, damit die Übung nicht in beliebigen Einzelmeinungen endet.</a:t>
             </a:r>
           </a:p>
         </p:txBody>
@@ -7309,7 +7309,7 @@
                 </a:solidFill>
                 <a:latin typeface="Source Serif 4"/>
               </a:rPr>
-              <a:t>Arbeitsblatt A: Wallet-Share-Analyse</a:t>
+              <a:t>AB-1: Wallet-Share-Analyse</a:t>
             </a:r>
           </a:p>
         </p:txBody>
@@ -7603,7 +7603,7 @@
                 </a:solidFill>
                 <a:latin typeface="Source Serif 4"/>
               </a:rPr>
-              <a:t>Arbeitsblatt A: Wallet-Share-Analyse</a:t>
+              <a:t>AB-1: Wallet-Share-Analyse</a:t>
             </a:r>
           </a:p>
         </p:txBody>
@@ -8386,7 +8386,7 @@
                 </a:solidFill>
                 <a:latin typeface="Source Serif 4"/>
               </a:rPr>
-              <a:t>Arbeitsblatt B: Cross-Selling-Gesprächsvorbereitung</a:t>
+              <a:t>AB-2: Cross-Selling-Gesprächsvorbereitung</a:t>
             </a:r>
           </a:p>
         </p:txBody>

--- a/protected-downloads/praesentation/M13.pptx
+++ b/protected-downloads/praesentation/M13.pptx
@@ -4338,7 +4338,7 @@
                 <a:solidFill>
                   <a:srgbClr val="C8D2E6"/>
                 </a:solidFill>
-                <a:latin typeface="JetBrains Mono"/>
+                <a:latin typeface="Consolas"/>
               </a:rPr>
               <a:t>FKB CAMPUS  ·  FIRMENKUNDENAKADEMIE  ·  M13</a:t>
             </a:r>
@@ -4373,7 +4373,7 @@
                 <a:solidFill>
                   <a:srgbClr val="FFFFFF"/>
                 </a:solidFill>
-                <a:latin typeface="Source Serif 4"/>
+                <a:latin typeface="Arial"/>
               </a:rPr>
               <a:t>Cross-Selling systematisch</a:t>
             </a:r>
@@ -4408,7 +4408,7 @@
                 <a:solidFill>
                   <a:srgbClr val="BECDE6"/>
                 </a:solidFill>
-                <a:latin typeface="Source Serif 4"/>
+                <a:latin typeface="Arial"/>
               </a:rPr>
               <a:t>Kundenpotenziale durch bedarfsorientiertes Cross-Selling und Wallet-Share-Analyse erschließen</a:t>
             </a:r>
@@ -4486,7 +4486,7 @@
                 <a:solidFill>
                   <a:srgbClr val="A0B4D2"/>
                 </a:solidFill>
-                <a:latin typeface="JetBrains Mono"/>
+                <a:latin typeface="Consolas"/>
               </a:rPr>
               <a:t>KOMPETENZFELD</a:t>
             </a:r>
@@ -4556,7 +4556,7 @@
                 <a:solidFill>
                   <a:srgbClr val="A0B4D2"/>
                 </a:solidFill>
-                <a:latin typeface="JetBrains Mono"/>
+                <a:latin typeface="Consolas"/>
               </a:rPr>
               <a:t>KOMPETENZSTUFE</a:t>
             </a:r>
@@ -4626,7 +4626,7 @@
                 <a:solidFill>
                   <a:srgbClr val="A0B4D2"/>
                 </a:solidFill>
-                <a:latin typeface="JetBrains Mono"/>
+                <a:latin typeface="Consolas"/>
               </a:rPr>
               <a:t>VERSION</a:t>
             </a:r>
@@ -4739,7 +4739,7 @@
                 <a:solidFill>
                   <a:srgbClr val="96A5BE"/>
                 </a:solidFill>
-                <a:latin typeface="JetBrains Mono"/>
+                <a:latin typeface="Consolas"/>
               </a:rPr>
               <a:t>FKB Campus  ·  2026</a:t>
             </a:r>
@@ -4774,7 +4774,7 @@
                 <a:solidFill>
                   <a:srgbClr val="96A5BE"/>
                 </a:solidFill>
-                <a:latin typeface="JetBrains Mono"/>
+                <a:latin typeface="Consolas"/>
               </a:rPr>
               <a:t>Trainer-Präsentation</a:t>
             </a:r>
@@ -4913,7 +4913,7 @@
                 <a:solidFill>
                   <a:srgbClr val="78808C"/>
                 </a:solidFill>
-                <a:latin typeface="JetBrains Mono"/>
+                <a:latin typeface="Consolas"/>
               </a:rPr>
               <a:t>M13  ·  INHALT</a:t>
             </a:r>
@@ -5034,7 +5034,7 @@
                 <a:solidFill>
                   <a:srgbClr val="1F2C56"/>
                 </a:solidFill>
-                <a:latin typeface="Source Serif 4"/>
+                <a:latin typeface="Arial"/>
               </a:rPr>
               <a:t>Schritt 1: Analyse</a:t>
             </a:r>
@@ -5050,7 +5050,7 @@
         <p:spPr>
           <a:xfrm>
             <a:off x="685800" y="1417320"/>
-            <a:ext cx="10817352" cy="5029200"/>
+            <a:ext cx="10817352" cy="4892040"/>
           </a:xfrm>
           <a:prstGeom prst="rect">
             <a:avLst/>
@@ -5058,12 +5058,12 @@
           <a:noFill/>
         </p:spPr>
         <p:txBody>
-          <a:bodyPr wrap="square">
+          <a:bodyPr wrap="square" anchor="ctr">
             <a:spAutoFit/>
           </a:bodyPr>
           <a:lstStyle/>
           <a:p>
-            <a:pPr>
+            <a:pPr marL="190500" indent="-190500">
               <a:spcBef>
                 <a:spcPts val="400"/>
               </a:spcBef>
@@ -5082,7 +5082,7 @@
             </a:r>
           </a:p>
           <a:p>
-            <a:pPr>
+            <a:pPr marL="190500" indent="-190500">
               <a:spcBef>
                 <a:spcPts val="400"/>
               </a:spcBef>
@@ -5101,7 +5101,7 @@
             </a:r>
           </a:p>
           <a:p>
-            <a:pPr>
+            <a:pPr marL="190500" indent="-190500">
               <a:spcBef>
                 <a:spcPts val="400"/>
               </a:spcBef>
@@ -5120,7 +5120,7 @@
             </a:r>
           </a:p>
           <a:p>
-            <a:pPr>
+            <a:pPr marL="190500" indent="-190500">
               <a:spcBef>
                 <a:spcPts val="400"/>
               </a:spcBef>
@@ -5211,7 +5211,7 @@
                 <a:solidFill>
                   <a:srgbClr val="A0B4D2"/>
                 </a:solidFill>
-                <a:latin typeface="JetBrains Mono"/>
+                <a:latin typeface="Consolas"/>
               </a:rPr>
               <a:t>FKB Campus  ·  M13</a:t>
             </a:r>
@@ -5350,7 +5350,7 @@
                 <a:solidFill>
                   <a:srgbClr val="78808C"/>
                 </a:solidFill>
-                <a:latin typeface="JetBrains Mono"/>
+                <a:latin typeface="Consolas"/>
               </a:rPr>
               <a:t>M13  ·  INHALT</a:t>
             </a:r>
@@ -5471,7 +5471,7 @@
                 <a:solidFill>
                   <a:srgbClr val="1F2C56"/>
                 </a:solidFill>
-                <a:latin typeface="Source Serif 4"/>
+                <a:latin typeface="Arial"/>
               </a:rPr>
               <a:t>Schritt 2: Hypothese formulieren</a:t>
             </a:r>
@@ -5487,7 +5487,7 @@
         <p:spPr>
           <a:xfrm>
             <a:off x="685800" y="1417320"/>
-            <a:ext cx="10817352" cy="5029200"/>
+            <a:ext cx="10817352" cy="4892040"/>
           </a:xfrm>
           <a:prstGeom prst="rect">
             <a:avLst/>
@@ -5495,12 +5495,12 @@
           <a:noFill/>
         </p:spPr>
         <p:txBody>
-          <a:bodyPr wrap="square">
+          <a:bodyPr wrap="square" anchor="ctr">
             <a:spAutoFit/>
           </a:bodyPr>
           <a:lstStyle/>
           <a:p>
-            <a:pPr>
+            <a:pPr marL="190500" indent="-190500">
               <a:spcBef>
                 <a:spcPts val="400"/>
               </a:spcBef>
@@ -5519,7 +5519,7 @@
             </a:r>
           </a:p>
           <a:p>
-            <a:pPr>
+            <a:pPr marL="177800" indent="-177800">
               <a:spcBef>
                 <a:spcPts val="600"/>
               </a:spcBef>
@@ -5610,7 +5610,7 @@
                 <a:solidFill>
                   <a:srgbClr val="A0B4D2"/>
                 </a:solidFill>
-                <a:latin typeface="JetBrains Mono"/>
+                <a:latin typeface="Consolas"/>
               </a:rPr>
               <a:t>FKB Campus  ·  M13</a:t>
             </a:r>
@@ -5749,7 +5749,7 @@
                 <a:solidFill>
                   <a:srgbClr val="78808C"/>
                 </a:solidFill>
-                <a:latin typeface="JetBrains Mono"/>
+                <a:latin typeface="Consolas"/>
               </a:rPr>
               <a:t>M13  ·  INHALT</a:t>
             </a:r>
@@ -5870,7 +5870,7 @@
                 <a:solidFill>
                   <a:srgbClr val="1F2C56"/>
                 </a:solidFill>
-                <a:latin typeface="Source Serif 4"/>
+                <a:latin typeface="Arial"/>
               </a:rPr>
               <a:t>Schritt 3: Gespräch</a:t>
             </a:r>
@@ -5886,7 +5886,7 @@
         <p:spPr>
           <a:xfrm>
             <a:off x="685800" y="1417320"/>
-            <a:ext cx="10817352" cy="5029200"/>
+            <a:ext cx="10817352" cy="4892040"/>
           </a:xfrm>
           <a:prstGeom prst="rect">
             <a:avLst/>
@@ -5899,7 +5899,7 @@
           </a:bodyPr>
           <a:lstStyle/>
           <a:p>
-            <a:pPr>
+            <a:pPr marL="190500" indent="-190500">
               <a:spcBef>
                 <a:spcPts val="400"/>
               </a:spcBef>
@@ -5918,7 +5918,7 @@
             </a:r>
           </a:p>
           <a:p>
-            <a:pPr>
+            <a:pPr marL="190500" indent="-190500">
               <a:spcBef>
                 <a:spcPts val="400"/>
               </a:spcBef>
@@ -5937,7 +5937,7 @@
             </a:r>
           </a:p>
           <a:p>
-            <a:pPr>
+            <a:pPr marL="190500" indent="-190500">
               <a:spcBef>
                 <a:spcPts val="400"/>
               </a:spcBef>
@@ -5956,7 +5956,7 @@
             </a:r>
           </a:p>
           <a:p>
-            <a:pPr>
+            <a:pPr marL="190500" indent="-190500">
               <a:spcBef>
                 <a:spcPts val="400"/>
               </a:spcBef>
@@ -5975,7 +5975,7 @@
             </a:r>
           </a:p>
           <a:p>
-            <a:pPr>
+            <a:pPr marL="190500" indent="-190500">
               <a:spcBef>
                 <a:spcPts val="400"/>
               </a:spcBef>
@@ -5994,7 +5994,7 @@
             </a:r>
           </a:p>
           <a:p>
-            <a:pPr>
+            <a:pPr marL="190500" indent="-190500">
               <a:spcBef>
                 <a:spcPts val="400"/>
               </a:spcBef>
@@ -6013,7 +6013,7 @@
             </a:r>
           </a:p>
           <a:p>
-            <a:pPr>
+            <a:pPr marL="190500" indent="-190500">
               <a:spcBef>
                 <a:spcPts val="400"/>
               </a:spcBef>
@@ -6104,7 +6104,7 @@
                 <a:solidFill>
                   <a:srgbClr val="A0B4D2"/>
                 </a:solidFill>
-                <a:latin typeface="JetBrains Mono"/>
+                <a:latin typeface="Consolas"/>
               </a:rPr>
               <a:t>FKB Campus  ·  M13</a:t>
             </a:r>
@@ -6243,7 +6243,7 @@
                 <a:solidFill>
                   <a:srgbClr val="78808C"/>
                 </a:solidFill>
-                <a:latin typeface="JetBrains Mono"/>
+                <a:latin typeface="Consolas"/>
               </a:rPr>
               <a:t>M13  ·  INHALT</a:t>
             </a:r>
@@ -6364,7 +6364,7 @@
                 <a:solidFill>
                   <a:srgbClr val="1F2C56"/>
                 </a:solidFill>
-                <a:latin typeface="Source Serif 4"/>
+                <a:latin typeface="Arial"/>
               </a:rPr>
               <a:t>Schritt 4: Dokumentation</a:t>
             </a:r>
@@ -6380,7 +6380,7 @@
         <p:spPr>
           <a:xfrm>
             <a:off x="685800" y="1417320"/>
-            <a:ext cx="10817352" cy="5029200"/>
+            <a:ext cx="10817352" cy="4892040"/>
           </a:xfrm>
           <a:prstGeom prst="rect">
             <a:avLst/>
@@ -6393,7 +6393,7 @@
           </a:bodyPr>
           <a:lstStyle/>
           <a:p>
-            <a:pPr>
+            <a:pPr marL="190500" indent="-190500">
               <a:spcBef>
                 <a:spcPts val="400"/>
               </a:spcBef>
@@ -6412,7 +6412,7 @@
             </a:r>
           </a:p>
           <a:p>
-            <a:pPr>
+            <a:pPr marL="190500" indent="-190500">
               <a:spcBef>
                 <a:spcPts val="400"/>
               </a:spcBef>
@@ -6431,7 +6431,7 @@
             </a:r>
           </a:p>
           <a:p>
-            <a:pPr>
+            <a:pPr marL="190500" indent="-190500">
               <a:spcBef>
                 <a:spcPts val="400"/>
               </a:spcBef>
@@ -6450,7 +6450,7 @@
             </a:r>
           </a:p>
           <a:p>
-            <a:pPr>
+            <a:pPr marL="190500" indent="-190500">
               <a:spcBef>
                 <a:spcPts val="400"/>
               </a:spcBef>
@@ -6469,7 +6469,7 @@
             </a:r>
           </a:p>
           <a:p>
-            <a:pPr>
+            <a:pPr marL="190500" indent="-190500">
               <a:spcBef>
                 <a:spcPts val="400"/>
               </a:spcBef>
@@ -6488,7 +6488,7 @@
             </a:r>
           </a:p>
           <a:p>
-            <a:pPr>
+            <a:pPr marL="190500" indent="-190500">
               <a:spcBef>
                 <a:spcPts val="400"/>
               </a:spcBef>
@@ -6507,7 +6507,7 @@
             </a:r>
           </a:p>
           <a:p>
-            <a:pPr>
+            <a:pPr marL="190500" indent="-190500">
               <a:spcBef>
                 <a:spcPts val="400"/>
               </a:spcBef>
@@ -6526,7 +6526,7 @@
             </a:r>
           </a:p>
           <a:p>
-            <a:pPr>
+            <a:pPr marL="190500" indent="-190500">
               <a:spcBef>
                 <a:spcPts val="400"/>
               </a:spcBef>
@@ -6545,7 +6545,7 @@
             </a:r>
           </a:p>
           <a:p>
-            <a:pPr>
+            <a:pPr marL="190500" indent="-190500">
               <a:spcBef>
                 <a:spcPts val="400"/>
               </a:spcBef>
@@ -6564,7 +6564,7 @@
             </a:r>
           </a:p>
           <a:p>
-            <a:pPr>
+            <a:pPr marL="190500" indent="-190500">
               <a:spcBef>
                 <a:spcPts val="400"/>
               </a:spcBef>
@@ -6583,7 +6583,7 @@
             </a:r>
           </a:p>
           <a:p>
-            <a:pPr>
+            <a:pPr marL="190500" indent="-190500">
               <a:spcBef>
                 <a:spcPts val="400"/>
               </a:spcBef>
@@ -6602,7 +6602,7 @@
             </a:r>
           </a:p>
           <a:p>
-            <a:pPr>
+            <a:pPr marL="190500" indent="-190500">
               <a:spcBef>
                 <a:spcPts val="400"/>
               </a:spcBef>
@@ -6693,7 +6693,7 @@
                 <a:solidFill>
                   <a:srgbClr val="A0B4D2"/>
                 </a:solidFill>
-                <a:latin typeface="JetBrains Mono"/>
+                <a:latin typeface="Consolas"/>
               </a:rPr>
               <a:t>FKB Campus  ·  M13</a:t>
             </a:r>
@@ -6832,7 +6832,7 @@
                 <a:solidFill>
                   <a:srgbClr val="78808C"/>
                 </a:solidFill>
-                <a:latin typeface="JetBrains Mono"/>
+                <a:latin typeface="Consolas"/>
               </a:rPr>
               <a:t>M13  ·  SCHAUBILD</a:t>
             </a:r>
@@ -6867,7 +6867,7 @@
                 <a:solidFill>
                   <a:srgbClr val="1F2C56"/>
                 </a:solidFill>
-                <a:latin typeface="Source Serif 4"/>
+                <a:latin typeface="Arial"/>
               </a:rPr>
               <a:t>Verbundpartner-Matrix</a:t>
             </a:r>
@@ -7012,7 +7012,7 @@
                 <a:solidFill>
                   <a:srgbClr val="A0B4D2"/>
                 </a:solidFill>
-                <a:latin typeface="JetBrains Mono"/>
+                <a:latin typeface="Consolas"/>
               </a:rPr>
               <a:t>FKB Campus  ·  M13</a:t>
             </a:r>
@@ -7047,7 +7047,7 @@
                 <a:solidFill>
                   <a:srgbClr val="A0B4D2"/>
                 </a:solidFill>
-                <a:latin typeface="JetBrains Mono"/>
+                <a:latin typeface="Consolas"/>
               </a:rPr>
               <a:t>Schaubild</a:t>
             </a:r>
@@ -7186,7 +7186,7 @@
                 <a:solidFill>
                   <a:srgbClr val="78808C"/>
                 </a:solidFill>
-                <a:latin typeface="JetBrains Mono"/>
+                <a:latin typeface="Consolas"/>
               </a:rPr>
               <a:t>M13  ·  INHALT</a:t>
             </a:r>
@@ -7307,7 +7307,7 @@
                 <a:solidFill>
                   <a:srgbClr val="1F2C56"/>
                 </a:solidFill>
-                <a:latin typeface="Source Serif 4"/>
+                <a:latin typeface="Arial"/>
               </a:rPr>
               <a:t>AB-1: Wallet-Share-Analyse</a:t>
             </a:r>
@@ -7323,7 +7323,7 @@
         <p:spPr>
           <a:xfrm>
             <a:off x="685800" y="1417320"/>
-            <a:ext cx="10817352" cy="5029200"/>
+            <a:ext cx="10817352" cy="4892040"/>
           </a:xfrm>
           <a:prstGeom prst="rect">
             <a:avLst/>
@@ -7331,12 +7331,12 @@
           <a:noFill/>
         </p:spPr>
         <p:txBody>
-          <a:bodyPr wrap="square">
+          <a:bodyPr wrap="square" anchor="ctr">
             <a:spAutoFit/>
           </a:bodyPr>
           <a:lstStyle/>
           <a:p>
-            <a:pPr>
+            <a:pPr marL="190500" indent="-190500">
               <a:spcBef>
                 <a:spcPts val="400"/>
               </a:spcBef>
@@ -7427,7 +7427,7 @@
                 <a:solidFill>
                   <a:srgbClr val="A0B4D2"/>
                 </a:solidFill>
-                <a:latin typeface="JetBrains Mono"/>
+                <a:latin typeface="Consolas"/>
               </a:rPr>
               <a:t>FKB Campus  ·  M13</a:t>
             </a:r>
@@ -7566,7 +7566,7 @@
                 <a:solidFill>
                   <a:srgbClr val="78808C"/>
                 </a:solidFill>
-                <a:latin typeface="JetBrains Mono"/>
+                <a:latin typeface="Consolas"/>
               </a:rPr>
               <a:t>M13  ·  ÜBERSICHT</a:t>
             </a:r>
@@ -7601,7 +7601,7 @@
                 <a:solidFill>
                   <a:srgbClr val="1F2C56"/>
                 </a:solidFill>
-                <a:latin typeface="Source Serif 4"/>
+                <a:latin typeface="Arial"/>
               </a:rPr>
               <a:t>AB-1: Wallet-Share-Analyse</a:t>
             </a:r>
@@ -8175,7 +8175,7 @@
                 <a:solidFill>
                   <a:srgbClr val="A0B4D2"/>
                 </a:solidFill>
-                <a:latin typeface="JetBrains Mono"/>
+                <a:latin typeface="Consolas"/>
               </a:rPr>
               <a:t>FKB Campus  ·  M13</a:t>
             </a:r>
@@ -8210,7 +8210,7 @@
                 <a:solidFill>
                   <a:srgbClr val="A0B4D2"/>
                 </a:solidFill>
-                <a:latin typeface="JetBrains Mono"/>
+                <a:latin typeface="Consolas"/>
               </a:rPr>
               <a:t>Übersicht</a:t>
             </a:r>
@@ -8349,7 +8349,7 @@
                 <a:solidFill>
                   <a:srgbClr val="78808C"/>
                 </a:solidFill>
-                <a:latin typeface="JetBrains Mono"/>
+                <a:latin typeface="Consolas"/>
               </a:rPr>
               <a:t>M13  ·  ÜBERSICHT</a:t>
             </a:r>
@@ -8384,7 +8384,7 @@
                 <a:solidFill>
                   <a:srgbClr val="1F2C56"/>
                 </a:solidFill>
-                <a:latin typeface="Source Serif 4"/>
+                <a:latin typeface="Arial"/>
               </a:rPr>
               <a:t>AB-2: Cross-Selling-Gesprächsvorbereitung</a:t>
             </a:r>
@@ -8745,7 +8745,7 @@
                 <a:solidFill>
                   <a:srgbClr val="A0B4D2"/>
                 </a:solidFill>
-                <a:latin typeface="JetBrains Mono"/>
+                <a:latin typeface="Consolas"/>
               </a:rPr>
               <a:t>FKB Campus  ·  M13</a:t>
             </a:r>
@@ -8780,7 +8780,7 @@
                 <a:solidFill>
                   <a:srgbClr val="A0B4D2"/>
                 </a:solidFill>
-                <a:latin typeface="JetBrains Mono"/>
+                <a:latin typeface="Consolas"/>
               </a:rPr>
               <a:t>Übersicht</a:t>
             </a:r>
@@ -8919,7 +8919,7 @@
                 <a:solidFill>
                   <a:srgbClr val="78808C"/>
                 </a:solidFill>
-                <a:latin typeface="JetBrains Mono"/>
+                <a:latin typeface="Consolas"/>
               </a:rPr>
               <a:t>ÜBERBLICK  ·  M13</a:t>
             </a:r>
@@ -8997,7 +8997,7 @@
                 <a:solidFill>
                   <a:srgbClr val="1F2C56"/>
                 </a:solidFill>
-                <a:latin typeface="Source Serif 4"/>
+                <a:latin typeface="Arial"/>
               </a:rPr>
               <a:t>Worum geht es heute</a:t>
             </a:r>
@@ -9146,7 +9146,7 @@
                 <a:solidFill>
                   <a:srgbClr val="A0B4D2"/>
                 </a:solidFill>
-                <a:latin typeface="JetBrains Mono"/>
+                <a:latin typeface="Consolas"/>
               </a:rPr>
               <a:t>FKB Campus  ·  M13</a:t>
             </a:r>
@@ -9285,7 +9285,7 @@
                 <a:solidFill>
                   <a:srgbClr val="78808C"/>
                 </a:solidFill>
-                <a:latin typeface="JetBrains Mono"/>
+                <a:latin typeface="Consolas"/>
               </a:rPr>
               <a:t>LERNZIELE  ·  M13</a:t>
             </a:r>
@@ -9363,7 +9363,7 @@
                 <a:solidFill>
                   <a:srgbClr val="1F2C56"/>
                 </a:solidFill>
-                <a:latin typeface="Source Serif 4"/>
+                <a:latin typeface="Arial"/>
               </a:rPr>
               <a:t>Was Sie heute mitnehmen</a:t>
             </a:r>
@@ -9559,7 +9559,7 @@
                 <a:solidFill>
                   <a:srgbClr val="A0B4D2"/>
                 </a:solidFill>
-                <a:latin typeface="JetBrains Mono"/>
+                <a:latin typeface="Consolas"/>
               </a:rPr>
               <a:t>FKB Campus  ·  M13</a:t>
             </a:r>
@@ -9698,7 +9698,7 @@
                 <a:solidFill>
                   <a:srgbClr val="78808C"/>
                 </a:solidFill>
-                <a:latin typeface="JetBrains Mono"/>
+                <a:latin typeface="Consolas"/>
               </a:rPr>
               <a:t>AGENDA  ·  M13</a:t>
             </a:r>
@@ -9776,7 +9776,7 @@
                 <a:solidFill>
                   <a:srgbClr val="1F2C56"/>
                 </a:solidFill>
-                <a:latin typeface="Source Serif 4"/>
+                <a:latin typeface="Arial"/>
               </a:rPr>
               <a:t>So läuft das Modul</a:t>
             </a:r>
@@ -10136,7 +10136,7 @@
                 <a:solidFill>
                   <a:srgbClr val="A0B4D2"/>
                 </a:solidFill>
-                <a:latin typeface="JetBrains Mono"/>
+                <a:latin typeface="Consolas"/>
               </a:rPr>
               <a:t>FKB Campus  ·  M13</a:t>
             </a:r>
@@ -10275,7 +10275,7 @@
                 <a:solidFill>
                   <a:srgbClr val="78808C"/>
                 </a:solidFill>
-                <a:latin typeface="JetBrains Mono"/>
+                <a:latin typeface="Consolas"/>
               </a:rPr>
               <a:t>M13  ·  INHALT</a:t>
             </a:r>
@@ -10396,7 +10396,7 @@
                 <a:solidFill>
                   <a:srgbClr val="1F2C56"/>
                 </a:solidFill>
-                <a:latin typeface="Source Serif 4"/>
+                <a:latin typeface="Arial"/>
               </a:rPr>
               <a:t>Definition</a:t>
             </a:r>
@@ -10412,7 +10412,7 @@
         <p:spPr>
           <a:xfrm>
             <a:off x="685800" y="1417320"/>
-            <a:ext cx="10817352" cy="5029200"/>
+            <a:ext cx="10817352" cy="4892040"/>
           </a:xfrm>
           <a:prstGeom prst="rect">
             <a:avLst/>
@@ -10420,12 +10420,12 @@
           <a:noFill/>
         </p:spPr>
         <p:txBody>
-          <a:bodyPr wrap="square">
+          <a:bodyPr wrap="square" anchor="ctr">
             <a:spAutoFit/>
           </a:bodyPr>
           <a:lstStyle/>
           <a:p>
-            <a:pPr>
+            <a:pPr marL="177800" indent="-177800">
               <a:spcBef>
                 <a:spcPts val="600"/>
               </a:spcBef>
@@ -10516,7 +10516,7 @@
                 <a:solidFill>
                   <a:srgbClr val="A0B4D2"/>
                 </a:solidFill>
-                <a:latin typeface="JetBrains Mono"/>
+                <a:latin typeface="Consolas"/>
               </a:rPr>
               <a:t>FKB Campus  ·  M13</a:t>
             </a:r>
@@ -10655,7 +10655,7 @@
                 <a:solidFill>
                   <a:srgbClr val="78808C"/>
                 </a:solidFill>
-                <a:latin typeface="JetBrains Mono"/>
+                <a:latin typeface="Consolas"/>
               </a:rPr>
               <a:t>M13  ·  INHALT</a:t>
             </a:r>
@@ -10776,7 +10776,7 @@
                 <a:solidFill>
                   <a:srgbClr val="1F2C56"/>
                 </a:solidFill>
-                <a:latin typeface="Source Serif 4"/>
+                <a:latin typeface="Arial"/>
               </a:rPr>
               <a:t>Zwei Typen: Push vs. Pull</a:t>
             </a:r>
@@ -10792,7 +10792,7 @@
         <p:spPr>
           <a:xfrm>
             <a:off x="685800" y="1417320"/>
-            <a:ext cx="10817352" cy="5029200"/>
+            <a:ext cx="10817352" cy="4892040"/>
           </a:xfrm>
           <a:prstGeom prst="rect">
             <a:avLst/>
@@ -10800,12 +10800,12 @@
           <a:noFill/>
         </p:spPr>
         <p:txBody>
-          <a:bodyPr wrap="square">
+          <a:bodyPr wrap="square" anchor="ctr">
             <a:spAutoFit/>
           </a:bodyPr>
           <a:lstStyle/>
           <a:p>
-            <a:pPr>
+            <a:pPr marL="190500" indent="-190500">
               <a:spcBef>
                 <a:spcPts val="400"/>
               </a:spcBef>
@@ -10896,7 +10896,7 @@
                 <a:solidFill>
                   <a:srgbClr val="A0B4D2"/>
                 </a:solidFill>
-                <a:latin typeface="JetBrains Mono"/>
+                <a:latin typeface="Consolas"/>
               </a:rPr>
               <a:t>FKB Campus  ·  M13</a:t>
             </a:r>
@@ -11035,7 +11035,7 @@
                 <a:solidFill>
                   <a:srgbClr val="78808C"/>
                 </a:solidFill>
-                <a:latin typeface="JetBrains Mono"/>
+                <a:latin typeface="Consolas"/>
               </a:rPr>
               <a:t>M13  ·  INHALT</a:t>
             </a:r>
@@ -11156,7 +11156,7 @@
                 <a:solidFill>
                   <a:srgbClr val="1F2C56"/>
                 </a:solidFill>
-                <a:latin typeface="Source Serif 4"/>
+                <a:latin typeface="Arial"/>
               </a:rPr>
               <a:t>Das Konzept</a:t>
             </a:r>
@@ -11172,7 +11172,7 @@
         <p:spPr>
           <a:xfrm>
             <a:off x="685800" y="1417320"/>
-            <a:ext cx="10817352" cy="5029200"/>
+            <a:ext cx="10817352" cy="4892040"/>
           </a:xfrm>
           <a:prstGeom prst="rect">
             <a:avLst/>
@@ -11180,12 +11180,12 @@
           <a:noFill/>
         </p:spPr>
         <p:txBody>
-          <a:bodyPr wrap="square">
+          <a:bodyPr wrap="square" anchor="ctr">
             <a:spAutoFit/>
           </a:bodyPr>
           <a:lstStyle/>
           <a:p>
-            <a:pPr>
+            <a:pPr marL="190500" indent="-190500">
               <a:spcBef>
                 <a:spcPts val="400"/>
               </a:spcBef>
@@ -11276,7 +11276,7 @@
                 <a:solidFill>
                   <a:srgbClr val="A0B4D2"/>
                 </a:solidFill>
-                <a:latin typeface="JetBrains Mono"/>
+                <a:latin typeface="Consolas"/>
               </a:rPr>
               <a:t>FKB Campus  ·  M13</a:t>
             </a:r>
@@ -11415,7 +11415,7 @@
                 <a:solidFill>
                   <a:srgbClr val="78808C"/>
                 </a:solidFill>
-                <a:latin typeface="JetBrains Mono"/>
+                <a:latin typeface="Consolas"/>
               </a:rPr>
               <a:t>M13  ·  INHALT</a:t>
             </a:r>
@@ -11536,7 +11536,7 @@
                 <a:solidFill>
                   <a:srgbClr val="1F2C56"/>
                 </a:solidFill>
-                <a:latin typeface="Source Serif 4"/>
+                <a:latin typeface="Arial"/>
               </a:rPr>
               <a:t>Potenzialanalyse in agree</a:t>
             </a:r>
@@ -11552,7 +11552,7 @@
         <p:spPr>
           <a:xfrm>
             <a:off x="685800" y="1417320"/>
-            <a:ext cx="10817352" cy="5029200"/>
+            <a:ext cx="10817352" cy="4892040"/>
           </a:xfrm>
           <a:prstGeom prst="rect">
             <a:avLst/>
@@ -11560,12 +11560,12 @@
           <a:noFill/>
         </p:spPr>
         <p:txBody>
-          <a:bodyPr wrap="square">
+          <a:bodyPr wrap="square" anchor="ctr">
             <a:spAutoFit/>
           </a:bodyPr>
           <a:lstStyle/>
           <a:p>
-            <a:pPr>
+            <a:pPr marL="190500" indent="-190500">
               <a:spcBef>
                 <a:spcPts val="400"/>
               </a:spcBef>
@@ -11584,7 +11584,7 @@
             </a:r>
           </a:p>
           <a:p>
-            <a:pPr>
+            <a:pPr marL="190500" indent="-190500">
               <a:spcBef>
                 <a:spcPts val="400"/>
               </a:spcBef>
@@ -11675,7 +11675,7 @@
                 <a:solidFill>
                   <a:srgbClr val="A0B4D2"/>
                 </a:solidFill>
-                <a:latin typeface="JetBrains Mono"/>
+                <a:latin typeface="Consolas"/>
               </a:rPr>
               <a:t>FKB Campus  ·  M13</a:t>
             </a:r>
@@ -11814,7 +11814,7 @@
                 <a:solidFill>
                   <a:srgbClr val="78808C"/>
                 </a:solidFill>
-                <a:latin typeface="JetBrains Mono"/>
+                <a:latin typeface="Consolas"/>
               </a:rPr>
               <a:t>M13  ·  INHALT</a:t>
             </a:r>
@@ -11935,7 +11935,7 @@
                 <a:solidFill>
                   <a:srgbClr val="1F2C56"/>
                 </a:solidFill>
-                <a:latin typeface="Source Serif 4"/>
+                <a:latin typeface="Arial"/>
               </a:rPr>
               <a:t>Ereignisbasierte Cross-Selling-Anlässe</a:t>
             </a:r>
@@ -11951,7 +11951,7 @@
         <p:spPr>
           <a:xfrm>
             <a:off x="685800" y="1417320"/>
-            <a:ext cx="10817352" cy="5029200"/>
+            <a:ext cx="10817352" cy="4892040"/>
           </a:xfrm>
           <a:prstGeom prst="rect">
             <a:avLst/>
@@ -11959,12 +11959,12 @@
           <a:noFill/>
         </p:spPr>
         <p:txBody>
-          <a:bodyPr wrap="square">
+          <a:bodyPr wrap="square" anchor="ctr">
             <a:spAutoFit/>
           </a:bodyPr>
           <a:lstStyle/>
           <a:p>
-            <a:pPr>
+            <a:pPr marL="190500" indent="-190500">
               <a:spcBef>
                 <a:spcPts val="400"/>
               </a:spcBef>
@@ -11983,7 +11983,7 @@
             </a:r>
           </a:p>
           <a:p>
-            <a:pPr>
+            <a:pPr marL="190500" indent="-190500">
               <a:spcBef>
                 <a:spcPts val="400"/>
               </a:spcBef>
@@ -12002,7 +12002,7 @@
             </a:r>
           </a:p>
           <a:p>
-            <a:pPr>
+            <a:pPr marL="190500" indent="-190500">
               <a:spcBef>
                 <a:spcPts val="400"/>
               </a:spcBef>
@@ -12093,7 +12093,7 @@
                 <a:solidFill>
                   <a:srgbClr val="A0B4D2"/>
                 </a:solidFill>
-                <a:latin typeface="JetBrains Mono"/>
+                <a:latin typeface="Consolas"/>
               </a:rPr>
               <a:t>FKB Campus  ·  M13</a:t>
             </a:r>

--- a/protected-downloads/praesentation/M13.pptx
+++ b/protected-downloads/praesentation/M13.pptx
@@ -20,8 +20,6 @@
     <p:sldId id="268" r:id="rId20"/>
     <p:sldId id="269" r:id="rId21"/>
     <p:sldId id="270" r:id="rId22"/>
-    <p:sldId id="271" r:id="rId23"/>
-    <p:sldId id="272" r:id="rId24"/>
   </p:sldIdLst>
   <p:sldSz cx="12188952" cy="6858000" type="screen4x3"/>
   <p:notesSz cx="6858000" cy="9144000"/>
@@ -543,146 +541,6 @@
 </p:notes>
 </file>
 
-<file path=ppt/notesSlides/notesSlide10.xml><?xml version="1.0" encoding="utf-8"?>
-<p:notes xmlns:a="http://schemas.openxmlformats.org/drawingml/2006/main" xmlns:p="http://schemas.openxmlformats.org/presentationml/2006/main" xmlns:r="http://schemas.openxmlformats.org/officeDocument/2006/relationships">
-  <p:cSld>
-    <p:spTree>
-      <p:nvGrpSpPr>
-        <p:cNvPr id="1" name=""/>
-        <p:cNvGrpSpPr/>
-        <p:nvPr/>
-      </p:nvGrpSpPr>
-      <p:grpSpPr>
-        <a:xfrm>
-          <a:off x="0" y="0"/>
-          <a:ext cx="0" cy="0"/>
-          <a:chOff x="0" y="0"/>
-          <a:chExt cx="0" cy="0"/>
-        </a:xfrm>
-      </p:grpSpPr>
-      <p:sp>
-        <p:nvSpPr>
-          <p:cNvPr id="2" name="Slide Image Placeholder 1"/>
-          <p:cNvSpPr>
-            <a:spLocks noGrp="1"/>
-          </p:cNvSpPr>
-          <p:nvPr>
-            <p:ph type="sldImg" idx="2"/>
-          </p:nvPr>
-        </p:nvSpPr>
-        <p:spPr/>
-      </p:sp>
-      <p:sp>
-        <p:nvSpPr>
-          <p:cNvPr id="3" name="Notes Placeholder 2"/>
-          <p:cNvSpPr>
-            <a:spLocks noGrp="1"/>
-          </p:cNvSpPr>
-          <p:nvPr>
-            <p:ph type="body" idx="3" sz="quarter"/>
-          </p:nvPr>
-        </p:nvSpPr>
-        <p:spPr/>
-        <p:txBody>
-          <a:bodyPr/>
-          <a:lstStyle/>
-          <a:p>
-            <a:r>
-              <a:t>Siehe Trainerhandbuch (Sektion 3) für Moderationshinweise, Timing und erwartete Teilnehmerreaktionen.</a:t>
-            </a:r>
-          </a:p>
-        </p:txBody>
-      </p:sp>
-      <p:sp>
-        <p:nvSpPr>
-          <p:cNvPr id="4" name="Slide Number Placeholder 3"/>
-          <p:cNvSpPr>
-            <a:spLocks noGrp="1"/>
-          </p:cNvSpPr>
-          <p:nvPr>
-            <p:ph type="sldNum" idx="5" sz="quarter"/>
-          </p:nvPr>
-        </p:nvSpPr>
-        <p:spPr/>
-      </p:sp>
-    </p:spTree>
-  </p:cSld>
-  <p:clrMapOvr>
-    <a:masterClrMapping/>
-  </p:clrMapOvr>
-</p:notes>
-</file>
-
-<file path=ppt/notesSlides/notesSlide11.xml><?xml version="1.0" encoding="utf-8"?>
-<p:notes xmlns:a="http://schemas.openxmlformats.org/drawingml/2006/main" xmlns:p="http://schemas.openxmlformats.org/presentationml/2006/main" xmlns:r="http://schemas.openxmlformats.org/officeDocument/2006/relationships">
-  <p:cSld>
-    <p:spTree>
-      <p:nvGrpSpPr>
-        <p:cNvPr id="1" name=""/>
-        <p:cNvGrpSpPr/>
-        <p:nvPr/>
-      </p:nvGrpSpPr>
-      <p:grpSpPr>
-        <a:xfrm>
-          <a:off x="0" y="0"/>
-          <a:ext cx="0" cy="0"/>
-          <a:chOff x="0" y="0"/>
-          <a:chExt cx="0" cy="0"/>
-        </a:xfrm>
-      </p:grpSpPr>
-      <p:sp>
-        <p:nvSpPr>
-          <p:cNvPr id="2" name="Slide Image Placeholder 1"/>
-          <p:cNvSpPr>
-            <a:spLocks noGrp="1"/>
-          </p:cNvSpPr>
-          <p:nvPr>
-            <p:ph type="sldImg" idx="2"/>
-          </p:nvPr>
-        </p:nvSpPr>
-        <p:spPr/>
-      </p:sp>
-      <p:sp>
-        <p:nvSpPr>
-          <p:cNvPr id="3" name="Notes Placeholder 2"/>
-          <p:cNvSpPr>
-            <a:spLocks noGrp="1"/>
-          </p:cNvSpPr>
-          <p:nvPr>
-            <p:ph type="body" idx="3" sz="quarter"/>
-          </p:nvPr>
-        </p:nvSpPr>
-        <p:spPr/>
-        <p:txBody>
-          <a:bodyPr/>
-          <a:lstStyle/>
-          <a:p>
-            <a:r>
-              <a:t>Moderation (HB Sec 3): Partnerarbeit mit Musterprofil aus Sec 4.3. Aufgabe: Welche Wallet-Share-Lücken erkennen Sie? Welche zwei Ansatzpunkte würden Sie zuerst adressieren? Auswertung im Plenum: Welche Lücken hat jedes Paar identifiziert? Unterschiede in der Priorisierung diskutieren. Trainer-Hinweis: Es gibt keine eindeutig richtige Priorisierung – das ist Absicht. Die Diskussion zeigt, dass systematisches Cross-Selling Urteile erfordert, nicht nur Checklisten. Das ist die Vorbereitung auf Stufe 3 (M14). Trainer-Hinweis Priorisierung: Wenn TN nach unterschiedlichen Kriterien priorisieren (der eine nach Kundenbedarf, der andere nach Abschlusswahrscheinlichkeit): beide Perspektiven würdigen und dann gemeinsam eine Entscheidungsregel ableiten – Anlass-Aktualität + Ertragspotenzial + Beziehungsrisiko. Das Priorisierungsraster aus Arbeitsblatt A (Priorität A vs. B) als gemeinsame Methode festhalten, damit die Übung nicht in beliebigen Einzelmeinungen endet.</a:t>
-            </a:r>
-          </a:p>
-        </p:txBody>
-      </p:sp>
-      <p:sp>
-        <p:nvSpPr>
-          <p:cNvPr id="4" name="Slide Number Placeholder 3"/>
-          <p:cNvSpPr>
-            <a:spLocks noGrp="1"/>
-          </p:cNvSpPr>
-          <p:nvPr>
-            <p:ph type="sldNum" idx="5" sz="quarter"/>
-          </p:nvPr>
-        </p:nvSpPr>
-        <p:spPr/>
-      </p:sp>
-    </p:spTree>
-  </p:cSld>
-  <p:clrMapOvr>
-    <a:masterClrMapping/>
-  </p:clrMapOvr>
-</p:notes>
-</file>
-
 <file path=ppt/notesSlides/notesSlide2.xml><?xml version="1.0" encoding="utf-8"?>
 <p:notes xmlns:a="http://schemas.openxmlformats.org/drawingml/2006/main" xmlns:p="http://schemas.openxmlformats.org/presentationml/2006/main" xmlns:r="http://schemas.openxmlformats.org/officeDocument/2006/relationships">
   <p:cSld>
@@ -728,7 +586,7 @@
           <a:lstStyle/>
           <a:p>
             <a:r>
-              <a:t>Siehe Trainerhandbuch (Sektion 3) für Moderationshinweise, Timing und erwartete Teilnehmerreaktionen.</a:t>
+              <a:t>Einstieg: „Wann hat Ihnen zuletzt jemand etwas verkauft, das Sie nicht brauchten – und wie hat sich das angefühlt?"</a:t>
             </a:r>
           </a:p>
         </p:txBody>
@@ -798,7 +656,7 @@
           <a:lstStyle/>
           <a:p>
             <a:r>
-              <a:t>Siehe Trainerhandbuch (Sektion 3) für Moderationshinweise, Timing und erwartete Teilnehmerreaktionen.</a:t>
+              <a:t>Der Modultitel ist Programm: systematisch heißt bedarfsorientiert, nicht listengetrieben.</a:t>
             </a:r>
           </a:p>
         </p:txBody>
@@ -868,7 +726,7 @@
           <a:lstStyle/>
           <a:p>
             <a:r>
-              <a:t>Siehe Trainerhandbuch (Sektion 3) für Moderationshinweise, Timing und erwartete Teilnehmerreaktionen.</a:t>
+              <a:t>Wallet-Share sichtbar machen: wo ist die Beziehung „flach" – viel Kredit, aber kein Verbundpartner eingebunden?</a:t>
             </a:r>
           </a:p>
         </p:txBody>
@@ -938,7 +796,7 @@
           <a:lstStyle/>
           <a:p>
             <a:r>
-              <a:t>Siehe Trainerhandbuch (Sektion 3) für Moderationshinweise, Timing und erwartete Teilnehmerreaktionen.</a:t>
+              <a:t>Die Hypothese ist der Kern: eine begründete Vermutung über den Bedarf, die im Gespräch geprüft wird.</a:t>
             </a:r>
           </a:p>
         </p:txBody>
@@ -1008,7 +866,12 @@
           <a:lstStyle/>
           <a:p>
             <a:r>
-              <a:t>Siehe Trainerhandbuch (Sektion 3) für Moderationshinweise, Timing und erwartete Teilnehmerreaktionen.</a:t>
+              <a:t>AB Musterlösung (Trainer-Version)</a:t>
+            </a:r>
+          </a:p>
+          <a:p>
+            <a:r>
+              <a:t>Fall Markus Hofer: stabile, aber flache Beziehung (Kontokorrent, Darlehen, ZV; kein Verbund). Einstieg Betriebsunterbrechungsversicherung – weil der Kunde einen zweiwöchigen CNC-Ausfall erwähnte. Anlass schlägt Produktliste.</a:t>
             </a:r>
           </a:p>
         </p:txBody>
@@ -1078,7 +941,7 @@
           <a:lstStyle/>
           <a:p>
             <a:r>
-              <a:t>Moderation (HB Sec 3): Partnerarbeit mit Musterprofil aus Sec 4.3. Aufgabe: Welche Wallet-Share-Lücken erkennen Sie? Welche zwei Ansatzpunkte würden Sie zuerst adressieren? Auswertung im Plenum: Welche Lücken hat jedes Paar identifiziert? Unterschiede in der Priorisierung diskutieren. Trainer-Hinweis: Es gibt keine eindeutig richtige Priorisierung – das ist Absicht. Die Diskussion zeigt, dass systematisches Cross-Selling Urteile erfordert, nicht nur Checklisten. Das ist die Vorbereitung auf Stufe 3 (M14). Trainer-Hinweis Priorisierung: Wenn TN nach unterschiedlichen Kriterien priorisieren (der eine nach Kundenbedarf, der andere nach Abschlusswahrscheinlichkeit): beide Perspektiven würdigen und dann gemeinsam eine Entscheidungsregel ableiten – Anlass-Aktualität + Ertragspotenzial + Beziehungsrisiko. Das Priorisierungsraster aus Arbeitsblatt A (Priorität A vs. B) als gemeinsame Methode festhalten, damit die Übung nicht in beliebigen Einzelmeinungen endet.</a:t>
+              <a:t>Überleitung zum Transfer: eine Hypothese für einen realen Kunden vorbereiten.</a:t>
             </a:r>
           </a:p>
         </p:txBody>
@@ -1148,77 +1011,7 @@
           <a:lstStyle/>
           <a:p>
             <a:r>
-              <a:t>Siehe Trainerhandbuch (Sektion 3) für Moderationshinweise, Timing und erwartete Teilnehmerreaktionen.</a:t>
-            </a:r>
-          </a:p>
-        </p:txBody>
-      </p:sp>
-      <p:sp>
-        <p:nvSpPr>
-          <p:cNvPr id="4" name="Slide Number Placeholder 3"/>
-          <p:cNvSpPr>
-            <a:spLocks noGrp="1"/>
-          </p:cNvSpPr>
-          <p:nvPr>
-            <p:ph type="sldNum" idx="5" sz="quarter"/>
-          </p:nvPr>
-        </p:nvSpPr>
-        <p:spPr/>
-      </p:sp>
-    </p:spTree>
-  </p:cSld>
-  <p:clrMapOvr>
-    <a:masterClrMapping/>
-  </p:clrMapOvr>
-</p:notes>
-</file>
-
-<file path=ppt/notesSlides/notesSlide9.xml><?xml version="1.0" encoding="utf-8"?>
-<p:notes xmlns:a="http://schemas.openxmlformats.org/drawingml/2006/main" xmlns:p="http://schemas.openxmlformats.org/presentationml/2006/main" xmlns:r="http://schemas.openxmlformats.org/officeDocument/2006/relationships">
-  <p:cSld>
-    <p:spTree>
-      <p:nvGrpSpPr>
-        <p:cNvPr id="1" name=""/>
-        <p:cNvGrpSpPr/>
-        <p:nvPr/>
-      </p:nvGrpSpPr>
-      <p:grpSpPr>
-        <a:xfrm>
-          <a:off x="0" y="0"/>
-          <a:ext cx="0" cy="0"/>
-          <a:chOff x="0" y="0"/>
-          <a:chExt cx="0" cy="0"/>
-        </a:xfrm>
-      </p:grpSpPr>
-      <p:sp>
-        <p:nvSpPr>
-          <p:cNvPr id="2" name="Slide Image Placeholder 1"/>
-          <p:cNvSpPr>
-            <a:spLocks noGrp="1"/>
-          </p:cNvSpPr>
-          <p:nvPr>
-            <p:ph type="sldImg" idx="2"/>
-          </p:nvPr>
-        </p:nvSpPr>
-        <p:spPr/>
-      </p:sp>
-      <p:sp>
-        <p:nvSpPr>
-          <p:cNvPr id="3" name="Notes Placeholder 2"/>
-          <p:cNvSpPr>
-            <a:spLocks noGrp="1"/>
-          </p:cNvSpPr>
-          <p:nvPr>
-            <p:ph type="body" idx="3" sz="quarter"/>
-          </p:nvPr>
-        </p:nvSpPr>
-        <p:spPr/>
-        <p:txBody>
-          <a:bodyPr/>
-          <a:lstStyle/>
-          <a:p>
-            <a:r>
-              <a:t>Siehe Trainerhandbuch (Sektion 3) für Moderationshinweise, Timing und erwartete Teilnehmerreaktionen.</a:t>
+              <a:t>Selbstcheck als Transferanker.</a:t>
             </a:r>
           </a:p>
         </p:txBody>
@@ -5036,7 +4829,7 @@
                 </a:solidFill>
                 <a:latin typeface="Arial"/>
               </a:rPr>
-              <a:t>Schritt 1: Analyse</a:t>
+              <a:t>Vier Schritte zum bedarfsgerechten Cross-Selling</a:t>
             </a:r>
           </a:p>
         </p:txBody>
@@ -5062,6 +4855,25 @@
             <a:spAutoFit/>
           </a:bodyPr>
           <a:lstStyle/>
+          <a:p>
+            <a:pPr marL="177800" indent="-177800">
+              <a:spcBef>
+                <a:spcPts val="600"/>
+              </a:spcBef>
+              <a:spcAft>
+                <a:spcPts val="200"/>
+              </a:spcAft>
+            </a:pPr>
+            <a:r>
+              <a:rPr sz="1200" i="1">
+                <a:solidFill>
+                  <a:srgbClr val="3D5466"/>
+                </a:solidFill>
+                <a:latin typeface="Arial"/>
+              </a:rPr>
+              <a:t>→  Systematisches Cross-Selling folgt vier Schritten – nicht dem Zufall des Gesprächsverlaufs.</a:t>
+            </a:r>
+          </a:p>
           <a:p>
             <a:pPr marL="190500" indent="-190500">
               <a:spcBef>
@@ -5078,7 +4890,7 @@
                 </a:solidFill>
                 <a:latin typeface="Arial"/>
               </a:rPr>
-              <a:t>▸  Wer? Welcher Kunde hat das größte unausgeschöpfte Potenzial?</a:t>
+              <a:t>▸  Schritt 1 Analyse: Bestand und Wallet-Share in agree prüfen.</a:t>
             </a:r>
           </a:p>
           <a:p>
@@ -5097,7 +4909,7 @@
                 </a:solidFill>
                 <a:latin typeface="Arial"/>
               </a:rPr>
-              <a:t>▸  Was? In welchem Bedarfsfeld liegt das Potenzial (Finanzierung, Absicherung, Anlage, ZV)?</a:t>
+              <a:t>▸  Schritt 2 Hypothese: konkrete Bedarfshypothese je Kunde formulieren.</a:t>
             </a:r>
           </a:p>
           <a:p>
@@ -5116,7 +4928,7 @@
                 </a:solidFill>
                 <a:latin typeface="Arial"/>
               </a:rPr>
-              <a:t>▸  Datenquellen: agree CRM, Jahreskontospiegel, Kreditakten, Verbundpartner-Cockpit</a:t>
+              <a:t>▸  Schritt 3 Gespräch: die Hypothese als Frage einbringen, nicht als Angebot.</a:t>
             </a:r>
           </a:p>
           <a:p>
@@ -5135,7 +4947,7 @@
                 </a:solidFill>
                 <a:latin typeface="Arial"/>
               </a:rPr>
-              <a:t>▸  Ergebnis: Eine priorisierte Liste von 3–5 Cross-Selling-Hypothesen für diesen Kunden.</a:t>
+              <a:t>▸  Schritt 4 Dokumentation: Ergebnis und nächsten Schritt im System festhalten.</a:t>
             </a:r>
           </a:p>
         </p:txBody>
@@ -5251,7 +5063,7 @@
             <a:avLst/>
           </a:prstGeom>
           <a:solidFill>
-            <a:srgbClr val="EDEDF3"/>
+            <a:srgbClr val="FFFFFF"/>
           </a:solidFill>
           <a:ln>
             <a:noFill/>
@@ -5352,51 +5164,43 @@
                 </a:solidFill>
                 <a:latin typeface="Consolas"/>
               </a:rPr>
-              <a:t>M13  ·  INHALT</a:t>
-            </a:r>
-          </a:p>
-        </p:txBody>
-      </p:sp>
-      <p:sp>
-        <p:nvSpPr>
-          <p:cNvPr id="5" name="Rectangle 4"/>
-          <p:cNvSpPr/>
-          <p:nvPr/>
-        </p:nvSpPr>
-        <p:spPr>
-          <a:xfrm>
-            <a:off x="0" y="1234440"/>
-            <a:ext cx="12188952" cy="12700"/>
-          </a:xfrm>
-          <a:prstGeom prst="rect">
-            <a:avLst/>
-          </a:prstGeom>
-          <a:solidFill>
-            <a:srgbClr val="D8DFE4"/>
-          </a:solidFill>
-          <a:ln>
-            <a:noFill/>
-          </a:ln>
-        </p:spPr>
-        <p:style>
-          <a:lnRef idx="1">
-            <a:schemeClr val="accent1"/>
-          </a:lnRef>
-          <a:fillRef idx="3">
-            <a:schemeClr val="accent1"/>
-          </a:fillRef>
-          <a:effectRef idx="2">
-            <a:schemeClr val="accent1"/>
-          </a:effectRef>
-          <a:fontRef idx="minor">
-            <a:schemeClr val="lt1"/>
-          </a:fontRef>
-        </p:style>
-        <p:txBody>
-          <a:bodyPr rtlCol="0" anchor="ctr"/>
-          <a:lstStyle/>
-          <a:p>
-            <a:pPr algn="ctr"/>
+              <a:t>M13  ·  SCHAUBILD</a:t>
+            </a:r>
+          </a:p>
+        </p:txBody>
+      </p:sp>
+      <p:sp>
+        <p:nvSpPr>
+          <p:cNvPr id="5" name="TextBox 4"/>
+          <p:cNvSpPr txBox="1"/>
+          <p:nvPr/>
+        </p:nvSpPr>
+        <p:spPr>
+          <a:xfrm>
+            <a:off x="685800" y="502920"/>
+            <a:ext cx="10817352" cy="594360"/>
+          </a:xfrm>
+          <a:prstGeom prst="rect">
+            <a:avLst/>
+          </a:prstGeom>
+          <a:noFill/>
+        </p:spPr>
+        <p:txBody>
+          <a:bodyPr wrap="square">
+            <a:spAutoFit/>
+          </a:bodyPr>
+          <a:lstStyle/>
+          <a:p>
+            <a:pPr algn="l"/>
+            <a:r>
+              <a:rPr sz="2000" b="1" i="0">
+                <a:solidFill>
+                  <a:srgbClr val="1F2C56"/>
+                </a:solidFill>
+                <a:latin typeface="Arial"/>
+              </a:rPr>
+              <a:t>Verbundpartner-Matrix: welcher Bedarf, welcher Partner</a:t>
+            </a:r>
           </a:p>
         </p:txBody>
       </p:sp>
@@ -5408,8 +5212,8 @@
         </p:nvSpPr>
         <p:spPr>
           <a:xfrm>
-            <a:off x="685800" y="502920"/>
-            <a:ext cx="36576" cy="658368"/>
+            <a:off x="685800" y="1143000"/>
+            <a:ext cx="10817352" cy="25400"/>
           </a:xfrm>
           <a:prstGeom prst="rect">
             <a:avLst/>
@@ -5443,105 +5247,33 @@
           </a:p>
         </p:txBody>
       </p:sp>
-      <p:sp>
-        <p:nvSpPr>
-          <p:cNvPr id="7" name="TextBox 6"/>
-          <p:cNvSpPr txBox="1"/>
-          <p:nvPr/>
-        </p:nvSpPr>
-        <p:spPr>
-          <a:xfrm>
-            <a:off x="813816" y="502920"/>
-            <a:ext cx="10634472" cy="685800"/>
-          </a:xfrm>
-          <a:prstGeom prst="rect">
-            <a:avLst/>
-          </a:prstGeom>
-          <a:noFill/>
-        </p:spPr>
-        <p:txBody>
-          <a:bodyPr wrap="square">
-            <a:spAutoFit/>
-          </a:bodyPr>
-          <a:lstStyle/>
-          <a:p>
-            <a:pPr algn="l"/>
-            <a:r>
-              <a:rPr sz="2400" b="1" i="0">
-                <a:solidFill>
-                  <a:srgbClr val="1F2C56"/>
-                </a:solidFill>
-                <a:latin typeface="Arial"/>
-              </a:rPr>
-              <a:t>Schritt 2: Hypothese formulieren</a:t>
-            </a:r>
-          </a:p>
-        </p:txBody>
-      </p:sp>
-      <p:sp>
-        <p:nvSpPr>
-          <p:cNvPr id="8" name="TextBox 7"/>
-          <p:cNvSpPr txBox="1"/>
-          <p:nvPr/>
-        </p:nvSpPr>
-        <p:spPr>
-          <a:xfrm>
-            <a:off x="685800" y="1417320"/>
-            <a:ext cx="10817352" cy="4892040"/>
-          </a:xfrm>
-          <a:prstGeom prst="rect">
-            <a:avLst/>
-          </a:prstGeom>
-          <a:noFill/>
-        </p:spPr>
-        <p:txBody>
-          <a:bodyPr wrap="square" anchor="ctr">
-            <a:spAutoFit/>
-          </a:bodyPr>
-          <a:lstStyle/>
-          <a:p>
-            <a:pPr marL="190500" indent="-190500">
-              <a:spcBef>
-                <a:spcPts val="400"/>
-              </a:spcBef>
-              <a:spcAft>
-                <a:spcPts val="200"/>
-              </a:spcAft>
-            </a:pPr>
-            <a:r>
-              <a:rPr sz="1300">
-                <a:solidFill>
-                  <a:srgbClr val="3D5466"/>
-                </a:solidFill>
-                <a:latin typeface="Arial"/>
-              </a:rPr>
-              <a:t>▸  Eine Cross-Selling-Hypothese verknüpft einen beobachteten Kundenbedarf mit einem konkreten Lösungsansatz. Gutes Format:</a:t>
-            </a:r>
-          </a:p>
-          <a:p>
-            <a:pPr marL="177800" indent="-177800">
-              <a:spcBef>
-                <a:spcPts val="600"/>
-              </a:spcBef>
-              <a:spcAft>
-                <a:spcPts val="200"/>
-              </a:spcAft>
-            </a:pPr>
-            <a:r>
-              <a:rPr sz="1200" i="1">
-                <a:solidFill>
-                  <a:srgbClr val="3D5466"/>
-                </a:solidFill>
-                <a:latin typeface="Arial"/>
-              </a:rPr>
-              <a:t>→  „[Kunde] hat [Situation/Signal]. Ich vermute deshalb, dass er [Bedarf] hat – passend dazu wäre [Lösung/Verbundpartner]."</a:t>
-            </a:r>
-          </a:p>
-        </p:txBody>
-      </p:sp>
-      <p:sp>
-        <p:nvSpPr>
-          <p:cNvPr id="9" name="Rectangle 8"/>
+      <p:pic>
+        <p:nvPicPr>
+          <p:cNvPr id="7" name="Picture 6" descr="image.png"/>
+          <p:cNvPicPr>
+            <a:picLocks noChangeAspect="1"/>
+          </p:cNvPicPr>
+          <p:nvPr/>
+        </p:nvPicPr>
+        <p:blipFill>
+          <a:blip r:embed="rId2"/>
+          <a:stretch>
+            <a:fillRect/>
+          </a:stretch>
+        </p:blipFill>
+        <p:spPr>
+          <a:xfrm>
+            <a:off x="2433486" y="1325880"/>
+            <a:ext cx="7321979" cy="4937760"/>
+          </a:xfrm>
+          <a:prstGeom prst="rect">
+            <a:avLst/>
+          </a:prstGeom>
+        </p:spPr>
+      </p:pic>
+      <p:sp>
+        <p:nvSpPr>
+          <p:cNvPr id="8" name="Rectangle 7"/>
           <p:cNvSpPr/>
           <p:nvPr/>
         </p:nvSpPr>
@@ -5584,7 +5316,7 @@
       </p:sp>
       <p:sp>
         <p:nvSpPr>
-          <p:cNvPr id="10" name="TextBox 9"/>
+          <p:cNvPr id="9" name="TextBox 8"/>
           <p:cNvSpPr txBox="1"/>
           <p:nvPr/>
         </p:nvSpPr>
@@ -5613,6 +5345,41 @@
                 <a:latin typeface="Consolas"/>
               </a:rPr>
               <a:t>FKB Campus  ·  M13</a:t>
+            </a:r>
+          </a:p>
+        </p:txBody>
+      </p:sp>
+      <p:sp>
+        <p:nvSpPr>
+          <p:cNvPr id="10" name="TextBox 9"/>
+          <p:cNvSpPr txBox="1"/>
+          <p:nvPr/>
+        </p:nvSpPr>
+        <p:spPr>
+          <a:xfrm>
+            <a:off x="7176211" y="6583680"/>
+            <a:ext cx="4326940" cy="256032"/>
+          </a:xfrm>
+          <a:prstGeom prst="rect">
+            <a:avLst/>
+          </a:prstGeom>
+          <a:noFill/>
+        </p:spPr>
+        <p:txBody>
+          <a:bodyPr wrap="none">
+            <a:spAutoFit/>
+          </a:bodyPr>
+          <a:lstStyle/>
+          <a:p>
+            <a:pPr algn="r"/>
+            <a:r>
+              <a:rPr sz="700">
+                <a:solidFill>
+                  <a:srgbClr val="A0B4D2"/>
+                </a:solidFill>
+                <a:latin typeface="Consolas"/>
+              </a:rPr>
+              <a:t>Schaubild</a:t>
             </a:r>
           </a:p>
         </p:txBody>
@@ -5650,7 +5417,7 @@
             <a:avLst/>
           </a:prstGeom>
           <a:solidFill>
-            <a:srgbClr val="EDEDF3"/>
+            <a:srgbClr val="1F2C56"/>
           </a:solidFill>
           <a:ln>
             <a:noFill/>
@@ -5680,57 +5447,14 @@
       </p:sp>
       <p:sp>
         <p:nvSpPr>
-          <p:cNvPr id="3" name="Rectangle 2"/>
-          <p:cNvSpPr/>
-          <p:nvPr/>
-        </p:nvSpPr>
-        <p:spPr>
-          <a:xfrm>
-            <a:off x="0" y="0"/>
-            <a:ext cx="12188952" cy="50292"/>
-          </a:xfrm>
-          <a:prstGeom prst="rect">
-            <a:avLst/>
-          </a:prstGeom>
-          <a:solidFill>
-            <a:srgbClr val="1F2C56"/>
-          </a:solidFill>
-          <a:ln>
-            <a:noFill/>
-          </a:ln>
-        </p:spPr>
-        <p:style>
-          <a:lnRef idx="1">
-            <a:schemeClr val="accent1"/>
-          </a:lnRef>
-          <a:fillRef idx="3">
-            <a:schemeClr val="accent1"/>
-          </a:fillRef>
-          <a:effectRef idx="2">
-            <a:schemeClr val="accent1"/>
-          </a:effectRef>
-          <a:fontRef idx="minor">
-            <a:schemeClr val="lt1"/>
-          </a:fontRef>
-        </p:style>
-        <p:txBody>
-          <a:bodyPr rtlCol="0" anchor="ctr"/>
-          <a:lstStyle/>
-          <a:p>
-            <a:pPr algn="ctr"/>
-          </a:p>
-        </p:txBody>
-      </p:sp>
-      <p:sp>
-        <p:nvSpPr>
-          <p:cNvPr id="4" name="TextBox 3"/>
+          <p:cNvPr id="3" name="TextBox 2"/>
           <p:cNvSpPr txBox="1"/>
           <p:nvPr/>
         </p:nvSpPr>
         <p:spPr>
           <a:xfrm>
-            <a:off x="685800" y="109728"/>
-            <a:ext cx="10817352" cy="228600"/>
+            <a:off x="685800" y="2377440"/>
+            <a:ext cx="10817352" cy="365760"/>
           </a:xfrm>
           <a:prstGeom prst="rect">
             <a:avLst/>
@@ -5745,70 +5469,27 @@
           <a:p>
             <a:pPr algn="l"/>
             <a:r>
-              <a:rPr sz="750">
-                <a:solidFill>
-                  <a:srgbClr val="78808C"/>
+              <a:rPr sz="1200">
+                <a:solidFill>
+                  <a:srgbClr val="D9C089"/>
                 </a:solidFill>
                 <a:latin typeface="Consolas"/>
               </a:rPr>
-              <a:t>M13  ·  INHALT</a:t>
-            </a:r>
-          </a:p>
-        </p:txBody>
-      </p:sp>
-      <p:sp>
-        <p:nvSpPr>
-          <p:cNvPr id="5" name="Rectangle 4"/>
+              <a:t>FALLARBEIT</a:t>
+            </a:r>
+          </a:p>
+        </p:txBody>
+      </p:sp>
+      <p:sp>
+        <p:nvSpPr>
+          <p:cNvPr id="4" name="Rectangle 3"/>
           <p:cNvSpPr/>
           <p:nvPr/>
         </p:nvSpPr>
         <p:spPr>
           <a:xfrm>
-            <a:off x="0" y="1234440"/>
-            <a:ext cx="12188952" cy="12700"/>
-          </a:xfrm>
-          <a:prstGeom prst="rect">
-            <a:avLst/>
-          </a:prstGeom>
-          <a:solidFill>
-            <a:srgbClr val="D8DFE4"/>
-          </a:solidFill>
-          <a:ln>
-            <a:noFill/>
-          </a:ln>
-        </p:spPr>
-        <p:style>
-          <a:lnRef idx="1">
-            <a:schemeClr val="accent1"/>
-          </a:lnRef>
-          <a:fillRef idx="3">
-            <a:schemeClr val="accent1"/>
-          </a:fillRef>
-          <a:effectRef idx="2">
-            <a:schemeClr val="accent1"/>
-          </a:effectRef>
-          <a:fontRef idx="minor">
-            <a:schemeClr val="lt1"/>
-          </a:fontRef>
-        </p:style>
-        <p:txBody>
-          <a:bodyPr rtlCol="0" anchor="ctr"/>
-          <a:lstStyle/>
-          <a:p>
-            <a:pPr algn="ctr"/>
-          </a:p>
-        </p:txBody>
-      </p:sp>
-      <p:sp>
-        <p:nvSpPr>
-          <p:cNvPr id="6" name="Rectangle 5"/>
-          <p:cNvSpPr/>
-          <p:nvPr/>
-        </p:nvSpPr>
-        <p:spPr>
-          <a:xfrm>
-            <a:off x="685800" y="502920"/>
-            <a:ext cx="36576" cy="658368"/>
+            <a:off x="685800" y="2788920"/>
+            <a:ext cx="548640" cy="38100"/>
           </a:xfrm>
           <a:prstGeom prst="rect">
             <a:avLst/>
@@ -5844,14 +5525,14 @@
       </p:sp>
       <p:sp>
         <p:nvSpPr>
-          <p:cNvPr id="7" name="TextBox 6"/>
+          <p:cNvPr id="5" name="TextBox 4"/>
           <p:cNvSpPr txBox="1"/>
           <p:nvPr/>
         </p:nvSpPr>
         <p:spPr>
           <a:xfrm>
-            <a:off x="813816" y="502920"/>
-            <a:ext cx="10634472" cy="685800"/>
+            <a:off x="685800" y="3017520"/>
+            <a:ext cx="10817352" cy="1463040"/>
           </a:xfrm>
           <a:prstGeom prst="rect">
             <a:avLst/>
@@ -5866,27 +5547,27 @@
           <a:p>
             <a:pPr algn="l"/>
             <a:r>
-              <a:rPr sz="2400" b="1" i="0">
-                <a:solidFill>
-                  <a:srgbClr val="1F2C56"/>
+              <a:rPr sz="4000" b="1" i="0">
+                <a:solidFill>
+                  <a:srgbClr val="FFFFFF"/>
                 </a:solidFill>
                 <a:latin typeface="Arial"/>
               </a:rPr>
-              <a:t>Schritt 3: Gespräch</a:t>
-            </a:r>
-          </a:p>
-        </p:txBody>
-      </p:sp>
-      <p:sp>
-        <p:nvSpPr>
-          <p:cNvPr id="8" name="TextBox 7"/>
+              <a:t>Praxiscase: vom Kredit zum Vollbankverbund</a:t>
+            </a:r>
+          </a:p>
+        </p:txBody>
+      </p:sp>
+      <p:sp>
+        <p:nvSpPr>
+          <p:cNvPr id="6" name="TextBox 5"/>
           <p:cNvSpPr txBox="1"/>
           <p:nvPr/>
         </p:nvSpPr>
         <p:spPr>
           <a:xfrm>
-            <a:off x="685800" y="1417320"/>
-            <a:ext cx="10817352" cy="4892040"/>
+            <a:off x="685800" y="4480560"/>
+            <a:ext cx="8653881" cy="1280160"/>
           </a:xfrm>
           <a:prstGeom prst="rect">
             <a:avLst/>
@@ -5899,193 +5580,29 @@
           </a:bodyPr>
           <a:lstStyle/>
           <a:p>
-            <a:pPr marL="190500" indent="-190500">
-              <a:spcBef>
-                <a:spcPts val="400"/>
-              </a:spcBef>
-              <a:spcAft>
-                <a:spcPts val="200"/>
-              </a:spcAft>
-            </a:pPr>
-            <a:r>
-              <a:rPr sz="1300">
-                <a:solidFill>
-                  <a:srgbClr val="3D5466"/>
+            <a:pPr algn="l"/>
+            <a:r>
+              <a:rPr sz="1600" b="0" i="0">
+                <a:solidFill>
+                  <a:srgbClr val="C8D2E6"/>
                 </a:solidFill>
                 <a:latin typeface="Arial"/>
               </a:rPr>
-              <a:t>▸  Das Cross-Selling-Gespräch ist kein Verkaufsgespräch. Es ist eine bedarfsgeleitete Gesprächserweiterung. Der Einstieg erfolgt über eine offene Frage zur Situation – nicht mit einem Produktvorschlag.</a:t>
-            </a:r>
-          </a:p>
-          <a:p>
-            <a:pPr marL="190500" indent="-190500">
-              <a:spcBef>
-                <a:spcPts val="400"/>
-              </a:spcBef>
-              <a:spcAft>
-                <a:spcPts val="200"/>
-              </a:spcAft>
-            </a:pPr>
-            <a:r>
-              <a:rPr sz="1300">
-                <a:solidFill>
-                  <a:srgbClr val="3D5466"/>
-                </a:solidFill>
-                <a:latin typeface="Arial"/>
-              </a:rPr>
-              <a:t>▸  Gesprächseinstieg nach SPIN :</a:t>
-            </a:r>
-          </a:p>
-          <a:p>
-            <a:pPr marL="190500" indent="-190500">
-              <a:spcBef>
-                <a:spcPts val="400"/>
-              </a:spcBef>
-              <a:spcAft>
-                <a:spcPts val="200"/>
-              </a:spcAft>
-            </a:pPr>
-            <a:r>
-              <a:rPr sz="1300">
-                <a:solidFill>
-                  <a:srgbClr val="3D5466"/>
-                </a:solidFill>
-                <a:latin typeface="Arial"/>
-              </a:rPr>
-              <a:t>▸  Situationsfrage: „Wie haben Sie aktuell Ihre Betriebsunterbrechungsrisiken abgesichert?"</a:t>
-            </a:r>
-          </a:p>
-          <a:p>
-            <a:pPr marL="190500" indent="-190500">
-              <a:spcBef>
-                <a:spcPts val="400"/>
-              </a:spcBef>
-              <a:spcAft>
-                <a:spcPts val="200"/>
-              </a:spcAft>
-            </a:pPr>
-            <a:r>
-              <a:rPr sz="1300">
-                <a:solidFill>
-                  <a:srgbClr val="3D5466"/>
-                </a:solidFill>
-                <a:latin typeface="Arial"/>
-              </a:rPr>
-              <a:t>▸  Problemfrage: „Gibt es Bereiche, bei denen Sie sich fragen, ob das ausreicht?"</a:t>
-            </a:r>
-          </a:p>
-          <a:p>
-            <a:pPr marL="190500" indent="-190500">
-              <a:spcBef>
-                <a:spcPts val="400"/>
-              </a:spcBef>
-              <a:spcAft>
-                <a:spcPts val="200"/>
-              </a:spcAft>
-            </a:pPr>
-            <a:r>
-              <a:rPr sz="1300">
-                <a:solidFill>
-                  <a:srgbClr val="3D5466"/>
-                </a:solidFill>
-                <a:latin typeface="Arial"/>
-              </a:rPr>
-              <a:t>▸  Implikationsfrage: „Was würde ein Ausfall von zwei Wochen für Ihren Betrieb bedeuten?"</a:t>
-            </a:r>
-          </a:p>
-          <a:p>
-            <a:pPr marL="190500" indent="-190500">
-              <a:spcBef>
-                <a:spcPts val="400"/>
-              </a:spcBef>
-              <a:spcAft>
-                <a:spcPts val="200"/>
-              </a:spcAft>
-            </a:pPr>
-            <a:r>
-              <a:rPr sz="1300">
-                <a:solidFill>
-                  <a:srgbClr val="3D5466"/>
-                </a:solidFill>
-                <a:latin typeface="Arial"/>
-              </a:rPr>
-              <a:t>▸  Nutzenfrage: „Was wäre für Sie die ideale Lösung, wenn das Risiko vollständig gedeckt wäre?"</a:t>
-            </a:r>
-          </a:p>
-          <a:p>
-            <a:pPr marL="190500" indent="-190500">
-              <a:spcBef>
-                <a:spcPts val="400"/>
-              </a:spcBef>
-              <a:spcAft>
-                <a:spcPts val="200"/>
-              </a:spcAft>
-            </a:pPr>
-            <a:r>
-              <a:rPr sz="1300">
-                <a:solidFill>
-                  <a:srgbClr val="3D5466"/>
-                </a:solidFill>
-                <a:latin typeface="Arial"/>
-              </a:rPr>
-              <a:t>▸  Erst nach diesem Verlauf folgt der Produktvorschlag – oder die Einbeziehung des Verbundpartners.</a:t>
-            </a:r>
-          </a:p>
-        </p:txBody>
-      </p:sp>
-      <p:sp>
-        <p:nvSpPr>
-          <p:cNvPr id="9" name="Rectangle 8"/>
-          <p:cNvSpPr/>
-          <p:nvPr/>
-        </p:nvSpPr>
-        <p:spPr>
-          <a:xfrm>
-            <a:off x="0" y="6510528"/>
-            <a:ext cx="12188952" cy="347472"/>
-          </a:xfrm>
-          <a:prstGeom prst="rect">
-            <a:avLst/>
-          </a:prstGeom>
-          <a:solidFill>
-            <a:srgbClr val="0A1937"/>
-          </a:solidFill>
-          <a:ln>
-            <a:noFill/>
-          </a:ln>
-        </p:spPr>
-        <p:style>
-          <a:lnRef idx="1">
-            <a:schemeClr val="accent1"/>
-          </a:lnRef>
-          <a:fillRef idx="3">
-            <a:schemeClr val="accent1"/>
-          </a:fillRef>
-          <a:effectRef idx="2">
-            <a:schemeClr val="accent1"/>
-          </a:effectRef>
-          <a:fontRef idx="minor">
-            <a:schemeClr val="lt1"/>
-          </a:fontRef>
-        </p:style>
-        <p:txBody>
-          <a:bodyPr rtlCol="0" anchor="ctr"/>
-          <a:lstStyle/>
-          <a:p>
-            <a:pPr algn="ctr"/>
-          </a:p>
-        </p:txBody>
-      </p:sp>
-      <p:sp>
-        <p:nvSpPr>
-          <p:cNvPr id="10" name="TextBox 9"/>
+              <a:t>Aus einer flachen Kreditbeziehung eine Verbundbeziehung entwickeln.</a:t>
+            </a:r>
+          </a:p>
+        </p:txBody>
+      </p:sp>
+      <p:sp>
+        <p:nvSpPr>
+          <p:cNvPr id="7" name="TextBox 6"/>
           <p:cNvSpPr txBox="1"/>
           <p:nvPr/>
         </p:nvSpPr>
         <p:spPr>
           <a:xfrm>
-            <a:off x="685800" y="6583680"/>
-            <a:ext cx="6490411" cy="256032"/>
+            <a:off x="685800" y="6355080"/>
+            <a:ext cx="10817352" cy="274320"/>
           </a:xfrm>
           <a:prstGeom prst="rect">
             <a:avLst/>
@@ -6102,7 +5619,7 @@
             <a:r>
               <a:rPr sz="700">
                 <a:solidFill>
-                  <a:srgbClr val="A0B4D2"/>
+                  <a:srgbClr val="8CA0C3"/>
                 </a:solidFill>
                 <a:latin typeface="Consolas"/>
               </a:rPr>
@@ -6245,7 +5762,7 @@
                 </a:solidFill>
                 <a:latin typeface="Consolas"/>
               </a:rPr>
-              <a:t>M13  ·  INHALT</a:t>
+              <a:t>M13  ·  ARBEITSBLATT</a:t>
             </a:r>
           </a:p>
         </p:txBody>
@@ -6366,7 +5883,7 @@
                 </a:solidFill>
                 <a:latin typeface="Arial"/>
               </a:rPr>
-              <a:t>Schritt 4: Dokumentation</a:t>
+              <a:t>Praxiscase Maschinenbauzulieferer bearbeiten</a:t>
             </a:r>
           </a:p>
         </p:txBody>
@@ -6379,8 +5896,8 @@
         </p:nvSpPr>
         <p:spPr>
           <a:xfrm>
-            <a:off x="685800" y="1417320"/>
-            <a:ext cx="10817352" cy="4892040"/>
+            <a:off x="685800" y="1554480"/>
+            <a:ext cx="10817352" cy="3840480"/>
           </a:xfrm>
           <a:prstGeom prst="rect">
             <a:avLst/>
@@ -6402,13 +5919,13 @@
               </a:spcAft>
             </a:pPr>
             <a:r>
-              <a:rPr sz="1300">
+              <a:rPr sz="1400">
                 <a:solidFill>
                   <a:srgbClr val="3D5466"/>
                 </a:solidFill>
                 <a:latin typeface="Arial"/>
               </a:rPr>
-              <a:t>▸  Besprochene Bedarfsfelder</a:t>
+              <a:t>▸  Analysieren Sie den Wallet-Share des Kunden in agree (AB-1).</a:t>
             </a:r>
           </a:p>
           <a:p>
@@ -6421,13 +5938,13 @@
               </a:spcAft>
             </a:pPr>
             <a:r>
-              <a:rPr sz="1300">
+              <a:rPr sz="1400">
                 <a:solidFill>
                   <a:srgbClr val="3D5466"/>
                 </a:solidFill>
                 <a:latin typeface="Arial"/>
               </a:rPr>
-              <a:t>▸  Ergebnis (Abschluss / offen / kein Bedarf)</a:t>
+              <a:t>▸  Formulieren Sie drei begründete Cross-Selling-Hypothesen.</a:t>
             </a:r>
           </a:p>
           <a:p>
@@ -6440,191 +5957,98 @@
               </a:spcAft>
             </a:pPr>
             <a:r>
-              <a:rPr sz="1300">
+              <a:rPr sz="1400">
                 <a:solidFill>
                   <a:srgbClr val="3D5466"/>
                 </a:solidFill>
                 <a:latin typeface="Arial"/>
               </a:rPr>
-              <a:t>▸  Nächste Schritte und Folgetermine</a:t>
-            </a:r>
-          </a:p>
-          <a:p>
-            <a:pPr marL="190500" indent="-190500">
-              <a:spcBef>
-                <a:spcPts val="400"/>
-              </a:spcBef>
-              <a:spcAft>
-                <a:spcPts val="200"/>
-              </a:spcAft>
-            </a:pPr>
-            <a:r>
-              <a:rPr sz="1300">
-                <a:solidFill>
-                  <a:srgbClr val="3D5466"/>
+              <a:t>▸  Bereiten Sie das Jahresgespräch vor: welche Hypothese als Einstieg, mit welcher Frage? (AB-2)</a:t>
+            </a:r>
+          </a:p>
+        </p:txBody>
+      </p:sp>
+      <p:sp>
+        <p:nvSpPr>
+          <p:cNvPr id="9" name="Rectangle 8"/>
+          <p:cNvSpPr/>
+          <p:nvPr/>
+        </p:nvSpPr>
+        <p:spPr>
+          <a:xfrm>
+            <a:off x="685800" y="5486400"/>
+            <a:ext cx="10817352" cy="640080"/>
+          </a:xfrm>
+          <a:prstGeom prst="rect">
+            <a:avLst/>
+          </a:prstGeom>
+          <a:solidFill>
+            <a:srgbClr val="1F2C56"/>
+          </a:solidFill>
+          <a:ln>
+            <a:noFill/>
+          </a:ln>
+        </p:spPr>
+        <p:style>
+          <a:lnRef idx="1">
+            <a:schemeClr val="accent1"/>
+          </a:lnRef>
+          <a:fillRef idx="3">
+            <a:schemeClr val="accent1"/>
+          </a:fillRef>
+          <a:effectRef idx="2">
+            <a:schemeClr val="accent1"/>
+          </a:effectRef>
+          <a:fontRef idx="minor">
+            <a:schemeClr val="lt1"/>
+          </a:fontRef>
+        </p:style>
+        <p:txBody>
+          <a:bodyPr rtlCol="0" anchor="ctr"/>
+          <a:lstStyle/>
+          <a:p>
+            <a:pPr algn="ctr"/>
+          </a:p>
+        </p:txBody>
+      </p:sp>
+      <p:sp>
+        <p:nvSpPr>
+          <p:cNvPr id="10" name="TextBox 9"/>
+          <p:cNvSpPr txBox="1"/>
+          <p:nvPr/>
+        </p:nvSpPr>
+        <p:spPr>
+          <a:xfrm>
+            <a:off x="868680" y="5596128"/>
+            <a:ext cx="10451592" cy="457200"/>
+          </a:xfrm>
+          <a:prstGeom prst="rect">
+            <a:avLst/>
+          </a:prstGeom>
+          <a:noFill/>
+        </p:spPr>
+        <p:txBody>
+          <a:bodyPr wrap="square">
+            <a:spAutoFit/>
+          </a:bodyPr>
+          <a:lstStyle/>
+          <a:p>
+            <a:pPr algn="l"/>
+            <a:r>
+              <a:rPr sz="1300" b="1" i="0">
+                <a:solidFill>
+                  <a:srgbClr val="FFFFFF"/>
                 </a:solidFill>
                 <a:latin typeface="Arial"/>
               </a:rPr>
-              <a:t>▸  Verbundpartner-Übergabe (falls relevant)</a:t>
-            </a:r>
-          </a:p>
-          <a:p>
-            <a:pPr marL="190500" indent="-190500">
-              <a:spcBef>
-                <a:spcPts val="400"/>
-              </a:spcBef>
-              <a:spcAft>
-                <a:spcPts val="200"/>
-              </a:spcAft>
-            </a:pPr>
-            <a:r>
-              <a:rPr sz="1300">
-                <a:solidFill>
-                  <a:srgbClr val="3D5466"/>
-                </a:solidFill>
-                <a:latin typeface="Arial"/>
-              </a:rPr>
-              <a:t>▸  ## 4.4 Verbundpartner-Matrix</a:t>
-            </a:r>
-          </a:p>
-          <a:p>
-            <a:pPr marL="190500" indent="-190500">
-              <a:spcBef>
-                <a:spcPts val="400"/>
-              </a:spcBef>
-              <a:spcAft>
-                <a:spcPts val="200"/>
-              </a:spcAft>
-            </a:pPr>
-            <a:r>
-              <a:rPr sz="1300">
-                <a:solidFill>
-                  <a:srgbClr val="3D5466"/>
-                </a:solidFill>
-                <a:latin typeface="Arial"/>
-              </a:rPr>
-              <a:t>▸  Die Stärke der VR-Bank liegt im Verbund. Welcher Verbundpartner ist für welches Bedarfsfeld relevant?</a:t>
-            </a:r>
-          </a:p>
-          <a:p>
-            <a:pPr marL="190500" indent="-190500">
-              <a:spcBef>
-                <a:spcPts val="400"/>
-              </a:spcBef>
-              <a:spcAft>
-                <a:spcPts val="200"/>
-              </a:spcAft>
-            </a:pPr>
-            <a:r>
-              <a:rPr sz="1300">
-                <a:solidFill>
-                  <a:srgbClr val="3D5466"/>
-                </a:solidFill>
-                <a:latin typeface="Arial"/>
-              </a:rPr>
-              <a:t>▸  ## 4.5 Praxiscase: Vom Kreditgespräch zum Vollbankverbund</a:t>
-            </a:r>
-          </a:p>
-          <a:p>
-            <a:pPr marL="190500" indent="-190500">
-              <a:spcBef>
-                <a:spcPts val="400"/>
-              </a:spcBef>
-              <a:spcAft>
-                <a:spcPts val="200"/>
-              </a:spcAft>
-            </a:pPr>
-            <a:r>
-              <a:rPr sz="1300">
-                <a:solidFill>
-                  <a:srgbClr val="3D5466"/>
-                </a:solidFill>
-                <a:latin typeface="Arial"/>
-              </a:rPr>
-              <a:t>▸  Ausgangssituation</a:t>
-            </a:r>
-          </a:p>
-          <a:p>
-            <a:pPr marL="190500" indent="-190500">
-              <a:spcBef>
-                <a:spcPts val="400"/>
-              </a:spcBef>
-              <a:spcAft>
-                <a:spcPts val="200"/>
-              </a:spcAft>
-            </a:pPr>
-            <a:r>
-              <a:rPr sz="1300">
-                <a:solidFill>
-                  <a:srgbClr val="3D5466"/>
-                </a:solidFill>
-                <a:latin typeface="Arial"/>
-              </a:rPr>
-              <a:t>▸  Vor dem Jahresgespräch analysiert Markus den Kunden in agree:</a:t>
-            </a:r>
-          </a:p>
-          <a:p>
-            <a:pPr marL="190500" indent="-190500">
-              <a:spcBef>
-                <a:spcPts val="400"/>
-              </a:spcBef>
-              <a:spcAft>
-                <a:spcPts val="200"/>
-              </a:spcAft>
-            </a:pPr>
-            <a:r>
-              <a:rPr sz="1300">
-                <a:solidFill>
-                  <a:srgbClr val="3D5466"/>
-                </a:solidFill>
-                <a:latin typeface="Arial"/>
-              </a:rPr>
-              <a:t>▸  Das Gespräch</a:t>
-            </a:r>
-          </a:p>
-          <a:p>
-            <a:pPr marL="190500" indent="-190500">
-              <a:spcBef>
-                <a:spcPts val="400"/>
-              </a:spcBef>
-              <a:spcAft>
-                <a:spcPts val="200"/>
-              </a:spcAft>
-            </a:pPr>
-            <a:r>
-              <a:rPr sz="1300">
-                <a:solidFill>
-                  <a:srgbClr val="3D5466"/>
-                </a:solidFill>
-                <a:latin typeface="Arial"/>
-              </a:rPr>
-              <a:t>▸  „Sie hatten letztes Jahr den Ausfall der CNC-Anlage erwähnt. Wie haben Sie die zwei Wochen finanziell abgefedert?"</a:t>
-            </a:r>
-          </a:p>
-          <a:p>
-            <a:pPr marL="190500" indent="-190500">
-              <a:spcBef>
-                <a:spcPts val="400"/>
-              </a:spcBef>
-              <a:spcAft>
-                <a:spcPts val="200"/>
-              </a:spcAft>
-            </a:pPr>
-            <a:r>
-              <a:rPr sz="1300">
-                <a:solidFill>
-                  <a:srgbClr val="3D5466"/>
-                </a:solidFill>
-                <a:latin typeface="Arial"/>
-              </a:rPr>
-              <a:t>▸  Der Kunde: „Ehrlich gesagt war das eng. Wir haben aus den Rücklagen überbrückt – aber das war ungeplant."</a:t>
-            </a:r>
-          </a:p>
-        </p:txBody>
-      </p:sp>
-      <p:sp>
-        <p:nvSpPr>
-          <p:cNvPr id="9" name="Rectangle 8"/>
+              <a:t>→  Bearbeitung im Teilnehmer-Workbook (Arbeitsblatt mit Ausfüllfeldern)</a:t>
+            </a:r>
+          </a:p>
+        </p:txBody>
+      </p:sp>
+      <p:sp>
+        <p:nvSpPr>
+          <p:cNvPr id="11" name="Rectangle 10"/>
           <p:cNvSpPr/>
           <p:nvPr/>
         </p:nvSpPr>
@@ -6667,7 +6091,7 @@
       </p:sp>
       <p:sp>
         <p:nvSpPr>
-          <p:cNvPr id="10" name="TextBox 9"/>
+          <p:cNvPr id="12" name="TextBox 11"/>
           <p:cNvSpPr txBox="1"/>
           <p:nvPr/>
         </p:nvSpPr>
@@ -6733,7 +6157,7 @@
             <a:avLst/>
           </a:prstGeom>
           <a:solidFill>
-            <a:srgbClr val="FFFFFF"/>
+            <a:srgbClr val="EDEDF3"/>
           </a:solidFill>
           <a:ln>
             <a:noFill/>
@@ -6834,43 +6258,51 @@
                 </a:solidFill>
                 <a:latin typeface="Consolas"/>
               </a:rPr>
-              <a:t>M13  ·  SCHAUBILD</a:t>
-            </a:r>
-          </a:p>
-        </p:txBody>
-      </p:sp>
-      <p:sp>
-        <p:nvSpPr>
-          <p:cNvPr id="5" name="TextBox 4"/>
-          <p:cNvSpPr txBox="1"/>
-          <p:nvPr/>
-        </p:nvSpPr>
-        <p:spPr>
-          <a:xfrm>
-            <a:off x="685800" y="502920"/>
-            <a:ext cx="10817352" cy="594360"/>
-          </a:xfrm>
-          <a:prstGeom prst="rect">
-            <a:avLst/>
-          </a:prstGeom>
-          <a:noFill/>
-        </p:spPr>
-        <p:txBody>
-          <a:bodyPr wrap="square">
-            <a:spAutoFit/>
-          </a:bodyPr>
-          <a:lstStyle/>
-          <a:p>
-            <a:pPr algn="l"/>
-            <a:r>
-              <a:rPr sz="2000" b="1" i="0">
-                <a:solidFill>
-                  <a:srgbClr val="1F2C56"/>
-                </a:solidFill>
-                <a:latin typeface="Arial"/>
-              </a:rPr>
-              <a:t>Verbundpartner-Matrix</a:t>
-            </a:r>
+              <a:t>M13  ·  INHALT</a:t>
+            </a:r>
+          </a:p>
+        </p:txBody>
+      </p:sp>
+      <p:sp>
+        <p:nvSpPr>
+          <p:cNvPr id="5" name="Rectangle 4"/>
+          <p:cNvSpPr/>
+          <p:nvPr/>
+        </p:nvSpPr>
+        <p:spPr>
+          <a:xfrm>
+            <a:off x="0" y="1234440"/>
+            <a:ext cx="12188952" cy="12700"/>
+          </a:xfrm>
+          <a:prstGeom prst="rect">
+            <a:avLst/>
+          </a:prstGeom>
+          <a:solidFill>
+            <a:srgbClr val="D8DFE4"/>
+          </a:solidFill>
+          <a:ln>
+            <a:noFill/>
+          </a:ln>
+        </p:spPr>
+        <p:style>
+          <a:lnRef idx="1">
+            <a:schemeClr val="accent1"/>
+          </a:lnRef>
+          <a:fillRef idx="3">
+            <a:schemeClr val="accent1"/>
+          </a:fillRef>
+          <a:effectRef idx="2">
+            <a:schemeClr val="accent1"/>
+          </a:effectRef>
+          <a:fontRef idx="minor">
+            <a:schemeClr val="lt1"/>
+          </a:fontRef>
+        </p:style>
+        <p:txBody>
+          <a:bodyPr rtlCol="0" anchor="ctr"/>
+          <a:lstStyle/>
+          <a:p>
+            <a:pPr algn="ctr"/>
           </a:p>
         </p:txBody>
       </p:sp>
@@ -6882,8 +6314,8 @@
         </p:nvSpPr>
         <p:spPr>
           <a:xfrm>
-            <a:off x="685800" y="1143000"/>
-            <a:ext cx="10817352" cy="25400"/>
+            <a:off x="685800" y="502920"/>
+            <a:ext cx="36576" cy="658368"/>
           </a:xfrm>
           <a:prstGeom prst="rect">
             <a:avLst/>
@@ -6917,33 +6349,105 @@
           </a:p>
         </p:txBody>
       </p:sp>
-      <p:pic>
-        <p:nvPicPr>
-          <p:cNvPr id="7" name="Picture 6" descr="image.png"/>
-          <p:cNvPicPr>
-            <a:picLocks noChangeAspect="1"/>
-          </p:cNvPicPr>
-          <p:nvPr/>
-        </p:nvPicPr>
-        <p:blipFill>
-          <a:blip r:embed="rId2"/>
-          <a:stretch>
-            <a:fillRect/>
-          </a:stretch>
-        </p:blipFill>
-        <p:spPr>
-          <a:xfrm>
-            <a:off x="2433486" y="1325880"/>
-            <a:ext cx="7321979" cy="4937760"/>
-          </a:xfrm>
-          <a:prstGeom prst="rect">
-            <a:avLst/>
-          </a:prstGeom>
-        </p:spPr>
-      </p:pic>
-      <p:sp>
-        <p:nvSpPr>
-          <p:cNvPr id="8" name="Rectangle 7"/>
+      <p:sp>
+        <p:nvSpPr>
+          <p:cNvPr id="7" name="TextBox 6"/>
+          <p:cNvSpPr txBox="1"/>
+          <p:nvPr/>
+        </p:nvSpPr>
+        <p:spPr>
+          <a:xfrm>
+            <a:off x="813816" y="502920"/>
+            <a:ext cx="10634472" cy="685800"/>
+          </a:xfrm>
+          <a:prstGeom prst="rect">
+            <a:avLst/>
+          </a:prstGeom>
+          <a:noFill/>
+        </p:spPr>
+        <p:txBody>
+          <a:bodyPr wrap="square">
+            <a:spAutoFit/>
+          </a:bodyPr>
+          <a:lstStyle/>
+          <a:p>
+            <a:pPr algn="l"/>
+            <a:r>
+              <a:rPr sz="2400" b="1" i="0">
+                <a:solidFill>
+                  <a:srgbClr val="1F2C56"/>
+                </a:solidFill>
+                <a:latin typeface="Arial"/>
+              </a:rPr>
+              <a:t>Prinzip dieses Moduls</a:t>
+            </a:r>
+          </a:p>
+        </p:txBody>
+      </p:sp>
+      <p:sp>
+        <p:nvSpPr>
+          <p:cNvPr id="8" name="TextBox 7"/>
+          <p:cNvSpPr txBox="1"/>
+          <p:nvPr/>
+        </p:nvSpPr>
+        <p:spPr>
+          <a:xfrm>
+            <a:off x="685800" y="1417320"/>
+            <a:ext cx="10817352" cy="4892040"/>
+          </a:xfrm>
+          <a:prstGeom prst="rect">
+            <a:avLst/>
+          </a:prstGeom>
+          <a:noFill/>
+        </p:spPr>
+        <p:txBody>
+          <a:bodyPr wrap="square" anchor="ctr">
+            <a:spAutoFit/>
+          </a:bodyPr>
+          <a:lstStyle/>
+          <a:p>
+            <a:pPr marL="177800" indent="-177800">
+              <a:spcBef>
+                <a:spcPts val="600"/>
+              </a:spcBef>
+              <a:spcAft>
+                <a:spcPts val="200"/>
+              </a:spcAft>
+            </a:pPr>
+            <a:r>
+              <a:rPr sz="1200" i="1">
+                <a:solidFill>
+                  <a:srgbClr val="3D5466"/>
+                </a:solidFill>
+                <a:latin typeface="Arial"/>
+              </a:rPr>
+              <a:t>→  Cross-Selling beginnt beim Bedarf des Kunden, nicht bei der Produktliste der Bank.</a:t>
+            </a:r>
+          </a:p>
+          <a:p>
+            <a:pPr marL="190500" indent="-190500">
+              <a:spcBef>
+                <a:spcPts val="400"/>
+              </a:spcBef>
+              <a:spcAft>
+                <a:spcPts val="200"/>
+              </a:spcAft>
+            </a:pPr>
+            <a:r>
+              <a:rPr sz="1300">
+                <a:solidFill>
+                  <a:srgbClr val="3D5466"/>
+                </a:solidFill>
+                <a:latin typeface="Arial"/>
+              </a:rPr>
+              <a:t>▸  Bedarfsorientiertes Cross-Selling (Pull) bindet und bringt Ertrag; Produkte drücken (Push) verbrennt Vertrauen.</a:t>
+            </a:r>
+          </a:p>
+        </p:txBody>
+      </p:sp>
+      <p:sp>
+        <p:nvSpPr>
+          <p:cNvPr id="9" name="Rectangle 8"/>
           <p:cNvSpPr/>
           <p:nvPr/>
         </p:nvSpPr>
@@ -6986,7 +6490,7 @@
       </p:sp>
       <p:sp>
         <p:nvSpPr>
-          <p:cNvPr id="9" name="TextBox 8"/>
+          <p:cNvPr id="10" name="TextBox 9"/>
           <p:cNvSpPr txBox="1"/>
           <p:nvPr/>
         </p:nvSpPr>
@@ -7015,41 +6519,6 @@
                 <a:latin typeface="Consolas"/>
               </a:rPr>
               <a:t>FKB Campus  ·  M13</a:t>
-            </a:r>
-          </a:p>
-        </p:txBody>
-      </p:sp>
-      <p:sp>
-        <p:nvSpPr>
-          <p:cNvPr id="10" name="TextBox 9"/>
-          <p:cNvSpPr txBox="1"/>
-          <p:nvPr/>
-        </p:nvSpPr>
-        <p:spPr>
-          <a:xfrm>
-            <a:off x="7176211" y="6583680"/>
-            <a:ext cx="4326940" cy="256032"/>
-          </a:xfrm>
-          <a:prstGeom prst="rect">
-            <a:avLst/>
-          </a:prstGeom>
-          <a:noFill/>
-        </p:spPr>
-        <p:txBody>
-          <a:bodyPr wrap="none">
-            <a:spAutoFit/>
-          </a:bodyPr>
-          <a:lstStyle/>
-          <a:p>
-            <a:pPr algn="r"/>
-            <a:r>
-              <a:rPr sz="700">
-                <a:solidFill>
-                  <a:srgbClr val="A0B4D2"/>
-                </a:solidFill>
-                <a:latin typeface="Consolas"/>
-              </a:rPr>
-              <a:t>Schaubild</a:t>
             </a:r>
           </a:p>
         </p:txBody>
@@ -7309,7 +6778,7 @@
                 </a:solidFill>
                 <a:latin typeface="Arial"/>
               </a:rPr>
-              <a:t>AB-1: Wallet-Share-Analyse</a:t>
+              <a:t>Reflexion und Selbstcheck</a:t>
             </a:r>
           </a:p>
         </p:txBody>
@@ -7351,7 +6820,45 @@
                 </a:solidFill>
                 <a:latin typeface="Arial"/>
               </a:rPr>
-              <a:t>▸  Meine Top-2 Cross-Selling-Hypothesen für diesen Kunden:</a:t>
+              <a:t>▸  Bei welchem Bestandskunden ist Ihre Beziehung „flach" – viel Kredit, kein Verbund?</a:t>
+            </a:r>
+          </a:p>
+          <a:p>
+            <a:pPr marL="190500" indent="-190500">
+              <a:spcBef>
+                <a:spcPts val="400"/>
+              </a:spcBef>
+              <a:spcAft>
+                <a:spcPts val="200"/>
+              </a:spcAft>
+            </a:pPr>
+            <a:r>
+              <a:rPr sz="1300">
+                <a:solidFill>
+                  <a:srgbClr val="3D5466"/>
+                </a:solidFill>
+                <a:latin typeface="Arial"/>
+              </a:rPr>
+              <a:t>▸  Welche ereignisbasierte Cross-Selling-Chance haben Sie zuletzt übersehen?</a:t>
+            </a:r>
+          </a:p>
+          <a:p>
+            <a:pPr marL="190500" indent="-190500">
+              <a:spcBef>
+                <a:spcPts val="400"/>
+              </a:spcBef>
+              <a:spcAft>
+                <a:spcPts val="200"/>
+              </a:spcAft>
+            </a:pPr>
+            <a:r>
+              <a:rPr sz="1300">
+                <a:solidFill>
+                  <a:srgbClr val="3D5466"/>
+                </a:solidFill>
+                <a:latin typeface="Arial"/>
+              </a:rPr>
+              <a:t>▸  Wie formulieren Sie eine Bedarfshypothese als Frage statt als Angebot?</a:t>
             </a:r>
           </a:p>
         </p:txBody>
@@ -7430,1359 +6937,6 @@
                 <a:latin typeface="Consolas"/>
               </a:rPr>
               <a:t>FKB Campus  ·  M13</a:t>
-            </a:r>
-          </a:p>
-        </p:txBody>
-      </p:sp>
-    </p:spTree>
-  </p:cSld>
-  <p:clrMapOvr>
-    <a:masterClrMapping/>
-  </p:clrMapOvr>
-</p:sld>
-</file>
-
-<file path=ppt/slides/slide16.xml><?xml version="1.0" encoding="utf-8"?>
-<p:sld xmlns:a="http://schemas.openxmlformats.org/drawingml/2006/main" xmlns:p="http://schemas.openxmlformats.org/presentationml/2006/main" xmlns:r="http://schemas.openxmlformats.org/officeDocument/2006/relationships">
-  <p:cSld>
-    <p:spTree>
-      <p:nvGrpSpPr>
-        <p:cNvPr id="1" name=""/>
-        <p:cNvGrpSpPr/>
-        <p:nvPr/>
-      </p:nvGrpSpPr>
-      <p:grpSpPr/>
-      <p:sp>
-        <p:nvSpPr>
-          <p:cNvPr id="2" name="Rectangle 1"/>
-          <p:cNvSpPr/>
-          <p:nvPr/>
-        </p:nvSpPr>
-        <p:spPr>
-          <a:xfrm>
-            <a:off x="0" y="0"/>
-            <a:ext cx="12188952" cy="6858000"/>
-          </a:xfrm>
-          <a:prstGeom prst="rect">
-            <a:avLst/>
-          </a:prstGeom>
-          <a:solidFill>
-            <a:srgbClr val="FFFFFF"/>
-          </a:solidFill>
-          <a:ln>
-            <a:noFill/>
-          </a:ln>
-        </p:spPr>
-        <p:style>
-          <a:lnRef idx="1">
-            <a:schemeClr val="accent1"/>
-          </a:lnRef>
-          <a:fillRef idx="3">
-            <a:schemeClr val="accent1"/>
-          </a:fillRef>
-          <a:effectRef idx="2">
-            <a:schemeClr val="accent1"/>
-          </a:effectRef>
-          <a:fontRef idx="minor">
-            <a:schemeClr val="lt1"/>
-          </a:fontRef>
-        </p:style>
-        <p:txBody>
-          <a:bodyPr rtlCol="0" anchor="ctr"/>
-          <a:lstStyle/>
-          <a:p>
-            <a:pPr algn="ctr"/>
-          </a:p>
-        </p:txBody>
-      </p:sp>
-      <p:sp>
-        <p:nvSpPr>
-          <p:cNvPr id="3" name="Rectangle 2"/>
-          <p:cNvSpPr/>
-          <p:nvPr/>
-        </p:nvSpPr>
-        <p:spPr>
-          <a:xfrm>
-            <a:off x="0" y="0"/>
-            <a:ext cx="12188952" cy="50292"/>
-          </a:xfrm>
-          <a:prstGeom prst="rect">
-            <a:avLst/>
-          </a:prstGeom>
-          <a:solidFill>
-            <a:srgbClr val="1F2C56"/>
-          </a:solidFill>
-          <a:ln>
-            <a:noFill/>
-          </a:ln>
-        </p:spPr>
-        <p:style>
-          <a:lnRef idx="1">
-            <a:schemeClr val="accent1"/>
-          </a:lnRef>
-          <a:fillRef idx="3">
-            <a:schemeClr val="accent1"/>
-          </a:fillRef>
-          <a:effectRef idx="2">
-            <a:schemeClr val="accent1"/>
-          </a:effectRef>
-          <a:fontRef idx="minor">
-            <a:schemeClr val="lt1"/>
-          </a:fontRef>
-        </p:style>
-        <p:txBody>
-          <a:bodyPr rtlCol="0" anchor="ctr"/>
-          <a:lstStyle/>
-          <a:p>
-            <a:pPr algn="ctr"/>
-          </a:p>
-        </p:txBody>
-      </p:sp>
-      <p:sp>
-        <p:nvSpPr>
-          <p:cNvPr id="4" name="TextBox 3"/>
-          <p:cNvSpPr txBox="1"/>
-          <p:nvPr/>
-        </p:nvSpPr>
-        <p:spPr>
-          <a:xfrm>
-            <a:off x="685800" y="109728"/>
-            <a:ext cx="10817352" cy="228600"/>
-          </a:xfrm>
-          <a:prstGeom prst="rect">
-            <a:avLst/>
-          </a:prstGeom>
-          <a:noFill/>
-        </p:spPr>
-        <p:txBody>
-          <a:bodyPr wrap="none">
-            <a:spAutoFit/>
-          </a:bodyPr>
-          <a:lstStyle/>
-          <a:p>
-            <a:pPr algn="l"/>
-            <a:r>
-              <a:rPr sz="750">
-                <a:solidFill>
-                  <a:srgbClr val="78808C"/>
-                </a:solidFill>
-                <a:latin typeface="Consolas"/>
-              </a:rPr>
-              <a:t>M13  ·  ÜBERSICHT</a:t>
-            </a:r>
-          </a:p>
-        </p:txBody>
-      </p:sp>
-      <p:sp>
-        <p:nvSpPr>
-          <p:cNvPr id="5" name="TextBox 4"/>
-          <p:cNvSpPr txBox="1"/>
-          <p:nvPr/>
-        </p:nvSpPr>
-        <p:spPr>
-          <a:xfrm>
-            <a:off x="685800" y="502920"/>
-            <a:ext cx="10817352" cy="594360"/>
-          </a:xfrm>
-          <a:prstGeom prst="rect">
-            <a:avLst/>
-          </a:prstGeom>
-          <a:noFill/>
-        </p:spPr>
-        <p:txBody>
-          <a:bodyPr wrap="square">
-            <a:spAutoFit/>
-          </a:bodyPr>
-          <a:lstStyle/>
-          <a:p>
-            <a:pPr algn="l"/>
-            <a:r>
-              <a:rPr sz="2000" b="1" i="0">
-                <a:solidFill>
-                  <a:srgbClr val="1F2C56"/>
-                </a:solidFill>
-                <a:latin typeface="Arial"/>
-              </a:rPr>
-              <a:t>AB-1: Wallet-Share-Analyse</a:t>
-            </a:r>
-          </a:p>
-        </p:txBody>
-      </p:sp>
-      <p:sp>
-        <p:nvSpPr>
-          <p:cNvPr id="6" name="Rectangle 5"/>
-          <p:cNvSpPr/>
-          <p:nvPr/>
-        </p:nvSpPr>
-        <p:spPr>
-          <a:xfrm>
-            <a:off x="685800" y="1143000"/>
-            <a:ext cx="10817352" cy="25400"/>
-          </a:xfrm>
-          <a:prstGeom prst="rect">
-            <a:avLst/>
-          </a:prstGeom>
-          <a:solidFill>
-            <a:srgbClr val="D9C089"/>
-          </a:solidFill>
-          <a:ln>
-            <a:noFill/>
-          </a:ln>
-        </p:spPr>
-        <p:style>
-          <a:lnRef idx="1">
-            <a:schemeClr val="accent1"/>
-          </a:lnRef>
-          <a:fillRef idx="3">
-            <a:schemeClr val="accent1"/>
-          </a:fillRef>
-          <a:effectRef idx="2">
-            <a:schemeClr val="accent1"/>
-          </a:effectRef>
-          <a:fontRef idx="minor">
-            <a:schemeClr val="lt1"/>
-          </a:fontRef>
-        </p:style>
-        <p:txBody>
-          <a:bodyPr rtlCol="0" anchor="ctr"/>
-          <a:lstStyle/>
-          <a:p>
-            <a:pPr algn="ctr"/>
-          </a:p>
-        </p:txBody>
-      </p:sp>
-      <p:graphicFrame>
-        <p:nvGraphicFramePr>
-          <p:cNvPr id="7" name="Table 6"/>
-          <p:cNvGraphicFramePr>
-            <a:graphicFrameLocks noGrp="1"/>
-          </p:cNvGraphicFramePr>
-          <p:nvPr/>
-        </p:nvGraphicFramePr>
-        <p:xfrm>
-          <a:off x="685800" y="1417320"/>
-          <a:ext cx="10817352" cy="2688336"/>
-        </p:xfrm>
-        <a:graphic>
-          <a:graphicData uri="http://schemas.openxmlformats.org/drawingml/2006/table">
-            <a:tbl>
-              <a:tblPr firstRow="1" bandRow="1">
-                <a:tableStyleId>{5C22544A-7EE6-4342-B048-85BDC9FD1C3A}</a:tableStyleId>
-              </a:tblPr>
-              <a:tblGrid>
-                <a:gridCol w="2163470"/>
-                <a:gridCol w="2163470"/>
-                <a:gridCol w="2163470"/>
-                <a:gridCol w="2163470"/>
-                <a:gridCol w="2163472"/>
-              </a:tblGrid>
-              <a:tr h="384048">
-                <a:tc>
-                  <a:txBody>
-                    <a:bodyPr/>
-                    <a:lstStyle/>
-                    <a:p>
-                      <a:r>
-                        <a:rPr sz="1100" b="1">
-                          <a:solidFill>
-                            <a:srgbClr val="FFFFFF"/>
-                          </a:solidFill>
-                          <a:latin typeface="Arial"/>
-                        </a:rPr>
-                        <a:t>Dimension</a:t>
-                      </a:r>
-                    </a:p>
-                  </a:txBody>
-                  <a:tcPr>
-                    <a:solidFill>
-                      <a:srgbClr val="1F2C56"/>
-                    </a:solidFill>
-                  </a:tcPr>
-                </a:tc>
-                <a:tc>
-                  <a:txBody>
-                    <a:bodyPr/>
-                    <a:lstStyle/>
-                    <a:p>
-                      <a:r>
-                        <a:rPr sz="1100" b="1">
-                          <a:solidFill>
-                            <a:srgbClr val="FFFFFF"/>
-                          </a:solidFill>
-                          <a:latin typeface="Arial"/>
-                        </a:rPr>
-                        <a:t>Aktueller Stand (uns bekannt)</a:t>
-                      </a:r>
-                    </a:p>
-                  </a:txBody>
-                  <a:tcPr>
-                    <a:solidFill>
-                      <a:srgbClr val="1F2C56"/>
-                    </a:solidFill>
-                  </a:tcPr>
-                </a:tc>
-                <a:tc>
-                  <a:txBody>
-                    <a:bodyPr/>
-                    <a:lstStyle/>
-                    <a:p>
-                      <a:r>
-                        <a:rPr sz="1100" b="1">
-                          <a:solidFill>
-                            <a:srgbClr val="FFFFFF"/>
-                          </a:solidFill>
-                          <a:latin typeface="Arial"/>
-                        </a:rPr>
-                        <a:t>Schätzung Gesamtbedarf</a:t>
-                      </a:r>
-                    </a:p>
-                  </a:txBody>
-                  <a:tcPr>
-                    <a:solidFill>
-                      <a:srgbClr val="1F2C56"/>
-                    </a:solidFill>
-                  </a:tcPr>
-                </a:tc>
-                <a:tc>
-                  <a:txBody>
-                    <a:bodyPr/>
-                    <a:lstStyle/>
-                    <a:p>
-                      <a:r>
-                        <a:rPr sz="1100" b="1">
-                          <a:solidFill>
-                            <a:srgbClr val="FFFFFF"/>
-                          </a:solidFill>
-                          <a:latin typeface="Arial"/>
-                        </a:rPr>
-                        <a:t>Wallet-Share (%)</a:t>
-                      </a:r>
-                    </a:p>
-                  </a:txBody>
-                  <a:tcPr>
-                    <a:solidFill>
-                      <a:srgbClr val="1F2C56"/>
-                    </a:solidFill>
-                  </a:tcPr>
-                </a:tc>
-                <a:tc>
-                  <a:txBody>
-                    <a:bodyPr/>
-                    <a:lstStyle/>
-                    <a:p>
-                      <a:r>
-                        <a:rPr sz="1100" b="1">
-                          <a:solidFill>
-                            <a:srgbClr val="FFFFFF"/>
-                          </a:solidFill>
-                          <a:latin typeface="Arial"/>
-                        </a:rPr>
-                        <a:t>Cross-Selling-Potenzial</a:t>
-                      </a:r>
-                    </a:p>
-                  </a:txBody>
-                  <a:tcPr>
-                    <a:solidFill>
-                      <a:srgbClr val="1F2C56"/>
-                    </a:solidFill>
-                  </a:tcPr>
-                </a:tc>
-              </a:tr>
-              <a:tr h="384048">
-                <a:tc>
-                  <a:txBody>
-                    <a:bodyPr/>
-                    <a:lstStyle/>
-                    <a:p>
-                      <a:r>
-                        <a:rPr sz="1050">
-                          <a:solidFill>
-                            <a:srgbClr val="3D5466"/>
-                          </a:solidFill>
-                          <a:latin typeface="Arial"/>
-                        </a:rPr>
-                        <a:t>Finanzierung</a:t>
-                      </a:r>
-                    </a:p>
-                  </a:txBody>
-                  <a:tcPr/>
-                </a:tc>
-                <a:tc>
-                  <a:txBody>
-                    <a:bodyPr/>
-                    <a:lstStyle/>
-                    <a:p/>
-                  </a:txBody>
-                  <a:tcPr/>
-                </a:tc>
-                <a:tc>
-                  <a:txBody>
-                    <a:bodyPr/>
-                    <a:lstStyle/>
-                    <a:p/>
-                  </a:txBody>
-                  <a:tcPr/>
-                </a:tc>
-                <a:tc>
-                  <a:txBody>
-                    <a:bodyPr/>
-                    <a:lstStyle/>
-                    <a:p/>
-                  </a:txBody>
-                  <a:tcPr/>
-                </a:tc>
-                <a:tc>
-                  <a:txBody>
-                    <a:bodyPr/>
-                    <a:lstStyle/>
-                    <a:p/>
-                  </a:txBody>
-                  <a:tcPr/>
-                </a:tc>
-              </a:tr>
-              <a:tr h="384048">
-                <a:tc>
-                  <a:txBody>
-                    <a:bodyPr/>
-                    <a:lstStyle/>
-                    <a:p>
-                      <a:r>
-                        <a:rPr sz="1050">
-                          <a:solidFill>
-                            <a:srgbClr val="3D5466"/>
-                          </a:solidFill>
-                          <a:latin typeface="Arial"/>
-                        </a:rPr>
-                        <a:t>Absicherung</a:t>
-                      </a:r>
-                    </a:p>
-                  </a:txBody>
-                  <a:tcPr/>
-                </a:tc>
-                <a:tc>
-                  <a:txBody>
-                    <a:bodyPr/>
-                    <a:lstStyle/>
-                    <a:p/>
-                  </a:txBody>
-                  <a:tcPr/>
-                </a:tc>
-                <a:tc>
-                  <a:txBody>
-                    <a:bodyPr/>
-                    <a:lstStyle/>
-                    <a:p/>
-                  </a:txBody>
-                  <a:tcPr/>
-                </a:tc>
-                <a:tc>
-                  <a:txBody>
-                    <a:bodyPr/>
-                    <a:lstStyle/>
-                    <a:p/>
-                  </a:txBody>
-                  <a:tcPr/>
-                </a:tc>
-                <a:tc>
-                  <a:txBody>
-                    <a:bodyPr/>
-                    <a:lstStyle/>
-                    <a:p/>
-                  </a:txBody>
-                  <a:tcPr/>
-                </a:tc>
-              </a:tr>
-              <a:tr h="384048">
-                <a:tc>
-                  <a:txBody>
-                    <a:bodyPr/>
-                    <a:lstStyle/>
-                    <a:p>
-                      <a:r>
-                        <a:rPr sz="1050">
-                          <a:solidFill>
-                            <a:srgbClr val="3D5466"/>
-                          </a:solidFill>
-                          <a:latin typeface="Arial"/>
-                        </a:rPr>
-                        <a:t>Kapitalanlage</a:t>
-                      </a:r>
-                    </a:p>
-                  </a:txBody>
-                  <a:tcPr/>
-                </a:tc>
-                <a:tc>
-                  <a:txBody>
-                    <a:bodyPr/>
-                    <a:lstStyle/>
-                    <a:p/>
-                  </a:txBody>
-                  <a:tcPr/>
-                </a:tc>
-                <a:tc>
-                  <a:txBody>
-                    <a:bodyPr/>
-                    <a:lstStyle/>
-                    <a:p/>
-                  </a:txBody>
-                  <a:tcPr/>
-                </a:tc>
-                <a:tc>
-                  <a:txBody>
-                    <a:bodyPr/>
-                    <a:lstStyle/>
-                    <a:p/>
-                  </a:txBody>
-                  <a:tcPr/>
-                </a:tc>
-                <a:tc>
-                  <a:txBody>
-                    <a:bodyPr/>
-                    <a:lstStyle/>
-                    <a:p/>
-                  </a:txBody>
-                  <a:tcPr/>
-                </a:tc>
-              </a:tr>
-              <a:tr h="384048">
-                <a:tc>
-                  <a:txBody>
-                    <a:bodyPr/>
-                    <a:lstStyle/>
-                    <a:p>
-                      <a:r>
-                        <a:rPr sz="1050">
-                          <a:solidFill>
-                            <a:srgbClr val="3D5466"/>
-                          </a:solidFill>
-                          <a:latin typeface="Arial"/>
-                        </a:rPr>
-                        <a:t>Zahlungsverkehr</a:t>
-                      </a:r>
-                    </a:p>
-                  </a:txBody>
-                  <a:tcPr/>
-                </a:tc>
-                <a:tc>
-                  <a:txBody>
-                    <a:bodyPr/>
-                    <a:lstStyle/>
-                    <a:p/>
-                  </a:txBody>
-                  <a:tcPr/>
-                </a:tc>
-                <a:tc>
-                  <a:txBody>
-                    <a:bodyPr/>
-                    <a:lstStyle/>
-                    <a:p/>
-                  </a:txBody>
-                  <a:tcPr/>
-                </a:tc>
-                <a:tc>
-                  <a:txBody>
-                    <a:bodyPr/>
-                    <a:lstStyle/>
-                    <a:p/>
-                  </a:txBody>
-                  <a:tcPr/>
-                </a:tc>
-                <a:tc>
-                  <a:txBody>
-                    <a:bodyPr/>
-                    <a:lstStyle/>
-                    <a:p/>
-                  </a:txBody>
-                  <a:tcPr/>
-                </a:tc>
-              </a:tr>
-              <a:tr h="384048">
-                <a:tc>
-                  <a:txBody>
-                    <a:bodyPr/>
-                    <a:lstStyle/>
-                    <a:p>
-                      <a:r>
-                        <a:rPr sz="1050">
-                          <a:solidFill>
-                            <a:srgbClr val="3D5466"/>
-                          </a:solidFill>
-                          <a:latin typeface="Arial"/>
-                        </a:rPr>
-                        <a:t>Privat/Gesellschafter</a:t>
-                      </a:r>
-                    </a:p>
-                  </a:txBody>
-                  <a:tcPr/>
-                </a:tc>
-                <a:tc>
-                  <a:txBody>
-                    <a:bodyPr/>
-                    <a:lstStyle/>
-                    <a:p/>
-                  </a:txBody>
-                  <a:tcPr/>
-                </a:tc>
-                <a:tc>
-                  <a:txBody>
-                    <a:bodyPr/>
-                    <a:lstStyle/>
-                    <a:p/>
-                  </a:txBody>
-                  <a:tcPr/>
-                </a:tc>
-                <a:tc>
-                  <a:txBody>
-                    <a:bodyPr/>
-                    <a:lstStyle/>
-                    <a:p/>
-                  </a:txBody>
-                  <a:tcPr/>
-                </a:tc>
-                <a:tc>
-                  <a:txBody>
-                    <a:bodyPr/>
-                    <a:lstStyle/>
-                    <a:p/>
-                  </a:txBody>
-                  <a:tcPr/>
-                </a:tc>
-              </a:tr>
-              <a:tr h="384048">
-                <a:tc>
-                  <a:txBody>
-                    <a:bodyPr/>
-                    <a:lstStyle/>
-                    <a:p>
-                      <a:r>
-                        <a:rPr sz="1050">
-                          <a:solidFill>
-                            <a:srgbClr val="3D5466"/>
-                          </a:solidFill>
-                          <a:latin typeface="Arial"/>
-                        </a:rPr>
-                        <a:t>Gesamt</a:t>
-                      </a:r>
-                    </a:p>
-                  </a:txBody>
-                  <a:tcPr/>
-                </a:tc>
-                <a:tc>
-                  <a:txBody>
-                    <a:bodyPr/>
-                    <a:lstStyle/>
-                    <a:p/>
-                  </a:txBody>
-                  <a:tcPr/>
-                </a:tc>
-                <a:tc>
-                  <a:txBody>
-                    <a:bodyPr/>
-                    <a:lstStyle/>
-                    <a:p/>
-                  </a:txBody>
-                  <a:tcPr/>
-                </a:tc>
-                <a:tc>
-                  <a:txBody>
-                    <a:bodyPr/>
-                    <a:lstStyle/>
-                    <a:p/>
-                  </a:txBody>
-                  <a:tcPr/>
-                </a:tc>
-                <a:tc>
-                  <a:txBody>
-                    <a:bodyPr/>
-                    <a:lstStyle/>
-                    <a:p/>
-                  </a:txBody>
-                  <a:tcPr/>
-                </a:tc>
-              </a:tr>
-            </a:tbl>
-          </a:graphicData>
-        </a:graphic>
-      </p:graphicFrame>
-      <p:sp>
-        <p:nvSpPr>
-          <p:cNvPr id="8" name="Rectangle 7"/>
-          <p:cNvSpPr/>
-          <p:nvPr/>
-        </p:nvSpPr>
-        <p:spPr>
-          <a:xfrm>
-            <a:off x="0" y="6510528"/>
-            <a:ext cx="12188952" cy="347472"/>
-          </a:xfrm>
-          <a:prstGeom prst="rect">
-            <a:avLst/>
-          </a:prstGeom>
-          <a:solidFill>
-            <a:srgbClr val="0A1937"/>
-          </a:solidFill>
-          <a:ln>
-            <a:noFill/>
-          </a:ln>
-        </p:spPr>
-        <p:style>
-          <a:lnRef idx="1">
-            <a:schemeClr val="accent1"/>
-          </a:lnRef>
-          <a:fillRef idx="3">
-            <a:schemeClr val="accent1"/>
-          </a:fillRef>
-          <a:effectRef idx="2">
-            <a:schemeClr val="accent1"/>
-          </a:effectRef>
-          <a:fontRef idx="minor">
-            <a:schemeClr val="lt1"/>
-          </a:fontRef>
-        </p:style>
-        <p:txBody>
-          <a:bodyPr rtlCol="0" anchor="ctr"/>
-          <a:lstStyle/>
-          <a:p>
-            <a:pPr algn="ctr"/>
-          </a:p>
-        </p:txBody>
-      </p:sp>
-      <p:sp>
-        <p:nvSpPr>
-          <p:cNvPr id="9" name="TextBox 8"/>
-          <p:cNvSpPr txBox="1"/>
-          <p:nvPr/>
-        </p:nvSpPr>
-        <p:spPr>
-          <a:xfrm>
-            <a:off x="685800" y="6583680"/>
-            <a:ext cx="6490411" cy="256032"/>
-          </a:xfrm>
-          <a:prstGeom prst="rect">
-            <a:avLst/>
-          </a:prstGeom>
-          <a:noFill/>
-        </p:spPr>
-        <p:txBody>
-          <a:bodyPr wrap="none">
-            <a:spAutoFit/>
-          </a:bodyPr>
-          <a:lstStyle/>
-          <a:p>
-            <a:pPr algn="l"/>
-            <a:r>
-              <a:rPr sz="700">
-                <a:solidFill>
-                  <a:srgbClr val="A0B4D2"/>
-                </a:solidFill>
-                <a:latin typeface="Consolas"/>
-              </a:rPr>
-              <a:t>FKB Campus  ·  M13</a:t>
-            </a:r>
-          </a:p>
-        </p:txBody>
-      </p:sp>
-      <p:sp>
-        <p:nvSpPr>
-          <p:cNvPr id="10" name="TextBox 9"/>
-          <p:cNvSpPr txBox="1"/>
-          <p:nvPr/>
-        </p:nvSpPr>
-        <p:spPr>
-          <a:xfrm>
-            <a:off x="7176211" y="6583680"/>
-            <a:ext cx="4326940" cy="256032"/>
-          </a:xfrm>
-          <a:prstGeom prst="rect">
-            <a:avLst/>
-          </a:prstGeom>
-          <a:noFill/>
-        </p:spPr>
-        <p:txBody>
-          <a:bodyPr wrap="none">
-            <a:spAutoFit/>
-          </a:bodyPr>
-          <a:lstStyle/>
-          <a:p>
-            <a:pPr algn="r"/>
-            <a:r>
-              <a:rPr sz="700">
-                <a:solidFill>
-                  <a:srgbClr val="A0B4D2"/>
-                </a:solidFill>
-                <a:latin typeface="Consolas"/>
-              </a:rPr>
-              <a:t>Übersicht</a:t>
-            </a:r>
-          </a:p>
-        </p:txBody>
-      </p:sp>
-    </p:spTree>
-  </p:cSld>
-  <p:clrMapOvr>
-    <a:masterClrMapping/>
-  </p:clrMapOvr>
-</p:sld>
-</file>
-
-<file path=ppt/slides/slide17.xml><?xml version="1.0" encoding="utf-8"?>
-<p:sld xmlns:a="http://schemas.openxmlformats.org/drawingml/2006/main" xmlns:p="http://schemas.openxmlformats.org/presentationml/2006/main" xmlns:r="http://schemas.openxmlformats.org/officeDocument/2006/relationships">
-  <p:cSld>
-    <p:spTree>
-      <p:nvGrpSpPr>
-        <p:cNvPr id="1" name=""/>
-        <p:cNvGrpSpPr/>
-        <p:nvPr/>
-      </p:nvGrpSpPr>
-      <p:grpSpPr/>
-      <p:sp>
-        <p:nvSpPr>
-          <p:cNvPr id="2" name="Rectangle 1"/>
-          <p:cNvSpPr/>
-          <p:nvPr/>
-        </p:nvSpPr>
-        <p:spPr>
-          <a:xfrm>
-            <a:off x="0" y="0"/>
-            <a:ext cx="12188952" cy="6858000"/>
-          </a:xfrm>
-          <a:prstGeom prst="rect">
-            <a:avLst/>
-          </a:prstGeom>
-          <a:solidFill>
-            <a:srgbClr val="FFFFFF"/>
-          </a:solidFill>
-          <a:ln>
-            <a:noFill/>
-          </a:ln>
-        </p:spPr>
-        <p:style>
-          <a:lnRef idx="1">
-            <a:schemeClr val="accent1"/>
-          </a:lnRef>
-          <a:fillRef idx="3">
-            <a:schemeClr val="accent1"/>
-          </a:fillRef>
-          <a:effectRef idx="2">
-            <a:schemeClr val="accent1"/>
-          </a:effectRef>
-          <a:fontRef idx="minor">
-            <a:schemeClr val="lt1"/>
-          </a:fontRef>
-        </p:style>
-        <p:txBody>
-          <a:bodyPr rtlCol="0" anchor="ctr"/>
-          <a:lstStyle/>
-          <a:p>
-            <a:pPr algn="ctr"/>
-          </a:p>
-        </p:txBody>
-      </p:sp>
-      <p:sp>
-        <p:nvSpPr>
-          <p:cNvPr id="3" name="Rectangle 2"/>
-          <p:cNvSpPr/>
-          <p:nvPr/>
-        </p:nvSpPr>
-        <p:spPr>
-          <a:xfrm>
-            <a:off x="0" y="0"/>
-            <a:ext cx="12188952" cy="50292"/>
-          </a:xfrm>
-          <a:prstGeom prst="rect">
-            <a:avLst/>
-          </a:prstGeom>
-          <a:solidFill>
-            <a:srgbClr val="1F2C56"/>
-          </a:solidFill>
-          <a:ln>
-            <a:noFill/>
-          </a:ln>
-        </p:spPr>
-        <p:style>
-          <a:lnRef idx="1">
-            <a:schemeClr val="accent1"/>
-          </a:lnRef>
-          <a:fillRef idx="3">
-            <a:schemeClr val="accent1"/>
-          </a:fillRef>
-          <a:effectRef idx="2">
-            <a:schemeClr val="accent1"/>
-          </a:effectRef>
-          <a:fontRef idx="minor">
-            <a:schemeClr val="lt1"/>
-          </a:fontRef>
-        </p:style>
-        <p:txBody>
-          <a:bodyPr rtlCol="0" anchor="ctr"/>
-          <a:lstStyle/>
-          <a:p>
-            <a:pPr algn="ctr"/>
-          </a:p>
-        </p:txBody>
-      </p:sp>
-      <p:sp>
-        <p:nvSpPr>
-          <p:cNvPr id="4" name="TextBox 3"/>
-          <p:cNvSpPr txBox="1"/>
-          <p:nvPr/>
-        </p:nvSpPr>
-        <p:spPr>
-          <a:xfrm>
-            <a:off x="685800" y="109728"/>
-            <a:ext cx="10817352" cy="228600"/>
-          </a:xfrm>
-          <a:prstGeom prst="rect">
-            <a:avLst/>
-          </a:prstGeom>
-          <a:noFill/>
-        </p:spPr>
-        <p:txBody>
-          <a:bodyPr wrap="none">
-            <a:spAutoFit/>
-          </a:bodyPr>
-          <a:lstStyle/>
-          <a:p>
-            <a:pPr algn="l"/>
-            <a:r>
-              <a:rPr sz="750">
-                <a:solidFill>
-                  <a:srgbClr val="78808C"/>
-                </a:solidFill>
-                <a:latin typeface="Consolas"/>
-              </a:rPr>
-              <a:t>M13  ·  ÜBERSICHT</a:t>
-            </a:r>
-          </a:p>
-        </p:txBody>
-      </p:sp>
-      <p:sp>
-        <p:nvSpPr>
-          <p:cNvPr id="5" name="TextBox 4"/>
-          <p:cNvSpPr txBox="1"/>
-          <p:nvPr/>
-        </p:nvSpPr>
-        <p:spPr>
-          <a:xfrm>
-            <a:off x="685800" y="502920"/>
-            <a:ext cx="10817352" cy="594360"/>
-          </a:xfrm>
-          <a:prstGeom prst="rect">
-            <a:avLst/>
-          </a:prstGeom>
-          <a:noFill/>
-        </p:spPr>
-        <p:txBody>
-          <a:bodyPr wrap="square">
-            <a:spAutoFit/>
-          </a:bodyPr>
-          <a:lstStyle/>
-          <a:p>
-            <a:pPr algn="l"/>
-            <a:r>
-              <a:rPr sz="2000" b="1" i="0">
-                <a:solidFill>
-                  <a:srgbClr val="1F2C56"/>
-                </a:solidFill>
-                <a:latin typeface="Arial"/>
-              </a:rPr>
-              <a:t>AB-2: Cross-Selling-Gesprächsvorbereitung</a:t>
-            </a:r>
-          </a:p>
-        </p:txBody>
-      </p:sp>
-      <p:sp>
-        <p:nvSpPr>
-          <p:cNvPr id="6" name="Rectangle 5"/>
-          <p:cNvSpPr/>
-          <p:nvPr/>
-        </p:nvSpPr>
-        <p:spPr>
-          <a:xfrm>
-            <a:off x="685800" y="1143000"/>
-            <a:ext cx="10817352" cy="25400"/>
-          </a:xfrm>
-          <a:prstGeom prst="rect">
-            <a:avLst/>
-          </a:prstGeom>
-          <a:solidFill>
-            <a:srgbClr val="D9C089"/>
-          </a:solidFill>
-          <a:ln>
-            <a:noFill/>
-          </a:ln>
-        </p:spPr>
-        <p:style>
-          <a:lnRef idx="1">
-            <a:schemeClr val="accent1"/>
-          </a:lnRef>
-          <a:fillRef idx="3">
-            <a:schemeClr val="accent1"/>
-          </a:fillRef>
-          <a:effectRef idx="2">
-            <a:schemeClr val="accent1"/>
-          </a:effectRef>
-          <a:fontRef idx="minor">
-            <a:schemeClr val="lt1"/>
-          </a:fontRef>
-        </p:style>
-        <p:txBody>
-          <a:bodyPr rtlCol="0" anchor="ctr"/>
-          <a:lstStyle/>
-          <a:p>
-            <a:pPr algn="ctr"/>
-          </a:p>
-        </p:txBody>
-      </p:sp>
-      <p:graphicFrame>
-        <p:nvGraphicFramePr>
-          <p:cNvPr id="7" name="Table 6"/>
-          <p:cNvGraphicFramePr>
-            <a:graphicFrameLocks noGrp="1"/>
-          </p:cNvGraphicFramePr>
-          <p:nvPr/>
-        </p:nvGraphicFramePr>
-        <p:xfrm>
-          <a:off x="685800" y="1417320"/>
-          <a:ext cx="10817352" cy="2688336"/>
-        </p:xfrm>
-        <a:graphic>
-          <a:graphicData uri="http://schemas.openxmlformats.org/drawingml/2006/table">
-            <a:tbl>
-              <a:tblPr firstRow="1" bandRow="1">
-                <a:tableStyleId>{5C22544A-7EE6-4342-B048-85BDC9FD1C3A}</a:tableStyleId>
-              </a:tblPr>
-              <a:tblGrid>
-                <a:gridCol w="5408676"/>
-                <a:gridCol w="5408676"/>
-              </a:tblGrid>
-              <a:tr h="384048">
-                <a:tc>
-                  <a:txBody>
-                    <a:bodyPr/>
-                    <a:lstStyle/>
-                    <a:p>
-                      <a:r>
-                        <a:rPr sz="1100" b="1">
-                          <a:solidFill>
-                            <a:srgbClr val="FFFFFF"/>
-                          </a:solidFill>
-                          <a:latin typeface="Arial"/>
-                        </a:rPr>
-                        <a:t>Schritt</a:t>
-                      </a:r>
-                    </a:p>
-                  </a:txBody>
-                  <a:tcPr>
-                    <a:solidFill>
-                      <a:srgbClr val="1F2C56"/>
-                    </a:solidFill>
-                  </a:tcPr>
-                </a:tc>
-                <a:tc>
-                  <a:txBody>
-                    <a:bodyPr/>
-                    <a:lstStyle/>
-                    <a:p>
-                      <a:r>
-                        <a:rPr sz="1100" b="1">
-                          <a:solidFill>
-                            <a:srgbClr val="FFFFFF"/>
-                          </a:solidFill>
-                          <a:latin typeface="Arial"/>
-                        </a:rPr>
-                        <a:t>Meine Vorbereitung</a:t>
-                      </a:r>
-                    </a:p>
-                  </a:txBody>
-                  <a:tcPr>
-                    <a:solidFill>
-                      <a:srgbClr val="1F2C56"/>
-                    </a:solidFill>
-                  </a:tcPr>
-                </a:tc>
-              </a:tr>
-              <a:tr h="384048">
-                <a:tc>
-                  <a:txBody>
-                    <a:bodyPr/>
-                    <a:lstStyle/>
-                    <a:p>
-                      <a:r>
-                        <a:rPr sz="1050">
-                          <a:solidFill>
-                            <a:srgbClr val="3D5466"/>
-                          </a:solidFill>
-                          <a:latin typeface="Arial"/>
-                        </a:rPr>
-                        <a:t>Situationsfrage</a:t>
-                      </a:r>
-                    </a:p>
-                  </a:txBody>
-                  <a:tcPr/>
-                </a:tc>
-                <a:tc>
-                  <a:txBody>
-                    <a:bodyPr/>
-                    <a:lstStyle/>
-                    <a:p/>
-                  </a:txBody>
-                  <a:tcPr/>
-                </a:tc>
-              </a:tr>
-              <a:tr h="384048">
-                <a:tc>
-                  <a:txBody>
-                    <a:bodyPr/>
-                    <a:lstStyle/>
-                    <a:p>
-                      <a:r>
-                        <a:rPr sz="1050">
-                          <a:solidFill>
-                            <a:srgbClr val="3D5466"/>
-                          </a:solidFill>
-                          <a:latin typeface="Arial"/>
-                        </a:rPr>
-                        <a:t>Problemfrage</a:t>
-                      </a:r>
-                    </a:p>
-                  </a:txBody>
-                  <a:tcPr/>
-                </a:tc>
-                <a:tc>
-                  <a:txBody>
-                    <a:bodyPr/>
-                    <a:lstStyle/>
-                    <a:p/>
-                  </a:txBody>
-                  <a:tcPr/>
-                </a:tc>
-              </a:tr>
-              <a:tr h="384048">
-                <a:tc>
-                  <a:txBody>
-                    <a:bodyPr/>
-                    <a:lstStyle/>
-                    <a:p>
-                      <a:r>
-                        <a:rPr sz="1050">
-                          <a:solidFill>
-                            <a:srgbClr val="3D5466"/>
-                          </a:solidFill>
-                          <a:latin typeface="Arial"/>
-                        </a:rPr>
-                        <a:t>Implikationsfrage</a:t>
-                      </a:r>
-                    </a:p>
-                  </a:txBody>
-                  <a:tcPr/>
-                </a:tc>
-                <a:tc>
-                  <a:txBody>
-                    <a:bodyPr/>
-                    <a:lstStyle/>
-                    <a:p/>
-                  </a:txBody>
-                  <a:tcPr/>
-                </a:tc>
-              </a:tr>
-              <a:tr h="384048">
-                <a:tc>
-                  <a:txBody>
-                    <a:bodyPr/>
-                    <a:lstStyle/>
-                    <a:p>
-                      <a:r>
-                        <a:rPr sz="1050">
-                          <a:solidFill>
-                            <a:srgbClr val="3D5466"/>
-                          </a:solidFill>
-                          <a:latin typeface="Arial"/>
-                        </a:rPr>
-                        <a:t>Nutzenfrage</a:t>
-                      </a:r>
-                    </a:p>
-                  </a:txBody>
-                  <a:tcPr/>
-                </a:tc>
-                <a:tc>
-                  <a:txBody>
-                    <a:bodyPr/>
-                    <a:lstStyle/>
-                    <a:p/>
-                  </a:txBody>
-                  <a:tcPr/>
-                </a:tc>
-              </a:tr>
-              <a:tr h="384048">
-                <a:tc>
-                  <a:txBody>
-                    <a:bodyPr/>
-                    <a:lstStyle/>
-                    <a:p>
-                      <a:r>
-                        <a:rPr sz="1050">
-                          <a:solidFill>
-                            <a:srgbClr val="3D5466"/>
-                          </a:solidFill>
-                          <a:latin typeface="Arial"/>
-                        </a:rPr>
-                        <a:t>Verbundpartner / Lösung</a:t>
-                      </a:r>
-                    </a:p>
-                  </a:txBody>
-                  <a:tcPr/>
-                </a:tc>
-                <a:tc>
-                  <a:txBody>
-                    <a:bodyPr/>
-                    <a:lstStyle/>
-                    <a:p/>
-                  </a:txBody>
-                  <a:tcPr/>
-                </a:tc>
-              </a:tr>
-              <a:tr h="384048">
-                <a:tc>
-                  <a:txBody>
-                    <a:bodyPr/>
-                    <a:lstStyle/>
-                    <a:p>
-                      <a:r>
-                        <a:rPr sz="1050">
-                          <a:solidFill>
-                            <a:srgbClr val="3D5466"/>
-                          </a:solidFill>
-                          <a:latin typeface="Arial"/>
-                        </a:rPr>
-                        <a:t>Dokumentation in agree</a:t>
-                      </a:r>
-                    </a:p>
-                  </a:txBody>
-                  <a:tcPr/>
-                </a:tc>
-                <a:tc>
-                  <a:txBody>
-                    <a:bodyPr/>
-                    <a:lstStyle/>
-                    <a:p/>
-                  </a:txBody>
-                  <a:tcPr/>
-                </a:tc>
-              </a:tr>
-            </a:tbl>
-          </a:graphicData>
-        </a:graphic>
-      </p:graphicFrame>
-      <p:sp>
-        <p:nvSpPr>
-          <p:cNvPr id="8" name="Rectangle 7"/>
-          <p:cNvSpPr/>
-          <p:nvPr/>
-        </p:nvSpPr>
-        <p:spPr>
-          <a:xfrm>
-            <a:off x="0" y="6510528"/>
-            <a:ext cx="12188952" cy="347472"/>
-          </a:xfrm>
-          <a:prstGeom prst="rect">
-            <a:avLst/>
-          </a:prstGeom>
-          <a:solidFill>
-            <a:srgbClr val="0A1937"/>
-          </a:solidFill>
-          <a:ln>
-            <a:noFill/>
-          </a:ln>
-        </p:spPr>
-        <p:style>
-          <a:lnRef idx="1">
-            <a:schemeClr val="accent1"/>
-          </a:lnRef>
-          <a:fillRef idx="3">
-            <a:schemeClr val="accent1"/>
-          </a:fillRef>
-          <a:effectRef idx="2">
-            <a:schemeClr val="accent1"/>
-          </a:effectRef>
-          <a:fontRef idx="minor">
-            <a:schemeClr val="lt1"/>
-          </a:fontRef>
-        </p:style>
-        <p:txBody>
-          <a:bodyPr rtlCol="0" anchor="ctr"/>
-          <a:lstStyle/>
-          <a:p>
-            <a:pPr algn="ctr"/>
-          </a:p>
-        </p:txBody>
-      </p:sp>
-      <p:sp>
-        <p:nvSpPr>
-          <p:cNvPr id="9" name="TextBox 8"/>
-          <p:cNvSpPr txBox="1"/>
-          <p:nvPr/>
-        </p:nvSpPr>
-        <p:spPr>
-          <a:xfrm>
-            <a:off x="685800" y="6583680"/>
-            <a:ext cx="6490411" cy="256032"/>
-          </a:xfrm>
-          <a:prstGeom prst="rect">
-            <a:avLst/>
-          </a:prstGeom>
-          <a:noFill/>
-        </p:spPr>
-        <p:txBody>
-          <a:bodyPr wrap="none">
-            <a:spAutoFit/>
-          </a:bodyPr>
-          <a:lstStyle/>
-          <a:p>
-            <a:pPr algn="l"/>
-            <a:r>
-              <a:rPr sz="700">
-                <a:solidFill>
-                  <a:srgbClr val="A0B4D2"/>
-                </a:solidFill>
-                <a:latin typeface="Consolas"/>
-              </a:rPr>
-              <a:t>FKB Campus  ·  M13</a:t>
-            </a:r>
-          </a:p>
-        </p:txBody>
-      </p:sp>
-      <p:sp>
-        <p:nvSpPr>
-          <p:cNvPr id="10" name="TextBox 9"/>
-          <p:cNvSpPr txBox="1"/>
-          <p:nvPr/>
-        </p:nvSpPr>
-        <p:spPr>
-          <a:xfrm>
-            <a:off x="7176211" y="6583680"/>
-            <a:ext cx="4326940" cy="256032"/>
-          </a:xfrm>
-          <a:prstGeom prst="rect">
-            <a:avLst/>
-          </a:prstGeom>
-          <a:noFill/>
-        </p:spPr>
-        <p:txBody>
-          <a:bodyPr wrap="none">
-            <a:spAutoFit/>
-          </a:bodyPr>
-          <a:lstStyle/>
-          <a:p>
-            <a:pPr algn="r"/>
-            <a:r>
-              <a:rPr sz="700">
-                <a:solidFill>
-                  <a:srgbClr val="A0B4D2"/>
-                </a:solidFill>
-                <a:latin typeface="Consolas"/>
-              </a:rPr>
-              <a:t>Übersicht</a:t>
             </a:r>
           </a:p>
         </p:txBody>
@@ -10398,7 +8552,7 @@
                 </a:solidFill>
                 <a:latin typeface="Arial"/>
               </a:rPr>
-              <a:t>Definition</a:t>
+              <a:t>Cross-Selling beginnt beim Bedarf, nicht bei der Produktliste</a:t>
             </a:r>
           </a:p>
         </p:txBody>
@@ -10440,7 +8594,45 @@
                 </a:solidFill>
                 <a:latin typeface="Arial"/>
               </a:rPr>
-              <a:t>→  Cross-Selling ist kein Verkaufsakt. Es ist das konsequente Ausfüllen eines Bedarfs, den der Kunde ohnehin hat – bei der eigenen Bank oder einem Wettbewerber.</a:t>
+              <a:t>→  Cross-Selling beginnt beim Bedarf des Kunden, nicht bei der Produktliste der Bank.</a:t>
+            </a:r>
+          </a:p>
+          <a:p>
+            <a:pPr marL="190500" indent="-190500">
+              <a:spcBef>
+                <a:spcPts val="400"/>
+              </a:spcBef>
+              <a:spcAft>
+                <a:spcPts val="200"/>
+              </a:spcAft>
+            </a:pPr>
+            <a:r>
+              <a:rPr sz="1300">
+                <a:solidFill>
+                  <a:srgbClr val="3D5466"/>
+                </a:solidFill>
+                <a:latin typeface="Arial"/>
+              </a:rPr>
+              <a:t>▸  Bedarfsorientiertes Cross-Selling (Pull) bindet und bringt Ertrag.</a:t>
+            </a:r>
+          </a:p>
+          <a:p>
+            <a:pPr marL="190500" indent="-190500">
+              <a:spcBef>
+                <a:spcPts val="400"/>
+              </a:spcBef>
+              <a:spcAft>
+                <a:spcPts val="200"/>
+              </a:spcAft>
+            </a:pPr>
+            <a:r>
+              <a:rPr sz="1300">
+                <a:solidFill>
+                  <a:srgbClr val="3D5466"/>
+                </a:solidFill>
+                <a:latin typeface="Arial"/>
+              </a:rPr>
+              <a:t>▸  Produkte drücken (Push) verbrennt Vertrauen – der Unterschied entscheidet über die Beziehung.</a:t>
             </a:r>
           </a:p>
         </p:txBody>
@@ -10778,7 +8970,7 @@
                 </a:solidFill>
                 <a:latin typeface="Arial"/>
               </a:rPr>
-              <a:t>Zwei Typen: Push vs. Pull</a:t>
+              <a:t>Push oder Pull: der entscheidende Unterschied</a:t>
             </a:r>
           </a:p>
         </p:txBody>
@@ -10804,6 +8996,25 @@
             <a:spAutoFit/>
           </a:bodyPr>
           <a:lstStyle/>
+          <a:p>
+            <a:pPr marL="177800" indent="-177800">
+              <a:spcBef>
+                <a:spcPts val="600"/>
+              </a:spcBef>
+              <a:spcAft>
+                <a:spcPts val="200"/>
+              </a:spcAft>
+            </a:pPr>
+            <a:r>
+              <a:rPr sz="1200" i="1">
+                <a:solidFill>
+                  <a:srgbClr val="3D5466"/>
+                </a:solidFill>
+                <a:latin typeface="Arial"/>
+              </a:rPr>
+              <a:t>→  Push fragt „Was können wir noch verkaufen?", Pull fragt „Welchen Bedarf hat der Kunde, den wir noch nicht decken?".</a:t>
+            </a:r>
+          </a:p>
           <a:p>
             <a:pPr marL="190500" indent="-190500">
               <a:spcBef>
@@ -10820,7 +9031,26 @@
                 </a:solidFill>
                 <a:latin typeface="Arial"/>
               </a:rPr>
-              <a:t>▸  ## 4.2 Wallet-Share-Analyse: Wo liegt das Potenzial?</a:t>
+              <a:t>▸  Push: von der Produktliste getrieben, kurzfristig, beziehungsschädlich.</a:t>
+            </a:r>
+          </a:p>
+          <a:p>
+            <a:pPr marL="190500" indent="-190500">
+              <a:spcBef>
+                <a:spcPts val="400"/>
+              </a:spcBef>
+              <a:spcAft>
+                <a:spcPts val="200"/>
+              </a:spcAft>
+            </a:pPr>
+            <a:r>
+              <a:rPr sz="1300">
+                <a:solidFill>
+                  <a:srgbClr val="3D5466"/>
+                </a:solidFill>
+                <a:latin typeface="Arial"/>
+              </a:rPr>
+              <a:t>▸  Pull: vom Kundenbedarf getrieben, nachhaltig, vertrauensbildend.</a:t>
             </a:r>
           </a:p>
         </p:txBody>
@@ -10936,7 +9166,7 @@
             <a:avLst/>
           </a:prstGeom>
           <a:solidFill>
-            <a:srgbClr val="EDEDF3"/>
+            <a:srgbClr val="1F2C56"/>
           </a:solidFill>
           <a:ln>
             <a:noFill/>
@@ -10966,57 +9196,14 @@
       </p:sp>
       <p:sp>
         <p:nvSpPr>
-          <p:cNvPr id="3" name="Rectangle 2"/>
-          <p:cNvSpPr/>
-          <p:nvPr/>
-        </p:nvSpPr>
-        <p:spPr>
-          <a:xfrm>
-            <a:off x="0" y="0"/>
-            <a:ext cx="12188952" cy="50292"/>
-          </a:xfrm>
-          <a:prstGeom prst="rect">
-            <a:avLst/>
-          </a:prstGeom>
-          <a:solidFill>
-            <a:srgbClr val="1F2C56"/>
-          </a:solidFill>
-          <a:ln>
-            <a:noFill/>
-          </a:ln>
-        </p:spPr>
-        <p:style>
-          <a:lnRef idx="1">
-            <a:schemeClr val="accent1"/>
-          </a:lnRef>
-          <a:fillRef idx="3">
-            <a:schemeClr val="accent1"/>
-          </a:fillRef>
-          <a:effectRef idx="2">
-            <a:schemeClr val="accent1"/>
-          </a:effectRef>
-          <a:fontRef idx="minor">
-            <a:schemeClr val="lt1"/>
-          </a:fontRef>
-        </p:style>
-        <p:txBody>
-          <a:bodyPr rtlCol="0" anchor="ctr"/>
-          <a:lstStyle/>
-          <a:p>
-            <a:pPr algn="ctr"/>
-          </a:p>
-        </p:txBody>
-      </p:sp>
-      <p:sp>
-        <p:nvSpPr>
-          <p:cNvPr id="4" name="TextBox 3"/>
+          <p:cNvPr id="3" name="TextBox 2"/>
           <p:cNvSpPr txBox="1"/>
           <p:nvPr/>
         </p:nvSpPr>
         <p:spPr>
           <a:xfrm>
-            <a:off x="685800" y="109728"/>
-            <a:ext cx="10817352" cy="228600"/>
+            <a:off x="685800" y="2377440"/>
+            <a:ext cx="10817352" cy="365760"/>
           </a:xfrm>
           <a:prstGeom prst="rect">
             <a:avLst/>
@@ -11031,70 +9218,27 @@
           <a:p>
             <a:pPr algn="l"/>
             <a:r>
-              <a:rPr sz="750">
-                <a:solidFill>
-                  <a:srgbClr val="78808C"/>
+              <a:rPr sz="1200">
+                <a:solidFill>
+                  <a:srgbClr val="D9C089"/>
                 </a:solidFill>
                 <a:latin typeface="Consolas"/>
               </a:rPr>
-              <a:t>M13  ·  INHALT</a:t>
-            </a:r>
-          </a:p>
-        </p:txBody>
-      </p:sp>
-      <p:sp>
-        <p:nvSpPr>
-          <p:cNvPr id="5" name="Rectangle 4"/>
+              <a:t>ANALYSE</a:t>
+            </a:r>
+          </a:p>
+        </p:txBody>
+      </p:sp>
+      <p:sp>
+        <p:nvSpPr>
+          <p:cNvPr id="4" name="Rectangle 3"/>
           <p:cNvSpPr/>
           <p:nvPr/>
         </p:nvSpPr>
         <p:spPr>
           <a:xfrm>
-            <a:off x="0" y="1234440"/>
-            <a:ext cx="12188952" cy="12700"/>
-          </a:xfrm>
-          <a:prstGeom prst="rect">
-            <a:avLst/>
-          </a:prstGeom>
-          <a:solidFill>
-            <a:srgbClr val="D8DFE4"/>
-          </a:solidFill>
-          <a:ln>
-            <a:noFill/>
-          </a:ln>
-        </p:spPr>
-        <p:style>
-          <a:lnRef idx="1">
-            <a:schemeClr val="accent1"/>
-          </a:lnRef>
-          <a:fillRef idx="3">
-            <a:schemeClr val="accent1"/>
-          </a:fillRef>
-          <a:effectRef idx="2">
-            <a:schemeClr val="accent1"/>
-          </a:effectRef>
-          <a:fontRef idx="minor">
-            <a:schemeClr val="lt1"/>
-          </a:fontRef>
-        </p:style>
-        <p:txBody>
-          <a:bodyPr rtlCol="0" anchor="ctr"/>
-          <a:lstStyle/>
-          <a:p>
-            <a:pPr algn="ctr"/>
-          </a:p>
-        </p:txBody>
-      </p:sp>
-      <p:sp>
-        <p:nvSpPr>
-          <p:cNvPr id="6" name="Rectangle 5"/>
-          <p:cNvSpPr/>
-          <p:nvPr/>
-        </p:nvSpPr>
-        <p:spPr>
-          <a:xfrm>
-            <a:off x="685800" y="502920"/>
-            <a:ext cx="36576" cy="658368"/>
+            <a:off x="685800" y="2788920"/>
+            <a:ext cx="548640" cy="38100"/>
           </a:xfrm>
           <a:prstGeom prst="rect">
             <a:avLst/>
@@ -11130,14 +9274,14 @@
       </p:sp>
       <p:sp>
         <p:nvSpPr>
-          <p:cNvPr id="7" name="TextBox 6"/>
+          <p:cNvPr id="5" name="TextBox 4"/>
           <p:cNvSpPr txBox="1"/>
           <p:nvPr/>
         </p:nvSpPr>
         <p:spPr>
           <a:xfrm>
-            <a:off x="813816" y="502920"/>
-            <a:ext cx="10634472" cy="685800"/>
+            <a:off x="685800" y="3017520"/>
+            <a:ext cx="10817352" cy="1463040"/>
           </a:xfrm>
           <a:prstGeom prst="rect">
             <a:avLst/>
@@ -11152,27 +9296,27 @@
           <a:p>
             <a:pPr algn="l"/>
             <a:r>
-              <a:rPr sz="2400" b="1" i="0">
-                <a:solidFill>
-                  <a:srgbClr val="1F2C56"/>
+              <a:rPr sz="4000" b="1" i="0">
+                <a:solidFill>
+                  <a:srgbClr val="FFFFFF"/>
                 </a:solidFill>
                 <a:latin typeface="Arial"/>
               </a:rPr>
-              <a:t>Das Konzept</a:t>
-            </a:r>
-          </a:p>
-        </p:txBody>
-      </p:sp>
-      <p:sp>
-        <p:nvSpPr>
-          <p:cNvPr id="8" name="TextBox 7"/>
+              <a:t>Wallet-Share &amp; Anlässe</a:t>
+            </a:r>
+          </a:p>
+        </p:txBody>
+      </p:sp>
+      <p:sp>
+        <p:nvSpPr>
+          <p:cNvPr id="6" name="TextBox 5"/>
           <p:cNvSpPr txBox="1"/>
           <p:nvPr/>
         </p:nvSpPr>
         <p:spPr>
           <a:xfrm>
-            <a:off x="685800" y="1417320"/>
-            <a:ext cx="10817352" cy="4892040"/>
+            <a:off x="685800" y="4480560"/>
+            <a:ext cx="8653881" cy="1280160"/>
           </a:xfrm>
           <a:prstGeom prst="rect">
             <a:avLst/>
@@ -11180,84 +9324,34 @@
           <a:noFill/>
         </p:spPr>
         <p:txBody>
-          <a:bodyPr wrap="square" anchor="ctr">
+          <a:bodyPr wrap="square">
             <a:spAutoFit/>
           </a:bodyPr>
           <a:lstStyle/>
           <a:p>
-            <a:pPr marL="190500" indent="-190500">
-              <a:spcBef>
-                <a:spcPts val="400"/>
-              </a:spcBef>
-              <a:spcAft>
-                <a:spcPts val="200"/>
-              </a:spcAft>
-            </a:pPr>
-            <a:r>
-              <a:rPr sz="1300">
-                <a:solidFill>
-                  <a:srgbClr val="3D5466"/>
+            <a:pPr algn="l"/>
+            <a:r>
+              <a:rPr sz="1600" b="0" i="0">
+                <a:solidFill>
+                  <a:srgbClr val="C8D2E6"/>
                 </a:solidFill>
                 <a:latin typeface="Arial"/>
               </a:rPr>
-              <a:t>▸  Das unausgeschöpfte Potenzial von 60 % ist nicht verloren – es ist bei einem Wettbewerber.</a:t>
-            </a:r>
-          </a:p>
-        </p:txBody>
-      </p:sp>
-      <p:sp>
-        <p:nvSpPr>
-          <p:cNvPr id="9" name="Rectangle 8"/>
-          <p:cNvSpPr/>
-          <p:nvPr/>
-        </p:nvSpPr>
-        <p:spPr>
-          <a:xfrm>
-            <a:off x="0" y="6510528"/>
-            <a:ext cx="12188952" cy="347472"/>
-          </a:xfrm>
-          <a:prstGeom prst="rect">
-            <a:avLst/>
-          </a:prstGeom>
-          <a:solidFill>
-            <a:srgbClr val="0A1937"/>
-          </a:solidFill>
-          <a:ln>
-            <a:noFill/>
-          </a:ln>
-        </p:spPr>
-        <p:style>
-          <a:lnRef idx="1">
-            <a:schemeClr val="accent1"/>
-          </a:lnRef>
-          <a:fillRef idx="3">
-            <a:schemeClr val="accent1"/>
-          </a:fillRef>
-          <a:effectRef idx="2">
-            <a:schemeClr val="accent1"/>
-          </a:effectRef>
-          <a:fontRef idx="minor">
-            <a:schemeClr val="lt1"/>
-          </a:fontRef>
-        </p:style>
-        <p:txBody>
-          <a:bodyPr rtlCol="0" anchor="ctr"/>
-          <a:lstStyle/>
-          <a:p>
-            <a:pPr algn="ctr"/>
-          </a:p>
-        </p:txBody>
-      </p:sp>
-      <p:sp>
-        <p:nvSpPr>
-          <p:cNvPr id="10" name="TextBox 9"/>
+              <a:t>Das ungenutzte Potenzial im Bestand sichtbar machen.</a:t>
+            </a:r>
+          </a:p>
+        </p:txBody>
+      </p:sp>
+      <p:sp>
+        <p:nvSpPr>
+          <p:cNvPr id="7" name="TextBox 6"/>
           <p:cNvSpPr txBox="1"/>
           <p:nvPr/>
         </p:nvSpPr>
         <p:spPr>
           <a:xfrm>
-            <a:off x="685800" y="6583680"/>
-            <a:ext cx="6490411" cy="256032"/>
+            <a:off x="685800" y="6355080"/>
+            <a:ext cx="10817352" cy="274320"/>
           </a:xfrm>
           <a:prstGeom prst="rect">
             <a:avLst/>
@@ -11274,7 +9368,7 @@
             <a:r>
               <a:rPr sz="700">
                 <a:solidFill>
-                  <a:srgbClr val="A0B4D2"/>
+                  <a:srgbClr val="8CA0C3"/>
                 </a:solidFill>
                 <a:latin typeface="Consolas"/>
               </a:rPr>
@@ -11538,7 +9632,7 @@
                 </a:solidFill>
                 <a:latin typeface="Arial"/>
               </a:rPr>
-              <a:t>Potenzialanalyse in agree</a:t>
+              <a:t>Wallet-Share: wo das Potenzial liegt</a:t>
             </a:r>
           </a:p>
         </p:txBody>
@@ -11564,6 +9658,25 @@
             <a:spAutoFit/>
           </a:bodyPr>
           <a:lstStyle/>
+          <a:p>
+            <a:pPr marL="177800" indent="-177800">
+              <a:spcBef>
+                <a:spcPts val="600"/>
+              </a:spcBef>
+              <a:spcAft>
+                <a:spcPts val="200"/>
+              </a:spcAft>
+            </a:pPr>
+            <a:r>
+              <a:rPr sz="1200" i="1">
+                <a:solidFill>
+                  <a:srgbClr val="3D5466"/>
+                </a:solidFill>
+                <a:latin typeface="Arial"/>
+              </a:rPr>
+              <a:t>→  Der Wallet-Share zeigt, welchen Anteil am Finanzbedarf des Kunden wir schon halten – und wo der Verbund fehlt.</a:t>
+            </a:r>
+          </a:p>
           <a:p>
             <a:pPr marL="190500" indent="-190500">
               <a:spcBef>
@@ -11580,7 +9693,7 @@
                 </a:solidFill>
                 <a:latin typeface="Arial"/>
               </a:rPr>
-              <a:t>▸  agree bietet über das CRM-Modul und den UnternehmerDialog strukturierte Hilfsmittel zur Potenzialanalyse. Berater sollten vor jedem Jahresgespräch folgende Felder prüfen:</a:t>
+              <a:t>▸  Potenzialanalyse in agree: bestehende Produkte gegen den typischen Bedarf der Branche halten.</a:t>
             </a:r>
           </a:p>
           <a:p>
@@ -11599,7 +9712,7 @@
                 </a:solidFill>
                 <a:latin typeface="Arial"/>
               </a:rPr>
-              <a:t>▸  Empfehlung: Erstellen Sie für Ihre Top-20-Kunden eine einfache Wallet-Share-Schätzung anhand dieser fünf Dimensionen, bevor Sie das Jahresgespräch vorbereiten.</a:t>
+              <a:t>▸  Ereignisbasierte Anlässe (Investition, Nachfolge, Auslandsgeschäft) öffnen den Cross-Selling-Bedarf.</a:t>
             </a:r>
           </a:p>
         </p:txBody>
@@ -11715,7 +9828,7 @@
             <a:avLst/>
           </a:prstGeom>
           <a:solidFill>
-            <a:srgbClr val="EDEDF3"/>
+            <a:srgbClr val="1F2C56"/>
           </a:solidFill>
           <a:ln>
             <a:noFill/>
@@ -11745,57 +9858,14 @@
       </p:sp>
       <p:sp>
         <p:nvSpPr>
-          <p:cNvPr id="3" name="Rectangle 2"/>
-          <p:cNvSpPr/>
-          <p:nvPr/>
-        </p:nvSpPr>
-        <p:spPr>
-          <a:xfrm>
-            <a:off x="0" y="0"/>
-            <a:ext cx="12188952" cy="50292"/>
-          </a:xfrm>
-          <a:prstGeom prst="rect">
-            <a:avLst/>
-          </a:prstGeom>
-          <a:solidFill>
-            <a:srgbClr val="1F2C56"/>
-          </a:solidFill>
-          <a:ln>
-            <a:noFill/>
-          </a:ln>
-        </p:spPr>
-        <p:style>
-          <a:lnRef idx="1">
-            <a:schemeClr val="accent1"/>
-          </a:lnRef>
-          <a:fillRef idx="3">
-            <a:schemeClr val="accent1"/>
-          </a:fillRef>
-          <a:effectRef idx="2">
-            <a:schemeClr val="accent1"/>
-          </a:effectRef>
-          <a:fontRef idx="minor">
-            <a:schemeClr val="lt1"/>
-          </a:fontRef>
-        </p:style>
-        <p:txBody>
-          <a:bodyPr rtlCol="0" anchor="ctr"/>
-          <a:lstStyle/>
-          <a:p>
-            <a:pPr algn="ctr"/>
-          </a:p>
-        </p:txBody>
-      </p:sp>
-      <p:sp>
-        <p:nvSpPr>
-          <p:cNvPr id="4" name="TextBox 3"/>
+          <p:cNvPr id="3" name="TextBox 2"/>
           <p:cNvSpPr txBox="1"/>
           <p:nvPr/>
         </p:nvSpPr>
         <p:spPr>
           <a:xfrm>
-            <a:off x="685800" y="109728"/>
-            <a:ext cx="10817352" cy="228600"/>
+            <a:off x="685800" y="2377440"/>
+            <a:ext cx="10817352" cy="365760"/>
           </a:xfrm>
           <a:prstGeom prst="rect">
             <a:avLst/>
@@ -11810,70 +9880,27 @@
           <a:p>
             <a:pPr algn="l"/>
             <a:r>
-              <a:rPr sz="750">
-                <a:solidFill>
-                  <a:srgbClr val="78808C"/>
+              <a:rPr sz="1200">
+                <a:solidFill>
+                  <a:srgbClr val="D9C089"/>
                 </a:solidFill>
                 <a:latin typeface="Consolas"/>
               </a:rPr>
-              <a:t>M13  ·  INHALT</a:t>
-            </a:r>
-          </a:p>
-        </p:txBody>
-      </p:sp>
-      <p:sp>
-        <p:nvSpPr>
-          <p:cNvPr id="5" name="Rectangle 4"/>
+              <a:t>SYSTEMATIK</a:t>
+            </a:r>
+          </a:p>
+        </p:txBody>
+      </p:sp>
+      <p:sp>
+        <p:nvSpPr>
+          <p:cNvPr id="4" name="Rectangle 3"/>
           <p:cNvSpPr/>
           <p:nvPr/>
         </p:nvSpPr>
         <p:spPr>
           <a:xfrm>
-            <a:off x="0" y="1234440"/>
-            <a:ext cx="12188952" cy="12700"/>
-          </a:xfrm>
-          <a:prstGeom prst="rect">
-            <a:avLst/>
-          </a:prstGeom>
-          <a:solidFill>
-            <a:srgbClr val="D8DFE4"/>
-          </a:solidFill>
-          <a:ln>
-            <a:noFill/>
-          </a:ln>
-        </p:spPr>
-        <p:style>
-          <a:lnRef idx="1">
-            <a:schemeClr val="accent1"/>
-          </a:lnRef>
-          <a:fillRef idx="3">
-            <a:schemeClr val="accent1"/>
-          </a:fillRef>
-          <a:effectRef idx="2">
-            <a:schemeClr val="accent1"/>
-          </a:effectRef>
-          <a:fontRef idx="minor">
-            <a:schemeClr val="lt1"/>
-          </a:fontRef>
-        </p:style>
-        <p:txBody>
-          <a:bodyPr rtlCol="0" anchor="ctr"/>
-          <a:lstStyle/>
-          <a:p>
-            <a:pPr algn="ctr"/>
-          </a:p>
-        </p:txBody>
-      </p:sp>
-      <p:sp>
-        <p:nvSpPr>
-          <p:cNvPr id="6" name="Rectangle 5"/>
-          <p:cNvSpPr/>
-          <p:nvPr/>
-        </p:nvSpPr>
-        <p:spPr>
-          <a:xfrm>
-            <a:off x="685800" y="502920"/>
-            <a:ext cx="36576" cy="658368"/>
+            <a:off x="685800" y="2788920"/>
+            <a:ext cx="548640" cy="38100"/>
           </a:xfrm>
           <a:prstGeom prst="rect">
             <a:avLst/>
@@ -11909,14 +9936,14 @@
       </p:sp>
       <p:sp>
         <p:nvSpPr>
-          <p:cNvPr id="7" name="TextBox 6"/>
+          <p:cNvPr id="5" name="TextBox 4"/>
           <p:cNvSpPr txBox="1"/>
           <p:nvPr/>
         </p:nvSpPr>
         <p:spPr>
           <a:xfrm>
-            <a:off x="813816" y="502920"/>
-            <a:ext cx="10634472" cy="685800"/>
+            <a:off x="685800" y="3017520"/>
+            <a:ext cx="10817352" cy="1463040"/>
           </a:xfrm>
           <a:prstGeom prst="rect">
             <a:avLst/>
@@ -11931,27 +9958,27 @@
           <a:p>
             <a:pPr algn="l"/>
             <a:r>
-              <a:rPr sz="2400" b="1" i="0">
-                <a:solidFill>
-                  <a:srgbClr val="1F2C56"/>
+              <a:rPr sz="4000" b="1" i="0">
+                <a:solidFill>
+                  <a:srgbClr val="FFFFFF"/>
                 </a:solidFill>
                 <a:latin typeface="Arial"/>
               </a:rPr>
-              <a:t>Ereignisbasierte Cross-Selling-Anlässe</a:t>
-            </a:r>
-          </a:p>
-        </p:txBody>
-      </p:sp>
-      <p:sp>
-        <p:nvSpPr>
-          <p:cNvPr id="8" name="TextBox 7"/>
+              <a:t>Der 4-Schritte-Prozess</a:t>
+            </a:r>
+          </a:p>
+        </p:txBody>
+      </p:sp>
+      <p:sp>
+        <p:nvSpPr>
+          <p:cNvPr id="6" name="TextBox 5"/>
           <p:cNvSpPr txBox="1"/>
           <p:nvPr/>
         </p:nvSpPr>
         <p:spPr>
           <a:xfrm>
-            <a:off x="685800" y="1417320"/>
-            <a:ext cx="10817352" cy="4892040"/>
+            <a:off x="685800" y="4480560"/>
+            <a:ext cx="8653881" cy="1280160"/>
           </a:xfrm>
           <a:prstGeom prst="rect">
             <a:avLst/>
@@ -11959,122 +9986,34 @@
           <a:noFill/>
         </p:spPr>
         <p:txBody>
-          <a:bodyPr wrap="square" anchor="ctr">
+          <a:bodyPr wrap="square">
             <a:spAutoFit/>
           </a:bodyPr>
           <a:lstStyle/>
           <a:p>
-            <a:pPr marL="190500" indent="-190500">
-              <a:spcBef>
-                <a:spcPts val="400"/>
-              </a:spcBef>
-              <a:spcAft>
-                <a:spcPts val="200"/>
-              </a:spcAft>
-            </a:pPr>
-            <a:r>
-              <a:rPr sz="1300">
-                <a:solidFill>
-                  <a:srgbClr val="3D5466"/>
+            <a:pPr algn="l"/>
+            <a:r>
+              <a:rPr sz="1600" b="0" i="0">
+                <a:solidFill>
+                  <a:srgbClr val="C8D2E6"/>
                 </a:solidFill>
                 <a:latin typeface="Arial"/>
               </a:rPr>
-              <a:t>▸  Das Jahresgespräch ist nur einer von vielen Anlässen. In der Praxis öffnen oft Ereignisse das Gespräch besser als der Jahreskalender – weil der Bedarf dann für den Kunden selbst spürbar ist:</a:t>
-            </a:r>
-          </a:p>
-          <a:p>
-            <a:pPr marL="190500" indent="-190500">
-              <a:spcBef>
-                <a:spcPts val="400"/>
-              </a:spcBef>
-              <a:spcAft>
-                <a:spcPts val="200"/>
-              </a:spcAft>
-            </a:pPr>
-            <a:r>
-              <a:rPr sz="1300">
-                <a:solidFill>
-                  <a:srgbClr val="3D5466"/>
-                </a:solidFill>
-                <a:latin typeface="Arial"/>
-              </a:rPr>
-              <a:t>▸  ## 4.3 Der 4-Schritte-Cross-Selling-Prozess</a:t>
-            </a:r>
-          </a:p>
-          <a:p>
-            <a:pPr marL="190500" indent="-190500">
-              <a:spcBef>
-                <a:spcPts val="400"/>
-              </a:spcBef>
-              <a:spcAft>
-                <a:spcPts val="200"/>
-              </a:spcAft>
-            </a:pPr>
-            <a:r>
-              <a:rPr sz="1300">
-                <a:solidFill>
-                  <a:srgbClr val="3D5466"/>
-                </a:solidFill>
-                <a:latin typeface="Arial"/>
-              </a:rPr>
-              <a:t>▸  Systematisches Cross-Selling folgt einem klaren Prozess – nicht dem Zufall eines Gesprächsmoments.</a:t>
-            </a:r>
-          </a:p>
-        </p:txBody>
-      </p:sp>
-      <p:sp>
-        <p:nvSpPr>
-          <p:cNvPr id="9" name="Rectangle 8"/>
-          <p:cNvSpPr/>
-          <p:nvPr/>
-        </p:nvSpPr>
-        <p:spPr>
-          <a:xfrm>
-            <a:off x="0" y="6510528"/>
-            <a:ext cx="12188952" cy="347472"/>
-          </a:xfrm>
-          <a:prstGeom prst="rect">
-            <a:avLst/>
-          </a:prstGeom>
-          <a:solidFill>
-            <a:srgbClr val="0A1937"/>
-          </a:solidFill>
-          <a:ln>
-            <a:noFill/>
-          </a:ln>
-        </p:spPr>
-        <p:style>
-          <a:lnRef idx="1">
-            <a:schemeClr val="accent1"/>
-          </a:lnRef>
-          <a:fillRef idx="3">
-            <a:schemeClr val="accent1"/>
-          </a:fillRef>
-          <a:effectRef idx="2">
-            <a:schemeClr val="accent1"/>
-          </a:effectRef>
-          <a:fontRef idx="minor">
-            <a:schemeClr val="lt1"/>
-          </a:fontRef>
-        </p:style>
-        <p:txBody>
-          <a:bodyPr rtlCol="0" anchor="ctr"/>
-          <a:lstStyle/>
-          <a:p>
-            <a:pPr algn="ctr"/>
-          </a:p>
-        </p:txBody>
-      </p:sp>
-      <p:sp>
-        <p:nvSpPr>
-          <p:cNvPr id="10" name="TextBox 9"/>
+              <a:t>Von der Analyse über die Hypothese zum dokumentierten Gespräch.</a:t>
+            </a:r>
+          </a:p>
+        </p:txBody>
+      </p:sp>
+      <p:sp>
+        <p:nvSpPr>
+          <p:cNvPr id="7" name="TextBox 6"/>
           <p:cNvSpPr txBox="1"/>
           <p:nvPr/>
         </p:nvSpPr>
         <p:spPr>
           <a:xfrm>
-            <a:off x="685800" y="6583680"/>
-            <a:ext cx="6490411" cy="256032"/>
+            <a:off x="685800" y="6355080"/>
+            <a:ext cx="10817352" cy="274320"/>
           </a:xfrm>
           <a:prstGeom prst="rect">
             <a:avLst/>
@@ -12091,7 +10030,7 @@
             <a:r>
               <a:rPr sz="700">
                 <a:solidFill>
-                  <a:srgbClr val="A0B4D2"/>
+                  <a:srgbClr val="8CA0C3"/>
                 </a:solidFill>
                 <a:latin typeface="Consolas"/>
               </a:rPr>
